--- a/output/wordlabs-dis-prefix-3day.pptx
+++ b/output/wordlabs-dis-prefix-3day.pptx
@@ -6040,7 +6040,7 @@
                 <a:ea typeface="Calibri" pitchFamily="34" charset="-122"/>
                 <a:cs typeface="Calibri" pitchFamily="34" charset="-120"/>
               </a:rPr>
-              <a:t>It is </a:t>
+              <a:t>She felt great </a:t>
             </a:r>
             <a:pPr algn="l" indent="0" marL="0">
               <a:buNone/>
@@ -6057,7 +6057,7 @@
                 <a:ea typeface="Calibri" pitchFamily="34" charset="-122"/>
                 <a:cs typeface="Calibri" pitchFamily="34" charset="-120"/>
               </a:rPr>
-              <a:t>dishonest</a:t>
+              <a:t>discomfort</a:t>
             </a:r>
             <a:pPr algn="l" indent="0" marL="0">
               <a:buNone/>
@@ -6071,7 +6071,7 @@
                 <a:ea typeface="Calibri" pitchFamily="34" charset="-122"/>
                 <a:cs typeface="Calibri" pitchFamily="34" charset="-120"/>
               </a:rPr>
-              <a:t> to </a:t>
+              <a:t> when she had to </a:t>
             </a:r>
             <a:pPr algn="l" indent="0" marL="0">
               <a:buNone/>
@@ -6102,7 +6102,7 @@
                 <a:ea typeface="Calibri" pitchFamily="34" charset="-122"/>
                 <a:cs typeface="Calibri" pitchFamily="34" charset="-120"/>
               </a:rPr>
-              <a:t> the computer without telling your teacher.</a:t>
+              <a:t> the power lead.</a:t>
             </a:r>
             <a:endParaRPr lang="en-US" sz="1800" dirty="0"/>
           </a:p>
@@ -6257,7 +6257,7 @@
                 <a:ea typeface="Trebuchet MS" pitchFamily="34" charset="-122"/>
                 <a:cs typeface="Trebuchet MS" pitchFamily="34" charset="-120"/>
               </a:rPr>
-              <a:t>dishonest</a:t>
+              <a:t>discomfort</a:t>
             </a:r>
             <a:endParaRPr lang="en-US" sz="1400" dirty="0"/>
           </a:p>
@@ -6855,7 +6855,7 @@
                 <a:ea typeface="Trebuchet MS" pitchFamily="34" charset="-122"/>
                 <a:cs typeface="Trebuchet MS" pitchFamily="34" charset="-120"/>
               </a:rPr>
-              <a:t>dishonest</a:t>
+              <a:t>discomfort</a:t>
             </a:r>
             <a:endParaRPr lang="en-US" sz="2800" dirty="0"/>
           </a:p>
@@ -7682,7 +7682,7 @@
                 <a:ea typeface="Trebuchet MS" pitchFamily="34" charset="-122"/>
                 <a:cs typeface="Trebuchet MS" pitchFamily="34" charset="-120"/>
               </a:rPr>
-              <a:t>dishonest</a:t>
+              <a:t>discomfort</a:t>
             </a:r>
             <a:endParaRPr lang="en-US" sz="2800" dirty="0"/>
           </a:p>
@@ -7933,7 +7933,7 @@
                 <a:ea typeface="Trebuchet MS" pitchFamily="34" charset="-122"/>
                 <a:cs typeface="Trebuchet MS" pitchFamily="34" charset="-120"/>
               </a:rPr>
-              <a:t>honest</a:t>
+              <a:t>comfort</a:t>
             </a:r>
             <a:endParaRPr lang="en-US" sz="1300" dirty="0"/>
           </a:p>
@@ -7972,7 +7972,7 @@
                 <a:ea typeface="Calibri" pitchFamily="34" charset="-122"/>
                 <a:cs typeface="Calibri" pitchFamily="34" charset="-120"/>
               </a:rPr>
-              <a:t>truthful, fair</a:t>
+              <a:t>ease, wellbeing</a:t>
             </a:r>
             <a:endParaRPr lang="en-US" sz="850" dirty="0"/>
           </a:p>
@@ -8667,7 +8667,7 @@
                 <a:ea typeface="Trebuchet MS" pitchFamily="34" charset="-122"/>
                 <a:cs typeface="Trebuchet MS" pitchFamily="34" charset="-120"/>
               </a:rPr>
-              <a:t>dishonest</a:t>
+              <a:t>discomfort</a:t>
             </a:r>
             <a:endParaRPr lang="en-US" sz="2800" dirty="0"/>
           </a:p>
@@ -8918,7 +8918,7 @@
                 <a:ea typeface="Trebuchet MS" pitchFamily="34" charset="-122"/>
                 <a:cs typeface="Trebuchet MS" pitchFamily="34" charset="-120"/>
               </a:rPr>
-              <a:t>honest</a:t>
+              <a:t>comfort</a:t>
             </a:r>
             <a:endParaRPr lang="en-US" sz="1300" dirty="0"/>
           </a:p>
@@ -8957,7 +8957,7 @@
                 <a:ea typeface="Calibri" pitchFamily="34" charset="-122"/>
                 <a:cs typeface="Calibri" pitchFamily="34" charset="-120"/>
               </a:rPr>
-              <a:t>truthful, fair</a:t>
+              <a:t>ease, wellbeing</a:t>
             </a:r>
             <a:endParaRPr lang="en-US" sz="850" dirty="0"/>
           </a:p>
@@ -9221,7 +9221,7 @@
                 <a:ea typeface="Trebuchet MS" pitchFamily="34" charset="-122"/>
                 <a:cs typeface="Trebuchet MS" pitchFamily="34" charset="-120"/>
               </a:rPr>
-              <a:t>hon</a:t>
+              <a:t>com</a:t>
             </a:r>
             <a:endParaRPr lang="en-US" sz="1400" dirty="0"/>
           </a:p>
@@ -9326,7 +9326,7 @@
                 <a:ea typeface="Trebuchet MS" pitchFamily="34" charset="-122"/>
                 <a:cs typeface="Trebuchet MS" pitchFamily="34" charset="-120"/>
               </a:rPr>
-              <a:t>est</a:t>
+              <a:t>fort</a:t>
             </a:r>
             <a:endParaRPr lang="en-US" sz="1400" dirty="0"/>
           </a:p>
@@ -9889,7 +9889,7 @@
                 <a:ea typeface="Trebuchet MS" pitchFamily="34" charset="-122"/>
                 <a:cs typeface="Trebuchet MS" pitchFamily="34" charset="-120"/>
               </a:rPr>
-              <a:t>dishonest</a:t>
+              <a:t>discomfort</a:t>
             </a:r>
             <a:endParaRPr lang="en-US" sz="2800" dirty="0"/>
           </a:p>
@@ -10140,7 +10140,7 @@
                 <a:ea typeface="Trebuchet MS" pitchFamily="34" charset="-122"/>
                 <a:cs typeface="Trebuchet MS" pitchFamily="34" charset="-120"/>
               </a:rPr>
-              <a:t>honest</a:t>
+              <a:t>comfort</a:t>
             </a:r>
             <a:endParaRPr lang="en-US" sz="1300" dirty="0"/>
           </a:p>
@@ -10179,7 +10179,7 @@
                 <a:ea typeface="Calibri" pitchFamily="34" charset="-122"/>
                 <a:cs typeface="Calibri" pitchFamily="34" charset="-120"/>
               </a:rPr>
-              <a:t>truthful, fair</a:t>
+              <a:t>ease, wellbeing</a:t>
             </a:r>
             <a:endParaRPr lang="en-US" sz="850" dirty="0"/>
           </a:p>
@@ -10443,7 +10443,7 @@
                 <a:ea typeface="Trebuchet MS" pitchFamily="34" charset="-122"/>
                 <a:cs typeface="Trebuchet MS" pitchFamily="34" charset="-120"/>
               </a:rPr>
-              <a:t>hon</a:t>
+              <a:t>com</a:t>
             </a:r>
             <a:endParaRPr lang="en-US" sz="1400" dirty="0"/>
           </a:p>
@@ -10548,7 +10548,7 @@
                 <a:ea typeface="Trebuchet MS" pitchFamily="34" charset="-122"/>
                 <a:cs typeface="Trebuchet MS" pitchFamily="34" charset="-120"/>
               </a:rPr>
-              <a:t>est</a:t>
+              <a:t>fort</a:t>
             </a:r>
             <a:endParaRPr lang="en-US" sz="1400" dirty="0"/>
           </a:p>
@@ -10905,7 +10905,7 @@
                 <a:ea typeface="Trebuchet MS" pitchFamily="34" charset="-122"/>
                 <a:cs typeface="Trebuchet MS" pitchFamily="34" charset="-120"/>
               </a:rPr>
-              <a:t>h</a:t>
+              <a:t>c</a:t>
             </a:r>
             <a:endParaRPr lang="en-US" sz="900" dirty="0"/>
           </a:p>
@@ -11037,7 +11037,7 @@
                 <a:ea typeface="Trebuchet MS" pitchFamily="34" charset="-122"/>
                 <a:cs typeface="Trebuchet MS" pitchFamily="34" charset="-120"/>
               </a:rPr>
-              <a:t>n</a:t>
+              <a:t>m</a:t>
             </a:r>
             <a:endParaRPr lang="en-US" sz="900" dirty="0"/>
           </a:p>
@@ -11103,7 +11103,7 @@
                 <a:ea typeface="Trebuchet MS" pitchFamily="34" charset="-122"/>
                 <a:cs typeface="Trebuchet MS" pitchFamily="34" charset="-120"/>
               </a:rPr>
-              <a:t>e</a:t>
+              <a:t>f</a:t>
             </a:r>
             <a:endParaRPr lang="en-US" sz="900" dirty="0"/>
           </a:p>
@@ -11169,7 +11169,7 @@
                 <a:ea typeface="Trebuchet MS" pitchFamily="34" charset="-122"/>
                 <a:cs typeface="Trebuchet MS" pitchFamily="34" charset="-120"/>
               </a:rPr>
-              <a:t>s</a:t>
+              <a:t>or</a:t>
             </a:r>
             <a:endParaRPr lang="en-US" sz="900" dirty="0"/>
           </a:p>
@@ -12783,7 +12783,7 @@
                 <a:ea typeface="Calibri" pitchFamily="34" charset="-122"/>
                 <a:cs typeface="Calibri" pitchFamily="34" charset="-120"/>
               </a:rPr>
-              <a:t>to join together</a:t>
+              <a:t>join together</a:t>
             </a:r>
             <a:endParaRPr lang="en-US" sz="850" dirty="0"/>
           </a:p>
@@ -13768,7 +13768,7 @@
                 <a:ea typeface="Calibri" pitchFamily="34" charset="-122"/>
                 <a:cs typeface="Calibri" pitchFamily="34" charset="-120"/>
               </a:rPr>
-              <a:t>to join together</a:t>
+              <a:t>join together</a:t>
             </a:r>
             <a:endParaRPr lang="en-US" sz="850" dirty="0"/>
           </a:p>
@@ -15255,7 +15255,7 @@
                 <a:ea typeface="Calibri" pitchFamily="34" charset="-122"/>
                 <a:cs typeface="Calibri" pitchFamily="34" charset="-120"/>
               </a:rPr>
-              <a:t>to join together</a:t>
+              <a:t>join together</a:t>
             </a:r>
             <a:endParaRPr lang="en-US" sz="850" dirty="0"/>
           </a:p>
@@ -17610,7 +17610,7 @@
                 <a:ea typeface="Calibri" pitchFamily="34" charset="-122"/>
                 <a:cs typeface="Calibri" pitchFamily="34" charset="-120"/>
               </a:rPr>
-              <a:t>The students showed </a:t>
+              <a:t>It was a great </a:t>
             </a:r>
             <a:pPr algn="l" indent="0" marL="0">
               <a:buNone/>
@@ -17627,7 +17627,7 @@
                 <a:ea typeface="Calibri" pitchFamily="34" charset="-122"/>
                 <a:cs typeface="Calibri" pitchFamily="34" charset="-120"/>
               </a:rPr>
-              <a:t>disrespect</a:t>
+              <a:t>discovery</a:t>
             </a:r>
             <a:pPr algn="l" indent="0" marL="0">
               <a:buNone/>
@@ -17641,7 +17641,7 @@
                 <a:ea typeface="Calibri" pitchFamily="34" charset="-122"/>
                 <a:cs typeface="Calibri" pitchFamily="34" charset="-120"/>
               </a:rPr>
-              <a:t> when they started to </a:t>
+              <a:t> that the honest explorer did not </a:t>
             </a:r>
             <a:pPr algn="l" indent="0" marL="0">
               <a:buNone/>
@@ -17658,7 +17658,7 @@
                 <a:ea typeface="Calibri" pitchFamily="34" charset="-122"/>
                 <a:cs typeface="Calibri" pitchFamily="34" charset="-120"/>
               </a:rPr>
-              <a:t>disagree</a:t>
+              <a:t>disappear</a:t>
             </a:r>
             <a:pPr algn="l" indent="0" marL="0">
               <a:buNone/>
@@ -17672,118 +17672,343 @@
                 <a:ea typeface="Calibri" pitchFamily="34" charset="-122"/>
                 <a:cs typeface="Calibri" pitchFamily="34" charset="-120"/>
               </a:rPr>
-              <a:t> loudly, which caused great </a:t>
-            </a:r>
+              <a:t> into the jungle.</a:t>
+            </a:r>
+            <a:endParaRPr lang="en-US" sz="1800" dirty="0"/>
+          </a:p>
+        </p:txBody>
+      </p:sp>
+      <p:sp>
+        <p:nvSpPr>
+          <p:cNvPr id="13" name="Shape 11"/>
+          <p:cNvSpPr/>
+          <p:nvPr/>
+        </p:nvSpPr>
+        <p:spPr>
+          <a:xfrm>
+            <a:off x="365760" y="2852928"/>
+            <a:ext cx="8412480" cy="475488"/>
+          </a:xfrm>
+          <a:prstGeom prst="rect">
+            <a:avLst>
+              <a:gd name="adj" fmla="val 15385"/>
+            </a:avLst>
+          </a:prstGeom>
+          <a:solidFill>
+            <a:srgbClr val="CCFBF1"/>
+          </a:solidFill>
+          <a:ln w="12700">
+            <a:solidFill>
+              <a:srgbClr val="0D9488"/>
+            </a:solidFill>
+            <a:prstDash val="solid"/>
+          </a:ln>
+        </p:spPr>
+      </p:sp>
+      <p:sp>
+        <p:nvSpPr>
+          <p:cNvPr id="14" name="Text 12"/>
+          <p:cNvSpPr/>
+          <p:nvPr/>
+        </p:nvSpPr>
+        <p:spPr>
+          <a:xfrm>
+            <a:off x="502920" y="2852928"/>
+            <a:ext cx="8229600" cy="475488"/>
+          </a:xfrm>
+          <a:prstGeom prst="rect">
+            <a:avLst/>
+          </a:prstGeom>
+          <a:noFill/>
+          <a:ln/>
+        </p:spPr>
+        <p:txBody>
+          <a:bodyPr wrap="square" rtlCol="0" anchor="ctr"/>
+          <a:lstStyle/>
+          <a:p>
             <a:pPr algn="l" indent="0" marL="0">
               <a:buNone/>
             </a:pPr>
             <a:r>
-              <a:rPr lang="en-US" sz="1800" b="1" dirty="0">
-                <a:solidFill>
-                  <a:srgbClr val="0D9488"/>
-                </a:solidFill>
-                <a:highlight>
-                  <a:srgbClr val="CCFBF1"/>
-                </a:highlight>
+              <a:rPr lang="en-US" sz="1200" b="1" dirty="0">
+                <a:solidFill>
+                  <a:srgbClr val="0F766E"/>
+                </a:solidFill>
                 <a:latin typeface="Calibri" pitchFamily="34" charset="0"/>
                 <a:ea typeface="Calibri" pitchFamily="34" charset="-122"/>
                 <a:cs typeface="Calibri" pitchFamily="34" charset="-120"/>
               </a:rPr>
-              <a:t>disappointment</a:t>
-            </a:r>
-            <a:pPr algn="l" indent="0" marL="0">
-              <a:buNone/>
-            </a:pPr>
-            <a:r>
-              <a:rPr lang="en-US" sz="1800" dirty="0">
-                <a:solidFill>
-                  <a:srgbClr val="0F172A"/>
+              <a:t>Now rewrite each focus word below with space between letters — leave room for your breakdown.</a:t>
+            </a:r>
+            <a:endParaRPr lang="en-US" sz="1200" dirty="0"/>
+          </a:p>
+        </p:txBody>
+      </p:sp>
+      <p:sp>
+        <p:nvSpPr>
+          <p:cNvPr id="15" name="Shape 13"/>
+          <p:cNvSpPr/>
+          <p:nvPr/>
+        </p:nvSpPr>
+        <p:spPr>
+          <a:xfrm>
+            <a:off x="411480" y="3456432"/>
+            <a:ext cx="2499360" cy="1005840"/>
+          </a:xfrm>
+          <a:prstGeom prst="rect">
+            <a:avLst>
+              <a:gd name="adj" fmla="val 7273"/>
+            </a:avLst>
+          </a:prstGeom>
+          <a:solidFill>
+            <a:srgbClr val="F8FAFC"/>
+          </a:solidFill>
+          <a:ln w="12700">
+            <a:solidFill>
+              <a:srgbClr val="E2E8F0"/>
+            </a:solidFill>
+            <a:prstDash val="solid"/>
+          </a:ln>
+        </p:spPr>
+      </p:sp>
+      <p:sp>
+        <p:nvSpPr>
+          <p:cNvPr id="16" name="Shape 14"/>
+          <p:cNvSpPr/>
+          <p:nvPr/>
+        </p:nvSpPr>
+        <p:spPr>
+          <a:xfrm>
+            <a:off x="411480" y="3977640"/>
+            <a:ext cx="2499360" cy="0"/>
+          </a:xfrm>
+          <a:prstGeom prst="line">
+            <a:avLst/>
+          </a:prstGeom>
+          <a:noFill/>
+          <a:ln w="12700">
+            <a:solidFill>
+              <a:srgbClr val="E2E8F0"/>
+            </a:solidFill>
+            <a:prstDash val="dash"/>
+          </a:ln>
+        </p:spPr>
+      </p:sp>
+      <p:sp>
+        <p:nvSpPr>
+          <p:cNvPr id="17" name="Text 15"/>
+          <p:cNvSpPr/>
+          <p:nvPr/>
+        </p:nvSpPr>
+        <p:spPr>
+          <a:xfrm>
+            <a:off x="411480" y="3456432"/>
+            <a:ext cx="2499360" cy="502920"/>
+          </a:xfrm>
+          <a:prstGeom prst="rect">
+            <a:avLst/>
+          </a:prstGeom>
+          <a:noFill/>
+          <a:ln/>
+        </p:spPr>
+        <p:txBody>
+          <a:bodyPr wrap="square" lIns="0" tIns="0" rIns="0" bIns="0" rtlCol="0" anchor="ctr"/>
+          <a:lstStyle/>
+          <a:p>
+            <a:pPr algn="ctr" indent="0" marL="0">
+              <a:buNone/>
+            </a:pPr>
+            <a:r>
+              <a:rPr lang="en-US" sz="1400" b="1" dirty="0">
+                <a:solidFill>
+                  <a:srgbClr val="0D9488"/>
+                </a:solidFill>
+                <a:latin typeface="Trebuchet MS" pitchFamily="34" charset="0"/>
+                <a:ea typeface="Trebuchet MS" pitchFamily="34" charset="-122"/>
+                <a:cs typeface="Trebuchet MS" pitchFamily="34" charset="-120"/>
+              </a:rPr>
+              <a:t>discovery</a:t>
+            </a:r>
+            <a:endParaRPr lang="en-US" sz="1400" dirty="0"/>
+          </a:p>
+        </p:txBody>
+      </p:sp>
+      <p:sp>
+        <p:nvSpPr>
+          <p:cNvPr id="18" name="Text 16"/>
+          <p:cNvSpPr/>
+          <p:nvPr/>
+        </p:nvSpPr>
+        <p:spPr>
+          <a:xfrm>
+            <a:off x="411480" y="4005072"/>
+            <a:ext cx="2499360" cy="457200"/>
+          </a:xfrm>
+          <a:prstGeom prst="rect">
+            <a:avLst/>
+          </a:prstGeom>
+          <a:noFill/>
+          <a:ln/>
+        </p:spPr>
+        <p:txBody>
+          <a:bodyPr wrap="square" lIns="0" tIns="0" rIns="0" bIns="0" rtlCol="0" anchor="ctr"/>
+          <a:lstStyle/>
+          <a:p>
+            <a:pPr algn="ctr" indent="0" marL="0">
+              <a:buNone/>
+            </a:pPr>
+            <a:r>
+              <a:rPr lang="en-US" sz="900" i="1" dirty="0">
+                <a:solidFill>
+                  <a:srgbClr val="475569"/>
                 </a:solidFill>
                 <a:latin typeface="Calibri" pitchFamily="34" charset="0"/>
                 <a:ea typeface="Calibri" pitchFamily="34" charset="-122"/>
                 <a:cs typeface="Calibri" pitchFamily="34" charset="-120"/>
               </a:rPr>
-              <a:t> for their teacher.</a:t>
-            </a:r>
-            <a:endParaRPr lang="en-US" sz="1800" dirty="0"/>
-          </a:p>
-        </p:txBody>
-      </p:sp>
-      <p:sp>
-        <p:nvSpPr>
-          <p:cNvPr id="13" name="Shape 11"/>
-          <p:cNvSpPr/>
-          <p:nvPr/>
-        </p:nvSpPr>
-        <p:spPr>
-          <a:xfrm>
-            <a:off x="365760" y="2852928"/>
-            <a:ext cx="8412480" cy="475488"/>
+              <a:t>write your breakdown below</a:t>
+            </a:r>
+            <a:endParaRPr lang="en-US" sz="900" dirty="0"/>
+          </a:p>
+        </p:txBody>
+      </p:sp>
+      <p:sp>
+        <p:nvSpPr>
+          <p:cNvPr id="19" name="Shape 17"/>
+          <p:cNvSpPr/>
+          <p:nvPr/>
+        </p:nvSpPr>
+        <p:spPr>
+          <a:xfrm>
+            <a:off x="3185160" y="3456432"/>
+            <a:ext cx="2499360" cy="1005840"/>
           </a:xfrm>
           <a:prstGeom prst="rect">
             <a:avLst>
-              <a:gd name="adj" fmla="val 15385"/>
+              <a:gd name="adj" fmla="val 7273"/>
             </a:avLst>
           </a:prstGeom>
           <a:solidFill>
-            <a:srgbClr val="CCFBF1"/>
-          </a:solidFill>
-          <a:ln w="12700">
-            <a:solidFill>
-              <a:srgbClr val="0D9488"/>
-            </a:solidFill>
-            <a:prstDash val="solid"/>
-          </a:ln>
-        </p:spPr>
-      </p:sp>
-      <p:sp>
-        <p:nvSpPr>
-          <p:cNvPr id="14" name="Text 12"/>
-          <p:cNvSpPr/>
-          <p:nvPr/>
-        </p:nvSpPr>
-        <p:spPr>
-          <a:xfrm>
-            <a:off x="502920" y="2852928"/>
-            <a:ext cx="8229600" cy="475488"/>
-          </a:xfrm>
-          <a:prstGeom prst="rect">
-            <a:avLst/>
-          </a:prstGeom>
-          <a:noFill/>
-          <a:ln/>
-        </p:spPr>
-        <p:txBody>
-          <a:bodyPr wrap="square" rtlCol="0" anchor="ctr"/>
-          <a:lstStyle/>
-          <a:p>
-            <a:pPr algn="l" indent="0" marL="0">
-              <a:buNone/>
-            </a:pPr>
-            <a:r>
-              <a:rPr lang="en-US" sz="1200" b="1" dirty="0">
-                <a:solidFill>
-                  <a:srgbClr val="0F766E"/>
+            <a:srgbClr val="F8FAFC"/>
+          </a:solidFill>
+          <a:ln w="12700">
+            <a:solidFill>
+              <a:srgbClr val="E2E8F0"/>
+            </a:solidFill>
+            <a:prstDash val="solid"/>
+          </a:ln>
+        </p:spPr>
+      </p:sp>
+      <p:sp>
+        <p:nvSpPr>
+          <p:cNvPr id="20" name="Shape 18"/>
+          <p:cNvSpPr/>
+          <p:nvPr/>
+        </p:nvSpPr>
+        <p:spPr>
+          <a:xfrm>
+            <a:off x="3185160" y="3977640"/>
+            <a:ext cx="2499360" cy="0"/>
+          </a:xfrm>
+          <a:prstGeom prst="line">
+            <a:avLst/>
+          </a:prstGeom>
+          <a:noFill/>
+          <a:ln w="12700">
+            <a:solidFill>
+              <a:srgbClr val="E2E8F0"/>
+            </a:solidFill>
+            <a:prstDash val="dash"/>
+          </a:ln>
+        </p:spPr>
+      </p:sp>
+      <p:sp>
+        <p:nvSpPr>
+          <p:cNvPr id="21" name="Text 19"/>
+          <p:cNvSpPr/>
+          <p:nvPr/>
+        </p:nvSpPr>
+        <p:spPr>
+          <a:xfrm>
+            <a:off x="3185160" y="3456432"/>
+            <a:ext cx="2499360" cy="502920"/>
+          </a:xfrm>
+          <a:prstGeom prst="rect">
+            <a:avLst/>
+          </a:prstGeom>
+          <a:noFill/>
+          <a:ln/>
+        </p:spPr>
+        <p:txBody>
+          <a:bodyPr wrap="square" lIns="0" tIns="0" rIns="0" bIns="0" rtlCol="0" anchor="ctr"/>
+          <a:lstStyle/>
+          <a:p>
+            <a:pPr algn="ctr" indent="0" marL="0">
+              <a:buNone/>
+            </a:pPr>
+            <a:r>
+              <a:rPr lang="en-US" sz="1400" b="1" dirty="0">
+                <a:solidFill>
+                  <a:srgbClr val="0D9488"/>
+                </a:solidFill>
+                <a:latin typeface="Trebuchet MS" pitchFamily="34" charset="0"/>
+                <a:ea typeface="Trebuchet MS" pitchFamily="34" charset="-122"/>
+                <a:cs typeface="Trebuchet MS" pitchFamily="34" charset="-120"/>
+              </a:rPr>
+              <a:t>dishonest</a:t>
+            </a:r>
+            <a:endParaRPr lang="en-US" sz="1400" dirty="0"/>
+          </a:p>
+        </p:txBody>
+      </p:sp>
+      <p:sp>
+        <p:nvSpPr>
+          <p:cNvPr id="22" name="Text 20"/>
+          <p:cNvSpPr/>
+          <p:nvPr/>
+        </p:nvSpPr>
+        <p:spPr>
+          <a:xfrm>
+            <a:off x="3185160" y="4005072"/>
+            <a:ext cx="2499360" cy="457200"/>
+          </a:xfrm>
+          <a:prstGeom prst="rect">
+            <a:avLst/>
+          </a:prstGeom>
+          <a:noFill/>
+          <a:ln/>
+        </p:spPr>
+        <p:txBody>
+          <a:bodyPr wrap="square" lIns="0" tIns="0" rIns="0" bIns="0" rtlCol="0" anchor="ctr"/>
+          <a:lstStyle/>
+          <a:p>
+            <a:pPr algn="ctr" indent="0" marL="0">
+              <a:buNone/>
+            </a:pPr>
+            <a:r>
+              <a:rPr lang="en-US" sz="900" i="1" dirty="0">
+                <a:solidFill>
+                  <a:srgbClr val="475569"/>
                 </a:solidFill>
                 <a:latin typeface="Calibri" pitchFamily="34" charset="0"/>
                 <a:ea typeface="Calibri" pitchFamily="34" charset="-122"/>
                 <a:cs typeface="Calibri" pitchFamily="34" charset="-120"/>
               </a:rPr>
-              <a:t>Now rewrite each focus word below with space between letters — leave room for your breakdown.</a:t>
-            </a:r>
-            <a:endParaRPr lang="en-US" sz="1200" dirty="0"/>
-          </a:p>
-        </p:txBody>
-      </p:sp>
-      <p:sp>
-        <p:nvSpPr>
-          <p:cNvPr id="15" name="Shape 13"/>
-          <p:cNvSpPr/>
-          <p:nvPr/>
-        </p:nvSpPr>
-        <p:spPr>
-          <a:xfrm>
-            <a:off x="411480" y="3456432"/>
+              <a:t>write your breakdown below</a:t>
+            </a:r>
+            <a:endParaRPr lang="en-US" sz="900" dirty="0"/>
+          </a:p>
+        </p:txBody>
+      </p:sp>
+      <p:sp>
+        <p:nvSpPr>
+          <p:cNvPr id="23" name="Shape 21"/>
+          <p:cNvSpPr/>
+          <p:nvPr/>
+        </p:nvSpPr>
+        <p:spPr>
+          <a:xfrm>
+            <a:off x="5958840" y="3456432"/>
             <a:ext cx="2499360" cy="1005840"/>
           </a:xfrm>
           <a:prstGeom prst="rect">
@@ -17804,13 +18029,13 @@
       </p:sp>
       <p:sp>
         <p:nvSpPr>
-          <p:cNvPr id="16" name="Shape 14"/>
-          <p:cNvSpPr/>
-          <p:nvPr/>
-        </p:nvSpPr>
-        <p:spPr>
-          <a:xfrm>
-            <a:off x="411480" y="3977640"/>
+          <p:cNvPr id="24" name="Shape 22"/>
+          <p:cNvSpPr/>
+          <p:nvPr/>
+        </p:nvSpPr>
+        <p:spPr>
+          <a:xfrm>
+            <a:off x="5958840" y="3977640"/>
             <a:ext cx="2499360" cy="0"/>
           </a:xfrm>
           <a:prstGeom prst="line">
@@ -17827,13 +18052,13 @@
       </p:sp>
       <p:sp>
         <p:nvSpPr>
-          <p:cNvPr id="17" name="Text 15"/>
-          <p:cNvSpPr/>
-          <p:nvPr/>
-        </p:nvSpPr>
-        <p:spPr>
-          <a:xfrm>
-            <a:off x="411480" y="3456432"/>
+          <p:cNvPr id="25" name="Text 23"/>
+          <p:cNvSpPr/>
+          <p:nvPr/>
+        </p:nvSpPr>
+        <p:spPr>
+          <a:xfrm>
+            <a:off x="5958840" y="3456432"/>
             <a:ext cx="2499360" cy="502920"/>
           </a:xfrm>
           <a:prstGeom prst="rect">
@@ -17858,263 +18083,7 @@
                 <a:ea typeface="Trebuchet MS" pitchFamily="34" charset="-122"/>
                 <a:cs typeface="Trebuchet MS" pitchFamily="34" charset="-120"/>
               </a:rPr>
-              <a:t>disrespect</a:t>
-            </a:r>
-            <a:endParaRPr lang="en-US" sz="1400" dirty="0"/>
-          </a:p>
-        </p:txBody>
-      </p:sp>
-      <p:sp>
-        <p:nvSpPr>
-          <p:cNvPr id="18" name="Text 16"/>
-          <p:cNvSpPr/>
-          <p:nvPr/>
-        </p:nvSpPr>
-        <p:spPr>
-          <a:xfrm>
-            <a:off x="411480" y="4005072"/>
-            <a:ext cx="2499360" cy="457200"/>
-          </a:xfrm>
-          <a:prstGeom prst="rect">
-            <a:avLst/>
-          </a:prstGeom>
-          <a:noFill/>
-          <a:ln/>
-        </p:spPr>
-        <p:txBody>
-          <a:bodyPr wrap="square" lIns="0" tIns="0" rIns="0" bIns="0" rtlCol="0" anchor="ctr"/>
-          <a:lstStyle/>
-          <a:p>
-            <a:pPr algn="ctr" indent="0" marL="0">
-              <a:buNone/>
-            </a:pPr>
-            <a:r>
-              <a:rPr lang="en-US" sz="900" i="1" dirty="0">
-                <a:solidFill>
-                  <a:srgbClr val="475569"/>
-                </a:solidFill>
-                <a:latin typeface="Calibri" pitchFamily="34" charset="0"/>
-                <a:ea typeface="Calibri" pitchFamily="34" charset="-122"/>
-                <a:cs typeface="Calibri" pitchFamily="34" charset="-120"/>
-              </a:rPr>
-              <a:t>write your breakdown below</a:t>
-            </a:r>
-            <a:endParaRPr lang="en-US" sz="900" dirty="0"/>
-          </a:p>
-        </p:txBody>
-      </p:sp>
-      <p:sp>
-        <p:nvSpPr>
-          <p:cNvPr id="19" name="Shape 17"/>
-          <p:cNvSpPr/>
-          <p:nvPr/>
-        </p:nvSpPr>
-        <p:spPr>
-          <a:xfrm>
-            <a:off x="3185160" y="3456432"/>
-            <a:ext cx="2499360" cy="1005840"/>
-          </a:xfrm>
-          <a:prstGeom prst="rect">
-            <a:avLst>
-              <a:gd name="adj" fmla="val 7273"/>
-            </a:avLst>
-          </a:prstGeom>
-          <a:solidFill>
-            <a:srgbClr val="F8FAFC"/>
-          </a:solidFill>
-          <a:ln w="12700">
-            <a:solidFill>
-              <a:srgbClr val="E2E8F0"/>
-            </a:solidFill>
-            <a:prstDash val="solid"/>
-          </a:ln>
-        </p:spPr>
-      </p:sp>
-      <p:sp>
-        <p:nvSpPr>
-          <p:cNvPr id="20" name="Shape 18"/>
-          <p:cNvSpPr/>
-          <p:nvPr/>
-        </p:nvSpPr>
-        <p:spPr>
-          <a:xfrm>
-            <a:off x="3185160" y="3977640"/>
-            <a:ext cx="2499360" cy="0"/>
-          </a:xfrm>
-          <a:prstGeom prst="line">
-            <a:avLst/>
-          </a:prstGeom>
-          <a:noFill/>
-          <a:ln w="12700">
-            <a:solidFill>
-              <a:srgbClr val="E2E8F0"/>
-            </a:solidFill>
-            <a:prstDash val="dash"/>
-          </a:ln>
-        </p:spPr>
-      </p:sp>
-      <p:sp>
-        <p:nvSpPr>
-          <p:cNvPr id="21" name="Text 19"/>
-          <p:cNvSpPr/>
-          <p:nvPr/>
-        </p:nvSpPr>
-        <p:spPr>
-          <a:xfrm>
-            <a:off x="3185160" y="3456432"/>
-            <a:ext cx="2499360" cy="502920"/>
-          </a:xfrm>
-          <a:prstGeom prst="rect">
-            <a:avLst/>
-          </a:prstGeom>
-          <a:noFill/>
-          <a:ln/>
-        </p:spPr>
-        <p:txBody>
-          <a:bodyPr wrap="square" lIns="0" tIns="0" rIns="0" bIns="0" rtlCol="0" anchor="ctr"/>
-          <a:lstStyle/>
-          <a:p>
-            <a:pPr algn="ctr" indent="0" marL="0">
-              <a:buNone/>
-            </a:pPr>
-            <a:r>
-              <a:rPr lang="en-US" sz="1400" b="1" dirty="0">
-                <a:solidFill>
-                  <a:srgbClr val="0D9488"/>
-                </a:solidFill>
-                <a:latin typeface="Trebuchet MS" pitchFamily="34" charset="0"/>
-                <a:ea typeface="Trebuchet MS" pitchFamily="34" charset="-122"/>
-                <a:cs typeface="Trebuchet MS" pitchFamily="34" charset="-120"/>
-              </a:rPr>
-              <a:t>disagree</a:t>
-            </a:r>
-            <a:endParaRPr lang="en-US" sz="1400" dirty="0"/>
-          </a:p>
-        </p:txBody>
-      </p:sp>
-      <p:sp>
-        <p:nvSpPr>
-          <p:cNvPr id="22" name="Text 20"/>
-          <p:cNvSpPr/>
-          <p:nvPr/>
-        </p:nvSpPr>
-        <p:spPr>
-          <a:xfrm>
-            <a:off x="3185160" y="4005072"/>
-            <a:ext cx="2499360" cy="457200"/>
-          </a:xfrm>
-          <a:prstGeom prst="rect">
-            <a:avLst/>
-          </a:prstGeom>
-          <a:noFill/>
-          <a:ln/>
-        </p:spPr>
-        <p:txBody>
-          <a:bodyPr wrap="square" lIns="0" tIns="0" rIns="0" bIns="0" rtlCol="0" anchor="ctr"/>
-          <a:lstStyle/>
-          <a:p>
-            <a:pPr algn="ctr" indent="0" marL="0">
-              <a:buNone/>
-            </a:pPr>
-            <a:r>
-              <a:rPr lang="en-US" sz="900" i="1" dirty="0">
-                <a:solidFill>
-                  <a:srgbClr val="475569"/>
-                </a:solidFill>
-                <a:latin typeface="Calibri" pitchFamily="34" charset="0"/>
-                <a:ea typeface="Calibri" pitchFamily="34" charset="-122"/>
-                <a:cs typeface="Calibri" pitchFamily="34" charset="-120"/>
-              </a:rPr>
-              <a:t>write your breakdown below</a:t>
-            </a:r>
-            <a:endParaRPr lang="en-US" sz="900" dirty="0"/>
-          </a:p>
-        </p:txBody>
-      </p:sp>
-      <p:sp>
-        <p:nvSpPr>
-          <p:cNvPr id="23" name="Shape 21"/>
-          <p:cNvSpPr/>
-          <p:nvPr/>
-        </p:nvSpPr>
-        <p:spPr>
-          <a:xfrm>
-            <a:off x="5958840" y="3456432"/>
-            <a:ext cx="2499360" cy="1005840"/>
-          </a:xfrm>
-          <a:prstGeom prst="rect">
-            <a:avLst>
-              <a:gd name="adj" fmla="val 7273"/>
-            </a:avLst>
-          </a:prstGeom>
-          <a:solidFill>
-            <a:srgbClr val="F8FAFC"/>
-          </a:solidFill>
-          <a:ln w="12700">
-            <a:solidFill>
-              <a:srgbClr val="E2E8F0"/>
-            </a:solidFill>
-            <a:prstDash val="solid"/>
-          </a:ln>
-        </p:spPr>
-      </p:sp>
-      <p:sp>
-        <p:nvSpPr>
-          <p:cNvPr id="24" name="Shape 22"/>
-          <p:cNvSpPr/>
-          <p:nvPr/>
-        </p:nvSpPr>
-        <p:spPr>
-          <a:xfrm>
-            <a:off x="5958840" y="3977640"/>
-            <a:ext cx="2499360" cy="0"/>
-          </a:xfrm>
-          <a:prstGeom prst="line">
-            <a:avLst/>
-          </a:prstGeom>
-          <a:noFill/>
-          <a:ln w="12700">
-            <a:solidFill>
-              <a:srgbClr val="E2E8F0"/>
-            </a:solidFill>
-            <a:prstDash val="dash"/>
-          </a:ln>
-        </p:spPr>
-      </p:sp>
-      <p:sp>
-        <p:nvSpPr>
-          <p:cNvPr id="25" name="Text 23"/>
-          <p:cNvSpPr/>
-          <p:nvPr/>
-        </p:nvSpPr>
-        <p:spPr>
-          <a:xfrm>
-            <a:off x="5958840" y="3456432"/>
-            <a:ext cx="2499360" cy="502920"/>
-          </a:xfrm>
-          <a:prstGeom prst="rect">
-            <a:avLst/>
-          </a:prstGeom>
-          <a:noFill/>
-          <a:ln/>
-        </p:spPr>
-        <p:txBody>
-          <a:bodyPr wrap="square" lIns="0" tIns="0" rIns="0" bIns="0" rtlCol="0" anchor="ctr"/>
-          <a:lstStyle/>
-          <a:p>
-            <a:pPr algn="ctr" indent="0" marL="0">
-              <a:buNone/>
-            </a:pPr>
-            <a:r>
-              <a:rPr lang="en-US" sz="1400" b="1" dirty="0">
-                <a:solidFill>
-                  <a:srgbClr val="0D9488"/>
-                </a:solidFill>
-                <a:latin typeface="Trebuchet MS" pitchFamily="34" charset="0"/>
-                <a:ea typeface="Trebuchet MS" pitchFamily="34" charset="-122"/>
-                <a:cs typeface="Trebuchet MS" pitchFamily="34" charset="-120"/>
-              </a:rPr>
-              <a:t>disappointment</a:t>
+              <a:t>disappear</a:t>
             </a:r>
             <a:endParaRPr lang="en-US" sz="1400" dirty="0"/>
           </a:p>
@@ -18584,7 +18553,7 @@
                 <a:ea typeface="Trebuchet MS" pitchFamily="34" charset="-122"/>
                 <a:cs typeface="Trebuchet MS" pitchFamily="34" charset="-120"/>
               </a:rPr>
-              <a:t>disrespect</a:t>
+              <a:t>discovery</a:t>
             </a:r>
             <a:endParaRPr lang="en-US" sz="2800" dirty="0"/>
           </a:p>
@@ -19411,7 +19380,7 @@
                 <a:ea typeface="Trebuchet MS" pitchFamily="34" charset="-122"/>
                 <a:cs typeface="Trebuchet MS" pitchFamily="34" charset="-120"/>
               </a:rPr>
-              <a:t>disrespect</a:t>
+              <a:t>discovery</a:t>
             </a:r>
             <a:endParaRPr lang="en-US" sz="2800" dirty="0"/>
           </a:p>
@@ -19491,7 +19460,7 @@
         </p:nvSpPr>
         <p:spPr>
           <a:xfrm>
-            <a:off x="2938272" y="2258568"/>
+            <a:off x="2221992" y="2258568"/>
             <a:ext cx="1828800" cy="292608"/>
           </a:xfrm>
           <a:prstGeom prst="rect">
@@ -19525,7 +19494,7 @@
         </p:nvSpPr>
         <p:spPr>
           <a:xfrm>
-            <a:off x="2938272" y="2258568"/>
+            <a:off x="2221992" y="2258568"/>
             <a:ext cx="1828800" cy="292608"/>
           </a:xfrm>
           <a:prstGeom prst="rect">
@@ -19564,7 +19533,7 @@
         </p:nvSpPr>
         <p:spPr>
           <a:xfrm>
-            <a:off x="2938272" y="2569464"/>
+            <a:off x="2221992" y="2569464"/>
             <a:ext cx="1828800" cy="201168"/>
           </a:xfrm>
           <a:prstGeom prst="rect">
@@ -19603,7 +19572,7 @@
         </p:nvSpPr>
         <p:spPr>
           <a:xfrm>
-            <a:off x="5803392" y="2258568"/>
+            <a:off x="4370832" y="2258568"/>
             <a:ext cx="1828800" cy="292608"/>
           </a:xfrm>
           <a:prstGeom prst="rect">
@@ -19637,7 +19606,7 @@
         </p:nvSpPr>
         <p:spPr>
           <a:xfrm>
-            <a:off x="5803392" y="2258568"/>
+            <a:off x="4370832" y="2258568"/>
             <a:ext cx="1828800" cy="292608"/>
           </a:xfrm>
           <a:prstGeom prst="rect">
@@ -19662,7 +19631,7 @@
                 <a:ea typeface="Trebuchet MS" pitchFamily="34" charset="-122"/>
                 <a:cs typeface="Trebuchet MS" pitchFamily="34" charset="-120"/>
               </a:rPr>
-              <a:t>respect</a:t>
+              <a:t>cover</a:t>
             </a:r>
             <a:endParaRPr lang="en-US" sz="1300" dirty="0"/>
           </a:p>
@@ -19676,7 +19645,7 @@
         </p:nvSpPr>
         <p:spPr>
           <a:xfrm>
-            <a:off x="5803392" y="2569464"/>
+            <a:off x="4370832" y="2569464"/>
             <a:ext cx="1828800" cy="201168"/>
           </a:xfrm>
           <a:prstGeom prst="rect">
@@ -19701,7 +19670,7 @@
                 <a:ea typeface="Calibri" pitchFamily="34" charset="-122"/>
                 <a:cs typeface="Calibri" pitchFamily="34" charset="-120"/>
               </a:rPr>
-              <a:t>to admire and treat well</a:t>
+              <a:t>to cover over, conceal</a:t>
             </a:r>
             <a:endParaRPr lang="en-US" sz="850" dirty="0"/>
           </a:p>
@@ -19710,6 +19679,118 @@
       <p:sp>
         <p:nvSpPr>
           <p:cNvPr id="22" name="Shape 20"/>
+          <p:cNvSpPr/>
+          <p:nvPr/>
+        </p:nvSpPr>
+        <p:spPr>
+          <a:xfrm>
+            <a:off x="6519672" y="2258568"/>
+            <a:ext cx="1828800" cy="292608"/>
+          </a:xfrm>
+          <a:prstGeom prst="rect">
+            <a:avLst>
+              <a:gd name="adj" fmla="val 25000"/>
+            </a:avLst>
+          </a:prstGeom>
+          <a:solidFill>
+            <a:srgbClr val="FCE7F3"/>
+          </a:solidFill>
+          <a:ln w="19050">
+            <a:solidFill>
+              <a:srgbClr val="DB2777"/>
+            </a:solidFill>
+            <a:prstDash val="solid"/>
+          </a:ln>
+          <a:effectLst>
+            <a:outerShdw sx="100000" sy="100000" kx="0" ky="0" algn="bl" rotWithShape="0" blurRad="101600" dist="38100" dir="8100000">
+              <a:srgbClr val="000000">
+                <a:alpha val="12000"/>
+              </a:srgbClr>
+            </a:outerShdw>
+          </a:effectLst>
+        </p:spPr>
+      </p:sp>
+      <p:sp>
+        <p:nvSpPr>
+          <p:cNvPr id="23" name="Text 21"/>
+          <p:cNvSpPr/>
+          <p:nvPr/>
+        </p:nvSpPr>
+        <p:spPr>
+          <a:xfrm>
+            <a:off x="6519672" y="2258568"/>
+            <a:ext cx="1828800" cy="292608"/>
+          </a:xfrm>
+          <a:prstGeom prst="rect">
+            <a:avLst/>
+          </a:prstGeom>
+          <a:noFill/>
+          <a:ln/>
+        </p:spPr>
+        <p:txBody>
+          <a:bodyPr wrap="square" lIns="0" tIns="0" rIns="0" bIns="0" rtlCol="0" anchor="ctr"/>
+          <a:lstStyle/>
+          <a:p>
+            <a:pPr algn="ctr" indent="0" marL="0">
+              <a:buNone/>
+            </a:pPr>
+            <a:r>
+              <a:rPr lang="en-US" sz="1300" b="1" dirty="0">
+                <a:solidFill>
+                  <a:srgbClr val="9D174D"/>
+                </a:solidFill>
+                <a:latin typeface="Trebuchet MS" pitchFamily="34" charset="0"/>
+                <a:ea typeface="Trebuchet MS" pitchFamily="34" charset="-122"/>
+                <a:cs typeface="Trebuchet MS" pitchFamily="34" charset="-120"/>
+              </a:rPr>
+              <a:t>y</a:t>
+            </a:r>
+            <a:endParaRPr lang="en-US" sz="1300" dirty="0"/>
+          </a:p>
+        </p:txBody>
+      </p:sp>
+      <p:sp>
+        <p:nvSpPr>
+          <p:cNvPr id="24" name="Text 22"/>
+          <p:cNvSpPr/>
+          <p:nvPr/>
+        </p:nvSpPr>
+        <p:spPr>
+          <a:xfrm>
+            <a:off x="6519672" y="2569464"/>
+            <a:ext cx="1828800" cy="201168"/>
+          </a:xfrm>
+          <a:prstGeom prst="rect">
+            <a:avLst/>
+          </a:prstGeom>
+          <a:noFill/>
+          <a:ln/>
+        </p:spPr>
+        <p:txBody>
+          <a:bodyPr wrap="square" lIns="0" tIns="0" rIns="0" bIns="0" rtlCol="0" anchor="t"/>
+          <a:lstStyle/>
+          <a:p>
+            <a:pPr algn="ctr" indent="0" marL="0">
+              <a:buNone/>
+            </a:pPr>
+            <a:r>
+              <a:rPr lang="en-US" sz="850" dirty="0">
+                <a:solidFill>
+                  <a:srgbClr val="475569"/>
+                </a:solidFill>
+                <a:latin typeface="Calibri" pitchFamily="34" charset="0"/>
+                <a:ea typeface="Calibri" pitchFamily="34" charset="-122"/>
+                <a:cs typeface="Calibri" pitchFamily="34" charset="-120"/>
+              </a:rPr>
+              <a:t>forms a noun</a:t>
+            </a:r>
+            <a:endParaRPr lang="en-US" sz="850" dirty="0"/>
+          </a:p>
+        </p:txBody>
+      </p:sp>
+      <p:sp>
+        <p:nvSpPr>
+          <p:cNvPr id="25" name="Shape 23"/>
           <p:cNvSpPr/>
           <p:nvPr/>
         </p:nvSpPr>
@@ -19736,7 +19817,7 @@
       </p:sp>
       <p:sp>
         <p:nvSpPr>
-          <p:cNvPr id="23" name="Text 21"/>
+          <p:cNvPr id="26" name="Text 24"/>
           <p:cNvSpPr/>
           <p:nvPr/>
         </p:nvSpPr>
@@ -19775,7 +19856,7 @@
       </p:sp>
       <p:sp>
         <p:nvSpPr>
-          <p:cNvPr id="24" name="Shape 22"/>
+          <p:cNvPr id="27" name="Shape 25"/>
           <p:cNvSpPr/>
           <p:nvPr/>
         </p:nvSpPr>
@@ -19802,7 +19883,7 @@
       </p:sp>
       <p:sp>
         <p:nvSpPr>
-          <p:cNvPr id="25" name="Text 23"/>
+          <p:cNvPr id="28" name="Text 26"/>
           <p:cNvSpPr/>
           <p:nvPr/>
         </p:nvSpPr>
@@ -19841,7 +19922,7 @@
       </p:sp>
       <p:sp>
         <p:nvSpPr>
-          <p:cNvPr id="26" name="Shape 24"/>
+          <p:cNvPr id="29" name="Shape 27"/>
           <p:cNvSpPr/>
           <p:nvPr/>
         </p:nvSpPr>
@@ -19868,7 +19949,7 @@
       </p:sp>
       <p:sp>
         <p:nvSpPr>
-          <p:cNvPr id="27" name="Text 25"/>
+          <p:cNvPr id="30" name="Text 28"/>
           <p:cNvSpPr/>
           <p:nvPr/>
         </p:nvSpPr>
@@ -19907,7 +19988,7 @@
       </p:sp>
       <p:sp>
         <p:nvSpPr>
-          <p:cNvPr id="28" name="Shape 26"/>
+          <p:cNvPr id="31" name="Shape 29"/>
           <p:cNvSpPr/>
           <p:nvPr/>
         </p:nvSpPr>
@@ -19934,7 +20015,7 @@
       </p:sp>
       <p:sp>
         <p:nvSpPr>
-          <p:cNvPr id="29" name="Text 27"/>
+          <p:cNvPr id="32" name="Text 30"/>
           <p:cNvSpPr/>
           <p:nvPr/>
         </p:nvSpPr>
@@ -20396,7 +20477,7 @@
                 <a:ea typeface="Trebuchet MS" pitchFamily="34" charset="-122"/>
                 <a:cs typeface="Trebuchet MS" pitchFamily="34" charset="-120"/>
               </a:rPr>
-              <a:t>disrespect</a:t>
+              <a:t>discovery</a:t>
             </a:r>
             <a:endParaRPr lang="en-US" sz="2800" dirty="0"/>
           </a:p>
@@ -20476,7 +20557,7 @@
         </p:nvSpPr>
         <p:spPr>
           <a:xfrm>
-            <a:off x="2938272" y="2258568"/>
+            <a:off x="2221992" y="2258568"/>
             <a:ext cx="1828800" cy="292608"/>
           </a:xfrm>
           <a:prstGeom prst="rect">
@@ -20510,7 +20591,7 @@
         </p:nvSpPr>
         <p:spPr>
           <a:xfrm>
-            <a:off x="2938272" y="2258568"/>
+            <a:off x="2221992" y="2258568"/>
             <a:ext cx="1828800" cy="292608"/>
           </a:xfrm>
           <a:prstGeom prst="rect">
@@ -20549,7 +20630,7 @@
         </p:nvSpPr>
         <p:spPr>
           <a:xfrm>
-            <a:off x="2938272" y="2569464"/>
+            <a:off x="2221992" y="2569464"/>
             <a:ext cx="1828800" cy="201168"/>
           </a:xfrm>
           <a:prstGeom prst="rect">
@@ -20588,7 +20669,7 @@
         </p:nvSpPr>
         <p:spPr>
           <a:xfrm>
-            <a:off x="5803392" y="2258568"/>
+            <a:off x="4370832" y="2258568"/>
             <a:ext cx="1828800" cy="292608"/>
           </a:xfrm>
           <a:prstGeom prst="rect">
@@ -20622,7 +20703,7 @@
         </p:nvSpPr>
         <p:spPr>
           <a:xfrm>
-            <a:off x="5803392" y="2258568"/>
+            <a:off x="4370832" y="2258568"/>
             <a:ext cx="1828800" cy="292608"/>
           </a:xfrm>
           <a:prstGeom prst="rect">
@@ -20647,7 +20728,7 @@
                 <a:ea typeface="Trebuchet MS" pitchFamily="34" charset="-122"/>
                 <a:cs typeface="Trebuchet MS" pitchFamily="34" charset="-120"/>
               </a:rPr>
-              <a:t>respect</a:t>
+              <a:t>cover</a:t>
             </a:r>
             <a:endParaRPr lang="en-US" sz="1300" dirty="0"/>
           </a:p>
@@ -20661,7 +20742,7 @@
         </p:nvSpPr>
         <p:spPr>
           <a:xfrm>
-            <a:off x="5803392" y="2569464"/>
+            <a:off x="4370832" y="2569464"/>
             <a:ext cx="1828800" cy="201168"/>
           </a:xfrm>
           <a:prstGeom prst="rect">
@@ -20686,7 +20767,7 @@
                 <a:ea typeface="Calibri" pitchFamily="34" charset="-122"/>
                 <a:cs typeface="Calibri" pitchFamily="34" charset="-120"/>
               </a:rPr>
-              <a:t>to admire and treat well</a:t>
+              <a:t>to cover over, conceal</a:t>
             </a:r>
             <a:endParaRPr lang="en-US" sz="850" dirty="0"/>
           </a:p>
@@ -20695,6 +20776,118 @@
       <p:sp>
         <p:nvSpPr>
           <p:cNvPr id="22" name="Shape 20"/>
+          <p:cNvSpPr/>
+          <p:nvPr/>
+        </p:nvSpPr>
+        <p:spPr>
+          <a:xfrm>
+            <a:off x="6519672" y="2258568"/>
+            <a:ext cx="1828800" cy="292608"/>
+          </a:xfrm>
+          <a:prstGeom prst="rect">
+            <a:avLst>
+              <a:gd name="adj" fmla="val 25000"/>
+            </a:avLst>
+          </a:prstGeom>
+          <a:solidFill>
+            <a:srgbClr val="FCE7F3"/>
+          </a:solidFill>
+          <a:ln w="19050">
+            <a:solidFill>
+              <a:srgbClr val="DB2777"/>
+            </a:solidFill>
+            <a:prstDash val="solid"/>
+          </a:ln>
+          <a:effectLst>
+            <a:outerShdw sx="100000" sy="100000" kx="0" ky="0" algn="bl" rotWithShape="0" blurRad="101600" dist="38100" dir="8100000">
+              <a:srgbClr val="000000">
+                <a:alpha val="12000"/>
+              </a:srgbClr>
+            </a:outerShdw>
+          </a:effectLst>
+        </p:spPr>
+      </p:sp>
+      <p:sp>
+        <p:nvSpPr>
+          <p:cNvPr id="23" name="Text 21"/>
+          <p:cNvSpPr/>
+          <p:nvPr/>
+        </p:nvSpPr>
+        <p:spPr>
+          <a:xfrm>
+            <a:off x="6519672" y="2258568"/>
+            <a:ext cx="1828800" cy="292608"/>
+          </a:xfrm>
+          <a:prstGeom prst="rect">
+            <a:avLst/>
+          </a:prstGeom>
+          <a:noFill/>
+          <a:ln/>
+        </p:spPr>
+        <p:txBody>
+          <a:bodyPr wrap="square" lIns="0" tIns="0" rIns="0" bIns="0" rtlCol="0" anchor="ctr"/>
+          <a:lstStyle/>
+          <a:p>
+            <a:pPr algn="ctr" indent="0" marL="0">
+              <a:buNone/>
+            </a:pPr>
+            <a:r>
+              <a:rPr lang="en-US" sz="1300" b="1" dirty="0">
+                <a:solidFill>
+                  <a:srgbClr val="9D174D"/>
+                </a:solidFill>
+                <a:latin typeface="Trebuchet MS" pitchFamily="34" charset="0"/>
+                <a:ea typeface="Trebuchet MS" pitchFamily="34" charset="-122"/>
+                <a:cs typeface="Trebuchet MS" pitchFamily="34" charset="-120"/>
+              </a:rPr>
+              <a:t>y</a:t>
+            </a:r>
+            <a:endParaRPr lang="en-US" sz="1300" dirty="0"/>
+          </a:p>
+        </p:txBody>
+      </p:sp>
+      <p:sp>
+        <p:nvSpPr>
+          <p:cNvPr id="24" name="Text 22"/>
+          <p:cNvSpPr/>
+          <p:nvPr/>
+        </p:nvSpPr>
+        <p:spPr>
+          <a:xfrm>
+            <a:off x="6519672" y="2569464"/>
+            <a:ext cx="1828800" cy="201168"/>
+          </a:xfrm>
+          <a:prstGeom prst="rect">
+            <a:avLst/>
+          </a:prstGeom>
+          <a:noFill/>
+          <a:ln/>
+        </p:spPr>
+        <p:txBody>
+          <a:bodyPr wrap="square" lIns="0" tIns="0" rIns="0" bIns="0" rtlCol="0" anchor="t"/>
+          <a:lstStyle/>
+          <a:p>
+            <a:pPr algn="ctr" indent="0" marL="0">
+              <a:buNone/>
+            </a:pPr>
+            <a:r>
+              <a:rPr lang="en-US" sz="850" dirty="0">
+                <a:solidFill>
+                  <a:srgbClr val="475569"/>
+                </a:solidFill>
+                <a:latin typeface="Calibri" pitchFamily="34" charset="0"/>
+                <a:ea typeface="Calibri" pitchFamily="34" charset="-122"/>
+                <a:cs typeface="Calibri" pitchFamily="34" charset="-120"/>
+              </a:rPr>
+              <a:t>forms a noun</a:t>
+            </a:r>
+            <a:endParaRPr lang="en-US" sz="850" dirty="0"/>
+          </a:p>
+        </p:txBody>
+      </p:sp>
+      <p:sp>
+        <p:nvSpPr>
+          <p:cNvPr id="25" name="Shape 23"/>
           <p:cNvSpPr/>
           <p:nvPr/>
         </p:nvSpPr>
@@ -20721,7 +20914,7 @@
       </p:sp>
       <p:sp>
         <p:nvSpPr>
-          <p:cNvPr id="23" name="Text 21"/>
+          <p:cNvPr id="26" name="Text 24"/>
           <p:cNvSpPr/>
           <p:nvPr/>
         </p:nvSpPr>
@@ -20760,7 +20953,7 @@
       </p:sp>
       <p:sp>
         <p:nvSpPr>
-          <p:cNvPr id="24" name="Shape 22"/>
+          <p:cNvPr id="27" name="Shape 25"/>
           <p:cNvSpPr/>
           <p:nvPr/>
         </p:nvSpPr>
@@ -20787,14 +20980,14 @@
       </p:sp>
       <p:sp>
         <p:nvSpPr>
-          <p:cNvPr id="25" name="Shape 23"/>
-          <p:cNvSpPr/>
-          <p:nvPr/>
-        </p:nvSpPr>
-        <p:spPr>
-          <a:xfrm>
-            <a:off x="2313432" y="3364992"/>
-            <a:ext cx="1645920" cy="475488"/>
+          <p:cNvPr id="28" name="Shape 26"/>
+          <p:cNvSpPr/>
+          <p:nvPr/>
+        </p:nvSpPr>
+        <p:spPr>
+          <a:xfrm>
+            <a:off x="1975104" y="3364992"/>
+            <a:ext cx="1554480" cy="475488"/>
           </a:xfrm>
           <a:prstGeom prst="rect">
             <a:avLst>
@@ -20814,14 +21007,14 @@
       </p:sp>
       <p:sp>
         <p:nvSpPr>
-          <p:cNvPr id="26" name="Text 24"/>
-          <p:cNvSpPr/>
-          <p:nvPr/>
-        </p:nvSpPr>
-        <p:spPr>
-          <a:xfrm>
-            <a:off x="2313432" y="3364992"/>
-            <a:ext cx="1645920" cy="475488"/>
+          <p:cNvPr id="29" name="Text 27"/>
+          <p:cNvSpPr/>
+          <p:nvPr/>
+        </p:nvSpPr>
+        <p:spPr>
+          <a:xfrm>
+            <a:off x="1975104" y="3364992"/>
+            <a:ext cx="1554480" cy="475488"/>
           </a:xfrm>
           <a:prstGeom prst="rect">
             <a:avLst/>
@@ -20853,14 +21046,14 @@
       </p:sp>
       <p:sp>
         <p:nvSpPr>
-          <p:cNvPr id="27" name="Text 25"/>
-          <p:cNvSpPr/>
-          <p:nvPr/>
-        </p:nvSpPr>
-        <p:spPr>
-          <a:xfrm>
-            <a:off x="3959352" y="3364992"/>
-            <a:ext cx="411480" cy="475488"/>
+          <p:cNvPr id="30" name="Text 28"/>
+          <p:cNvSpPr/>
+          <p:nvPr/>
+        </p:nvSpPr>
+        <p:spPr>
+          <a:xfrm>
+            <a:off x="3529584" y="3364992"/>
+            <a:ext cx="73152" cy="475488"/>
           </a:xfrm>
           <a:prstGeom prst="rect">
             <a:avLst/>
@@ -20892,14 +21085,14 @@
       </p:sp>
       <p:sp>
         <p:nvSpPr>
-          <p:cNvPr id="28" name="Shape 26"/>
-          <p:cNvSpPr/>
-          <p:nvPr/>
-        </p:nvSpPr>
-        <p:spPr>
-          <a:xfrm>
-            <a:off x="4370832" y="3364992"/>
-            <a:ext cx="1645920" cy="475488"/>
+          <p:cNvPr id="31" name="Shape 29"/>
+          <p:cNvSpPr/>
+          <p:nvPr/>
+        </p:nvSpPr>
+        <p:spPr>
+          <a:xfrm>
+            <a:off x="3602736" y="3364992"/>
+            <a:ext cx="1554480" cy="475488"/>
           </a:xfrm>
           <a:prstGeom prst="rect">
             <a:avLst>
@@ -20919,14 +21112,14 @@
       </p:sp>
       <p:sp>
         <p:nvSpPr>
-          <p:cNvPr id="29" name="Text 27"/>
-          <p:cNvSpPr/>
-          <p:nvPr/>
-        </p:nvSpPr>
-        <p:spPr>
-          <a:xfrm>
-            <a:off x="4370832" y="3364992"/>
-            <a:ext cx="1645920" cy="475488"/>
+          <p:cNvPr id="32" name="Text 30"/>
+          <p:cNvSpPr/>
+          <p:nvPr/>
+        </p:nvSpPr>
+        <p:spPr>
+          <a:xfrm>
+            <a:off x="3602736" y="3364992"/>
+            <a:ext cx="1554480" cy="475488"/>
           </a:xfrm>
           <a:prstGeom prst="rect">
             <a:avLst/>
@@ -20950,7 +21143,7 @@
                 <a:ea typeface="Trebuchet MS" pitchFamily="34" charset="-122"/>
                 <a:cs typeface="Trebuchet MS" pitchFamily="34" charset="-120"/>
               </a:rPr>
-              <a:t>re</a:t>
+              <a:t>cov</a:t>
             </a:r>
             <a:endParaRPr lang="en-US" sz="1400" dirty="0"/>
           </a:p>
@@ -20958,14 +21151,14 @@
       </p:sp>
       <p:sp>
         <p:nvSpPr>
-          <p:cNvPr id="30" name="Text 28"/>
-          <p:cNvSpPr/>
-          <p:nvPr/>
-        </p:nvSpPr>
-        <p:spPr>
-          <a:xfrm>
-            <a:off x="6016752" y="3364992"/>
-            <a:ext cx="411480" cy="475488"/>
+          <p:cNvPr id="33" name="Text 31"/>
+          <p:cNvSpPr/>
+          <p:nvPr/>
+        </p:nvSpPr>
+        <p:spPr>
+          <a:xfrm>
+            <a:off x="5157216" y="3364992"/>
+            <a:ext cx="73152" cy="475488"/>
           </a:xfrm>
           <a:prstGeom prst="rect">
             <a:avLst/>
@@ -20997,14 +21190,14 @@
       </p:sp>
       <p:sp>
         <p:nvSpPr>
-          <p:cNvPr id="31" name="Shape 29"/>
-          <p:cNvSpPr/>
-          <p:nvPr/>
-        </p:nvSpPr>
-        <p:spPr>
-          <a:xfrm>
-            <a:off x="6428232" y="3364992"/>
-            <a:ext cx="1645920" cy="475488"/>
+          <p:cNvPr id="34" name="Shape 32"/>
+          <p:cNvSpPr/>
+          <p:nvPr/>
+        </p:nvSpPr>
+        <p:spPr>
+          <a:xfrm>
+            <a:off x="5230368" y="3364992"/>
+            <a:ext cx="1554480" cy="475488"/>
           </a:xfrm>
           <a:prstGeom prst="rect">
             <a:avLst>
@@ -21024,14 +21217,14 @@
       </p:sp>
       <p:sp>
         <p:nvSpPr>
-          <p:cNvPr id="32" name="Text 30"/>
-          <p:cNvSpPr/>
-          <p:nvPr/>
-        </p:nvSpPr>
-        <p:spPr>
-          <a:xfrm>
-            <a:off x="6428232" y="3364992"/>
-            <a:ext cx="1645920" cy="475488"/>
+          <p:cNvPr id="35" name="Text 33"/>
+          <p:cNvSpPr/>
+          <p:nvPr/>
+        </p:nvSpPr>
+        <p:spPr>
+          <a:xfrm>
+            <a:off x="5230368" y="3364992"/>
+            <a:ext cx="1554480" cy="475488"/>
           </a:xfrm>
           <a:prstGeom prst="rect">
             <a:avLst/>
@@ -21055,7 +21248,7 @@
                 <a:ea typeface="Trebuchet MS" pitchFamily="34" charset="-122"/>
                 <a:cs typeface="Trebuchet MS" pitchFamily="34" charset="-120"/>
               </a:rPr>
-              <a:t>spect</a:t>
+              <a:t>er</a:t>
             </a:r>
             <a:endParaRPr lang="en-US" sz="1400" dirty="0"/>
           </a:p>
@@ -21063,7 +21256,112 @@
       </p:sp>
       <p:sp>
         <p:nvSpPr>
-          <p:cNvPr id="33" name="Shape 31"/>
+          <p:cNvPr id="36" name="Text 34"/>
+          <p:cNvSpPr/>
+          <p:nvPr/>
+        </p:nvSpPr>
+        <p:spPr>
+          <a:xfrm>
+            <a:off x="6784848" y="3364992"/>
+            <a:ext cx="73152" cy="475488"/>
+          </a:xfrm>
+          <a:prstGeom prst="rect">
+            <a:avLst/>
+          </a:prstGeom>
+          <a:noFill/>
+          <a:ln/>
+        </p:spPr>
+        <p:txBody>
+          <a:bodyPr wrap="square" lIns="0" tIns="0" rIns="0" bIns="0" rtlCol="0" anchor="ctr"/>
+          <a:lstStyle/>
+          <a:p>
+            <a:pPr algn="ctr" indent="0" marL="0">
+              <a:buNone/>
+            </a:pPr>
+            <a:r>
+              <a:rPr lang="en-US" sz="1600" b="1" dirty="0">
+                <a:solidFill>
+                  <a:srgbClr val="0D9488"/>
+                </a:solidFill>
+                <a:latin typeface="Trebuchet MS" pitchFamily="34" charset="0"/>
+                <a:ea typeface="Trebuchet MS" pitchFamily="34" charset="-122"/>
+                <a:cs typeface="Trebuchet MS" pitchFamily="34" charset="-120"/>
+              </a:rPr>
+              <a:t>·</a:t>
+            </a:r>
+            <a:endParaRPr lang="en-US" sz="1600" dirty="0"/>
+          </a:p>
+        </p:txBody>
+      </p:sp>
+      <p:sp>
+        <p:nvSpPr>
+          <p:cNvPr id="37" name="Shape 35"/>
+          <p:cNvSpPr/>
+          <p:nvPr/>
+        </p:nvSpPr>
+        <p:spPr>
+          <a:xfrm>
+            <a:off x="6858000" y="3364992"/>
+            <a:ext cx="1554480" cy="475488"/>
+          </a:xfrm>
+          <a:prstGeom prst="rect">
+            <a:avLst>
+              <a:gd name="adj" fmla="val 9615"/>
+            </a:avLst>
+          </a:prstGeom>
+          <a:solidFill>
+            <a:srgbClr val="FFFFFF"/>
+          </a:solidFill>
+          <a:ln w="12700">
+            <a:solidFill>
+              <a:srgbClr val="0D9488"/>
+            </a:solidFill>
+            <a:prstDash val="solid"/>
+          </a:ln>
+        </p:spPr>
+      </p:sp>
+      <p:sp>
+        <p:nvSpPr>
+          <p:cNvPr id="38" name="Text 36"/>
+          <p:cNvSpPr/>
+          <p:nvPr/>
+        </p:nvSpPr>
+        <p:spPr>
+          <a:xfrm>
+            <a:off x="6858000" y="3364992"/>
+            <a:ext cx="1554480" cy="475488"/>
+          </a:xfrm>
+          <a:prstGeom prst="rect">
+            <a:avLst/>
+          </a:prstGeom>
+          <a:noFill/>
+          <a:ln/>
+        </p:spPr>
+        <p:txBody>
+          <a:bodyPr wrap="square" lIns="0" tIns="0" rIns="0" bIns="0" rtlCol="0" anchor="ctr"/>
+          <a:lstStyle/>
+          <a:p>
+            <a:pPr algn="ctr" indent="0" marL="0">
+              <a:buNone/>
+            </a:pPr>
+            <a:r>
+              <a:rPr lang="en-US" sz="1400" b="1" dirty="0">
+                <a:solidFill>
+                  <a:srgbClr val="0D9488"/>
+                </a:solidFill>
+                <a:latin typeface="Trebuchet MS" pitchFamily="34" charset="0"/>
+                <a:ea typeface="Trebuchet MS" pitchFamily="34" charset="-122"/>
+                <a:cs typeface="Trebuchet MS" pitchFamily="34" charset="-120"/>
+              </a:rPr>
+              <a:t>y</a:t>
+            </a:r>
+            <a:endParaRPr lang="en-US" sz="1400" dirty="0"/>
+          </a:p>
+        </p:txBody>
+      </p:sp>
+      <p:sp>
+        <p:nvSpPr>
+          <p:cNvPr id="39" name="Shape 37"/>
           <p:cNvSpPr/>
           <p:nvPr/>
         </p:nvSpPr>
@@ -21090,7 +21388,7 @@
       </p:sp>
       <p:sp>
         <p:nvSpPr>
-          <p:cNvPr id="34" name="Text 32"/>
+          <p:cNvPr id="40" name="Text 38"/>
           <p:cNvSpPr/>
           <p:nvPr/>
         </p:nvSpPr>
@@ -21129,7 +21427,7 @@
       </p:sp>
       <p:sp>
         <p:nvSpPr>
-          <p:cNvPr id="35" name="Shape 33"/>
+          <p:cNvPr id="41" name="Shape 39"/>
           <p:cNvSpPr/>
           <p:nvPr/>
         </p:nvSpPr>
@@ -21156,7 +21454,7 @@
       </p:sp>
       <p:sp>
         <p:nvSpPr>
-          <p:cNvPr id="36" name="Text 34"/>
+          <p:cNvPr id="42" name="Text 40"/>
           <p:cNvSpPr/>
           <p:nvPr/>
         </p:nvSpPr>
@@ -21618,7 +21916,7 @@
                 <a:ea typeface="Trebuchet MS" pitchFamily="34" charset="-122"/>
                 <a:cs typeface="Trebuchet MS" pitchFamily="34" charset="-120"/>
               </a:rPr>
-              <a:t>disrespect</a:t>
+              <a:t>discovery</a:t>
             </a:r>
             <a:endParaRPr lang="en-US" sz="2800" dirty="0"/>
           </a:p>
@@ -21698,7 +21996,7 @@
         </p:nvSpPr>
         <p:spPr>
           <a:xfrm>
-            <a:off x="2938272" y="2258568"/>
+            <a:off x="2221992" y="2258568"/>
             <a:ext cx="1828800" cy="292608"/>
           </a:xfrm>
           <a:prstGeom prst="rect">
@@ -21732,7 +22030,7 @@
         </p:nvSpPr>
         <p:spPr>
           <a:xfrm>
-            <a:off x="2938272" y="2258568"/>
+            <a:off x="2221992" y="2258568"/>
             <a:ext cx="1828800" cy="292608"/>
           </a:xfrm>
           <a:prstGeom prst="rect">
@@ -21771,7 +22069,7 @@
         </p:nvSpPr>
         <p:spPr>
           <a:xfrm>
-            <a:off x="2938272" y="2569464"/>
+            <a:off x="2221992" y="2569464"/>
             <a:ext cx="1828800" cy="201168"/>
           </a:xfrm>
           <a:prstGeom prst="rect">
@@ -21810,7 +22108,7 @@
         </p:nvSpPr>
         <p:spPr>
           <a:xfrm>
-            <a:off x="5803392" y="2258568"/>
+            <a:off x="4370832" y="2258568"/>
             <a:ext cx="1828800" cy="292608"/>
           </a:xfrm>
           <a:prstGeom prst="rect">
@@ -21844,7 +22142,7 @@
         </p:nvSpPr>
         <p:spPr>
           <a:xfrm>
-            <a:off x="5803392" y="2258568"/>
+            <a:off x="4370832" y="2258568"/>
             <a:ext cx="1828800" cy="292608"/>
           </a:xfrm>
           <a:prstGeom prst="rect">
@@ -21869,7 +22167,7 @@
                 <a:ea typeface="Trebuchet MS" pitchFamily="34" charset="-122"/>
                 <a:cs typeface="Trebuchet MS" pitchFamily="34" charset="-120"/>
               </a:rPr>
-              <a:t>respect</a:t>
+              <a:t>cover</a:t>
             </a:r>
             <a:endParaRPr lang="en-US" sz="1300" dirty="0"/>
           </a:p>
@@ -21883,7 +22181,7 @@
         </p:nvSpPr>
         <p:spPr>
           <a:xfrm>
-            <a:off x="5803392" y="2569464"/>
+            <a:off x="4370832" y="2569464"/>
             <a:ext cx="1828800" cy="201168"/>
           </a:xfrm>
           <a:prstGeom prst="rect">
@@ -21908,7 +22206,7 @@
                 <a:ea typeface="Calibri" pitchFamily="34" charset="-122"/>
                 <a:cs typeface="Calibri" pitchFamily="34" charset="-120"/>
               </a:rPr>
-              <a:t>to admire and treat well</a:t>
+              <a:t>to cover over, conceal</a:t>
             </a:r>
             <a:endParaRPr lang="en-US" sz="850" dirty="0"/>
           </a:p>
@@ -21917,6 +22215,118 @@
       <p:sp>
         <p:nvSpPr>
           <p:cNvPr id="22" name="Shape 20"/>
+          <p:cNvSpPr/>
+          <p:nvPr/>
+        </p:nvSpPr>
+        <p:spPr>
+          <a:xfrm>
+            <a:off x="6519672" y="2258568"/>
+            <a:ext cx="1828800" cy="292608"/>
+          </a:xfrm>
+          <a:prstGeom prst="rect">
+            <a:avLst>
+              <a:gd name="adj" fmla="val 25000"/>
+            </a:avLst>
+          </a:prstGeom>
+          <a:solidFill>
+            <a:srgbClr val="FCE7F3"/>
+          </a:solidFill>
+          <a:ln w="19050">
+            <a:solidFill>
+              <a:srgbClr val="DB2777"/>
+            </a:solidFill>
+            <a:prstDash val="solid"/>
+          </a:ln>
+          <a:effectLst>
+            <a:outerShdw sx="100000" sy="100000" kx="0" ky="0" algn="bl" rotWithShape="0" blurRad="101600" dist="38100" dir="8100000">
+              <a:srgbClr val="000000">
+                <a:alpha val="12000"/>
+              </a:srgbClr>
+            </a:outerShdw>
+          </a:effectLst>
+        </p:spPr>
+      </p:sp>
+      <p:sp>
+        <p:nvSpPr>
+          <p:cNvPr id="23" name="Text 21"/>
+          <p:cNvSpPr/>
+          <p:nvPr/>
+        </p:nvSpPr>
+        <p:spPr>
+          <a:xfrm>
+            <a:off x="6519672" y="2258568"/>
+            <a:ext cx="1828800" cy="292608"/>
+          </a:xfrm>
+          <a:prstGeom prst="rect">
+            <a:avLst/>
+          </a:prstGeom>
+          <a:noFill/>
+          <a:ln/>
+        </p:spPr>
+        <p:txBody>
+          <a:bodyPr wrap="square" lIns="0" tIns="0" rIns="0" bIns="0" rtlCol="0" anchor="ctr"/>
+          <a:lstStyle/>
+          <a:p>
+            <a:pPr algn="ctr" indent="0" marL="0">
+              <a:buNone/>
+            </a:pPr>
+            <a:r>
+              <a:rPr lang="en-US" sz="1300" b="1" dirty="0">
+                <a:solidFill>
+                  <a:srgbClr val="9D174D"/>
+                </a:solidFill>
+                <a:latin typeface="Trebuchet MS" pitchFamily="34" charset="0"/>
+                <a:ea typeface="Trebuchet MS" pitchFamily="34" charset="-122"/>
+                <a:cs typeface="Trebuchet MS" pitchFamily="34" charset="-120"/>
+              </a:rPr>
+              <a:t>y</a:t>
+            </a:r>
+            <a:endParaRPr lang="en-US" sz="1300" dirty="0"/>
+          </a:p>
+        </p:txBody>
+      </p:sp>
+      <p:sp>
+        <p:nvSpPr>
+          <p:cNvPr id="24" name="Text 22"/>
+          <p:cNvSpPr/>
+          <p:nvPr/>
+        </p:nvSpPr>
+        <p:spPr>
+          <a:xfrm>
+            <a:off x="6519672" y="2569464"/>
+            <a:ext cx="1828800" cy="201168"/>
+          </a:xfrm>
+          <a:prstGeom prst="rect">
+            <a:avLst/>
+          </a:prstGeom>
+          <a:noFill/>
+          <a:ln/>
+        </p:spPr>
+        <p:txBody>
+          <a:bodyPr wrap="square" lIns="0" tIns="0" rIns="0" bIns="0" rtlCol="0" anchor="t"/>
+          <a:lstStyle/>
+          <a:p>
+            <a:pPr algn="ctr" indent="0" marL="0">
+              <a:buNone/>
+            </a:pPr>
+            <a:r>
+              <a:rPr lang="en-US" sz="850" dirty="0">
+                <a:solidFill>
+                  <a:srgbClr val="475569"/>
+                </a:solidFill>
+                <a:latin typeface="Calibri" pitchFamily="34" charset="0"/>
+                <a:ea typeface="Calibri" pitchFamily="34" charset="-122"/>
+                <a:cs typeface="Calibri" pitchFamily="34" charset="-120"/>
+              </a:rPr>
+              <a:t>forms a noun</a:t>
+            </a:r>
+            <a:endParaRPr lang="en-US" sz="850" dirty="0"/>
+          </a:p>
+        </p:txBody>
+      </p:sp>
+      <p:sp>
+        <p:nvSpPr>
+          <p:cNvPr id="25" name="Shape 23"/>
           <p:cNvSpPr/>
           <p:nvPr/>
         </p:nvSpPr>
@@ -21943,7 +22353,7 @@
       </p:sp>
       <p:sp>
         <p:nvSpPr>
-          <p:cNvPr id="23" name="Text 21"/>
+          <p:cNvPr id="26" name="Text 24"/>
           <p:cNvSpPr/>
           <p:nvPr/>
         </p:nvSpPr>
@@ -21982,7 +22392,7 @@
       </p:sp>
       <p:sp>
         <p:nvSpPr>
-          <p:cNvPr id="24" name="Shape 22"/>
+          <p:cNvPr id="27" name="Shape 25"/>
           <p:cNvSpPr/>
           <p:nvPr/>
         </p:nvSpPr>
@@ -22009,14 +22419,14 @@
       </p:sp>
       <p:sp>
         <p:nvSpPr>
-          <p:cNvPr id="25" name="Shape 23"/>
-          <p:cNvSpPr/>
-          <p:nvPr/>
-        </p:nvSpPr>
-        <p:spPr>
-          <a:xfrm>
-            <a:off x="2313432" y="3364992"/>
-            <a:ext cx="1645920" cy="475488"/>
+          <p:cNvPr id="28" name="Shape 26"/>
+          <p:cNvSpPr/>
+          <p:nvPr/>
+        </p:nvSpPr>
+        <p:spPr>
+          <a:xfrm>
+            <a:off x="1975104" y="3364992"/>
+            <a:ext cx="1554480" cy="475488"/>
           </a:xfrm>
           <a:prstGeom prst="rect">
             <a:avLst>
@@ -22036,14 +22446,14 @@
       </p:sp>
       <p:sp>
         <p:nvSpPr>
-          <p:cNvPr id="26" name="Text 24"/>
-          <p:cNvSpPr/>
-          <p:nvPr/>
-        </p:nvSpPr>
-        <p:spPr>
-          <a:xfrm>
-            <a:off x="2313432" y="3364992"/>
-            <a:ext cx="1645920" cy="475488"/>
+          <p:cNvPr id="29" name="Text 27"/>
+          <p:cNvSpPr/>
+          <p:nvPr/>
+        </p:nvSpPr>
+        <p:spPr>
+          <a:xfrm>
+            <a:off x="1975104" y="3364992"/>
+            <a:ext cx="1554480" cy="475488"/>
           </a:xfrm>
           <a:prstGeom prst="rect">
             <a:avLst/>
@@ -22075,14 +22485,14 @@
       </p:sp>
       <p:sp>
         <p:nvSpPr>
-          <p:cNvPr id="27" name="Text 25"/>
-          <p:cNvSpPr/>
-          <p:nvPr/>
-        </p:nvSpPr>
-        <p:spPr>
-          <a:xfrm>
-            <a:off x="3959352" y="3364992"/>
-            <a:ext cx="411480" cy="475488"/>
+          <p:cNvPr id="30" name="Text 28"/>
+          <p:cNvSpPr/>
+          <p:nvPr/>
+        </p:nvSpPr>
+        <p:spPr>
+          <a:xfrm>
+            <a:off x="3529584" y="3364992"/>
+            <a:ext cx="73152" cy="475488"/>
           </a:xfrm>
           <a:prstGeom prst="rect">
             <a:avLst/>
@@ -22114,14 +22524,14 @@
       </p:sp>
       <p:sp>
         <p:nvSpPr>
-          <p:cNvPr id="28" name="Shape 26"/>
-          <p:cNvSpPr/>
-          <p:nvPr/>
-        </p:nvSpPr>
-        <p:spPr>
-          <a:xfrm>
-            <a:off x="4370832" y="3364992"/>
-            <a:ext cx="1645920" cy="475488"/>
+          <p:cNvPr id="31" name="Shape 29"/>
+          <p:cNvSpPr/>
+          <p:nvPr/>
+        </p:nvSpPr>
+        <p:spPr>
+          <a:xfrm>
+            <a:off x="3602736" y="3364992"/>
+            <a:ext cx="1554480" cy="475488"/>
           </a:xfrm>
           <a:prstGeom prst="rect">
             <a:avLst>
@@ -22141,14 +22551,14 @@
       </p:sp>
       <p:sp>
         <p:nvSpPr>
-          <p:cNvPr id="29" name="Text 27"/>
-          <p:cNvSpPr/>
-          <p:nvPr/>
-        </p:nvSpPr>
-        <p:spPr>
-          <a:xfrm>
-            <a:off x="4370832" y="3364992"/>
-            <a:ext cx="1645920" cy="475488"/>
+          <p:cNvPr id="32" name="Text 30"/>
+          <p:cNvSpPr/>
+          <p:nvPr/>
+        </p:nvSpPr>
+        <p:spPr>
+          <a:xfrm>
+            <a:off x="3602736" y="3364992"/>
+            <a:ext cx="1554480" cy="475488"/>
           </a:xfrm>
           <a:prstGeom prst="rect">
             <a:avLst/>
@@ -22172,7 +22582,7 @@
                 <a:ea typeface="Trebuchet MS" pitchFamily="34" charset="-122"/>
                 <a:cs typeface="Trebuchet MS" pitchFamily="34" charset="-120"/>
               </a:rPr>
-              <a:t>re</a:t>
+              <a:t>cov</a:t>
             </a:r>
             <a:endParaRPr lang="en-US" sz="1400" dirty="0"/>
           </a:p>
@@ -22180,14 +22590,14 @@
       </p:sp>
       <p:sp>
         <p:nvSpPr>
-          <p:cNvPr id="30" name="Text 28"/>
-          <p:cNvSpPr/>
-          <p:nvPr/>
-        </p:nvSpPr>
-        <p:spPr>
-          <a:xfrm>
-            <a:off x="6016752" y="3364992"/>
-            <a:ext cx="411480" cy="475488"/>
+          <p:cNvPr id="33" name="Text 31"/>
+          <p:cNvSpPr/>
+          <p:nvPr/>
+        </p:nvSpPr>
+        <p:spPr>
+          <a:xfrm>
+            <a:off x="5157216" y="3364992"/>
+            <a:ext cx="73152" cy="475488"/>
           </a:xfrm>
           <a:prstGeom prst="rect">
             <a:avLst/>
@@ -22219,14 +22629,14 @@
       </p:sp>
       <p:sp>
         <p:nvSpPr>
-          <p:cNvPr id="31" name="Shape 29"/>
-          <p:cNvSpPr/>
-          <p:nvPr/>
-        </p:nvSpPr>
-        <p:spPr>
-          <a:xfrm>
-            <a:off x="6428232" y="3364992"/>
-            <a:ext cx="1645920" cy="475488"/>
+          <p:cNvPr id="34" name="Shape 32"/>
+          <p:cNvSpPr/>
+          <p:nvPr/>
+        </p:nvSpPr>
+        <p:spPr>
+          <a:xfrm>
+            <a:off x="5230368" y="3364992"/>
+            <a:ext cx="1554480" cy="475488"/>
           </a:xfrm>
           <a:prstGeom prst="rect">
             <a:avLst>
@@ -22246,14 +22656,14 @@
       </p:sp>
       <p:sp>
         <p:nvSpPr>
-          <p:cNvPr id="32" name="Text 30"/>
-          <p:cNvSpPr/>
-          <p:nvPr/>
-        </p:nvSpPr>
-        <p:spPr>
-          <a:xfrm>
-            <a:off x="6428232" y="3364992"/>
-            <a:ext cx="1645920" cy="475488"/>
+          <p:cNvPr id="35" name="Text 33"/>
+          <p:cNvSpPr/>
+          <p:nvPr/>
+        </p:nvSpPr>
+        <p:spPr>
+          <a:xfrm>
+            <a:off x="5230368" y="3364992"/>
+            <a:ext cx="1554480" cy="475488"/>
           </a:xfrm>
           <a:prstGeom prst="rect">
             <a:avLst/>
@@ -22277,7 +22687,7 @@
                 <a:ea typeface="Trebuchet MS" pitchFamily="34" charset="-122"/>
                 <a:cs typeface="Trebuchet MS" pitchFamily="34" charset="-120"/>
               </a:rPr>
-              <a:t>spect</a:t>
+              <a:t>er</a:t>
             </a:r>
             <a:endParaRPr lang="en-US" sz="1400" dirty="0"/>
           </a:p>
@@ -22285,7 +22695,112 @@
       </p:sp>
       <p:sp>
         <p:nvSpPr>
-          <p:cNvPr id="33" name="Shape 31"/>
+          <p:cNvPr id="36" name="Text 34"/>
+          <p:cNvSpPr/>
+          <p:nvPr/>
+        </p:nvSpPr>
+        <p:spPr>
+          <a:xfrm>
+            <a:off x="6784848" y="3364992"/>
+            <a:ext cx="73152" cy="475488"/>
+          </a:xfrm>
+          <a:prstGeom prst="rect">
+            <a:avLst/>
+          </a:prstGeom>
+          <a:noFill/>
+          <a:ln/>
+        </p:spPr>
+        <p:txBody>
+          <a:bodyPr wrap="square" lIns="0" tIns="0" rIns="0" bIns="0" rtlCol="0" anchor="ctr"/>
+          <a:lstStyle/>
+          <a:p>
+            <a:pPr algn="ctr" indent="0" marL="0">
+              <a:buNone/>
+            </a:pPr>
+            <a:r>
+              <a:rPr lang="en-US" sz="1600" b="1" dirty="0">
+                <a:solidFill>
+                  <a:srgbClr val="0D9488"/>
+                </a:solidFill>
+                <a:latin typeface="Trebuchet MS" pitchFamily="34" charset="0"/>
+                <a:ea typeface="Trebuchet MS" pitchFamily="34" charset="-122"/>
+                <a:cs typeface="Trebuchet MS" pitchFamily="34" charset="-120"/>
+              </a:rPr>
+              <a:t>·</a:t>
+            </a:r>
+            <a:endParaRPr lang="en-US" sz="1600" dirty="0"/>
+          </a:p>
+        </p:txBody>
+      </p:sp>
+      <p:sp>
+        <p:nvSpPr>
+          <p:cNvPr id="37" name="Shape 35"/>
+          <p:cNvSpPr/>
+          <p:nvPr/>
+        </p:nvSpPr>
+        <p:spPr>
+          <a:xfrm>
+            <a:off x="6858000" y="3364992"/>
+            <a:ext cx="1554480" cy="475488"/>
+          </a:xfrm>
+          <a:prstGeom prst="rect">
+            <a:avLst>
+              <a:gd name="adj" fmla="val 9615"/>
+            </a:avLst>
+          </a:prstGeom>
+          <a:solidFill>
+            <a:srgbClr val="FFFFFF"/>
+          </a:solidFill>
+          <a:ln w="12700">
+            <a:solidFill>
+              <a:srgbClr val="0D9488"/>
+            </a:solidFill>
+            <a:prstDash val="solid"/>
+          </a:ln>
+        </p:spPr>
+      </p:sp>
+      <p:sp>
+        <p:nvSpPr>
+          <p:cNvPr id="38" name="Text 36"/>
+          <p:cNvSpPr/>
+          <p:nvPr/>
+        </p:nvSpPr>
+        <p:spPr>
+          <a:xfrm>
+            <a:off x="6858000" y="3364992"/>
+            <a:ext cx="1554480" cy="475488"/>
+          </a:xfrm>
+          <a:prstGeom prst="rect">
+            <a:avLst/>
+          </a:prstGeom>
+          <a:noFill/>
+          <a:ln/>
+        </p:spPr>
+        <p:txBody>
+          <a:bodyPr wrap="square" lIns="0" tIns="0" rIns="0" bIns="0" rtlCol="0" anchor="ctr"/>
+          <a:lstStyle/>
+          <a:p>
+            <a:pPr algn="ctr" indent="0" marL="0">
+              <a:buNone/>
+            </a:pPr>
+            <a:r>
+              <a:rPr lang="en-US" sz="1400" b="1" dirty="0">
+                <a:solidFill>
+                  <a:srgbClr val="0D9488"/>
+                </a:solidFill>
+                <a:latin typeface="Trebuchet MS" pitchFamily="34" charset="0"/>
+                <a:ea typeface="Trebuchet MS" pitchFamily="34" charset="-122"/>
+                <a:cs typeface="Trebuchet MS" pitchFamily="34" charset="-120"/>
+              </a:rPr>
+              <a:t>y</a:t>
+            </a:r>
+            <a:endParaRPr lang="en-US" sz="1400" dirty="0"/>
+          </a:p>
+        </p:txBody>
+      </p:sp>
+      <p:sp>
+        <p:nvSpPr>
+          <p:cNvPr id="39" name="Shape 37"/>
           <p:cNvSpPr/>
           <p:nvPr/>
         </p:nvSpPr>
@@ -22312,7 +22827,7 @@
       </p:sp>
       <p:sp>
         <p:nvSpPr>
-          <p:cNvPr id="34" name="Text 32"/>
+          <p:cNvPr id="40" name="Text 38"/>
           <p:cNvSpPr/>
           <p:nvPr/>
         </p:nvSpPr>
@@ -22351,18 +22866,18 @@
       </p:sp>
       <p:sp>
         <p:nvSpPr>
-          <p:cNvPr id="35" name="Shape 33"/>
+          <p:cNvPr id="41" name="Shape 39"/>
           <p:cNvSpPr/>
           <p:nvPr/>
         </p:nvSpPr>
         <p:spPr>
           <a:xfrm>
             <a:off x="1874520" y="4096512"/>
-            <a:ext cx="6903720" cy="804672"/>
+            <a:ext cx="6903720" cy="658368"/>
           </a:xfrm>
           <a:prstGeom prst="rect">
             <a:avLst>
-              <a:gd name="adj" fmla="val 6818"/>
+              <a:gd name="adj" fmla="val 8333"/>
             </a:avLst>
           </a:prstGeom>
           <a:solidFill>
@@ -22378,18 +22893,18 @@
       </p:sp>
       <p:sp>
         <p:nvSpPr>
-          <p:cNvPr id="36" name="Shape 34"/>
-          <p:cNvSpPr/>
-          <p:nvPr/>
-        </p:nvSpPr>
-        <p:spPr>
-          <a:xfrm>
-            <a:off x="1951330" y="4169664"/>
-            <a:ext cx="676656" cy="384048"/>
+          <p:cNvPr id="42" name="Shape 40"/>
+          <p:cNvSpPr/>
+          <p:nvPr/>
+        </p:nvSpPr>
+        <p:spPr>
+          <a:xfrm>
+            <a:off x="2023872" y="4169664"/>
+            <a:ext cx="685800" cy="475488"/>
           </a:xfrm>
           <a:prstGeom prst="rect">
             <a:avLst>
-              <a:gd name="adj" fmla="val 9524"/>
+              <a:gd name="adj" fmla="val 7692"/>
             </a:avLst>
           </a:prstGeom>
           <a:solidFill>
@@ -22405,14 +22920,14 @@
       </p:sp>
       <p:sp>
         <p:nvSpPr>
-          <p:cNvPr id="37" name="Text 35"/>
-          <p:cNvSpPr/>
-          <p:nvPr/>
-        </p:nvSpPr>
-        <p:spPr>
-          <a:xfrm>
-            <a:off x="1951330" y="4169664"/>
-            <a:ext cx="676656" cy="384048"/>
+          <p:cNvPr id="43" name="Text 41"/>
+          <p:cNvSpPr/>
+          <p:nvPr/>
+        </p:nvSpPr>
+        <p:spPr>
+          <a:xfrm>
+            <a:off x="2023872" y="4169664"/>
+            <a:ext cx="685800" cy="475488"/>
           </a:xfrm>
           <a:prstGeom prst="rect">
             <a:avLst/>
@@ -22444,18 +22959,18 @@
       </p:sp>
       <p:sp>
         <p:nvSpPr>
-          <p:cNvPr id="38" name="Shape 36"/>
-          <p:cNvSpPr/>
-          <p:nvPr/>
-        </p:nvSpPr>
-        <p:spPr>
-          <a:xfrm>
-            <a:off x="2677363" y="4169664"/>
-            <a:ext cx="676656" cy="384048"/>
+          <p:cNvPr id="44" name="Shape 42"/>
+          <p:cNvSpPr/>
+          <p:nvPr/>
+        </p:nvSpPr>
+        <p:spPr>
+          <a:xfrm>
+            <a:off x="2831592" y="4169664"/>
+            <a:ext cx="685800" cy="475488"/>
           </a:xfrm>
           <a:prstGeom prst="rect">
             <a:avLst>
-              <a:gd name="adj" fmla="val 9524"/>
+              <a:gd name="adj" fmla="val 7692"/>
             </a:avLst>
           </a:prstGeom>
           <a:solidFill>
@@ -22471,14 +22986,14 @@
       </p:sp>
       <p:sp>
         <p:nvSpPr>
-          <p:cNvPr id="39" name="Text 37"/>
-          <p:cNvSpPr/>
-          <p:nvPr/>
-        </p:nvSpPr>
-        <p:spPr>
-          <a:xfrm>
-            <a:off x="2677363" y="4169664"/>
-            <a:ext cx="676656" cy="384048"/>
+          <p:cNvPr id="45" name="Text 43"/>
+          <p:cNvSpPr/>
+          <p:nvPr/>
+        </p:nvSpPr>
+        <p:spPr>
+          <a:xfrm>
+            <a:off x="2831592" y="4169664"/>
+            <a:ext cx="685800" cy="475488"/>
           </a:xfrm>
           <a:prstGeom prst="rect">
             <a:avLst/>
@@ -22510,18 +23025,18 @@
       </p:sp>
       <p:sp>
         <p:nvSpPr>
-          <p:cNvPr id="40" name="Shape 38"/>
-          <p:cNvSpPr/>
-          <p:nvPr/>
-        </p:nvSpPr>
-        <p:spPr>
-          <a:xfrm>
-            <a:off x="3403397" y="4169664"/>
-            <a:ext cx="676656" cy="384048"/>
+          <p:cNvPr id="46" name="Shape 44"/>
+          <p:cNvSpPr/>
+          <p:nvPr/>
+        </p:nvSpPr>
+        <p:spPr>
+          <a:xfrm>
+            <a:off x="3639312" y="4169664"/>
+            <a:ext cx="685800" cy="475488"/>
           </a:xfrm>
           <a:prstGeom prst="rect">
             <a:avLst>
-              <a:gd name="adj" fmla="val 9524"/>
+              <a:gd name="adj" fmla="val 7692"/>
             </a:avLst>
           </a:prstGeom>
           <a:solidFill>
@@ -22537,14 +23052,14 @@
       </p:sp>
       <p:sp>
         <p:nvSpPr>
-          <p:cNvPr id="41" name="Text 39"/>
-          <p:cNvSpPr/>
-          <p:nvPr/>
-        </p:nvSpPr>
-        <p:spPr>
-          <a:xfrm>
-            <a:off x="3403397" y="4169664"/>
-            <a:ext cx="676656" cy="384048"/>
+          <p:cNvPr id="47" name="Text 45"/>
+          <p:cNvSpPr/>
+          <p:nvPr/>
+        </p:nvSpPr>
+        <p:spPr>
+          <a:xfrm>
+            <a:off x="3639312" y="4169664"/>
+            <a:ext cx="685800" cy="475488"/>
           </a:xfrm>
           <a:prstGeom prst="rect">
             <a:avLst/>
@@ -22576,18 +23091,18 @@
       </p:sp>
       <p:sp>
         <p:nvSpPr>
-          <p:cNvPr id="42" name="Shape 40"/>
-          <p:cNvSpPr/>
-          <p:nvPr/>
-        </p:nvSpPr>
-        <p:spPr>
-          <a:xfrm>
-            <a:off x="4129430" y="4169664"/>
-            <a:ext cx="676656" cy="384048"/>
+          <p:cNvPr id="48" name="Shape 46"/>
+          <p:cNvSpPr/>
+          <p:nvPr/>
+        </p:nvSpPr>
+        <p:spPr>
+          <a:xfrm>
+            <a:off x="4447032" y="4169664"/>
+            <a:ext cx="685800" cy="475488"/>
           </a:xfrm>
           <a:prstGeom prst="rect">
             <a:avLst>
-              <a:gd name="adj" fmla="val 9524"/>
+              <a:gd name="adj" fmla="val 7692"/>
             </a:avLst>
           </a:prstGeom>
           <a:solidFill>
@@ -22603,14 +23118,14 @@
       </p:sp>
       <p:sp>
         <p:nvSpPr>
-          <p:cNvPr id="43" name="Text 41"/>
-          <p:cNvSpPr/>
-          <p:nvPr/>
-        </p:nvSpPr>
-        <p:spPr>
-          <a:xfrm>
-            <a:off x="4129430" y="4169664"/>
-            <a:ext cx="676656" cy="384048"/>
+          <p:cNvPr id="49" name="Text 47"/>
+          <p:cNvSpPr/>
+          <p:nvPr/>
+        </p:nvSpPr>
+        <p:spPr>
+          <a:xfrm>
+            <a:off x="4447032" y="4169664"/>
+            <a:ext cx="685800" cy="475488"/>
           </a:xfrm>
           <a:prstGeom prst="rect">
             <a:avLst/>
@@ -22634,7 +23149,7 @@
                 <a:ea typeface="Trebuchet MS" pitchFamily="34" charset="-122"/>
                 <a:cs typeface="Trebuchet MS" pitchFamily="34" charset="-120"/>
               </a:rPr>
-              <a:t>r</a:t>
+              <a:t>c</a:t>
             </a:r>
             <a:endParaRPr lang="en-US" sz="900" dirty="0"/>
           </a:p>
@@ -22642,18 +23157,18 @@
       </p:sp>
       <p:sp>
         <p:nvSpPr>
-          <p:cNvPr id="44" name="Shape 42"/>
-          <p:cNvSpPr/>
-          <p:nvPr/>
-        </p:nvSpPr>
-        <p:spPr>
-          <a:xfrm>
-            <a:off x="4855464" y="4169664"/>
-            <a:ext cx="676656" cy="384048"/>
+          <p:cNvPr id="50" name="Shape 48"/>
+          <p:cNvSpPr/>
+          <p:nvPr/>
+        </p:nvSpPr>
+        <p:spPr>
+          <a:xfrm>
+            <a:off x="5254752" y="4169664"/>
+            <a:ext cx="685800" cy="475488"/>
           </a:xfrm>
           <a:prstGeom prst="rect">
             <a:avLst>
-              <a:gd name="adj" fmla="val 9524"/>
+              <a:gd name="adj" fmla="val 7692"/>
             </a:avLst>
           </a:prstGeom>
           <a:solidFill>
@@ -22669,14 +23184,14 @@
       </p:sp>
       <p:sp>
         <p:nvSpPr>
-          <p:cNvPr id="45" name="Text 43"/>
-          <p:cNvSpPr/>
-          <p:nvPr/>
-        </p:nvSpPr>
-        <p:spPr>
-          <a:xfrm>
-            <a:off x="4855464" y="4169664"/>
-            <a:ext cx="676656" cy="384048"/>
+          <p:cNvPr id="51" name="Text 49"/>
+          <p:cNvSpPr/>
+          <p:nvPr/>
+        </p:nvSpPr>
+        <p:spPr>
+          <a:xfrm>
+            <a:off x="5254752" y="4169664"/>
+            <a:ext cx="685800" cy="475488"/>
           </a:xfrm>
           <a:prstGeom prst="rect">
             <a:avLst/>
@@ -22700,7 +23215,7 @@
                 <a:ea typeface="Trebuchet MS" pitchFamily="34" charset="-122"/>
                 <a:cs typeface="Trebuchet MS" pitchFamily="34" charset="-120"/>
               </a:rPr>
-              <a:t>e</a:t>
+              <a:t>o</a:t>
             </a:r>
             <a:endParaRPr lang="en-US" sz="900" dirty="0"/>
           </a:p>
@@ -22708,18 +23223,18 @@
       </p:sp>
       <p:sp>
         <p:nvSpPr>
-          <p:cNvPr id="46" name="Shape 44"/>
-          <p:cNvSpPr/>
-          <p:nvPr/>
-        </p:nvSpPr>
-        <p:spPr>
-          <a:xfrm>
-            <a:off x="5581498" y="4169664"/>
-            <a:ext cx="676656" cy="384048"/>
+          <p:cNvPr id="52" name="Shape 50"/>
+          <p:cNvSpPr/>
+          <p:nvPr/>
+        </p:nvSpPr>
+        <p:spPr>
+          <a:xfrm>
+            <a:off x="6062472" y="4169664"/>
+            <a:ext cx="685800" cy="475488"/>
           </a:xfrm>
           <a:prstGeom prst="rect">
             <a:avLst>
-              <a:gd name="adj" fmla="val 9524"/>
+              <a:gd name="adj" fmla="val 7692"/>
             </a:avLst>
           </a:prstGeom>
           <a:solidFill>
@@ -22735,14 +23250,14 @@
       </p:sp>
       <p:sp>
         <p:nvSpPr>
-          <p:cNvPr id="47" name="Text 45"/>
-          <p:cNvSpPr/>
-          <p:nvPr/>
-        </p:nvSpPr>
-        <p:spPr>
-          <a:xfrm>
-            <a:off x="5581498" y="4169664"/>
-            <a:ext cx="676656" cy="384048"/>
+          <p:cNvPr id="53" name="Text 51"/>
+          <p:cNvSpPr/>
+          <p:nvPr/>
+        </p:nvSpPr>
+        <p:spPr>
+          <a:xfrm>
+            <a:off x="6062472" y="4169664"/>
+            <a:ext cx="685800" cy="475488"/>
           </a:xfrm>
           <a:prstGeom prst="rect">
             <a:avLst/>
@@ -22766,7 +23281,7 @@
                 <a:ea typeface="Trebuchet MS" pitchFamily="34" charset="-122"/>
                 <a:cs typeface="Trebuchet MS" pitchFamily="34" charset="-120"/>
               </a:rPr>
-              <a:t>s</a:t>
+              <a:t>v</a:t>
             </a:r>
             <a:endParaRPr lang="en-US" sz="900" dirty="0"/>
           </a:p>
@@ -22774,18 +23289,18 @@
       </p:sp>
       <p:sp>
         <p:nvSpPr>
-          <p:cNvPr id="48" name="Shape 46"/>
-          <p:cNvSpPr/>
-          <p:nvPr/>
-        </p:nvSpPr>
-        <p:spPr>
-          <a:xfrm>
-            <a:off x="6307531" y="4169664"/>
-            <a:ext cx="676656" cy="384048"/>
+          <p:cNvPr id="54" name="Shape 52"/>
+          <p:cNvSpPr/>
+          <p:nvPr/>
+        </p:nvSpPr>
+        <p:spPr>
+          <a:xfrm>
+            <a:off x="6870192" y="4169664"/>
+            <a:ext cx="685800" cy="475488"/>
           </a:xfrm>
           <a:prstGeom prst="rect">
             <a:avLst>
-              <a:gd name="adj" fmla="val 9524"/>
+              <a:gd name="adj" fmla="val 7692"/>
             </a:avLst>
           </a:prstGeom>
           <a:solidFill>
@@ -22801,14 +23316,14 @@
       </p:sp>
       <p:sp>
         <p:nvSpPr>
-          <p:cNvPr id="49" name="Text 47"/>
-          <p:cNvSpPr/>
-          <p:nvPr/>
-        </p:nvSpPr>
-        <p:spPr>
-          <a:xfrm>
-            <a:off x="6307531" y="4169664"/>
-            <a:ext cx="676656" cy="384048"/>
+          <p:cNvPr id="55" name="Text 53"/>
+          <p:cNvSpPr/>
+          <p:nvPr/>
+        </p:nvSpPr>
+        <p:spPr>
+          <a:xfrm>
+            <a:off x="6870192" y="4169664"/>
+            <a:ext cx="685800" cy="475488"/>
           </a:xfrm>
           <a:prstGeom prst="rect">
             <a:avLst/>
@@ -22832,7 +23347,7 @@
                 <a:ea typeface="Trebuchet MS" pitchFamily="34" charset="-122"/>
                 <a:cs typeface="Trebuchet MS" pitchFamily="34" charset="-120"/>
               </a:rPr>
-              <a:t>p</a:t>
+              <a:t>er</a:t>
             </a:r>
             <a:endParaRPr lang="en-US" sz="900" dirty="0"/>
           </a:p>
@@ -22840,18 +23355,18 @@
       </p:sp>
       <p:sp>
         <p:nvSpPr>
-          <p:cNvPr id="50" name="Shape 48"/>
-          <p:cNvSpPr/>
-          <p:nvPr/>
-        </p:nvSpPr>
-        <p:spPr>
-          <a:xfrm>
-            <a:off x="7033565" y="4169664"/>
-            <a:ext cx="676656" cy="384048"/>
+          <p:cNvPr id="56" name="Shape 54"/>
+          <p:cNvSpPr/>
+          <p:nvPr/>
+        </p:nvSpPr>
+        <p:spPr>
+          <a:xfrm>
+            <a:off x="7677912" y="4169664"/>
+            <a:ext cx="685800" cy="475488"/>
           </a:xfrm>
           <a:prstGeom prst="rect">
             <a:avLst>
-              <a:gd name="adj" fmla="val 9524"/>
+              <a:gd name="adj" fmla="val 7692"/>
             </a:avLst>
           </a:prstGeom>
           <a:solidFill>
@@ -22867,14 +23382,14 @@
       </p:sp>
       <p:sp>
         <p:nvSpPr>
-          <p:cNvPr id="51" name="Text 49"/>
-          <p:cNvSpPr/>
-          <p:nvPr/>
-        </p:nvSpPr>
-        <p:spPr>
-          <a:xfrm>
-            <a:off x="7033565" y="4169664"/>
-            <a:ext cx="676656" cy="384048"/>
+          <p:cNvPr id="57" name="Text 55"/>
+          <p:cNvSpPr/>
+          <p:nvPr/>
+        </p:nvSpPr>
+        <p:spPr>
+          <a:xfrm>
+            <a:off x="7677912" y="4169664"/>
+            <a:ext cx="685800" cy="475488"/>
           </a:xfrm>
           <a:prstGeom prst="rect">
             <a:avLst/>
@@ -22898,114 +23413,9 @@
                 <a:ea typeface="Trebuchet MS" pitchFamily="34" charset="-122"/>
                 <a:cs typeface="Trebuchet MS" pitchFamily="34" charset="-120"/>
               </a:rPr>
-              <a:t>e</a:t>
+              <a:t>y</a:t>
             </a:r>
             <a:endParaRPr lang="en-US" sz="900" dirty="0"/>
-          </a:p>
-        </p:txBody>
-      </p:sp>
-      <p:sp>
-        <p:nvSpPr>
-          <p:cNvPr id="52" name="Shape 50"/>
-          <p:cNvSpPr/>
-          <p:nvPr/>
-        </p:nvSpPr>
-        <p:spPr>
-          <a:xfrm>
-            <a:off x="7759598" y="4169664"/>
-            <a:ext cx="676656" cy="384048"/>
-          </a:xfrm>
-          <a:prstGeom prst="rect">
-            <a:avLst>
-              <a:gd name="adj" fmla="val 9524"/>
-            </a:avLst>
-          </a:prstGeom>
-          <a:solidFill>
-            <a:srgbClr val="FFFFFF"/>
-          </a:solidFill>
-          <a:ln w="12700">
-            <a:solidFill>
-              <a:srgbClr val="DB2777"/>
-            </a:solidFill>
-            <a:prstDash val="solid"/>
-          </a:ln>
-        </p:spPr>
-      </p:sp>
-      <p:sp>
-        <p:nvSpPr>
-          <p:cNvPr id="53" name="Text 51"/>
-          <p:cNvSpPr/>
-          <p:nvPr/>
-        </p:nvSpPr>
-        <p:spPr>
-          <a:xfrm>
-            <a:off x="7759598" y="4169664"/>
-            <a:ext cx="676656" cy="384048"/>
-          </a:xfrm>
-          <a:prstGeom prst="rect">
-            <a:avLst/>
-          </a:prstGeom>
-          <a:noFill/>
-          <a:ln/>
-        </p:spPr>
-        <p:txBody>
-          <a:bodyPr wrap="square" lIns="0" tIns="0" rIns="0" bIns="0" rtlCol="0" anchor="ctr"/>
-          <a:lstStyle/>
-          <a:p>
-            <a:pPr algn="ctr" indent="0" marL="0">
-              <a:buNone/>
-            </a:pPr>
-            <a:r>
-              <a:rPr lang="en-US" sz="900" b="1" dirty="0">
-                <a:solidFill>
-                  <a:srgbClr val="9D174D"/>
-                </a:solidFill>
-                <a:latin typeface="Trebuchet MS" pitchFamily="34" charset="0"/>
-                <a:ea typeface="Trebuchet MS" pitchFamily="34" charset="-122"/>
-                <a:cs typeface="Trebuchet MS" pitchFamily="34" charset="-120"/>
-              </a:rPr>
-              <a:t>ct</a:t>
-            </a:r>
-            <a:endParaRPr lang="en-US" sz="900" dirty="0"/>
-          </a:p>
-        </p:txBody>
-      </p:sp>
-      <p:sp>
-        <p:nvSpPr>
-          <p:cNvPr id="54" name="Text 52"/>
-          <p:cNvSpPr/>
-          <p:nvPr/>
-        </p:nvSpPr>
-        <p:spPr>
-          <a:xfrm>
-            <a:off x="7759598" y="4572000"/>
-            <a:ext cx="676656" cy="219456"/>
-          </a:xfrm>
-          <a:prstGeom prst="rect">
-            <a:avLst/>
-          </a:prstGeom>
-          <a:noFill/>
-          <a:ln/>
-        </p:spPr>
-        <p:txBody>
-          <a:bodyPr wrap="square" lIns="0" tIns="0" rIns="0" bIns="0" rtlCol="0" anchor="t"/>
-          <a:lstStyle/>
-          <a:p>
-            <a:pPr algn="ctr" indent="0" marL="0">
-              <a:buNone/>
-            </a:pPr>
-            <a:r>
-              <a:rPr lang="en-US" sz="750" i="1" dirty="0">
-                <a:solidFill>
-                  <a:srgbClr val="94A3B8"/>
-                </a:solidFill>
-                <a:latin typeface="Calibri" pitchFamily="34" charset="0"/>
-                <a:ea typeface="Calibri" pitchFamily="34" charset="-122"/>
-                <a:cs typeface="Calibri" pitchFamily="34" charset="-120"/>
-              </a:rPr>
-              <a:t>/kt/</a:t>
-            </a:r>
-            <a:endParaRPr lang="en-US" sz="750" dirty="0"/>
           </a:p>
         </p:txBody>
       </p:sp>
@@ -23434,7 +23844,7 @@
                 <a:ea typeface="Trebuchet MS" pitchFamily="34" charset="-122"/>
                 <a:cs typeface="Trebuchet MS" pitchFamily="34" charset="-120"/>
               </a:rPr>
-              <a:t>disagree</a:t>
+              <a:t>dishonest</a:t>
             </a:r>
             <a:endParaRPr lang="en-US" sz="2800" dirty="0"/>
           </a:p>
@@ -24261,7 +24671,7 @@
                 <a:ea typeface="Trebuchet MS" pitchFamily="34" charset="-122"/>
                 <a:cs typeface="Trebuchet MS" pitchFamily="34" charset="-120"/>
               </a:rPr>
-              <a:t>disagree</a:t>
+              <a:t>dishonest</a:t>
             </a:r>
             <a:endParaRPr lang="en-US" sz="2800" dirty="0"/>
           </a:p>
@@ -24512,7 +24922,7 @@
                 <a:ea typeface="Trebuchet MS" pitchFamily="34" charset="-122"/>
                 <a:cs typeface="Trebuchet MS" pitchFamily="34" charset="-120"/>
               </a:rPr>
-              <a:t>agree</a:t>
+              <a:t>honest</a:t>
             </a:r>
             <a:endParaRPr lang="en-US" sz="1300" dirty="0"/>
           </a:p>
@@ -24551,7 +24961,7 @@
                 <a:ea typeface="Calibri" pitchFamily="34" charset="-122"/>
                 <a:cs typeface="Calibri" pitchFamily="34" charset="-120"/>
               </a:rPr>
-              <a:t>to share the same opinion</a:t>
+              <a:t>truthful, fair</a:t>
             </a:r>
             <a:endParaRPr lang="en-US" sz="850" dirty="0"/>
           </a:p>
@@ -25965,7 +26375,7 @@
                 <a:ea typeface="Trebuchet MS" pitchFamily="34" charset="-122"/>
                 <a:cs typeface="Trebuchet MS" pitchFamily="34" charset="-120"/>
               </a:rPr>
-              <a:t>disagree</a:t>
+              <a:t>dishonest</a:t>
             </a:r>
             <a:endParaRPr lang="en-US" sz="2800" dirty="0"/>
           </a:p>
@@ -26216,7 +26626,7 @@
                 <a:ea typeface="Trebuchet MS" pitchFamily="34" charset="-122"/>
                 <a:cs typeface="Trebuchet MS" pitchFamily="34" charset="-120"/>
               </a:rPr>
-              <a:t>agree</a:t>
+              <a:t>honest</a:t>
             </a:r>
             <a:endParaRPr lang="en-US" sz="1300" dirty="0"/>
           </a:p>
@@ -26255,7 +26665,7 @@
                 <a:ea typeface="Calibri" pitchFamily="34" charset="-122"/>
                 <a:cs typeface="Calibri" pitchFamily="34" charset="-120"/>
               </a:rPr>
-              <a:t>to share the same opinion</a:t>
+              <a:t>truthful, fair</a:t>
             </a:r>
             <a:endParaRPr lang="en-US" sz="850" dirty="0"/>
           </a:p>
@@ -26519,7 +26929,7 @@
                 <a:ea typeface="Trebuchet MS" pitchFamily="34" charset="-122"/>
                 <a:cs typeface="Trebuchet MS" pitchFamily="34" charset="-120"/>
               </a:rPr>
-              <a:t>a</a:t>
+              <a:t>hon</a:t>
             </a:r>
             <a:endParaRPr lang="en-US" sz="1400" dirty="0"/>
           </a:p>
@@ -26624,7 +27034,7 @@
                 <a:ea typeface="Trebuchet MS" pitchFamily="34" charset="-122"/>
                 <a:cs typeface="Trebuchet MS" pitchFamily="34" charset="-120"/>
               </a:rPr>
-              <a:t>gree</a:t>
+              <a:t>est</a:t>
             </a:r>
             <a:endParaRPr lang="en-US" sz="1400" dirty="0"/>
           </a:p>
@@ -27187,7 +27597,7 @@
                 <a:ea typeface="Trebuchet MS" pitchFamily="34" charset="-122"/>
                 <a:cs typeface="Trebuchet MS" pitchFamily="34" charset="-120"/>
               </a:rPr>
-              <a:t>disagree</a:t>
+              <a:t>dishonest</a:t>
             </a:r>
             <a:endParaRPr lang="en-US" sz="2800" dirty="0"/>
           </a:p>
@@ -27438,7 +27848,7 @@
                 <a:ea typeface="Trebuchet MS" pitchFamily="34" charset="-122"/>
                 <a:cs typeface="Trebuchet MS" pitchFamily="34" charset="-120"/>
               </a:rPr>
-              <a:t>agree</a:t>
+              <a:t>honest</a:t>
             </a:r>
             <a:endParaRPr lang="en-US" sz="1300" dirty="0"/>
           </a:p>
@@ -27477,7 +27887,7 @@
                 <a:ea typeface="Calibri" pitchFamily="34" charset="-122"/>
                 <a:cs typeface="Calibri" pitchFamily="34" charset="-120"/>
               </a:rPr>
-              <a:t>to share the same opinion</a:t>
+              <a:t>truthful, fair</a:t>
             </a:r>
             <a:endParaRPr lang="en-US" sz="850" dirty="0"/>
           </a:p>
@@ -27741,7 +28151,7 @@
                 <a:ea typeface="Trebuchet MS" pitchFamily="34" charset="-122"/>
                 <a:cs typeface="Trebuchet MS" pitchFamily="34" charset="-120"/>
               </a:rPr>
-              <a:t>a</a:t>
+              <a:t>hon</a:t>
             </a:r>
             <a:endParaRPr lang="en-US" sz="1400" dirty="0"/>
           </a:p>
@@ -27846,7 +28256,7 @@
                 <a:ea typeface="Trebuchet MS" pitchFamily="34" charset="-122"/>
                 <a:cs typeface="Trebuchet MS" pitchFamily="34" charset="-120"/>
               </a:rPr>
-              <a:t>gree</a:t>
+              <a:t>est</a:t>
             </a:r>
             <a:endParaRPr lang="en-US" sz="1400" dirty="0"/>
           </a:p>
@@ -27953,8 +28363,8 @@
         </p:nvSpPr>
         <p:spPr>
           <a:xfrm>
-            <a:off x="2124837" y="4169664"/>
-            <a:ext cx="685800" cy="475488"/>
+            <a:off x="1951330" y="4169664"/>
+            <a:ext cx="676656" cy="475488"/>
           </a:xfrm>
           <a:prstGeom prst="rect">
             <a:avLst>
@@ -27980,8 +28390,8 @@
         </p:nvSpPr>
         <p:spPr>
           <a:xfrm>
-            <a:off x="2124837" y="4169664"/>
-            <a:ext cx="685800" cy="475488"/>
+            <a:off x="1951330" y="4169664"/>
+            <a:ext cx="676656" cy="475488"/>
           </a:xfrm>
           <a:prstGeom prst="rect">
             <a:avLst/>
@@ -28019,8 +28429,8 @@
         </p:nvSpPr>
         <p:spPr>
           <a:xfrm>
-            <a:off x="3033522" y="4169664"/>
-            <a:ext cx="685800" cy="475488"/>
+            <a:off x="2677363" y="4169664"/>
+            <a:ext cx="676656" cy="475488"/>
           </a:xfrm>
           <a:prstGeom prst="rect">
             <a:avLst>
@@ -28046,8 +28456,8 @@
         </p:nvSpPr>
         <p:spPr>
           <a:xfrm>
-            <a:off x="3033522" y="4169664"/>
-            <a:ext cx="685800" cy="475488"/>
+            <a:off x="2677363" y="4169664"/>
+            <a:ext cx="676656" cy="475488"/>
           </a:xfrm>
           <a:prstGeom prst="rect">
             <a:avLst/>
@@ -28085,8 +28495,8 @@
         </p:nvSpPr>
         <p:spPr>
           <a:xfrm>
-            <a:off x="3942207" y="4169664"/>
-            <a:ext cx="685800" cy="475488"/>
+            <a:off x="3403397" y="4169664"/>
+            <a:ext cx="676656" cy="475488"/>
           </a:xfrm>
           <a:prstGeom prst="rect">
             <a:avLst>
@@ -28112,8 +28522,8 @@
         </p:nvSpPr>
         <p:spPr>
           <a:xfrm>
-            <a:off x="3942207" y="4169664"/>
-            <a:ext cx="685800" cy="475488"/>
+            <a:off x="3403397" y="4169664"/>
+            <a:ext cx="676656" cy="475488"/>
           </a:xfrm>
           <a:prstGeom prst="rect">
             <a:avLst/>
@@ -28151,8 +28561,8 @@
         </p:nvSpPr>
         <p:spPr>
           <a:xfrm>
-            <a:off x="4850892" y="4169664"/>
-            <a:ext cx="685800" cy="475488"/>
+            <a:off x="4129430" y="4169664"/>
+            <a:ext cx="676656" cy="475488"/>
           </a:xfrm>
           <a:prstGeom prst="rect">
             <a:avLst>
@@ -28178,8 +28588,8 @@
         </p:nvSpPr>
         <p:spPr>
           <a:xfrm>
-            <a:off x="4850892" y="4169664"/>
-            <a:ext cx="685800" cy="475488"/>
+            <a:off x="4129430" y="4169664"/>
+            <a:ext cx="676656" cy="475488"/>
           </a:xfrm>
           <a:prstGeom prst="rect">
             <a:avLst/>
@@ -28203,7 +28613,7 @@
                 <a:ea typeface="Trebuchet MS" pitchFamily="34" charset="-122"/>
                 <a:cs typeface="Trebuchet MS" pitchFamily="34" charset="-120"/>
               </a:rPr>
-              <a:t>a</a:t>
+              <a:t>h</a:t>
             </a:r>
             <a:endParaRPr lang="en-US" sz="900" dirty="0"/>
           </a:p>
@@ -28217,8 +28627,8 @@
         </p:nvSpPr>
         <p:spPr>
           <a:xfrm>
-            <a:off x="5759577" y="4169664"/>
-            <a:ext cx="685800" cy="475488"/>
+            <a:off x="4855464" y="4169664"/>
+            <a:ext cx="676656" cy="475488"/>
           </a:xfrm>
           <a:prstGeom prst="rect">
             <a:avLst>
@@ -28244,8 +28654,8 @@
         </p:nvSpPr>
         <p:spPr>
           <a:xfrm>
-            <a:off x="5759577" y="4169664"/>
-            <a:ext cx="685800" cy="475488"/>
+            <a:off x="4855464" y="4169664"/>
+            <a:ext cx="676656" cy="475488"/>
           </a:xfrm>
           <a:prstGeom prst="rect">
             <a:avLst/>
@@ -28269,7 +28679,7 @@
                 <a:ea typeface="Trebuchet MS" pitchFamily="34" charset="-122"/>
                 <a:cs typeface="Trebuchet MS" pitchFamily="34" charset="-120"/>
               </a:rPr>
-              <a:t>g</a:t>
+              <a:t>o</a:t>
             </a:r>
             <a:endParaRPr lang="en-US" sz="900" dirty="0"/>
           </a:p>
@@ -28283,8 +28693,8 @@
         </p:nvSpPr>
         <p:spPr>
           <a:xfrm>
-            <a:off x="6668262" y="4169664"/>
-            <a:ext cx="685800" cy="475488"/>
+            <a:off x="5581498" y="4169664"/>
+            <a:ext cx="676656" cy="475488"/>
           </a:xfrm>
           <a:prstGeom prst="rect">
             <a:avLst>
@@ -28310,8 +28720,8 @@
         </p:nvSpPr>
         <p:spPr>
           <a:xfrm>
-            <a:off x="6668262" y="4169664"/>
-            <a:ext cx="685800" cy="475488"/>
+            <a:off x="5581498" y="4169664"/>
+            <a:ext cx="676656" cy="475488"/>
           </a:xfrm>
           <a:prstGeom prst="rect">
             <a:avLst/>
@@ -28335,7 +28745,7 @@
                 <a:ea typeface="Trebuchet MS" pitchFamily="34" charset="-122"/>
                 <a:cs typeface="Trebuchet MS" pitchFamily="34" charset="-120"/>
               </a:rPr>
-              <a:t>r</a:t>
+              <a:t>n</a:t>
             </a:r>
             <a:endParaRPr lang="en-US" sz="900" dirty="0"/>
           </a:p>
@@ -28349,8 +28759,8 @@
         </p:nvSpPr>
         <p:spPr>
           <a:xfrm>
-            <a:off x="7576947" y="4169664"/>
-            <a:ext cx="685800" cy="475488"/>
+            <a:off x="6307531" y="4169664"/>
+            <a:ext cx="676656" cy="475488"/>
           </a:xfrm>
           <a:prstGeom prst="rect">
             <a:avLst>
@@ -28376,8 +28786,8 @@
         </p:nvSpPr>
         <p:spPr>
           <a:xfrm>
-            <a:off x="7576947" y="4169664"/>
-            <a:ext cx="685800" cy="475488"/>
+            <a:off x="6307531" y="4169664"/>
+            <a:ext cx="676656" cy="475488"/>
           </a:xfrm>
           <a:prstGeom prst="rect">
             <a:avLst/>
@@ -28401,7 +28811,139 @@
                 <a:ea typeface="Trebuchet MS" pitchFamily="34" charset="-122"/>
                 <a:cs typeface="Trebuchet MS" pitchFamily="34" charset="-120"/>
               </a:rPr>
-              <a:t>ee</a:t>
+              <a:t>e</a:t>
+            </a:r>
+            <a:endParaRPr lang="en-US" sz="900" dirty="0"/>
+          </a:p>
+        </p:txBody>
+      </p:sp>
+      <p:sp>
+        <p:nvSpPr>
+          <p:cNvPr id="50" name="Shape 48"/>
+          <p:cNvSpPr/>
+          <p:nvPr/>
+        </p:nvSpPr>
+        <p:spPr>
+          <a:xfrm>
+            <a:off x="7033565" y="4169664"/>
+            <a:ext cx="676656" cy="475488"/>
+          </a:xfrm>
+          <a:prstGeom prst="rect">
+            <a:avLst>
+              <a:gd name="adj" fmla="val 7692"/>
+            </a:avLst>
+          </a:prstGeom>
+          <a:solidFill>
+            <a:srgbClr val="FFFFFF"/>
+          </a:solidFill>
+          <a:ln w="12700">
+            <a:solidFill>
+              <a:srgbClr val="DB2777"/>
+            </a:solidFill>
+            <a:prstDash val="solid"/>
+          </a:ln>
+        </p:spPr>
+      </p:sp>
+      <p:sp>
+        <p:nvSpPr>
+          <p:cNvPr id="51" name="Text 49"/>
+          <p:cNvSpPr/>
+          <p:nvPr/>
+        </p:nvSpPr>
+        <p:spPr>
+          <a:xfrm>
+            <a:off x="7033565" y="4169664"/>
+            <a:ext cx="676656" cy="475488"/>
+          </a:xfrm>
+          <a:prstGeom prst="rect">
+            <a:avLst/>
+          </a:prstGeom>
+          <a:noFill/>
+          <a:ln/>
+        </p:spPr>
+        <p:txBody>
+          <a:bodyPr wrap="square" lIns="0" tIns="0" rIns="0" bIns="0" rtlCol="0" anchor="ctr"/>
+          <a:lstStyle/>
+          <a:p>
+            <a:pPr algn="ctr" indent="0" marL="0">
+              <a:buNone/>
+            </a:pPr>
+            <a:r>
+              <a:rPr lang="en-US" sz="900" b="1" dirty="0">
+                <a:solidFill>
+                  <a:srgbClr val="9D174D"/>
+                </a:solidFill>
+                <a:latin typeface="Trebuchet MS" pitchFamily="34" charset="0"/>
+                <a:ea typeface="Trebuchet MS" pitchFamily="34" charset="-122"/>
+                <a:cs typeface="Trebuchet MS" pitchFamily="34" charset="-120"/>
+              </a:rPr>
+              <a:t>s</a:t>
+            </a:r>
+            <a:endParaRPr lang="en-US" sz="900" dirty="0"/>
+          </a:p>
+        </p:txBody>
+      </p:sp>
+      <p:sp>
+        <p:nvSpPr>
+          <p:cNvPr id="52" name="Shape 50"/>
+          <p:cNvSpPr/>
+          <p:nvPr/>
+        </p:nvSpPr>
+        <p:spPr>
+          <a:xfrm>
+            <a:off x="7759598" y="4169664"/>
+            <a:ext cx="676656" cy="475488"/>
+          </a:xfrm>
+          <a:prstGeom prst="rect">
+            <a:avLst>
+              <a:gd name="adj" fmla="val 7692"/>
+            </a:avLst>
+          </a:prstGeom>
+          <a:solidFill>
+            <a:srgbClr val="FFFFFF"/>
+          </a:solidFill>
+          <a:ln w="12700">
+            <a:solidFill>
+              <a:srgbClr val="DB2777"/>
+            </a:solidFill>
+            <a:prstDash val="solid"/>
+          </a:ln>
+        </p:spPr>
+      </p:sp>
+      <p:sp>
+        <p:nvSpPr>
+          <p:cNvPr id="53" name="Text 51"/>
+          <p:cNvSpPr/>
+          <p:nvPr/>
+        </p:nvSpPr>
+        <p:spPr>
+          <a:xfrm>
+            <a:off x="7759598" y="4169664"/>
+            <a:ext cx="676656" cy="475488"/>
+          </a:xfrm>
+          <a:prstGeom prst="rect">
+            <a:avLst/>
+          </a:prstGeom>
+          <a:noFill/>
+          <a:ln/>
+        </p:spPr>
+        <p:txBody>
+          <a:bodyPr wrap="square" lIns="0" tIns="0" rIns="0" bIns="0" rtlCol="0" anchor="ctr"/>
+          <a:lstStyle/>
+          <a:p>
+            <a:pPr algn="ctr" indent="0" marL="0">
+              <a:buNone/>
+            </a:pPr>
+            <a:r>
+              <a:rPr lang="en-US" sz="900" b="1" dirty="0">
+                <a:solidFill>
+                  <a:srgbClr val="9D174D"/>
+                </a:solidFill>
+                <a:latin typeface="Trebuchet MS" pitchFamily="34" charset="0"/>
+                <a:ea typeface="Trebuchet MS" pitchFamily="34" charset="-122"/>
+                <a:cs typeface="Trebuchet MS" pitchFamily="34" charset="-120"/>
+              </a:rPr>
+              <a:t>t</a:t>
             </a:r>
             <a:endParaRPr lang="en-US" sz="900" dirty="0"/>
           </a:p>
@@ -28832,7 +29374,7 @@
                 <a:ea typeface="Trebuchet MS" pitchFamily="34" charset="-122"/>
                 <a:cs typeface="Trebuchet MS" pitchFamily="34" charset="-120"/>
               </a:rPr>
-              <a:t>disappointment</a:t>
+              <a:t>disappear</a:t>
             </a:r>
             <a:endParaRPr lang="en-US" sz="2800" dirty="0"/>
           </a:p>
@@ -29659,7 +30201,7 @@
                 <a:ea typeface="Trebuchet MS" pitchFamily="34" charset="-122"/>
                 <a:cs typeface="Trebuchet MS" pitchFamily="34" charset="-120"/>
               </a:rPr>
-              <a:t>disappointment</a:t>
+              <a:t>disappear</a:t>
             </a:r>
             <a:endParaRPr lang="en-US" sz="2800" dirty="0"/>
           </a:p>
@@ -29739,7 +30281,7 @@
         </p:nvSpPr>
         <p:spPr>
           <a:xfrm>
-            <a:off x="2221992" y="2258568"/>
+            <a:off x="2938272" y="2258568"/>
             <a:ext cx="1828800" cy="292608"/>
           </a:xfrm>
           <a:prstGeom prst="rect">
@@ -29773,7 +30315,7 @@
         </p:nvSpPr>
         <p:spPr>
           <a:xfrm>
-            <a:off x="2221992" y="2258568"/>
+            <a:off x="2938272" y="2258568"/>
             <a:ext cx="1828800" cy="292608"/>
           </a:xfrm>
           <a:prstGeom prst="rect">
@@ -29812,7 +30354,7 @@
         </p:nvSpPr>
         <p:spPr>
           <a:xfrm>
-            <a:off x="2221992" y="2569464"/>
+            <a:off x="2938272" y="2569464"/>
             <a:ext cx="1828800" cy="201168"/>
           </a:xfrm>
           <a:prstGeom prst="rect">
@@ -29851,7 +30393,7 @@
         </p:nvSpPr>
         <p:spPr>
           <a:xfrm>
-            <a:off x="4370832" y="2258568"/>
+            <a:off x="5803392" y="2258568"/>
             <a:ext cx="1828800" cy="292608"/>
           </a:xfrm>
           <a:prstGeom prst="rect">
@@ -29885,7 +30427,7 @@
         </p:nvSpPr>
         <p:spPr>
           <a:xfrm>
-            <a:off x="4370832" y="2258568"/>
+            <a:off x="5803392" y="2258568"/>
             <a:ext cx="1828800" cy="292608"/>
           </a:xfrm>
           <a:prstGeom prst="rect">
@@ -29910,7 +30452,7 @@
                 <a:ea typeface="Trebuchet MS" pitchFamily="34" charset="-122"/>
                 <a:cs typeface="Trebuchet MS" pitchFamily="34" charset="-120"/>
               </a:rPr>
-              <a:t>appoint</a:t>
+              <a:t>appear</a:t>
             </a:r>
             <a:endParaRPr lang="en-US" sz="1300" dirty="0"/>
           </a:p>
@@ -29924,7 +30466,7 @@
         </p:nvSpPr>
         <p:spPr>
           <a:xfrm>
-            <a:off x="4370832" y="2569464"/>
+            <a:off x="5803392" y="2569464"/>
             <a:ext cx="1828800" cy="201168"/>
           </a:xfrm>
           <a:prstGeom prst="rect">
@@ -29949,7 +30491,7 @@
                 <a:ea typeface="Calibri" pitchFamily="34" charset="-122"/>
                 <a:cs typeface="Calibri" pitchFamily="34" charset="-120"/>
               </a:rPr>
-              <a:t>to arrange or set up</a:t>
+              <a:t>to come into sight</a:t>
             </a:r>
             <a:endParaRPr lang="en-US" sz="850" dirty="0"/>
           </a:p>
@@ -29963,30 +30505,23 @@
         </p:nvSpPr>
         <p:spPr>
           <a:xfrm>
-            <a:off x="6519672" y="2258568"/>
-            <a:ext cx="1828800" cy="292608"/>
+            <a:off x="365760" y="3273552"/>
+            <a:ext cx="1371600" cy="658368"/>
           </a:xfrm>
           <a:prstGeom prst="rect">
             <a:avLst>
-              <a:gd name="adj" fmla="val 25000"/>
+              <a:gd name="adj" fmla="val 8333"/>
             </a:avLst>
           </a:prstGeom>
           <a:solidFill>
-            <a:srgbClr val="FCE7F3"/>
-          </a:solidFill>
-          <a:ln w="19050">
-            <a:solidFill>
-              <a:srgbClr val="DB2777"/>
-            </a:solidFill>
-            <a:prstDash val="solid"/>
-          </a:ln>
-          <a:effectLst>
-            <a:outerShdw sx="100000" sy="100000" kx="0" ky="0" algn="bl" rotWithShape="0" blurRad="101600" dist="38100" dir="8100000">
-              <a:srgbClr val="000000">
-                <a:alpha val="12000"/>
-              </a:srgbClr>
-            </a:outerShdw>
-          </a:effectLst>
+            <a:srgbClr val="E2E8F0"/>
+          </a:solidFill>
+          <a:ln w="12700">
+            <a:solidFill>
+              <a:srgbClr val="E2E8F0"/>
+            </a:solidFill>
+            <a:prstDash val="solid"/>
+          </a:ln>
         </p:spPr>
       </p:sp>
       <p:sp>
@@ -29997,90 +30532,117 @@
         </p:nvSpPr>
         <p:spPr>
           <a:xfrm>
-            <a:off x="6519672" y="2258568"/>
-            <a:ext cx="1828800" cy="292608"/>
-          </a:xfrm>
-          <a:prstGeom prst="rect">
-            <a:avLst/>
-          </a:prstGeom>
-          <a:noFill/>
-          <a:ln/>
-        </p:spPr>
-        <p:txBody>
-          <a:bodyPr wrap="square" lIns="0" tIns="0" rIns="0" bIns="0" rtlCol="0" anchor="ctr"/>
-          <a:lstStyle/>
-          <a:p>
-            <a:pPr algn="ctr" indent="0" marL="0">
-              <a:buNone/>
-            </a:pPr>
-            <a:r>
-              <a:rPr lang="en-US" sz="1300" b="1" dirty="0">
-                <a:solidFill>
-                  <a:srgbClr val="9D174D"/>
+            <a:off x="365760" y="3273552"/>
+            <a:ext cx="1371600" cy="658368"/>
+          </a:xfrm>
+          <a:prstGeom prst="rect">
+            <a:avLst/>
+          </a:prstGeom>
+          <a:noFill/>
+          <a:ln/>
+        </p:spPr>
+        <p:txBody>
+          <a:bodyPr wrap="square" lIns="0" tIns="0" rIns="0" bIns="0" rtlCol="0" anchor="ctr"/>
+          <a:lstStyle/>
+          <a:p>
+            <a:pPr algn="ctr" indent="0" marL="0">
+              <a:buNone/>
+            </a:pPr>
+            <a:r>
+              <a:rPr lang="en-US" sz="1100" b="1" dirty="0">
+                <a:solidFill>
+                  <a:srgbClr val="475569"/>
                 </a:solidFill>
                 <a:latin typeface="Trebuchet MS" pitchFamily="34" charset="0"/>
                 <a:ea typeface="Trebuchet MS" pitchFamily="34" charset="-122"/>
                 <a:cs typeface="Trebuchet MS" pitchFamily="34" charset="-120"/>
               </a:rPr>
-              <a:t>ment</a:t>
-            </a:r>
-            <a:endParaRPr lang="en-US" sz="1300" dirty="0"/>
-          </a:p>
-        </p:txBody>
-      </p:sp>
-      <p:sp>
-        <p:nvSpPr>
-          <p:cNvPr id="24" name="Text 22"/>
-          <p:cNvSpPr/>
-          <p:nvPr/>
-        </p:nvSpPr>
-        <p:spPr>
-          <a:xfrm>
-            <a:off x="6519672" y="2569464"/>
-            <a:ext cx="1828800" cy="201168"/>
-          </a:xfrm>
-          <a:prstGeom prst="rect">
-            <a:avLst/>
-          </a:prstGeom>
-          <a:noFill/>
-          <a:ln/>
-        </p:spPr>
-        <p:txBody>
-          <a:bodyPr wrap="square" lIns="0" tIns="0" rIns="0" bIns="0" rtlCol="0" anchor="t"/>
-          <a:lstStyle/>
-          <a:p>
-            <a:pPr algn="ctr" indent="0" marL="0">
-              <a:buNone/>
-            </a:pPr>
-            <a:r>
-              <a:rPr lang="en-US" sz="850" dirty="0">
-                <a:solidFill>
-                  <a:srgbClr val="475569"/>
+              <a:t>Syllables</a:t>
+            </a:r>
+            <a:endParaRPr lang="en-US" sz="1100" dirty="0"/>
+          </a:p>
+        </p:txBody>
+      </p:sp>
+      <p:sp>
+        <p:nvSpPr>
+          <p:cNvPr id="24" name="Shape 22"/>
+          <p:cNvSpPr/>
+          <p:nvPr/>
+        </p:nvSpPr>
+        <p:spPr>
+          <a:xfrm>
+            <a:off x="1874520" y="3273552"/>
+            <a:ext cx="6903720" cy="658368"/>
+          </a:xfrm>
+          <a:prstGeom prst="rect">
+            <a:avLst>
+              <a:gd name="adj" fmla="val 8333"/>
+            </a:avLst>
+          </a:prstGeom>
+          <a:solidFill>
+            <a:srgbClr val="F8FAFC"/>
+          </a:solidFill>
+          <a:ln w="12700">
+            <a:solidFill>
+              <a:srgbClr val="E2E8F0"/>
+            </a:solidFill>
+            <a:prstDash val="dash"/>
+          </a:ln>
+        </p:spPr>
+      </p:sp>
+      <p:sp>
+        <p:nvSpPr>
+          <p:cNvPr id="25" name="Text 23"/>
+          <p:cNvSpPr/>
+          <p:nvPr/>
+        </p:nvSpPr>
+        <p:spPr>
+          <a:xfrm>
+            <a:off x="1874520" y="3273552"/>
+            <a:ext cx="6903720" cy="658368"/>
+          </a:xfrm>
+          <a:prstGeom prst="rect">
+            <a:avLst/>
+          </a:prstGeom>
+          <a:noFill/>
+          <a:ln/>
+        </p:spPr>
+        <p:txBody>
+          <a:bodyPr wrap="square" rtlCol="0" anchor="ctr"/>
+          <a:lstStyle/>
+          <a:p>
+            <a:pPr algn="ctr" indent="0" marL="0">
+              <a:buNone/>
+            </a:pPr>
+            <a:r>
+              <a:rPr lang="en-US" sz="1100" i="1" dirty="0">
+                <a:solidFill>
+                  <a:srgbClr val="CBD5E1"/>
                 </a:solidFill>
                 <a:latin typeface="Calibri" pitchFamily="34" charset="0"/>
                 <a:ea typeface="Calibri" pitchFamily="34" charset="-122"/>
                 <a:cs typeface="Calibri" pitchFamily="34" charset="-120"/>
               </a:rPr>
-              <a:t>result or condition</a:t>
-            </a:r>
-            <a:endParaRPr lang="en-US" sz="850" dirty="0"/>
-          </a:p>
-        </p:txBody>
-      </p:sp>
-      <p:sp>
-        <p:nvSpPr>
-          <p:cNvPr id="25" name="Shape 23"/>
-          <p:cNvSpPr/>
-          <p:nvPr/>
-        </p:nvSpPr>
-        <p:spPr>
-          <a:xfrm>
-            <a:off x="365760" y="3273552"/>
-            <a:ext cx="1371600" cy="658368"/>
+              <a:t>Write here...</a:t>
+            </a:r>
+            <a:endParaRPr lang="en-US" sz="1100" dirty="0"/>
+          </a:p>
+        </p:txBody>
+      </p:sp>
+      <p:sp>
+        <p:nvSpPr>
+          <p:cNvPr id="26" name="Shape 24"/>
+          <p:cNvSpPr/>
+          <p:nvPr/>
+        </p:nvSpPr>
+        <p:spPr>
+          <a:xfrm>
+            <a:off x="365760" y="4096512"/>
+            <a:ext cx="1371600" cy="804672"/>
           </a:xfrm>
           <a:prstGeom prst="rect">
             <a:avLst>
-              <a:gd name="adj" fmla="val 8333"/>
+              <a:gd name="adj" fmla="val 6818"/>
             </a:avLst>
           </a:prstGeom>
           <a:solidFill>
@@ -30096,14 +30658,14 @@
       </p:sp>
       <p:sp>
         <p:nvSpPr>
-          <p:cNvPr id="26" name="Text 24"/>
-          <p:cNvSpPr/>
-          <p:nvPr/>
-        </p:nvSpPr>
-        <p:spPr>
-          <a:xfrm>
-            <a:off x="365760" y="3273552"/>
-            <a:ext cx="1371600" cy="658368"/>
+          <p:cNvPr id="27" name="Text 25"/>
+          <p:cNvSpPr/>
+          <p:nvPr/>
+        </p:nvSpPr>
+        <p:spPr>
+          <a:xfrm>
+            <a:off x="365760" y="4096512"/>
+            <a:ext cx="1371600" cy="804672"/>
           </a:xfrm>
           <a:prstGeom prst="rect">
             <a:avLst/>
@@ -30127,7 +30689,7 @@
                 <a:ea typeface="Trebuchet MS" pitchFamily="34" charset="-122"/>
                 <a:cs typeface="Trebuchet MS" pitchFamily="34" charset="-120"/>
               </a:rPr>
-              <a:t>Syllables</a:t>
+              <a:t>Phonemes</a:t>
             </a:r>
             <a:endParaRPr lang="en-US" sz="1100" dirty="0"/>
           </a:p>
@@ -30135,80 +30697,14 @@
       </p:sp>
       <p:sp>
         <p:nvSpPr>
-          <p:cNvPr id="27" name="Shape 25"/>
-          <p:cNvSpPr/>
-          <p:nvPr/>
-        </p:nvSpPr>
-        <p:spPr>
-          <a:xfrm>
-            <a:off x="1874520" y="3273552"/>
-            <a:ext cx="6903720" cy="658368"/>
-          </a:xfrm>
-          <a:prstGeom prst="rect">
-            <a:avLst>
-              <a:gd name="adj" fmla="val 8333"/>
-            </a:avLst>
-          </a:prstGeom>
-          <a:solidFill>
-            <a:srgbClr val="F8FAFC"/>
-          </a:solidFill>
-          <a:ln w="12700">
-            <a:solidFill>
-              <a:srgbClr val="E2E8F0"/>
-            </a:solidFill>
-            <a:prstDash val="dash"/>
-          </a:ln>
-        </p:spPr>
-      </p:sp>
-      <p:sp>
-        <p:nvSpPr>
-          <p:cNvPr id="28" name="Text 26"/>
-          <p:cNvSpPr/>
-          <p:nvPr/>
-        </p:nvSpPr>
-        <p:spPr>
-          <a:xfrm>
-            <a:off x="1874520" y="3273552"/>
-            <a:ext cx="6903720" cy="658368"/>
-          </a:xfrm>
-          <a:prstGeom prst="rect">
-            <a:avLst/>
-          </a:prstGeom>
-          <a:noFill/>
-          <a:ln/>
-        </p:spPr>
-        <p:txBody>
-          <a:bodyPr wrap="square" rtlCol="0" anchor="ctr"/>
-          <a:lstStyle/>
-          <a:p>
-            <a:pPr algn="ctr" indent="0" marL="0">
-              <a:buNone/>
-            </a:pPr>
-            <a:r>
-              <a:rPr lang="en-US" sz="1100" i="1" dirty="0">
-                <a:solidFill>
-                  <a:srgbClr val="CBD5E1"/>
-                </a:solidFill>
-                <a:latin typeface="Calibri" pitchFamily="34" charset="0"/>
-                <a:ea typeface="Calibri" pitchFamily="34" charset="-122"/>
-                <a:cs typeface="Calibri" pitchFamily="34" charset="-120"/>
-              </a:rPr>
-              <a:t>Write here...</a:t>
-            </a:r>
-            <a:endParaRPr lang="en-US" sz="1100" dirty="0"/>
-          </a:p>
-        </p:txBody>
-      </p:sp>
-      <p:sp>
-        <p:nvSpPr>
-          <p:cNvPr id="29" name="Shape 27"/>
-          <p:cNvSpPr/>
-          <p:nvPr/>
-        </p:nvSpPr>
-        <p:spPr>
-          <a:xfrm>
-            <a:off x="365760" y="4096512"/>
-            <a:ext cx="1371600" cy="804672"/>
+          <p:cNvPr id="28" name="Shape 26"/>
+          <p:cNvSpPr/>
+          <p:nvPr/>
+        </p:nvSpPr>
+        <p:spPr>
+          <a:xfrm>
+            <a:off x="1874520" y="4096512"/>
+            <a:ext cx="6903720" cy="804672"/>
           </a:xfrm>
           <a:prstGeom prst="rect">
             <a:avLst>
@@ -30216,85 +30712,19 @@
             </a:avLst>
           </a:prstGeom>
           <a:solidFill>
-            <a:srgbClr val="E2E8F0"/>
+            <a:srgbClr val="F8FAFC"/>
           </a:solidFill>
           <a:ln w="12700">
             <a:solidFill>
               <a:srgbClr val="E2E8F0"/>
             </a:solidFill>
-            <a:prstDash val="solid"/>
-          </a:ln>
-        </p:spPr>
-      </p:sp>
-      <p:sp>
-        <p:nvSpPr>
-          <p:cNvPr id="30" name="Text 28"/>
-          <p:cNvSpPr/>
-          <p:nvPr/>
-        </p:nvSpPr>
-        <p:spPr>
-          <a:xfrm>
-            <a:off x="365760" y="4096512"/>
-            <a:ext cx="1371600" cy="804672"/>
-          </a:xfrm>
-          <a:prstGeom prst="rect">
-            <a:avLst/>
-          </a:prstGeom>
-          <a:noFill/>
-          <a:ln/>
-        </p:spPr>
-        <p:txBody>
-          <a:bodyPr wrap="square" lIns="0" tIns="0" rIns="0" bIns="0" rtlCol="0" anchor="ctr"/>
-          <a:lstStyle/>
-          <a:p>
-            <a:pPr algn="ctr" indent="0" marL="0">
-              <a:buNone/>
-            </a:pPr>
-            <a:r>
-              <a:rPr lang="en-US" sz="1100" b="1" dirty="0">
-                <a:solidFill>
-                  <a:srgbClr val="475569"/>
-                </a:solidFill>
-                <a:latin typeface="Trebuchet MS" pitchFamily="34" charset="0"/>
-                <a:ea typeface="Trebuchet MS" pitchFamily="34" charset="-122"/>
-                <a:cs typeface="Trebuchet MS" pitchFamily="34" charset="-120"/>
-              </a:rPr>
-              <a:t>Phonemes</a:t>
-            </a:r>
-            <a:endParaRPr lang="en-US" sz="1100" dirty="0"/>
-          </a:p>
-        </p:txBody>
-      </p:sp>
-      <p:sp>
-        <p:nvSpPr>
-          <p:cNvPr id="31" name="Shape 29"/>
-          <p:cNvSpPr/>
-          <p:nvPr/>
-        </p:nvSpPr>
-        <p:spPr>
-          <a:xfrm>
-            <a:off x="1874520" y="4096512"/>
-            <a:ext cx="6903720" cy="804672"/>
-          </a:xfrm>
-          <a:prstGeom prst="rect">
-            <a:avLst>
-              <a:gd name="adj" fmla="val 6818"/>
-            </a:avLst>
-          </a:prstGeom>
-          <a:solidFill>
-            <a:srgbClr val="F8FAFC"/>
-          </a:solidFill>
-          <a:ln w="12700">
-            <a:solidFill>
-              <a:srgbClr val="E2E8F0"/>
-            </a:solidFill>
             <a:prstDash val="dash"/>
           </a:ln>
         </p:spPr>
       </p:sp>
       <p:sp>
         <p:nvSpPr>
-          <p:cNvPr id="32" name="Text 30"/>
+          <p:cNvPr id="29" name="Text 27"/>
           <p:cNvSpPr/>
           <p:nvPr/>
         </p:nvSpPr>
@@ -30756,7 +31186,7 @@
                 <a:ea typeface="Trebuchet MS" pitchFamily="34" charset="-122"/>
                 <a:cs typeface="Trebuchet MS" pitchFamily="34" charset="-120"/>
               </a:rPr>
-              <a:t>disappointment</a:t>
+              <a:t>disappear</a:t>
             </a:r>
             <a:endParaRPr lang="en-US" sz="2800" dirty="0"/>
           </a:p>
@@ -30836,7 +31266,7 @@
         </p:nvSpPr>
         <p:spPr>
           <a:xfrm>
-            <a:off x="2221992" y="2258568"/>
+            <a:off x="2938272" y="2258568"/>
             <a:ext cx="1828800" cy="292608"/>
           </a:xfrm>
           <a:prstGeom prst="rect">
@@ -30870,7 +31300,7 @@
         </p:nvSpPr>
         <p:spPr>
           <a:xfrm>
-            <a:off x="2221992" y="2258568"/>
+            <a:off x="2938272" y="2258568"/>
             <a:ext cx="1828800" cy="292608"/>
           </a:xfrm>
           <a:prstGeom prst="rect">
@@ -30909,7 +31339,7 @@
         </p:nvSpPr>
         <p:spPr>
           <a:xfrm>
-            <a:off x="2221992" y="2569464"/>
+            <a:off x="2938272" y="2569464"/>
             <a:ext cx="1828800" cy="201168"/>
           </a:xfrm>
           <a:prstGeom prst="rect">
@@ -30948,7 +31378,7 @@
         </p:nvSpPr>
         <p:spPr>
           <a:xfrm>
-            <a:off x="4370832" y="2258568"/>
+            <a:off x="5803392" y="2258568"/>
             <a:ext cx="1828800" cy="292608"/>
           </a:xfrm>
           <a:prstGeom prst="rect">
@@ -30982,7 +31412,7 @@
         </p:nvSpPr>
         <p:spPr>
           <a:xfrm>
-            <a:off x="4370832" y="2258568"/>
+            <a:off x="5803392" y="2258568"/>
             <a:ext cx="1828800" cy="292608"/>
           </a:xfrm>
           <a:prstGeom prst="rect">
@@ -31007,7 +31437,7 @@
                 <a:ea typeface="Trebuchet MS" pitchFamily="34" charset="-122"/>
                 <a:cs typeface="Trebuchet MS" pitchFamily="34" charset="-120"/>
               </a:rPr>
-              <a:t>appoint</a:t>
+              <a:t>appear</a:t>
             </a:r>
             <a:endParaRPr lang="en-US" sz="1300" dirty="0"/>
           </a:p>
@@ -31021,7 +31451,7 @@
         </p:nvSpPr>
         <p:spPr>
           <a:xfrm>
-            <a:off x="4370832" y="2569464"/>
+            <a:off x="5803392" y="2569464"/>
             <a:ext cx="1828800" cy="201168"/>
           </a:xfrm>
           <a:prstGeom prst="rect">
@@ -31046,7 +31476,7 @@
                 <a:ea typeface="Calibri" pitchFamily="34" charset="-122"/>
                 <a:cs typeface="Calibri" pitchFamily="34" charset="-120"/>
               </a:rPr>
-              <a:t>to arrange or set up</a:t>
+              <a:t>to come into sight</a:t>
             </a:r>
             <a:endParaRPr lang="en-US" sz="850" dirty="0"/>
           </a:p>
@@ -31060,30 +31490,23 @@
         </p:nvSpPr>
         <p:spPr>
           <a:xfrm>
-            <a:off x="6519672" y="2258568"/>
-            <a:ext cx="1828800" cy="292608"/>
+            <a:off x="365760" y="3273552"/>
+            <a:ext cx="1371600" cy="658368"/>
           </a:xfrm>
           <a:prstGeom prst="rect">
             <a:avLst>
-              <a:gd name="adj" fmla="val 25000"/>
+              <a:gd name="adj" fmla="val 8333"/>
             </a:avLst>
           </a:prstGeom>
           <a:solidFill>
-            <a:srgbClr val="FCE7F3"/>
-          </a:solidFill>
-          <a:ln w="19050">
-            <a:solidFill>
-              <a:srgbClr val="DB2777"/>
-            </a:solidFill>
-            <a:prstDash val="solid"/>
-          </a:ln>
-          <a:effectLst>
-            <a:outerShdw sx="100000" sy="100000" kx="0" ky="0" algn="bl" rotWithShape="0" blurRad="101600" dist="38100" dir="8100000">
-              <a:srgbClr val="000000">
-                <a:alpha val="12000"/>
-              </a:srgbClr>
-            </a:outerShdw>
-          </a:effectLst>
+            <a:srgbClr val="E2E8F0"/>
+          </a:solidFill>
+          <a:ln w="12700">
+            <a:solidFill>
+              <a:srgbClr val="E2E8F0"/>
+            </a:solidFill>
+            <a:prstDash val="solid"/>
+          </a:ln>
         </p:spPr>
       </p:sp>
       <p:sp>
@@ -31094,86 +31517,47 @@
         </p:nvSpPr>
         <p:spPr>
           <a:xfrm>
-            <a:off x="6519672" y="2258568"/>
-            <a:ext cx="1828800" cy="292608"/>
-          </a:xfrm>
-          <a:prstGeom prst="rect">
-            <a:avLst/>
-          </a:prstGeom>
-          <a:noFill/>
-          <a:ln/>
-        </p:spPr>
-        <p:txBody>
-          <a:bodyPr wrap="square" lIns="0" tIns="0" rIns="0" bIns="0" rtlCol="0" anchor="ctr"/>
-          <a:lstStyle/>
-          <a:p>
-            <a:pPr algn="ctr" indent="0" marL="0">
-              <a:buNone/>
-            </a:pPr>
-            <a:r>
-              <a:rPr lang="en-US" sz="1300" b="1" dirty="0">
-                <a:solidFill>
-                  <a:srgbClr val="9D174D"/>
+            <a:off x="365760" y="3273552"/>
+            <a:ext cx="1371600" cy="658368"/>
+          </a:xfrm>
+          <a:prstGeom prst="rect">
+            <a:avLst/>
+          </a:prstGeom>
+          <a:noFill/>
+          <a:ln/>
+        </p:spPr>
+        <p:txBody>
+          <a:bodyPr wrap="square" lIns="0" tIns="0" rIns="0" bIns="0" rtlCol="0" anchor="ctr"/>
+          <a:lstStyle/>
+          <a:p>
+            <a:pPr algn="ctr" indent="0" marL="0">
+              <a:buNone/>
+            </a:pPr>
+            <a:r>
+              <a:rPr lang="en-US" sz="1100" b="1" dirty="0">
+                <a:solidFill>
+                  <a:srgbClr val="475569"/>
                 </a:solidFill>
                 <a:latin typeface="Trebuchet MS" pitchFamily="34" charset="0"/>
                 <a:ea typeface="Trebuchet MS" pitchFamily="34" charset="-122"/>
                 <a:cs typeface="Trebuchet MS" pitchFamily="34" charset="-120"/>
               </a:rPr>
-              <a:t>ment</a:t>
-            </a:r>
-            <a:endParaRPr lang="en-US" sz="1300" dirty="0"/>
-          </a:p>
-        </p:txBody>
-      </p:sp>
-      <p:sp>
-        <p:nvSpPr>
-          <p:cNvPr id="24" name="Text 22"/>
-          <p:cNvSpPr/>
-          <p:nvPr/>
-        </p:nvSpPr>
-        <p:spPr>
-          <a:xfrm>
-            <a:off x="6519672" y="2569464"/>
-            <a:ext cx="1828800" cy="201168"/>
-          </a:xfrm>
-          <a:prstGeom prst="rect">
-            <a:avLst/>
-          </a:prstGeom>
-          <a:noFill/>
-          <a:ln/>
-        </p:spPr>
-        <p:txBody>
-          <a:bodyPr wrap="square" lIns="0" tIns="0" rIns="0" bIns="0" rtlCol="0" anchor="t"/>
-          <a:lstStyle/>
-          <a:p>
-            <a:pPr algn="ctr" indent="0" marL="0">
-              <a:buNone/>
-            </a:pPr>
-            <a:r>
-              <a:rPr lang="en-US" sz="850" dirty="0">
-                <a:solidFill>
-                  <a:srgbClr val="475569"/>
-                </a:solidFill>
-                <a:latin typeface="Calibri" pitchFamily="34" charset="0"/>
-                <a:ea typeface="Calibri" pitchFamily="34" charset="-122"/>
-                <a:cs typeface="Calibri" pitchFamily="34" charset="-120"/>
-              </a:rPr>
-              <a:t>result or condition</a:t>
-            </a:r>
-            <a:endParaRPr lang="en-US" sz="850" dirty="0"/>
-          </a:p>
-        </p:txBody>
-      </p:sp>
-      <p:sp>
-        <p:nvSpPr>
-          <p:cNvPr id="25" name="Shape 23"/>
-          <p:cNvSpPr/>
-          <p:nvPr/>
-        </p:nvSpPr>
-        <p:spPr>
-          <a:xfrm>
-            <a:off x="365760" y="3273552"/>
-            <a:ext cx="1371600" cy="658368"/>
+              <a:t>Syllables</a:t>
+            </a:r>
+            <a:endParaRPr lang="en-US" sz="1100" dirty="0"/>
+          </a:p>
+        </p:txBody>
+      </p:sp>
+      <p:sp>
+        <p:nvSpPr>
+          <p:cNvPr id="24" name="Shape 22"/>
+          <p:cNvSpPr/>
+          <p:nvPr/>
+        </p:nvSpPr>
+        <p:spPr>
+          <a:xfrm>
+            <a:off x="1874520" y="3273552"/>
+            <a:ext cx="6903720" cy="658368"/>
           </a:xfrm>
           <a:prstGeom prst="rect">
             <a:avLst>
@@ -31181,11 +31565,38 @@
             </a:avLst>
           </a:prstGeom>
           <a:solidFill>
-            <a:srgbClr val="E2E8F0"/>
-          </a:solidFill>
-          <a:ln w="12700">
-            <a:solidFill>
-              <a:srgbClr val="E2E8F0"/>
+            <a:srgbClr val="CCFBF1"/>
+          </a:solidFill>
+          <a:ln w="12700">
+            <a:solidFill>
+              <a:srgbClr val="0D9488"/>
+            </a:solidFill>
+            <a:prstDash val="solid"/>
+          </a:ln>
+        </p:spPr>
+      </p:sp>
+      <p:sp>
+        <p:nvSpPr>
+          <p:cNvPr id="25" name="Shape 23"/>
+          <p:cNvSpPr/>
+          <p:nvPr/>
+        </p:nvSpPr>
+        <p:spPr>
+          <a:xfrm>
+            <a:off x="2313432" y="3364992"/>
+            <a:ext cx="1645920" cy="475488"/>
+          </a:xfrm>
+          <a:prstGeom prst="rect">
+            <a:avLst>
+              <a:gd name="adj" fmla="val 9615"/>
+            </a:avLst>
+          </a:prstGeom>
+          <a:solidFill>
+            <a:srgbClr val="FFFFFF"/>
+          </a:solidFill>
+          <a:ln w="12700">
+            <a:solidFill>
+              <a:srgbClr val="0D9488"/>
             </a:solidFill>
             <a:prstDash val="solid"/>
           </a:ln>
@@ -31199,63 +31610,75 @@
         </p:nvSpPr>
         <p:spPr>
           <a:xfrm>
-            <a:off x="365760" y="3273552"/>
-            <a:ext cx="1371600" cy="658368"/>
-          </a:xfrm>
-          <a:prstGeom prst="rect">
-            <a:avLst/>
-          </a:prstGeom>
-          <a:noFill/>
-          <a:ln/>
-        </p:spPr>
-        <p:txBody>
-          <a:bodyPr wrap="square" lIns="0" tIns="0" rIns="0" bIns="0" rtlCol="0" anchor="ctr"/>
-          <a:lstStyle/>
-          <a:p>
-            <a:pPr algn="ctr" indent="0" marL="0">
-              <a:buNone/>
-            </a:pPr>
-            <a:r>
-              <a:rPr lang="en-US" sz="1100" b="1" dirty="0">
-                <a:solidFill>
-                  <a:srgbClr val="475569"/>
+            <a:off x="2313432" y="3364992"/>
+            <a:ext cx="1645920" cy="475488"/>
+          </a:xfrm>
+          <a:prstGeom prst="rect">
+            <a:avLst/>
+          </a:prstGeom>
+          <a:noFill/>
+          <a:ln/>
+        </p:spPr>
+        <p:txBody>
+          <a:bodyPr wrap="square" lIns="0" tIns="0" rIns="0" bIns="0" rtlCol="0" anchor="ctr"/>
+          <a:lstStyle/>
+          <a:p>
+            <a:pPr algn="ctr" indent="0" marL="0">
+              <a:buNone/>
+            </a:pPr>
+            <a:r>
+              <a:rPr lang="en-US" sz="1400" b="1" dirty="0">
+                <a:solidFill>
+                  <a:srgbClr val="0D9488"/>
                 </a:solidFill>
                 <a:latin typeface="Trebuchet MS" pitchFamily="34" charset="0"/>
                 <a:ea typeface="Trebuchet MS" pitchFamily="34" charset="-122"/>
                 <a:cs typeface="Trebuchet MS" pitchFamily="34" charset="-120"/>
               </a:rPr>
-              <a:t>Syllables</a:t>
-            </a:r>
-            <a:endParaRPr lang="en-US" sz="1100" dirty="0"/>
-          </a:p>
-        </p:txBody>
-      </p:sp>
-      <p:sp>
-        <p:nvSpPr>
-          <p:cNvPr id="27" name="Shape 25"/>
-          <p:cNvSpPr/>
-          <p:nvPr/>
-        </p:nvSpPr>
-        <p:spPr>
-          <a:xfrm>
-            <a:off x="1874520" y="3273552"/>
-            <a:ext cx="6903720" cy="658368"/>
-          </a:xfrm>
-          <a:prstGeom prst="rect">
-            <a:avLst>
-              <a:gd name="adj" fmla="val 8333"/>
-            </a:avLst>
-          </a:prstGeom>
-          <a:solidFill>
-            <a:srgbClr val="CCFBF1"/>
-          </a:solidFill>
-          <a:ln w="12700">
-            <a:solidFill>
-              <a:srgbClr val="0D9488"/>
-            </a:solidFill>
-            <a:prstDash val="solid"/>
-          </a:ln>
-        </p:spPr>
+              <a:t>dis</a:t>
+            </a:r>
+            <a:endParaRPr lang="en-US" sz="1400" dirty="0"/>
+          </a:p>
+        </p:txBody>
+      </p:sp>
+      <p:sp>
+        <p:nvSpPr>
+          <p:cNvPr id="27" name="Text 25"/>
+          <p:cNvSpPr/>
+          <p:nvPr/>
+        </p:nvSpPr>
+        <p:spPr>
+          <a:xfrm>
+            <a:off x="3959352" y="3364992"/>
+            <a:ext cx="411480" cy="475488"/>
+          </a:xfrm>
+          <a:prstGeom prst="rect">
+            <a:avLst/>
+          </a:prstGeom>
+          <a:noFill/>
+          <a:ln/>
+        </p:spPr>
+        <p:txBody>
+          <a:bodyPr wrap="square" lIns="0" tIns="0" rIns="0" bIns="0" rtlCol="0" anchor="ctr"/>
+          <a:lstStyle/>
+          <a:p>
+            <a:pPr algn="ctr" indent="0" marL="0">
+              <a:buNone/>
+            </a:pPr>
+            <a:r>
+              <a:rPr lang="en-US" sz="1600" b="1" dirty="0">
+                <a:solidFill>
+                  <a:srgbClr val="0D9488"/>
+                </a:solidFill>
+                <a:latin typeface="Trebuchet MS" pitchFamily="34" charset="0"/>
+                <a:ea typeface="Trebuchet MS" pitchFamily="34" charset="-122"/>
+                <a:cs typeface="Trebuchet MS" pitchFamily="34" charset="-120"/>
+              </a:rPr>
+              <a:t>·</a:t>
+            </a:r>
+            <a:endParaRPr lang="en-US" sz="1600" dirty="0"/>
+          </a:p>
+        </p:txBody>
       </p:sp>
       <p:sp>
         <p:nvSpPr>
@@ -31265,8 +31688,8 @@
         </p:nvSpPr>
         <p:spPr>
           <a:xfrm>
-            <a:off x="1975104" y="3364992"/>
-            <a:ext cx="1554480" cy="475488"/>
+            <a:off x="4370832" y="3364992"/>
+            <a:ext cx="1645920" cy="475488"/>
           </a:xfrm>
           <a:prstGeom prst="rect">
             <a:avLst>
@@ -31292,8 +31715,8 @@
         </p:nvSpPr>
         <p:spPr>
           <a:xfrm>
-            <a:off x="1975104" y="3364992"/>
-            <a:ext cx="1554480" cy="475488"/>
+            <a:off x="4370832" y="3364992"/>
+            <a:ext cx="1645920" cy="475488"/>
           </a:xfrm>
           <a:prstGeom prst="rect">
             <a:avLst/>
@@ -31317,7 +31740,7 @@
                 <a:ea typeface="Trebuchet MS" pitchFamily="34" charset="-122"/>
                 <a:cs typeface="Trebuchet MS" pitchFamily="34" charset="-120"/>
               </a:rPr>
-              <a:t>dis</a:t>
+              <a:t>ap</a:t>
             </a:r>
             <a:endParaRPr lang="en-US" sz="1400" dirty="0"/>
           </a:p>
@@ -31331,8 +31754,8 @@
         </p:nvSpPr>
         <p:spPr>
           <a:xfrm>
-            <a:off x="3529584" y="3364992"/>
-            <a:ext cx="73152" cy="475488"/>
+            <a:off x="6016752" y="3364992"/>
+            <a:ext cx="411480" cy="475488"/>
           </a:xfrm>
           <a:prstGeom prst="rect">
             <a:avLst/>
@@ -31370,8 +31793,8 @@
         </p:nvSpPr>
         <p:spPr>
           <a:xfrm>
-            <a:off x="3602736" y="3364992"/>
-            <a:ext cx="1554480" cy="475488"/>
+            <a:off x="6428232" y="3364992"/>
+            <a:ext cx="1645920" cy="475488"/>
           </a:xfrm>
           <a:prstGeom prst="rect">
             <a:avLst>
@@ -31397,8 +31820,8 @@
         </p:nvSpPr>
         <p:spPr>
           <a:xfrm>
-            <a:off x="3602736" y="3364992"/>
-            <a:ext cx="1554480" cy="475488"/>
+            <a:off x="6428232" y="3364992"/>
+            <a:ext cx="1645920" cy="475488"/>
           </a:xfrm>
           <a:prstGeom prst="rect">
             <a:avLst/>
@@ -31422,7 +31845,7 @@
                 <a:ea typeface="Trebuchet MS" pitchFamily="34" charset="-122"/>
                 <a:cs typeface="Trebuchet MS" pitchFamily="34" charset="-120"/>
               </a:rPr>
-              <a:t>ap</a:t>
+              <a:t>pear</a:t>
             </a:r>
             <a:endParaRPr lang="en-US" sz="1400" dirty="0"/>
           </a:p>
@@ -31430,224 +31853,80 @@
       </p:sp>
       <p:sp>
         <p:nvSpPr>
-          <p:cNvPr id="33" name="Text 31"/>
-          <p:cNvSpPr/>
-          <p:nvPr/>
-        </p:nvSpPr>
-        <p:spPr>
-          <a:xfrm>
-            <a:off x="5157216" y="3364992"/>
-            <a:ext cx="73152" cy="475488"/>
-          </a:xfrm>
-          <a:prstGeom prst="rect">
-            <a:avLst/>
-          </a:prstGeom>
-          <a:noFill/>
-          <a:ln/>
-        </p:spPr>
-        <p:txBody>
-          <a:bodyPr wrap="square" lIns="0" tIns="0" rIns="0" bIns="0" rtlCol="0" anchor="ctr"/>
-          <a:lstStyle/>
-          <a:p>
-            <a:pPr algn="ctr" indent="0" marL="0">
-              <a:buNone/>
-            </a:pPr>
-            <a:r>
-              <a:rPr lang="en-US" sz="1600" b="1" dirty="0">
-                <a:solidFill>
-                  <a:srgbClr val="0D9488"/>
+          <p:cNvPr id="33" name="Shape 31"/>
+          <p:cNvSpPr/>
+          <p:nvPr/>
+        </p:nvSpPr>
+        <p:spPr>
+          <a:xfrm>
+            <a:off x="365760" y="4096512"/>
+            <a:ext cx="1371600" cy="804672"/>
+          </a:xfrm>
+          <a:prstGeom prst="rect">
+            <a:avLst>
+              <a:gd name="adj" fmla="val 6818"/>
+            </a:avLst>
+          </a:prstGeom>
+          <a:solidFill>
+            <a:srgbClr val="E2E8F0"/>
+          </a:solidFill>
+          <a:ln w="12700">
+            <a:solidFill>
+              <a:srgbClr val="E2E8F0"/>
+            </a:solidFill>
+            <a:prstDash val="solid"/>
+          </a:ln>
+        </p:spPr>
+      </p:sp>
+      <p:sp>
+        <p:nvSpPr>
+          <p:cNvPr id="34" name="Text 32"/>
+          <p:cNvSpPr/>
+          <p:nvPr/>
+        </p:nvSpPr>
+        <p:spPr>
+          <a:xfrm>
+            <a:off x="365760" y="4096512"/>
+            <a:ext cx="1371600" cy="804672"/>
+          </a:xfrm>
+          <a:prstGeom prst="rect">
+            <a:avLst/>
+          </a:prstGeom>
+          <a:noFill/>
+          <a:ln/>
+        </p:spPr>
+        <p:txBody>
+          <a:bodyPr wrap="square" lIns="0" tIns="0" rIns="0" bIns="0" rtlCol="0" anchor="ctr"/>
+          <a:lstStyle/>
+          <a:p>
+            <a:pPr algn="ctr" indent="0" marL="0">
+              <a:buNone/>
+            </a:pPr>
+            <a:r>
+              <a:rPr lang="en-US" sz="1100" b="1" dirty="0">
+                <a:solidFill>
+                  <a:srgbClr val="475569"/>
                 </a:solidFill>
                 <a:latin typeface="Trebuchet MS" pitchFamily="34" charset="0"/>
                 <a:ea typeface="Trebuchet MS" pitchFamily="34" charset="-122"/>
                 <a:cs typeface="Trebuchet MS" pitchFamily="34" charset="-120"/>
               </a:rPr>
-              <a:t>·</a:t>
-            </a:r>
-            <a:endParaRPr lang="en-US" sz="1600" dirty="0"/>
-          </a:p>
-        </p:txBody>
-      </p:sp>
-      <p:sp>
-        <p:nvSpPr>
-          <p:cNvPr id="34" name="Shape 32"/>
-          <p:cNvSpPr/>
-          <p:nvPr/>
-        </p:nvSpPr>
-        <p:spPr>
-          <a:xfrm>
-            <a:off x="5230368" y="3364992"/>
-            <a:ext cx="1554480" cy="475488"/>
-          </a:xfrm>
-          <a:prstGeom prst="rect">
-            <a:avLst>
-              <a:gd name="adj" fmla="val 9615"/>
-            </a:avLst>
-          </a:prstGeom>
-          <a:solidFill>
-            <a:srgbClr val="FFFFFF"/>
-          </a:solidFill>
-          <a:ln w="12700">
-            <a:solidFill>
-              <a:srgbClr val="0D9488"/>
-            </a:solidFill>
-            <a:prstDash val="solid"/>
-          </a:ln>
-        </p:spPr>
-      </p:sp>
-      <p:sp>
-        <p:nvSpPr>
-          <p:cNvPr id="35" name="Text 33"/>
-          <p:cNvSpPr/>
-          <p:nvPr/>
-        </p:nvSpPr>
-        <p:spPr>
-          <a:xfrm>
-            <a:off x="5230368" y="3364992"/>
-            <a:ext cx="1554480" cy="475488"/>
-          </a:xfrm>
-          <a:prstGeom prst="rect">
-            <a:avLst/>
-          </a:prstGeom>
-          <a:noFill/>
-          <a:ln/>
-        </p:spPr>
-        <p:txBody>
-          <a:bodyPr wrap="square" lIns="0" tIns="0" rIns="0" bIns="0" rtlCol="0" anchor="ctr"/>
-          <a:lstStyle/>
-          <a:p>
-            <a:pPr algn="ctr" indent="0" marL="0">
-              <a:buNone/>
-            </a:pPr>
-            <a:r>
-              <a:rPr lang="en-US" sz="1400" b="1" dirty="0">
-                <a:solidFill>
-                  <a:srgbClr val="0D9488"/>
-                </a:solidFill>
-                <a:latin typeface="Trebuchet MS" pitchFamily="34" charset="0"/>
-                <a:ea typeface="Trebuchet MS" pitchFamily="34" charset="-122"/>
-                <a:cs typeface="Trebuchet MS" pitchFamily="34" charset="-120"/>
-              </a:rPr>
-              <a:t>point</a:t>
-            </a:r>
-            <a:endParaRPr lang="en-US" sz="1400" dirty="0"/>
-          </a:p>
-        </p:txBody>
-      </p:sp>
-      <p:sp>
-        <p:nvSpPr>
-          <p:cNvPr id="36" name="Text 34"/>
-          <p:cNvSpPr/>
-          <p:nvPr/>
-        </p:nvSpPr>
-        <p:spPr>
-          <a:xfrm>
-            <a:off x="6784848" y="3364992"/>
-            <a:ext cx="73152" cy="475488"/>
-          </a:xfrm>
-          <a:prstGeom prst="rect">
-            <a:avLst/>
-          </a:prstGeom>
-          <a:noFill/>
-          <a:ln/>
-        </p:spPr>
-        <p:txBody>
-          <a:bodyPr wrap="square" lIns="0" tIns="0" rIns="0" bIns="0" rtlCol="0" anchor="ctr"/>
-          <a:lstStyle/>
-          <a:p>
-            <a:pPr algn="ctr" indent="0" marL="0">
-              <a:buNone/>
-            </a:pPr>
-            <a:r>
-              <a:rPr lang="en-US" sz="1600" b="1" dirty="0">
-                <a:solidFill>
-                  <a:srgbClr val="0D9488"/>
-                </a:solidFill>
-                <a:latin typeface="Trebuchet MS" pitchFamily="34" charset="0"/>
-                <a:ea typeface="Trebuchet MS" pitchFamily="34" charset="-122"/>
-                <a:cs typeface="Trebuchet MS" pitchFamily="34" charset="-120"/>
-              </a:rPr>
-              <a:t>·</a:t>
-            </a:r>
-            <a:endParaRPr lang="en-US" sz="1600" dirty="0"/>
-          </a:p>
-        </p:txBody>
-      </p:sp>
-      <p:sp>
-        <p:nvSpPr>
-          <p:cNvPr id="37" name="Shape 35"/>
-          <p:cNvSpPr/>
-          <p:nvPr/>
-        </p:nvSpPr>
-        <p:spPr>
-          <a:xfrm>
-            <a:off x="6858000" y="3364992"/>
-            <a:ext cx="1554480" cy="475488"/>
-          </a:xfrm>
-          <a:prstGeom prst="rect">
-            <a:avLst>
-              <a:gd name="adj" fmla="val 9615"/>
-            </a:avLst>
-          </a:prstGeom>
-          <a:solidFill>
-            <a:srgbClr val="FFFFFF"/>
-          </a:solidFill>
-          <a:ln w="12700">
-            <a:solidFill>
-              <a:srgbClr val="0D9488"/>
-            </a:solidFill>
-            <a:prstDash val="solid"/>
-          </a:ln>
-        </p:spPr>
-      </p:sp>
-      <p:sp>
-        <p:nvSpPr>
-          <p:cNvPr id="38" name="Text 36"/>
-          <p:cNvSpPr/>
-          <p:nvPr/>
-        </p:nvSpPr>
-        <p:spPr>
-          <a:xfrm>
-            <a:off x="6858000" y="3364992"/>
-            <a:ext cx="1554480" cy="475488"/>
-          </a:xfrm>
-          <a:prstGeom prst="rect">
-            <a:avLst/>
-          </a:prstGeom>
-          <a:noFill/>
-          <a:ln/>
-        </p:spPr>
-        <p:txBody>
-          <a:bodyPr wrap="square" lIns="0" tIns="0" rIns="0" bIns="0" rtlCol="0" anchor="ctr"/>
-          <a:lstStyle/>
-          <a:p>
-            <a:pPr algn="ctr" indent="0" marL="0">
-              <a:buNone/>
-            </a:pPr>
-            <a:r>
-              <a:rPr lang="en-US" sz="1400" b="1" dirty="0">
-                <a:solidFill>
-                  <a:srgbClr val="0D9488"/>
-                </a:solidFill>
-                <a:latin typeface="Trebuchet MS" pitchFamily="34" charset="0"/>
-                <a:ea typeface="Trebuchet MS" pitchFamily="34" charset="-122"/>
-                <a:cs typeface="Trebuchet MS" pitchFamily="34" charset="-120"/>
-              </a:rPr>
-              <a:t>ment</a:t>
-            </a:r>
-            <a:endParaRPr lang="en-US" sz="1400" dirty="0"/>
-          </a:p>
-        </p:txBody>
-      </p:sp>
-      <p:sp>
-        <p:nvSpPr>
-          <p:cNvPr id="39" name="Shape 37"/>
-          <p:cNvSpPr/>
-          <p:nvPr/>
-        </p:nvSpPr>
-        <p:spPr>
-          <a:xfrm>
-            <a:off x="365760" y="4096512"/>
-            <a:ext cx="1371600" cy="804672"/>
+              <a:t>Phonemes</a:t>
+            </a:r>
+            <a:endParaRPr lang="en-US" sz="1100" dirty="0"/>
+          </a:p>
+        </p:txBody>
+      </p:sp>
+      <p:sp>
+        <p:nvSpPr>
+          <p:cNvPr id="35" name="Shape 33"/>
+          <p:cNvSpPr/>
+          <p:nvPr/>
+        </p:nvSpPr>
+        <p:spPr>
+          <a:xfrm>
+            <a:off x="1874520" y="4096512"/>
+            <a:ext cx="6903720" cy="804672"/>
           </a:xfrm>
           <a:prstGeom prst="rect">
             <a:avLst>
@@ -31655,85 +31934,19 @@
             </a:avLst>
           </a:prstGeom>
           <a:solidFill>
-            <a:srgbClr val="E2E8F0"/>
+            <a:srgbClr val="F8FAFC"/>
           </a:solidFill>
           <a:ln w="12700">
             <a:solidFill>
               <a:srgbClr val="E2E8F0"/>
             </a:solidFill>
-            <a:prstDash val="solid"/>
-          </a:ln>
-        </p:spPr>
-      </p:sp>
-      <p:sp>
-        <p:nvSpPr>
-          <p:cNvPr id="40" name="Text 38"/>
-          <p:cNvSpPr/>
-          <p:nvPr/>
-        </p:nvSpPr>
-        <p:spPr>
-          <a:xfrm>
-            <a:off x="365760" y="4096512"/>
-            <a:ext cx="1371600" cy="804672"/>
-          </a:xfrm>
-          <a:prstGeom prst="rect">
-            <a:avLst/>
-          </a:prstGeom>
-          <a:noFill/>
-          <a:ln/>
-        </p:spPr>
-        <p:txBody>
-          <a:bodyPr wrap="square" lIns="0" tIns="0" rIns="0" bIns="0" rtlCol="0" anchor="ctr"/>
-          <a:lstStyle/>
-          <a:p>
-            <a:pPr algn="ctr" indent="0" marL="0">
-              <a:buNone/>
-            </a:pPr>
-            <a:r>
-              <a:rPr lang="en-US" sz="1100" b="1" dirty="0">
-                <a:solidFill>
-                  <a:srgbClr val="475569"/>
-                </a:solidFill>
-                <a:latin typeface="Trebuchet MS" pitchFamily="34" charset="0"/>
-                <a:ea typeface="Trebuchet MS" pitchFamily="34" charset="-122"/>
-                <a:cs typeface="Trebuchet MS" pitchFamily="34" charset="-120"/>
-              </a:rPr>
-              <a:t>Phonemes</a:t>
-            </a:r>
-            <a:endParaRPr lang="en-US" sz="1100" dirty="0"/>
-          </a:p>
-        </p:txBody>
-      </p:sp>
-      <p:sp>
-        <p:nvSpPr>
-          <p:cNvPr id="41" name="Shape 39"/>
-          <p:cNvSpPr/>
-          <p:nvPr/>
-        </p:nvSpPr>
-        <p:spPr>
-          <a:xfrm>
-            <a:off x="1874520" y="4096512"/>
-            <a:ext cx="6903720" cy="804672"/>
-          </a:xfrm>
-          <a:prstGeom prst="rect">
-            <a:avLst>
-              <a:gd name="adj" fmla="val 6818"/>
-            </a:avLst>
-          </a:prstGeom>
-          <a:solidFill>
-            <a:srgbClr val="F8FAFC"/>
-          </a:solidFill>
-          <a:ln w="12700">
-            <a:solidFill>
-              <a:srgbClr val="E2E8F0"/>
-            </a:solidFill>
             <a:prstDash val="dash"/>
           </a:ln>
         </p:spPr>
       </p:sp>
       <p:sp>
         <p:nvSpPr>
-          <p:cNvPr id="42" name="Text 40"/>
+          <p:cNvPr id="36" name="Text 34"/>
           <p:cNvSpPr/>
           <p:nvPr/>
         </p:nvSpPr>
@@ -32195,7 +32408,7 @@
                 <a:ea typeface="Trebuchet MS" pitchFamily="34" charset="-122"/>
                 <a:cs typeface="Trebuchet MS" pitchFamily="34" charset="-120"/>
               </a:rPr>
-              <a:t>disappointment</a:t>
+              <a:t>disappear</a:t>
             </a:r>
             <a:endParaRPr lang="en-US" sz="2800" dirty="0"/>
           </a:p>
@@ -32275,7 +32488,7 @@
         </p:nvSpPr>
         <p:spPr>
           <a:xfrm>
-            <a:off x="2221992" y="2258568"/>
+            <a:off x="2938272" y="2258568"/>
             <a:ext cx="1828800" cy="292608"/>
           </a:xfrm>
           <a:prstGeom prst="rect">
@@ -32309,7 +32522,7 @@
         </p:nvSpPr>
         <p:spPr>
           <a:xfrm>
-            <a:off x="2221992" y="2258568"/>
+            <a:off x="2938272" y="2258568"/>
             <a:ext cx="1828800" cy="292608"/>
           </a:xfrm>
           <a:prstGeom prst="rect">
@@ -32348,7 +32561,7 @@
         </p:nvSpPr>
         <p:spPr>
           <a:xfrm>
-            <a:off x="2221992" y="2569464"/>
+            <a:off x="2938272" y="2569464"/>
             <a:ext cx="1828800" cy="201168"/>
           </a:xfrm>
           <a:prstGeom prst="rect">
@@ -32387,7 +32600,7 @@
         </p:nvSpPr>
         <p:spPr>
           <a:xfrm>
-            <a:off x="4370832" y="2258568"/>
+            <a:off x="5803392" y="2258568"/>
             <a:ext cx="1828800" cy="292608"/>
           </a:xfrm>
           <a:prstGeom prst="rect">
@@ -32421,7 +32634,7 @@
         </p:nvSpPr>
         <p:spPr>
           <a:xfrm>
-            <a:off x="4370832" y="2258568"/>
+            <a:off x="5803392" y="2258568"/>
             <a:ext cx="1828800" cy="292608"/>
           </a:xfrm>
           <a:prstGeom prst="rect">
@@ -32446,7 +32659,7 @@
                 <a:ea typeface="Trebuchet MS" pitchFamily="34" charset="-122"/>
                 <a:cs typeface="Trebuchet MS" pitchFamily="34" charset="-120"/>
               </a:rPr>
-              <a:t>appoint</a:t>
+              <a:t>appear</a:t>
             </a:r>
             <a:endParaRPr lang="en-US" sz="1300" dirty="0"/>
           </a:p>
@@ -32460,7 +32673,7 @@
         </p:nvSpPr>
         <p:spPr>
           <a:xfrm>
-            <a:off x="4370832" y="2569464"/>
+            <a:off x="5803392" y="2569464"/>
             <a:ext cx="1828800" cy="201168"/>
           </a:xfrm>
           <a:prstGeom prst="rect">
@@ -32485,7 +32698,7 @@
                 <a:ea typeface="Calibri" pitchFamily="34" charset="-122"/>
                 <a:cs typeface="Calibri" pitchFamily="34" charset="-120"/>
               </a:rPr>
-              <a:t>to arrange or set up</a:t>
+              <a:t>to come into sight</a:t>
             </a:r>
             <a:endParaRPr lang="en-US" sz="850" dirty="0"/>
           </a:p>
@@ -32499,30 +32712,23 @@
         </p:nvSpPr>
         <p:spPr>
           <a:xfrm>
-            <a:off x="6519672" y="2258568"/>
-            <a:ext cx="1828800" cy="292608"/>
+            <a:off x="365760" y="3273552"/>
+            <a:ext cx="1371600" cy="658368"/>
           </a:xfrm>
           <a:prstGeom prst="rect">
             <a:avLst>
-              <a:gd name="adj" fmla="val 25000"/>
+              <a:gd name="adj" fmla="val 8333"/>
             </a:avLst>
           </a:prstGeom>
           <a:solidFill>
-            <a:srgbClr val="FCE7F3"/>
-          </a:solidFill>
-          <a:ln w="19050">
-            <a:solidFill>
-              <a:srgbClr val="DB2777"/>
-            </a:solidFill>
-            <a:prstDash val="solid"/>
-          </a:ln>
-          <a:effectLst>
-            <a:outerShdw sx="100000" sy="100000" kx="0" ky="0" algn="bl" rotWithShape="0" blurRad="101600" dist="38100" dir="8100000">
-              <a:srgbClr val="000000">
-                <a:alpha val="12000"/>
-              </a:srgbClr>
-            </a:outerShdw>
-          </a:effectLst>
+            <a:srgbClr val="E2E8F0"/>
+          </a:solidFill>
+          <a:ln w="12700">
+            <a:solidFill>
+              <a:srgbClr val="E2E8F0"/>
+            </a:solidFill>
+            <a:prstDash val="solid"/>
+          </a:ln>
         </p:spPr>
       </p:sp>
       <p:sp>
@@ -32533,47 +32739,839 @@
         </p:nvSpPr>
         <p:spPr>
           <a:xfrm>
-            <a:off x="6519672" y="2258568"/>
-            <a:ext cx="1828800" cy="292608"/>
-          </a:xfrm>
-          <a:prstGeom prst="rect">
-            <a:avLst/>
-          </a:prstGeom>
-          <a:noFill/>
-          <a:ln/>
-        </p:spPr>
-        <p:txBody>
-          <a:bodyPr wrap="square" lIns="0" tIns="0" rIns="0" bIns="0" rtlCol="0" anchor="ctr"/>
-          <a:lstStyle/>
-          <a:p>
-            <a:pPr algn="ctr" indent="0" marL="0">
-              <a:buNone/>
-            </a:pPr>
-            <a:r>
-              <a:rPr lang="en-US" sz="1300" b="1" dirty="0">
-                <a:solidFill>
-                  <a:srgbClr val="9D174D"/>
+            <a:off x="365760" y="3273552"/>
+            <a:ext cx="1371600" cy="658368"/>
+          </a:xfrm>
+          <a:prstGeom prst="rect">
+            <a:avLst/>
+          </a:prstGeom>
+          <a:noFill/>
+          <a:ln/>
+        </p:spPr>
+        <p:txBody>
+          <a:bodyPr wrap="square" lIns="0" tIns="0" rIns="0" bIns="0" rtlCol="0" anchor="ctr"/>
+          <a:lstStyle/>
+          <a:p>
+            <a:pPr algn="ctr" indent="0" marL="0">
+              <a:buNone/>
+            </a:pPr>
+            <a:r>
+              <a:rPr lang="en-US" sz="1100" b="1" dirty="0">
+                <a:solidFill>
+                  <a:srgbClr val="475569"/>
                 </a:solidFill>
                 <a:latin typeface="Trebuchet MS" pitchFamily="34" charset="0"/>
                 <a:ea typeface="Trebuchet MS" pitchFamily="34" charset="-122"/>
                 <a:cs typeface="Trebuchet MS" pitchFamily="34" charset="-120"/>
               </a:rPr>
-              <a:t>ment</a:t>
-            </a:r>
-            <a:endParaRPr lang="en-US" sz="1300" dirty="0"/>
-          </a:p>
-        </p:txBody>
-      </p:sp>
-      <p:sp>
-        <p:nvSpPr>
-          <p:cNvPr id="24" name="Text 22"/>
-          <p:cNvSpPr/>
-          <p:nvPr/>
-        </p:nvSpPr>
-        <p:spPr>
-          <a:xfrm>
-            <a:off x="6519672" y="2569464"/>
-            <a:ext cx="1828800" cy="201168"/>
+              <a:t>Syllables</a:t>
+            </a:r>
+            <a:endParaRPr lang="en-US" sz="1100" dirty="0"/>
+          </a:p>
+        </p:txBody>
+      </p:sp>
+      <p:sp>
+        <p:nvSpPr>
+          <p:cNvPr id="24" name="Shape 22"/>
+          <p:cNvSpPr/>
+          <p:nvPr/>
+        </p:nvSpPr>
+        <p:spPr>
+          <a:xfrm>
+            <a:off x="1874520" y="3273552"/>
+            <a:ext cx="6903720" cy="658368"/>
+          </a:xfrm>
+          <a:prstGeom prst="rect">
+            <a:avLst>
+              <a:gd name="adj" fmla="val 8333"/>
+            </a:avLst>
+          </a:prstGeom>
+          <a:solidFill>
+            <a:srgbClr val="CCFBF1"/>
+          </a:solidFill>
+          <a:ln w="12700">
+            <a:solidFill>
+              <a:srgbClr val="0D9488"/>
+            </a:solidFill>
+            <a:prstDash val="solid"/>
+          </a:ln>
+        </p:spPr>
+      </p:sp>
+      <p:sp>
+        <p:nvSpPr>
+          <p:cNvPr id="25" name="Shape 23"/>
+          <p:cNvSpPr/>
+          <p:nvPr/>
+        </p:nvSpPr>
+        <p:spPr>
+          <a:xfrm>
+            <a:off x="2313432" y="3364992"/>
+            <a:ext cx="1645920" cy="475488"/>
+          </a:xfrm>
+          <a:prstGeom prst="rect">
+            <a:avLst>
+              <a:gd name="adj" fmla="val 9615"/>
+            </a:avLst>
+          </a:prstGeom>
+          <a:solidFill>
+            <a:srgbClr val="FFFFFF"/>
+          </a:solidFill>
+          <a:ln w="12700">
+            <a:solidFill>
+              <a:srgbClr val="0D9488"/>
+            </a:solidFill>
+            <a:prstDash val="solid"/>
+          </a:ln>
+        </p:spPr>
+      </p:sp>
+      <p:sp>
+        <p:nvSpPr>
+          <p:cNvPr id="26" name="Text 24"/>
+          <p:cNvSpPr/>
+          <p:nvPr/>
+        </p:nvSpPr>
+        <p:spPr>
+          <a:xfrm>
+            <a:off x="2313432" y="3364992"/>
+            <a:ext cx="1645920" cy="475488"/>
+          </a:xfrm>
+          <a:prstGeom prst="rect">
+            <a:avLst/>
+          </a:prstGeom>
+          <a:noFill/>
+          <a:ln/>
+        </p:spPr>
+        <p:txBody>
+          <a:bodyPr wrap="square" lIns="0" tIns="0" rIns="0" bIns="0" rtlCol="0" anchor="ctr"/>
+          <a:lstStyle/>
+          <a:p>
+            <a:pPr algn="ctr" indent="0" marL="0">
+              <a:buNone/>
+            </a:pPr>
+            <a:r>
+              <a:rPr lang="en-US" sz="1400" b="1" dirty="0">
+                <a:solidFill>
+                  <a:srgbClr val="0D9488"/>
+                </a:solidFill>
+                <a:latin typeface="Trebuchet MS" pitchFamily="34" charset="0"/>
+                <a:ea typeface="Trebuchet MS" pitchFamily="34" charset="-122"/>
+                <a:cs typeface="Trebuchet MS" pitchFamily="34" charset="-120"/>
+              </a:rPr>
+              <a:t>dis</a:t>
+            </a:r>
+            <a:endParaRPr lang="en-US" sz="1400" dirty="0"/>
+          </a:p>
+        </p:txBody>
+      </p:sp>
+      <p:sp>
+        <p:nvSpPr>
+          <p:cNvPr id="27" name="Text 25"/>
+          <p:cNvSpPr/>
+          <p:nvPr/>
+        </p:nvSpPr>
+        <p:spPr>
+          <a:xfrm>
+            <a:off x="3959352" y="3364992"/>
+            <a:ext cx="411480" cy="475488"/>
+          </a:xfrm>
+          <a:prstGeom prst="rect">
+            <a:avLst/>
+          </a:prstGeom>
+          <a:noFill/>
+          <a:ln/>
+        </p:spPr>
+        <p:txBody>
+          <a:bodyPr wrap="square" lIns="0" tIns="0" rIns="0" bIns="0" rtlCol="0" anchor="ctr"/>
+          <a:lstStyle/>
+          <a:p>
+            <a:pPr algn="ctr" indent="0" marL="0">
+              <a:buNone/>
+            </a:pPr>
+            <a:r>
+              <a:rPr lang="en-US" sz="1600" b="1" dirty="0">
+                <a:solidFill>
+                  <a:srgbClr val="0D9488"/>
+                </a:solidFill>
+                <a:latin typeface="Trebuchet MS" pitchFamily="34" charset="0"/>
+                <a:ea typeface="Trebuchet MS" pitchFamily="34" charset="-122"/>
+                <a:cs typeface="Trebuchet MS" pitchFamily="34" charset="-120"/>
+              </a:rPr>
+              <a:t>·</a:t>
+            </a:r>
+            <a:endParaRPr lang="en-US" sz="1600" dirty="0"/>
+          </a:p>
+        </p:txBody>
+      </p:sp>
+      <p:sp>
+        <p:nvSpPr>
+          <p:cNvPr id="28" name="Shape 26"/>
+          <p:cNvSpPr/>
+          <p:nvPr/>
+        </p:nvSpPr>
+        <p:spPr>
+          <a:xfrm>
+            <a:off x="4370832" y="3364992"/>
+            <a:ext cx="1645920" cy="475488"/>
+          </a:xfrm>
+          <a:prstGeom prst="rect">
+            <a:avLst>
+              <a:gd name="adj" fmla="val 9615"/>
+            </a:avLst>
+          </a:prstGeom>
+          <a:solidFill>
+            <a:srgbClr val="FFFFFF"/>
+          </a:solidFill>
+          <a:ln w="12700">
+            <a:solidFill>
+              <a:srgbClr val="0D9488"/>
+            </a:solidFill>
+            <a:prstDash val="solid"/>
+          </a:ln>
+        </p:spPr>
+      </p:sp>
+      <p:sp>
+        <p:nvSpPr>
+          <p:cNvPr id="29" name="Text 27"/>
+          <p:cNvSpPr/>
+          <p:nvPr/>
+        </p:nvSpPr>
+        <p:spPr>
+          <a:xfrm>
+            <a:off x="4370832" y="3364992"/>
+            <a:ext cx="1645920" cy="475488"/>
+          </a:xfrm>
+          <a:prstGeom prst="rect">
+            <a:avLst/>
+          </a:prstGeom>
+          <a:noFill/>
+          <a:ln/>
+        </p:spPr>
+        <p:txBody>
+          <a:bodyPr wrap="square" lIns="0" tIns="0" rIns="0" bIns="0" rtlCol="0" anchor="ctr"/>
+          <a:lstStyle/>
+          <a:p>
+            <a:pPr algn="ctr" indent="0" marL="0">
+              <a:buNone/>
+            </a:pPr>
+            <a:r>
+              <a:rPr lang="en-US" sz="1400" b="1" dirty="0">
+                <a:solidFill>
+                  <a:srgbClr val="0D9488"/>
+                </a:solidFill>
+                <a:latin typeface="Trebuchet MS" pitchFamily="34" charset="0"/>
+                <a:ea typeface="Trebuchet MS" pitchFamily="34" charset="-122"/>
+                <a:cs typeface="Trebuchet MS" pitchFamily="34" charset="-120"/>
+              </a:rPr>
+              <a:t>ap</a:t>
+            </a:r>
+            <a:endParaRPr lang="en-US" sz="1400" dirty="0"/>
+          </a:p>
+        </p:txBody>
+      </p:sp>
+      <p:sp>
+        <p:nvSpPr>
+          <p:cNvPr id="30" name="Text 28"/>
+          <p:cNvSpPr/>
+          <p:nvPr/>
+        </p:nvSpPr>
+        <p:spPr>
+          <a:xfrm>
+            <a:off x="6016752" y="3364992"/>
+            <a:ext cx="411480" cy="475488"/>
+          </a:xfrm>
+          <a:prstGeom prst="rect">
+            <a:avLst/>
+          </a:prstGeom>
+          <a:noFill/>
+          <a:ln/>
+        </p:spPr>
+        <p:txBody>
+          <a:bodyPr wrap="square" lIns="0" tIns="0" rIns="0" bIns="0" rtlCol="0" anchor="ctr"/>
+          <a:lstStyle/>
+          <a:p>
+            <a:pPr algn="ctr" indent="0" marL="0">
+              <a:buNone/>
+            </a:pPr>
+            <a:r>
+              <a:rPr lang="en-US" sz="1600" b="1" dirty="0">
+                <a:solidFill>
+                  <a:srgbClr val="0D9488"/>
+                </a:solidFill>
+                <a:latin typeface="Trebuchet MS" pitchFamily="34" charset="0"/>
+                <a:ea typeface="Trebuchet MS" pitchFamily="34" charset="-122"/>
+                <a:cs typeface="Trebuchet MS" pitchFamily="34" charset="-120"/>
+              </a:rPr>
+              <a:t>·</a:t>
+            </a:r>
+            <a:endParaRPr lang="en-US" sz="1600" dirty="0"/>
+          </a:p>
+        </p:txBody>
+      </p:sp>
+      <p:sp>
+        <p:nvSpPr>
+          <p:cNvPr id="31" name="Shape 29"/>
+          <p:cNvSpPr/>
+          <p:nvPr/>
+        </p:nvSpPr>
+        <p:spPr>
+          <a:xfrm>
+            <a:off x="6428232" y="3364992"/>
+            <a:ext cx="1645920" cy="475488"/>
+          </a:xfrm>
+          <a:prstGeom prst="rect">
+            <a:avLst>
+              <a:gd name="adj" fmla="val 9615"/>
+            </a:avLst>
+          </a:prstGeom>
+          <a:solidFill>
+            <a:srgbClr val="FFFFFF"/>
+          </a:solidFill>
+          <a:ln w="12700">
+            <a:solidFill>
+              <a:srgbClr val="0D9488"/>
+            </a:solidFill>
+            <a:prstDash val="solid"/>
+          </a:ln>
+        </p:spPr>
+      </p:sp>
+      <p:sp>
+        <p:nvSpPr>
+          <p:cNvPr id="32" name="Text 30"/>
+          <p:cNvSpPr/>
+          <p:nvPr/>
+        </p:nvSpPr>
+        <p:spPr>
+          <a:xfrm>
+            <a:off x="6428232" y="3364992"/>
+            <a:ext cx="1645920" cy="475488"/>
+          </a:xfrm>
+          <a:prstGeom prst="rect">
+            <a:avLst/>
+          </a:prstGeom>
+          <a:noFill/>
+          <a:ln/>
+        </p:spPr>
+        <p:txBody>
+          <a:bodyPr wrap="square" lIns="0" tIns="0" rIns="0" bIns="0" rtlCol="0" anchor="ctr"/>
+          <a:lstStyle/>
+          <a:p>
+            <a:pPr algn="ctr" indent="0" marL="0">
+              <a:buNone/>
+            </a:pPr>
+            <a:r>
+              <a:rPr lang="en-US" sz="1400" b="1" dirty="0">
+                <a:solidFill>
+                  <a:srgbClr val="0D9488"/>
+                </a:solidFill>
+                <a:latin typeface="Trebuchet MS" pitchFamily="34" charset="0"/>
+                <a:ea typeface="Trebuchet MS" pitchFamily="34" charset="-122"/>
+                <a:cs typeface="Trebuchet MS" pitchFamily="34" charset="-120"/>
+              </a:rPr>
+              <a:t>pear</a:t>
+            </a:r>
+            <a:endParaRPr lang="en-US" sz="1400" dirty="0"/>
+          </a:p>
+        </p:txBody>
+      </p:sp>
+      <p:sp>
+        <p:nvSpPr>
+          <p:cNvPr id="33" name="Shape 31"/>
+          <p:cNvSpPr/>
+          <p:nvPr/>
+        </p:nvSpPr>
+        <p:spPr>
+          <a:xfrm>
+            <a:off x="365760" y="4096512"/>
+            <a:ext cx="1371600" cy="804672"/>
+          </a:xfrm>
+          <a:prstGeom prst="rect">
+            <a:avLst>
+              <a:gd name="adj" fmla="val 6818"/>
+            </a:avLst>
+          </a:prstGeom>
+          <a:solidFill>
+            <a:srgbClr val="E2E8F0"/>
+          </a:solidFill>
+          <a:ln w="12700">
+            <a:solidFill>
+              <a:srgbClr val="E2E8F0"/>
+            </a:solidFill>
+            <a:prstDash val="solid"/>
+          </a:ln>
+        </p:spPr>
+      </p:sp>
+      <p:sp>
+        <p:nvSpPr>
+          <p:cNvPr id="34" name="Text 32"/>
+          <p:cNvSpPr/>
+          <p:nvPr/>
+        </p:nvSpPr>
+        <p:spPr>
+          <a:xfrm>
+            <a:off x="365760" y="4096512"/>
+            <a:ext cx="1371600" cy="804672"/>
+          </a:xfrm>
+          <a:prstGeom prst="rect">
+            <a:avLst/>
+          </a:prstGeom>
+          <a:noFill/>
+          <a:ln/>
+        </p:spPr>
+        <p:txBody>
+          <a:bodyPr wrap="square" lIns="0" tIns="0" rIns="0" bIns="0" rtlCol="0" anchor="ctr"/>
+          <a:lstStyle/>
+          <a:p>
+            <a:pPr algn="ctr" indent="0" marL="0">
+              <a:buNone/>
+            </a:pPr>
+            <a:r>
+              <a:rPr lang="en-US" sz="1100" b="1" dirty="0">
+                <a:solidFill>
+                  <a:srgbClr val="475569"/>
+                </a:solidFill>
+                <a:latin typeface="Trebuchet MS" pitchFamily="34" charset="0"/>
+                <a:ea typeface="Trebuchet MS" pitchFamily="34" charset="-122"/>
+                <a:cs typeface="Trebuchet MS" pitchFamily="34" charset="-120"/>
+              </a:rPr>
+              <a:t>Phonemes</a:t>
+            </a:r>
+            <a:endParaRPr lang="en-US" sz="1100" dirty="0"/>
+          </a:p>
+        </p:txBody>
+      </p:sp>
+      <p:sp>
+        <p:nvSpPr>
+          <p:cNvPr id="35" name="Shape 33"/>
+          <p:cNvSpPr/>
+          <p:nvPr/>
+        </p:nvSpPr>
+        <p:spPr>
+          <a:xfrm>
+            <a:off x="1874520" y="4096512"/>
+            <a:ext cx="6903720" cy="804672"/>
+          </a:xfrm>
+          <a:prstGeom prst="rect">
+            <a:avLst>
+              <a:gd name="adj" fmla="val 6818"/>
+            </a:avLst>
+          </a:prstGeom>
+          <a:solidFill>
+            <a:srgbClr val="FCE7F3"/>
+          </a:solidFill>
+          <a:ln w="12700">
+            <a:solidFill>
+              <a:srgbClr val="DB2777"/>
+            </a:solidFill>
+            <a:prstDash val="solid"/>
+          </a:ln>
+        </p:spPr>
+      </p:sp>
+      <p:sp>
+        <p:nvSpPr>
+          <p:cNvPr id="36" name="Shape 34"/>
+          <p:cNvSpPr/>
+          <p:nvPr/>
+        </p:nvSpPr>
+        <p:spPr>
+          <a:xfrm>
+            <a:off x="2254649" y="4169664"/>
+            <a:ext cx="685800" cy="384048"/>
+          </a:xfrm>
+          <a:prstGeom prst="rect">
+            <a:avLst>
+              <a:gd name="adj" fmla="val 9524"/>
+            </a:avLst>
+          </a:prstGeom>
+          <a:solidFill>
+            <a:srgbClr val="FFFFFF"/>
+          </a:solidFill>
+          <a:ln w="12700">
+            <a:solidFill>
+              <a:srgbClr val="DB2777"/>
+            </a:solidFill>
+            <a:prstDash val="solid"/>
+          </a:ln>
+        </p:spPr>
+      </p:sp>
+      <p:sp>
+        <p:nvSpPr>
+          <p:cNvPr id="37" name="Text 35"/>
+          <p:cNvSpPr/>
+          <p:nvPr/>
+        </p:nvSpPr>
+        <p:spPr>
+          <a:xfrm>
+            <a:off x="2254649" y="4169664"/>
+            <a:ext cx="685800" cy="384048"/>
+          </a:xfrm>
+          <a:prstGeom prst="rect">
+            <a:avLst/>
+          </a:prstGeom>
+          <a:noFill/>
+          <a:ln/>
+        </p:spPr>
+        <p:txBody>
+          <a:bodyPr wrap="square" lIns="0" tIns="0" rIns="0" bIns="0" rtlCol="0" anchor="ctr"/>
+          <a:lstStyle/>
+          <a:p>
+            <a:pPr algn="ctr" indent="0" marL="0">
+              <a:buNone/>
+            </a:pPr>
+            <a:r>
+              <a:rPr lang="en-US" sz="900" b="1" dirty="0">
+                <a:solidFill>
+                  <a:srgbClr val="9D174D"/>
+                </a:solidFill>
+                <a:latin typeface="Trebuchet MS" pitchFamily="34" charset="0"/>
+                <a:ea typeface="Trebuchet MS" pitchFamily="34" charset="-122"/>
+                <a:cs typeface="Trebuchet MS" pitchFamily="34" charset="-120"/>
+              </a:rPr>
+              <a:t>d</a:t>
+            </a:r>
+            <a:endParaRPr lang="en-US" sz="900" dirty="0"/>
+          </a:p>
+        </p:txBody>
+      </p:sp>
+      <p:sp>
+        <p:nvSpPr>
+          <p:cNvPr id="38" name="Shape 36"/>
+          <p:cNvSpPr/>
+          <p:nvPr/>
+        </p:nvSpPr>
+        <p:spPr>
+          <a:xfrm>
+            <a:off x="3293146" y="4169664"/>
+            <a:ext cx="685800" cy="384048"/>
+          </a:xfrm>
+          <a:prstGeom prst="rect">
+            <a:avLst>
+              <a:gd name="adj" fmla="val 9524"/>
+            </a:avLst>
+          </a:prstGeom>
+          <a:solidFill>
+            <a:srgbClr val="FFFFFF"/>
+          </a:solidFill>
+          <a:ln w="12700">
+            <a:solidFill>
+              <a:srgbClr val="DB2777"/>
+            </a:solidFill>
+            <a:prstDash val="solid"/>
+          </a:ln>
+        </p:spPr>
+      </p:sp>
+      <p:sp>
+        <p:nvSpPr>
+          <p:cNvPr id="39" name="Text 37"/>
+          <p:cNvSpPr/>
+          <p:nvPr/>
+        </p:nvSpPr>
+        <p:spPr>
+          <a:xfrm>
+            <a:off x="3293146" y="4169664"/>
+            <a:ext cx="685800" cy="384048"/>
+          </a:xfrm>
+          <a:prstGeom prst="rect">
+            <a:avLst/>
+          </a:prstGeom>
+          <a:noFill/>
+          <a:ln/>
+        </p:spPr>
+        <p:txBody>
+          <a:bodyPr wrap="square" lIns="0" tIns="0" rIns="0" bIns="0" rtlCol="0" anchor="ctr"/>
+          <a:lstStyle/>
+          <a:p>
+            <a:pPr algn="ctr" indent="0" marL="0">
+              <a:buNone/>
+            </a:pPr>
+            <a:r>
+              <a:rPr lang="en-US" sz="900" b="1" dirty="0">
+                <a:solidFill>
+                  <a:srgbClr val="9D174D"/>
+                </a:solidFill>
+                <a:latin typeface="Trebuchet MS" pitchFamily="34" charset="0"/>
+                <a:ea typeface="Trebuchet MS" pitchFamily="34" charset="-122"/>
+                <a:cs typeface="Trebuchet MS" pitchFamily="34" charset="-120"/>
+              </a:rPr>
+              <a:t>i</a:t>
+            </a:r>
+            <a:endParaRPr lang="en-US" sz="900" dirty="0"/>
+          </a:p>
+        </p:txBody>
+      </p:sp>
+      <p:sp>
+        <p:nvSpPr>
+          <p:cNvPr id="40" name="Shape 38"/>
+          <p:cNvSpPr/>
+          <p:nvPr/>
+        </p:nvSpPr>
+        <p:spPr>
+          <a:xfrm>
+            <a:off x="4331643" y="4169664"/>
+            <a:ext cx="685800" cy="384048"/>
+          </a:xfrm>
+          <a:prstGeom prst="rect">
+            <a:avLst>
+              <a:gd name="adj" fmla="val 9524"/>
+            </a:avLst>
+          </a:prstGeom>
+          <a:solidFill>
+            <a:srgbClr val="FFFFFF"/>
+          </a:solidFill>
+          <a:ln w="12700">
+            <a:solidFill>
+              <a:srgbClr val="DB2777"/>
+            </a:solidFill>
+            <a:prstDash val="solid"/>
+          </a:ln>
+        </p:spPr>
+      </p:sp>
+      <p:sp>
+        <p:nvSpPr>
+          <p:cNvPr id="41" name="Text 39"/>
+          <p:cNvSpPr/>
+          <p:nvPr/>
+        </p:nvSpPr>
+        <p:spPr>
+          <a:xfrm>
+            <a:off x="4331643" y="4169664"/>
+            <a:ext cx="685800" cy="384048"/>
+          </a:xfrm>
+          <a:prstGeom prst="rect">
+            <a:avLst/>
+          </a:prstGeom>
+          <a:noFill/>
+          <a:ln/>
+        </p:spPr>
+        <p:txBody>
+          <a:bodyPr wrap="square" lIns="0" tIns="0" rIns="0" bIns="0" rtlCol="0" anchor="ctr"/>
+          <a:lstStyle/>
+          <a:p>
+            <a:pPr algn="ctr" indent="0" marL="0">
+              <a:buNone/>
+            </a:pPr>
+            <a:r>
+              <a:rPr lang="en-US" sz="900" b="1" dirty="0">
+                <a:solidFill>
+                  <a:srgbClr val="9D174D"/>
+                </a:solidFill>
+                <a:latin typeface="Trebuchet MS" pitchFamily="34" charset="0"/>
+                <a:ea typeface="Trebuchet MS" pitchFamily="34" charset="-122"/>
+                <a:cs typeface="Trebuchet MS" pitchFamily="34" charset="-120"/>
+              </a:rPr>
+              <a:t>s</a:t>
+            </a:r>
+            <a:endParaRPr lang="en-US" sz="900" dirty="0"/>
+          </a:p>
+        </p:txBody>
+      </p:sp>
+      <p:sp>
+        <p:nvSpPr>
+          <p:cNvPr id="42" name="Shape 40"/>
+          <p:cNvSpPr/>
+          <p:nvPr/>
+        </p:nvSpPr>
+        <p:spPr>
+          <a:xfrm>
+            <a:off x="5370141" y="4169664"/>
+            <a:ext cx="685800" cy="384048"/>
+          </a:xfrm>
+          <a:prstGeom prst="rect">
+            <a:avLst>
+              <a:gd name="adj" fmla="val 9524"/>
+            </a:avLst>
+          </a:prstGeom>
+          <a:solidFill>
+            <a:srgbClr val="FFFFFF"/>
+          </a:solidFill>
+          <a:ln w="12700">
+            <a:solidFill>
+              <a:srgbClr val="DB2777"/>
+            </a:solidFill>
+            <a:prstDash val="solid"/>
+          </a:ln>
+        </p:spPr>
+      </p:sp>
+      <p:sp>
+        <p:nvSpPr>
+          <p:cNvPr id="43" name="Text 41"/>
+          <p:cNvSpPr/>
+          <p:nvPr/>
+        </p:nvSpPr>
+        <p:spPr>
+          <a:xfrm>
+            <a:off x="5370141" y="4169664"/>
+            <a:ext cx="685800" cy="384048"/>
+          </a:xfrm>
+          <a:prstGeom prst="rect">
+            <a:avLst/>
+          </a:prstGeom>
+          <a:noFill/>
+          <a:ln/>
+        </p:spPr>
+        <p:txBody>
+          <a:bodyPr wrap="square" lIns="0" tIns="0" rIns="0" bIns="0" rtlCol="0" anchor="ctr"/>
+          <a:lstStyle/>
+          <a:p>
+            <a:pPr algn="ctr" indent="0" marL="0">
+              <a:buNone/>
+            </a:pPr>
+            <a:r>
+              <a:rPr lang="en-US" sz="900" b="1" dirty="0">
+                <a:solidFill>
+                  <a:srgbClr val="9D174D"/>
+                </a:solidFill>
+                <a:latin typeface="Trebuchet MS" pitchFamily="34" charset="0"/>
+                <a:ea typeface="Trebuchet MS" pitchFamily="34" charset="-122"/>
+                <a:cs typeface="Trebuchet MS" pitchFamily="34" charset="-120"/>
+              </a:rPr>
+              <a:t>a</a:t>
+            </a:r>
+            <a:endParaRPr lang="en-US" sz="900" dirty="0"/>
+          </a:p>
+        </p:txBody>
+      </p:sp>
+      <p:sp>
+        <p:nvSpPr>
+          <p:cNvPr id="44" name="Shape 42"/>
+          <p:cNvSpPr/>
+          <p:nvPr/>
+        </p:nvSpPr>
+        <p:spPr>
+          <a:xfrm>
+            <a:off x="6408638" y="4169664"/>
+            <a:ext cx="685800" cy="384048"/>
+          </a:xfrm>
+          <a:prstGeom prst="rect">
+            <a:avLst>
+              <a:gd name="adj" fmla="val 9524"/>
+            </a:avLst>
+          </a:prstGeom>
+          <a:solidFill>
+            <a:srgbClr val="FFFFFF"/>
+          </a:solidFill>
+          <a:ln w="12700">
+            <a:solidFill>
+              <a:srgbClr val="DB2777"/>
+            </a:solidFill>
+            <a:prstDash val="solid"/>
+          </a:ln>
+        </p:spPr>
+      </p:sp>
+      <p:sp>
+        <p:nvSpPr>
+          <p:cNvPr id="45" name="Text 43"/>
+          <p:cNvSpPr/>
+          <p:nvPr/>
+        </p:nvSpPr>
+        <p:spPr>
+          <a:xfrm>
+            <a:off x="6408638" y="4169664"/>
+            <a:ext cx="685800" cy="384048"/>
+          </a:xfrm>
+          <a:prstGeom prst="rect">
+            <a:avLst/>
+          </a:prstGeom>
+          <a:noFill/>
+          <a:ln/>
+        </p:spPr>
+        <p:txBody>
+          <a:bodyPr wrap="square" lIns="0" tIns="0" rIns="0" bIns="0" rtlCol="0" anchor="ctr"/>
+          <a:lstStyle/>
+          <a:p>
+            <a:pPr algn="ctr" indent="0" marL="0">
+              <a:buNone/>
+            </a:pPr>
+            <a:r>
+              <a:rPr lang="en-US" sz="900" b="1" dirty="0">
+                <a:solidFill>
+                  <a:srgbClr val="9D174D"/>
+                </a:solidFill>
+                <a:latin typeface="Trebuchet MS" pitchFamily="34" charset="0"/>
+                <a:ea typeface="Trebuchet MS" pitchFamily="34" charset="-122"/>
+                <a:cs typeface="Trebuchet MS" pitchFamily="34" charset="-120"/>
+              </a:rPr>
+              <a:t>pp</a:t>
+            </a:r>
+            <a:endParaRPr lang="en-US" sz="900" dirty="0"/>
+          </a:p>
+        </p:txBody>
+      </p:sp>
+      <p:sp>
+        <p:nvSpPr>
+          <p:cNvPr id="46" name="Shape 44"/>
+          <p:cNvSpPr/>
+          <p:nvPr/>
+        </p:nvSpPr>
+        <p:spPr>
+          <a:xfrm>
+            <a:off x="7447135" y="4169664"/>
+            <a:ext cx="685800" cy="384048"/>
+          </a:xfrm>
+          <a:prstGeom prst="rect">
+            <a:avLst>
+              <a:gd name="adj" fmla="val 9524"/>
+            </a:avLst>
+          </a:prstGeom>
+          <a:solidFill>
+            <a:srgbClr val="FFFFFF"/>
+          </a:solidFill>
+          <a:ln w="12700">
+            <a:solidFill>
+              <a:srgbClr val="DB2777"/>
+            </a:solidFill>
+            <a:prstDash val="solid"/>
+          </a:ln>
+        </p:spPr>
+      </p:sp>
+      <p:sp>
+        <p:nvSpPr>
+          <p:cNvPr id="47" name="Text 45"/>
+          <p:cNvSpPr/>
+          <p:nvPr/>
+        </p:nvSpPr>
+        <p:spPr>
+          <a:xfrm>
+            <a:off x="7447135" y="4169664"/>
+            <a:ext cx="685800" cy="384048"/>
+          </a:xfrm>
+          <a:prstGeom prst="rect">
+            <a:avLst/>
+          </a:prstGeom>
+          <a:noFill/>
+          <a:ln/>
+        </p:spPr>
+        <p:txBody>
+          <a:bodyPr wrap="square" lIns="0" tIns="0" rIns="0" bIns="0" rtlCol="0" anchor="ctr"/>
+          <a:lstStyle/>
+          <a:p>
+            <a:pPr algn="ctr" indent="0" marL="0">
+              <a:buNone/>
+            </a:pPr>
+            <a:r>
+              <a:rPr lang="en-US" sz="900" b="1" dirty="0">
+                <a:solidFill>
+                  <a:srgbClr val="9D174D"/>
+                </a:solidFill>
+                <a:latin typeface="Trebuchet MS" pitchFamily="34" charset="0"/>
+                <a:ea typeface="Trebuchet MS" pitchFamily="34" charset="-122"/>
+                <a:cs typeface="Trebuchet MS" pitchFamily="34" charset="-120"/>
+              </a:rPr>
+              <a:t>ear</a:t>
+            </a:r>
+            <a:endParaRPr lang="en-US" sz="900" dirty="0"/>
+          </a:p>
+        </p:txBody>
+      </p:sp>
+      <p:sp>
+        <p:nvSpPr>
+          <p:cNvPr id="48" name="Text 46"/>
+          <p:cNvSpPr/>
+          <p:nvPr/>
+        </p:nvSpPr>
+        <p:spPr>
+          <a:xfrm>
+            <a:off x="7447135" y="4572000"/>
+            <a:ext cx="685800" cy="219456"/>
           </a:xfrm>
           <a:prstGeom prst="rect">
             <a:avLst/>
@@ -32589,1376 +33587,17 @@
               <a:buNone/>
             </a:pPr>
             <a:r>
-              <a:rPr lang="en-US" sz="850" dirty="0">
-                <a:solidFill>
-                  <a:srgbClr val="475569"/>
+              <a:rPr lang="en-US" sz="750" i="1" dirty="0">
+                <a:solidFill>
+                  <a:srgbClr val="94A3B8"/>
                 </a:solidFill>
                 <a:latin typeface="Calibri" pitchFamily="34" charset="0"/>
                 <a:ea typeface="Calibri" pitchFamily="34" charset="-122"/>
                 <a:cs typeface="Calibri" pitchFamily="34" charset="-120"/>
               </a:rPr>
-              <a:t>result or condition</a:t>
-            </a:r>
-            <a:endParaRPr lang="en-US" sz="850" dirty="0"/>
-          </a:p>
-        </p:txBody>
-      </p:sp>
-      <p:sp>
-        <p:nvSpPr>
-          <p:cNvPr id="25" name="Shape 23"/>
-          <p:cNvSpPr/>
-          <p:nvPr/>
-        </p:nvSpPr>
-        <p:spPr>
-          <a:xfrm>
-            <a:off x="365760" y="3273552"/>
-            <a:ext cx="1371600" cy="658368"/>
-          </a:xfrm>
-          <a:prstGeom prst="rect">
-            <a:avLst>
-              <a:gd name="adj" fmla="val 8333"/>
-            </a:avLst>
-          </a:prstGeom>
-          <a:solidFill>
-            <a:srgbClr val="E2E8F0"/>
-          </a:solidFill>
-          <a:ln w="12700">
-            <a:solidFill>
-              <a:srgbClr val="E2E8F0"/>
-            </a:solidFill>
-            <a:prstDash val="solid"/>
-          </a:ln>
-        </p:spPr>
-      </p:sp>
-      <p:sp>
-        <p:nvSpPr>
-          <p:cNvPr id="26" name="Text 24"/>
-          <p:cNvSpPr/>
-          <p:nvPr/>
-        </p:nvSpPr>
-        <p:spPr>
-          <a:xfrm>
-            <a:off x="365760" y="3273552"/>
-            <a:ext cx="1371600" cy="658368"/>
-          </a:xfrm>
-          <a:prstGeom prst="rect">
-            <a:avLst/>
-          </a:prstGeom>
-          <a:noFill/>
-          <a:ln/>
-        </p:spPr>
-        <p:txBody>
-          <a:bodyPr wrap="square" lIns="0" tIns="0" rIns="0" bIns="0" rtlCol="0" anchor="ctr"/>
-          <a:lstStyle/>
-          <a:p>
-            <a:pPr algn="ctr" indent="0" marL="0">
-              <a:buNone/>
-            </a:pPr>
-            <a:r>
-              <a:rPr lang="en-US" sz="1100" b="1" dirty="0">
-                <a:solidFill>
-                  <a:srgbClr val="475569"/>
-                </a:solidFill>
-                <a:latin typeface="Trebuchet MS" pitchFamily="34" charset="0"/>
-                <a:ea typeface="Trebuchet MS" pitchFamily="34" charset="-122"/>
-                <a:cs typeface="Trebuchet MS" pitchFamily="34" charset="-120"/>
-              </a:rPr>
-              <a:t>Syllables</a:t>
-            </a:r>
-            <a:endParaRPr lang="en-US" sz="1100" dirty="0"/>
-          </a:p>
-        </p:txBody>
-      </p:sp>
-      <p:sp>
-        <p:nvSpPr>
-          <p:cNvPr id="27" name="Shape 25"/>
-          <p:cNvSpPr/>
-          <p:nvPr/>
-        </p:nvSpPr>
-        <p:spPr>
-          <a:xfrm>
-            <a:off x="1874520" y="3273552"/>
-            <a:ext cx="6903720" cy="658368"/>
-          </a:xfrm>
-          <a:prstGeom prst="rect">
-            <a:avLst>
-              <a:gd name="adj" fmla="val 8333"/>
-            </a:avLst>
-          </a:prstGeom>
-          <a:solidFill>
-            <a:srgbClr val="CCFBF1"/>
-          </a:solidFill>
-          <a:ln w="12700">
-            <a:solidFill>
-              <a:srgbClr val="0D9488"/>
-            </a:solidFill>
-            <a:prstDash val="solid"/>
-          </a:ln>
-        </p:spPr>
-      </p:sp>
-      <p:sp>
-        <p:nvSpPr>
-          <p:cNvPr id="28" name="Shape 26"/>
-          <p:cNvSpPr/>
-          <p:nvPr/>
-        </p:nvSpPr>
-        <p:spPr>
-          <a:xfrm>
-            <a:off x="1975104" y="3364992"/>
-            <a:ext cx="1554480" cy="475488"/>
-          </a:xfrm>
-          <a:prstGeom prst="rect">
-            <a:avLst>
-              <a:gd name="adj" fmla="val 9615"/>
-            </a:avLst>
-          </a:prstGeom>
-          <a:solidFill>
-            <a:srgbClr val="FFFFFF"/>
-          </a:solidFill>
-          <a:ln w="12700">
-            <a:solidFill>
-              <a:srgbClr val="0D9488"/>
-            </a:solidFill>
-            <a:prstDash val="solid"/>
-          </a:ln>
-        </p:spPr>
-      </p:sp>
-      <p:sp>
-        <p:nvSpPr>
-          <p:cNvPr id="29" name="Text 27"/>
-          <p:cNvSpPr/>
-          <p:nvPr/>
-        </p:nvSpPr>
-        <p:spPr>
-          <a:xfrm>
-            <a:off x="1975104" y="3364992"/>
-            <a:ext cx="1554480" cy="475488"/>
-          </a:xfrm>
-          <a:prstGeom prst="rect">
-            <a:avLst/>
-          </a:prstGeom>
-          <a:noFill/>
-          <a:ln/>
-        </p:spPr>
-        <p:txBody>
-          <a:bodyPr wrap="square" lIns="0" tIns="0" rIns="0" bIns="0" rtlCol="0" anchor="ctr"/>
-          <a:lstStyle/>
-          <a:p>
-            <a:pPr algn="ctr" indent="0" marL="0">
-              <a:buNone/>
-            </a:pPr>
-            <a:r>
-              <a:rPr lang="en-US" sz="1400" b="1" dirty="0">
-                <a:solidFill>
-                  <a:srgbClr val="0D9488"/>
-                </a:solidFill>
-                <a:latin typeface="Trebuchet MS" pitchFamily="34" charset="0"/>
-                <a:ea typeface="Trebuchet MS" pitchFamily="34" charset="-122"/>
-                <a:cs typeface="Trebuchet MS" pitchFamily="34" charset="-120"/>
-              </a:rPr>
-              <a:t>dis</a:t>
-            </a:r>
-            <a:endParaRPr lang="en-US" sz="1400" dirty="0"/>
-          </a:p>
-        </p:txBody>
-      </p:sp>
-      <p:sp>
-        <p:nvSpPr>
-          <p:cNvPr id="30" name="Text 28"/>
-          <p:cNvSpPr/>
-          <p:nvPr/>
-        </p:nvSpPr>
-        <p:spPr>
-          <a:xfrm>
-            <a:off x="3529584" y="3364992"/>
-            <a:ext cx="73152" cy="475488"/>
-          </a:xfrm>
-          <a:prstGeom prst="rect">
-            <a:avLst/>
-          </a:prstGeom>
-          <a:noFill/>
-          <a:ln/>
-        </p:spPr>
-        <p:txBody>
-          <a:bodyPr wrap="square" lIns="0" tIns="0" rIns="0" bIns="0" rtlCol="0" anchor="ctr"/>
-          <a:lstStyle/>
-          <a:p>
-            <a:pPr algn="ctr" indent="0" marL="0">
-              <a:buNone/>
-            </a:pPr>
-            <a:r>
-              <a:rPr lang="en-US" sz="1600" b="1" dirty="0">
-                <a:solidFill>
-                  <a:srgbClr val="0D9488"/>
-                </a:solidFill>
-                <a:latin typeface="Trebuchet MS" pitchFamily="34" charset="0"/>
-                <a:ea typeface="Trebuchet MS" pitchFamily="34" charset="-122"/>
-                <a:cs typeface="Trebuchet MS" pitchFamily="34" charset="-120"/>
-              </a:rPr>
-              <a:t>·</a:t>
-            </a:r>
-            <a:endParaRPr lang="en-US" sz="1600" dirty="0"/>
-          </a:p>
-        </p:txBody>
-      </p:sp>
-      <p:sp>
-        <p:nvSpPr>
-          <p:cNvPr id="31" name="Shape 29"/>
-          <p:cNvSpPr/>
-          <p:nvPr/>
-        </p:nvSpPr>
-        <p:spPr>
-          <a:xfrm>
-            <a:off x="3602736" y="3364992"/>
-            <a:ext cx="1554480" cy="475488"/>
-          </a:xfrm>
-          <a:prstGeom prst="rect">
-            <a:avLst>
-              <a:gd name="adj" fmla="val 9615"/>
-            </a:avLst>
-          </a:prstGeom>
-          <a:solidFill>
-            <a:srgbClr val="FFFFFF"/>
-          </a:solidFill>
-          <a:ln w="12700">
-            <a:solidFill>
-              <a:srgbClr val="0D9488"/>
-            </a:solidFill>
-            <a:prstDash val="solid"/>
-          </a:ln>
-        </p:spPr>
-      </p:sp>
-      <p:sp>
-        <p:nvSpPr>
-          <p:cNvPr id="32" name="Text 30"/>
-          <p:cNvSpPr/>
-          <p:nvPr/>
-        </p:nvSpPr>
-        <p:spPr>
-          <a:xfrm>
-            <a:off x="3602736" y="3364992"/>
-            <a:ext cx="1554480" cy="475488"/>
-          </a:xfrm>
-          <a:prstGeom prst="rect">
-            <a:avLst/>
-          </a:prstGeom>
-          <a:noFill/>
-          <a:ln/>
-        </p:spPr>
-        <p:txBody>
-          <a:bodyPr wrap="square" lIns="0" tIns="0" rIns="0" bIns="0" rtlCol="0" anchor="ctr"/>
-          <a:lstStyle/>
-          <a:p>
-            <a:pPr algn="ctr" indent="0" marL="0">
-              <a:buNone/>
-            </a:pPr>
-            <a:r>
-              <a:rPr lang="en-US" sz="1400" b="1" dirty="0">
-                <a:solidFill>
-                  <a:srgbClr val="0D9488"/>
-                </a:solidFill>
-                <a:latin typeface="Trebuchet MS" pitchFamily="34" charset="0"/>
-                <a:ea typeface="Trebuchet MS" pitchFamily="34" charset="-122"/>
-                <a:cs typeface="Trebuchet MS" pitchFamily="34" charset="-120"/>
-              </a:rPr>
-              <a:t>ap</a:t>
-            </a:r>
-            <a:endParaRPr lang="en-US" sz="1400" dirty="0"/>
-          </a:p>
-        </p:txBody>
-      </p:sp>
-      <p:sp>
-        <p:nvSpPr>
-          <p:cNvPr id="33" name="Text 31"/>
-          <p:cNvSpPr/>
-          <p:nvPr/>
-        </p:nvSpPr>
-        <p:spPr>
-          <a:xfrm>
-            <a:off x="5157216" y="3364992"/>
-            <a:ext cx="73152" cy="475488"/>
-          </a:xfrm>
-          <a:prstGeom prst="rect">
-            <a:avLst/>
-          </a:prstGeom>
-          <a:noFill/>
-          <a:ln/>
-        </p:spPr>
-        <p:txBody>
-          <a:bodyPr wrap="square" lIns="0" tIns="0" rIns="0" bIns="0" rtlCol="0" anchor="ctr"/>
-          <a:lstStyle/>
-          <a:p>
-            <a:pPr algn="ctr" indent="0" marL="0">
-              <a:buNone/>
-            </a:pPr>
-            <a:r>
-              <a:rPr lang="en-US" sz="1600" b="1" dirty="0">
-                <a:solidFill>
-                  <a:srgbClr val="0D9488"/>
-                </a:solidFill>
-                <a:latin typeface="Trebuchet MS" pitchFamily="34" charset="0"/>
-                <a:ea typeface="Trebuchet MS" pitchFamily="34" charset="-122"/>
-                <a:cs typeface="Trebuchet MS" pitchFamily="34" charset="-120"/>
-              </a:rPr>
-              <a:t>·</a:t>
-            </a:r>
-            <a:endParaRPr lang="en-US" sz="1600" dirty="0"/>
-          </a:p>
-        </p:txBody>
-      </p:sp>
-      <p:sp>
-        <p:nvSpPr>
-          <p:cNvPr id="34" name="Shape 32"/>
-          <p:cNvSpPr/>
-          <p:nvPr/>
-        </p:nvSpPr>
-        <p:spPr>
-          <a:xfrm>
-            <a:off x="5230368" y="3364992"/>
-            <a:ext cx="1554480" cy="475488"/>
-          </a:xfrm>
-          <a:prstGeom prst="rect">
-            <a:avLst>
-              <a:gd name="adj" fmla="val 9615"/>
-            </a:avLst>
-          </a:prstGeom>
-          <a:solidFill>
-            <a:srgbClr val="FFFFFF"/>
-          </a:solidFill>
-          <a:ln w="12700">
-            <a:solidFill>
-              <a:srgbClr val="0D9488"/>
-            </a:solidFill>
-            <a:prstDash val="solid"/>
-          </a:ln>
-        </p:spPr>
-      </p:sp>
-      <p:sp>
-        <p:nvSpPr>
-          <p:cNvPr id="35" name="Text 33"/>
-          <p:cNvSpPr/>
-          <p:nvPr/>
-        </p:nvSpPr>
-        <p:spPr>
-          <a:xfrm>
-            <a:off x="5230368" y="3364992"/>
-            <a:ext cx="1554480" cy="475488"/>
-          </a:xfrm>
-          <a:prstGeom prst="rect">
-            <a:avLst/>
-          </a:prstGeom>
-          <a:noFill/>
-          <a:ln/>
-        </p:spPr>
-        <p:txBody>
-          <a:bodyPr wrap="square" lIns="0" tIns="0" rIns="0" bIns="0" rtlCol="0" anchor="ctr"/>
-          <a:lstStyle/>
-          <a:p>
-            <a:pPr algn="ctr" indent="0" marL="0">
-              <a:buNone/>
-            </a:pPr>
-            <a:r>
-              <a:rPr lang="en-US" sz="1400" b="1" dirty="0">
-                <a:solidFill>
-                  <a:srgbClr val="0D9488"/>
-                </a:solidFill>
-                <a:latin typeface="Trebuchet MS" pitchFamily="34" charset="0"/>
-                <a:ea typeface="Trebuchet MS" pitchFamily="34" charset="-122"/>
-                <a:cs typeface="Trebuchet MS" pitchFamily="34" charset="-120"/>
-              </a:rPr>
-              <a:t>point</a:t>
-            </a:r>
-            <a:endParaRPr lang="en-US" sz="1400" dirty="0"/>
-          </a:p>
-        </p:txBody>
-      </p:sp>
-      <p:sp>
-        <p:nvSpPr>
-          <p:cNvPr id="36" name="Text 34"/>
-          <p:cNvSpPr/>
-          <p:nvPr/>
-        </p:nvSpPr>
-        <p:spPr>
-          <a:xfrm>
-            <a:off x="6784848" y="3364992"/>
-            <a:ext cx="73152" cy="475488"/>
-          </a:xfrm>
-          <a:prstGeom prst="rect">
-            <a:avLst/>
-          </a:prstGeom>
-          <a:noFill/>
-          <a:ln/>
-        </p:spPr>
-        <p:txBody>
-          <a:bodyPr wrap="square" lIns="0" tIns="0" rIns="0" bIns="0" rtlCol="0" anchor="ctr"/>
-          <a:lstStyle/>
-          <a:p>
-            <a:pPr algn="ctr" indent="0" marL="0">
-              <a:buNone/>
-            </a:pPr>
-            <a:r>
-              <a:rPr lang="en-US" sz="1600" b="1" dirty="0">
-                <a:solidFill>
-                  <a:srgbClr val="0D9488"/>
-                </a:solidFill>
-                <a:latin typeface="Trebuchet MS" pitchFamily="34" charset="0"/>
-                <a:ea typeface="Trebuchet MS" pitchFamily="34" charset="-122"/>
-                <a:cs typeface="Trebuchet MS" pitchFamily="34" charset="-120"/>
-              </a:rPr>
-              <a:t>·</a:t>
-            </a:r>
-            <a:endParaRPr lang="en-US" sz="1600" dirty="0"/>
-          </a:p>
-        </p:txBody>
-      </p:sp>
-      <p:sp>
-        <p:nvSpPr>
-          <p:cNvPr id="37" name="Shape 35"/>
-          <p:cNvSpPr/>
-          <p:nvPr/>
-        </p:nvSpPr>
-        <p:spPr>
-          <a:xfrm>
-            <a:off x="6858000" y="3364992"/>
-            <a:ext cx="1554480" cy="475488"/>
-          </a:xfrm>
-          <a:prstGeom prst="rect">
-            <a:avLst>
-              <a:gd name="adj" fmla="val 9615"/>
-            </a:avLst>
-          </a:prstGeom>
-          <a:solidFill>
-            <a:srgbClr val="FFFFFF"/>
-          </a:solidFill>
-          <a:ln w="12700">
-            <a:solidFill>
-              <a:srgbClr val="0D9488"/>
-            </a:solidFill>
-            <a:prstDash val="solid"/>
-          </a:ln>
-        </p:spPr>
-      </p:sp>
-      <p:sp>
-        <p:nvSpPr>
-          <p:cNvPr id="38" name="Text 36"/>
-          <p:cNvSpPr/>
-          <p:nvPr/>
-        </p:nvSpPr>
-        <p:spPr>
-          <a:xfrm>
-            <a:off x="6858000" y="3364992"/>
-            <a:ext cx="1554480" cy="475488"/>
-          </a:xfrm>
-          <a:prstGeom prst="rect">
-            <a:avLst/>
-          </a:prstGeom>
-          <a:noFill/>
-          <a:ln/>
-        </p:spPr>
-        <p:txBody>
-          <a:bodyPr wrap="square" lIns="0" tIns="0" rIns="0" bIns="0" rtlCol="0" anchor="ctr"/>
-          <a:lstStyle/>
-          <a:p>
-            <a:pPr algn="ctr" indent="0" marL="0">
-              <a:buNone/>
-            </a:pPr>
-            <a:r>
-              <a:rPr lang="en-US" sz="1400" b="1" dirty="0">
-                <a:solidFill>
-                  <a:srgbClr val="0D9488"/>
-                </a:solidFill>
-                <a:latin typeface="Trebuchet MS" pitchFamily="34" charset="0"/>
-                <a:ea typeface="Trebuchet MS" pitchFamily="34" charset="-122"/>
-                <a:cs typeface="Trebuchet MS" pitchFamily="34" charset="-120"/>
-              </a:rPr>
-              <a:t>ment</a:t>
-            </a:r>
-            <a:endParaRPr lang="en-US" sz="1400" dirty="0"/>
-          </a:p>
-        </p:txBody>
-      </p:sp>
-      <p:sp>
-        <p:nvSpPr>
-          <p:cNvPr id="39" name="Shape 37"/>
-          <p:cNvSpPr/>
-          <p:nvPr/>
-        </p:nvSpPr>
-        <p:spPr>
-          <a:xfrm>
-            <a:off x="365760" y="4096512"/>
-            <a:ext cx="1371600" cy="804672"/>
-          </a:xfrm>
-          <a:prstGeom prst="rect">
-            <a:avLst>
-              <a:gd name="adj" fmla="val 6818"/>
-            </a:avLst>
-          </a:prstGeom>
-          <a:solidFill>
-            <a:srgbClr val="E2E8F0"/>
-          </a:solidFill>
-          <a:ln w="12700">
-            <a:solidFill>
-              <a:srgbClr val="E2E8F0"/>
-            </a:solidFill>
-            <a:prstDash val="solid"/>
-          </a:ln>
-        </p:spPr>
-      </p:sp>
-      <p:sp>
-        <p:nvSpPr>
-          <p:cNvPr id="40" name="Text 38"/>
-          <p:cNvSpPr/>
-          <p:nvPr/>
-        </p:nvSpPr>
-        <p:spPr>
-          <a:xfrm>
-            <a:off x="365760" y="4096512"/>
-            <a:ext cx="1371600" cy="804672"/>
-          </a:xfrm>
-          <a:prstGeom prst="rect">
-            <a:avLst/>
-          </a:prstGeom>
-          <a:noFill/>
-          <a:ln/>
-        </p:spPr>
-        <p:txBody>
-          <a:bodyPr wrap="square" lIns="0" tIns="0" rIns="0" bIns="0" rtlCol="0" anchor="ctr"/>
-          <a:lstStyle/>
-          <a:p>
-            <a:pPr algn="ctr" indent="0" marL="0">
-              <a:buNone/>
-            </a:pPr>
-            <a:r>
-              <a:rPr lang="en-US" sz="1100" b="1" dirty="0">
-                <a:solidFill>
-                  <a:srgbClr val="475569"/>
-                </a:solidFill>
-                <a:latin typeface="Trebuchet MS" pitchFamily="34" charset="0"/>
-                <a:ea typeface="Trebuchet MS" pitchFamily="34" charset="-122"/>
-                <a:cs typeface="Trebuchet MS" pitchFamily="34" charset="-120"/>
-              </a:rPr>
-              <a:t>Phonemes</a:t>
-            </a:r>
-            <a:endParaRPr lang="en-US" sz="1100" dirty="0"/>
-          </a:p>
-        </p:txBody>
-      </p:sp>
-      <p:sp>
-        <p:nvSpPr>
-          <p:cNvPr id="41" name="Shape 39"/>
-          <p:cNvSpPr/>
-          <p:nvPr/>
-        </p:nvSpPr>
-        <p:spPr>
-          <a:xfrm>
-            <a:off x="1874520" y="4096512"/>
-            <a:ext cx="6903720" cy="658368"/>
-          </a:xfrm>
-          <a:prstGeom prst="rect">
-            <a:avLst>
-              <a:gd name="adj" fmla="val 8333"/>
-            </a:avLst>
-          </a:prstGeom>
-          <a:solidFill>
-            <a:srgbClr val="FCE7F3"/>
-          </a:solidFill>
-          <a:ln w="12700">
-            <a:solidFill>
-              <a:srgbClr val="DB2777"/>
-            </a:solidFill>
-            <a:prstDash val="solid"/>
-          </a:ln>
-        </p:spPr>
-      </p:sp>
-      <p:sp>
-        <p:nvSpPr>
-          <p:cNvPr id="42" name="Shape 40"/>
-          <p:cNvSpPr/>
-          <p:nvPr/>
-        </p:nvSpPr>
-        <p:spPr>
-          <a:xfrm>
-            <a:off x="1952596" y="4169664"/>
-            <a:ext cx="493776" cy="475488"/>
-          </a:xfrm>
-          <a:prstGeom prst="rect">
-            <a:avLst>
-              <a:gd name="adj" fmla="val 7692"/>
-            </a:avLst>
-          </a:prstGeom>
-          <a:solidFill>
-            <a:srgbClr val="FFFFFF"/>
-          </a:solidFill>
-          <a:ln w="12700">
-            <a:solidFill>
-              <a:srgbClr val="DB2777"/>
-            </a:solidFill>
-            <a:prstDash val="solid"/>
-          </a:ln>
-        </p:spPr>
-      </p:sp>
-      <p:sp>
-        <p:nvSpPr>
-          <p:cNvPr id="43" name="Text 41"/>
-          <p:cNvSpPr/>
-          <p:nvPr/>
-        </p:nvSpPr>
-        <p:spPr>
-          <a:xfrm>
-            <a:off x="1952596" y="4169664"/>
-            <a:ext cx="493776" cy="475488"/>
-          </a:xfrm>
-          <a:prstGeom prst="rect">
-            <a:avLst/>
-          </a:prstGeom>
-          <a:noFill/>
-          <a:ln/>
-        </p:spPr>
-        <p:txBody>
-          <a:bodyPr wrap="square" lIns="0" tIns="0" rIns="0" bIns="0" rtlCol="0" anchor="ctr"/>
-          <a:lstStyle/>
-          <a:p>
-            <a:pPr algn="ctr" indent="0" marL="0">
-              <a:buNone/>
-            </a:pPr>
-            <a:r>
-              <a:rPr lang="en-US" sz="900" b="1" dirty="0">
-                <a:solidFill>
-                  <a:srgbClr val="9D174D"/>
-                </a:solidFill>
-                <a:latin typeface="Trebuchet MS" pitchFamily="34" charset="0"/>
-                <a:ea typeface="Trebuchet MS" pitchFamily="34" charset="-122"/>
-                <a:cs typeface="Trebuchet MS" pitchFamily="34" charset="-120"/>
-              </a:rPr>
-              <a:t>d</a:t>
-            </a:r>
-            <a:endParaRPr lang="en-US" sz="900" dirty="0"/>
-          </a:p>
-        </p:txBody>
-      </p:sp>
-      <p:sp>
-        <p:nvSpPr>
-          <p:cNvPr id="44" name="Shape 42"/>
-          <p:cNvSpPr/>
-          <p:nvPr/>
-        </p:nvSpPr>
-        <p:spPr>
-          <a:xfrm>
-            <a:off x="2497015" y="4169664"/>
-            <a:ext cx="493776" cy="475488"/>
-          </a:xfrm>
-          <a:prstGeom prst="rect">
-            <a:avLst>
-              <a:gd name="adj" fmla="val 7692"/>
-            </a:avLst>
-          </a:prstGeom>
-          <a:solidFill>
-            <a:srgbClr val="FFFFFF"/>
-          </a:solidFill>
-          <a:ln w="12700">
-            <a:solidFill>
-              <a:srgbClr val="DB2777"/>
-            </a:solidFill>
-            <a:prstDash val="solid"/>
-          </a:ln>
-        </p:spPr>
-      </p:sp>
-      <p:sp>
-        <p:nvSpPr>
-          <p:cNvPr id="45" name="Text 43"/>
-          <p:cNvSpPr/>
-          <p:nvPr/>
-        </p:nvSpPr>
-        <p:spPr>
-          <a:xfrm>
-            <a:off x="2497015" y="4169664"/>
-            <a:ext cx="493776" cy="475488"/>
-          </a:xfrm>
-          <a:prstGeom prst="rect">
-            <a:avLst/>
-          </a:prstGeom>
-          <a:noFill/>
-          <a:ln/>
-        </p:spPr>
-        <p:txBody>
-          <a:bodyPr wrap="square" lIns="0" tIns="0" rIns="0" bIns="0" rtlCol="0" anchor="ctr"/>
-          <a:lstStyle/>
-          <a:p>
-            <a:pPr algn="ctr" indent="0" marL="0">
-              <a:buNone/>
-            </a:pPr>
-            <a:r>
-              <a:rPr lang="en-US" sz="900" b="1" dirty="0">
-                <a:solidFill>
-                  <a:srgbClr val="9D174D"/>
-                </a:solidFill>
-                <a:latin typeface="Trebuchet MS" pitchFamily="34" charset="0"/>
-                <a:ea typeface="Trebuchet MS" pitchFamily="34" charset="-122"/>
-                <a:cs typeface="Trebuchet MS" pitchFamily="34" charset="-120"/>
-              </a:rPr>
-              <a:t>i</a:t>
-            </a:r>
-            <a:endParaRPr lang="en-US" sz="900" dirty="0"/>
-          </a:p>
-        </p:txBody>
-      </p:sp>
-      <p:sp>
-        <p:nvSpPr>
-          <p:cNvPr id="46" name="Shape 44"/>
-          <p:cNvSpPr/>
-          <p:nvPr/>
-        </p:nvSpPr>
-        <p:spPr>
-          <a:xfrm>
-            <a:off x="3041435" y="4169664"/>
-            <a:ext cx="493776" cy="475488"/>
-          </a:xfrm>
-          <a:prstGeom prst="rect">
-            <a:avLst>
-              <a:gd name="adj" fmla="val 7692"/>
-            </a:avLst>
-          </a:prstGeom>
-          <a:solidFill>
-            <a:srgbClr val="FFFFFF"/>
-          </a:solidFill>
-          <a:ln w="12700">
-            <a:solidFill>
-              <a:srgbClr val="DB2777"/>
-            </a:solidFill>
-            <a:prstDash val="solid"/>
-          </a:ln>
-        </p:spPr>
-      </p:sp>
-      <p:sp>
-        <p:nvSpPr>
-          <p:cNvPr id="47" name="Text 45"/>
-          <p:cNvSpPr/>
-          <p:nvPr/>
-        </p:nvSpPr>
-        <p:spPr>
-          <a:xfrm>
-            <a:off x="3041435" y="4169664"/>
-            <a:ext cx="493776" cy="475488"/>
-          </a:xfrm>
-          <a:prstGeom prst="rect">
-            <a:avLst/>
-          </a:prstGeom>
-          <a:noFill/>
-          <a:ln/>
-        </p:spPr>
-        <p:txBody>
-          <a:bodyPr wrap="square" lIns="0" tIns="0" rIns="0" bIns="0" rtlCol="0" anchor="ctr"/>
-          <a:lstStyle/>
-          <a:p>
-            <a:pPr algn="ctr" indent="0" marL="0">
-              <a:buNone/>
-            </a:pPr>
-            <a:r>
-              <a:rPr lang="en-US" sz="900" b="1" dirty="0">
-                <a:solidFill>
-                  <a:srgbClr val="9D174D"/>
-                </a:solidFill>
-                <a:latin typeface="Trebuchet MS" pitchFamily="34" charset="0"/>
-                <a:ea typeface="Trebuchet MS" pitchFamily="34" charset="-122"/>
-                <a:cs typeface="Trebuchet MS" pitchFamily="34" charset="-120"/>
-              </a:rPr>
-              <a:t>s</a:t>
-            </a:r>
-            <a:endParaRPr lang="en-US" sz="900" dirty="0"/>
-          </a:p>
-        </p:txBody>
-      </p:sp>
-      <p:sp>
-        <p:nvSpPr>
-          <p:cNvPr id="48" name="Shape 46"/>
-          <p:cNvSpPr/>
-          <p:nvPr/>
-        </p:nvSpPr>
-        <p:spPr>
-          <a:xfrm>
-            <a:off x="3585855" y="4169664"/>
-            <a:ext cx="493776" cy="475488"/>
-          </a:xfrm>
-          <a:prstGeom prst="rect">
-            <a:avLst>
-              <a:gd name="adj" fmla="val 7692"/>
-            </a:avLst>
-          </a:prstGeom>
-          <a:solidFill>
-            <a:srgbClr val="FFFFFF"/>
-          </a:solidFill>
-          <a:ln w="12700">
-            <a:solidFill>
-              <a:srgbClr val="DB2777"/>
-            </a:solidFill>
-            <a:prstDash val="solid"/>
-          </a:ln>
-        </p:spPr>
-      </p:sp>
-      <p:sp>
-        <p:nvSpPr>
-          <p:cNvPr id="49" name="Text 47"/>
-          <p:cNvSpPr/>
-          <p:nvPr/>
-        </p:nvSpPr>
-        <p:spPr>
-          <a:xfrm>
-            <a:off x="3585855" y="4169664"/>
-            <a:ext cx="493776" cy="475488"/>
-          </a:xfrm>
-          <a:prstGeom prst="rect">
-            <a:avLst/>
-          </a:prstGeom>
-          <a:noFill/>
-          <a:ln/>
-        </p:spPr>
-        <p:txBody>
-          <a:bodyPr wrap="square" lIns="0" tIns="0" rIns="0" bIns="0" rtlCol="0" anchor="ctr"/>
-          <a:lstStyle/>
-          <a:p>
-            <a:pPr algn="ctr" indent="0" marL="0">
-              <a:buNone/>
-            </a:pPr>
-            <a:r>
-              <a:rPr lang="en-US" sz="900" b="1" dirty="0">
-                <a:solidFill>
-                  <a:srgbClr val="9D174D"/>
-                </a:solidFill>
-                <a:latin typeface="Trebuchet MS" pitchFamily="34" charset="0"/>
-                <a:ea typeface="Trebuchet MS" pitchFamily="34" charset="-122"/>
-                <a:cs typeface="Trebuchet MS" pitchFamily="34" charset="-120"/>
-              </a:rPr>
-              <a:t>a</a:t>
-            </a:r>
-            <a:endParaRPr lang="en-US" sz="900" dirty="0"/>
-          </a:p>
-        </p:txBody>
-      </p:sp>
-      <p:sp>
-        <p:nvSpPr>
-          <p:cNvPr id="50" name="Shape 48"/>
-          <p:cNvSpPr/>
-          <p:nvPr/>
-        </p:nvSpPr>
-        <p:spPr>
-          <a:xfrm>
-            <a:off x="4130274" y="4169664"/>
-            <a:ext cx="493776" cy="475488"/>
-          </a:xfrm>
-          <a:prstGeom prst="rect">
-            <a:avLst>
-              <a:gd name="adj" fmla="val 7692"/>
-            </a:avLst>
-          </a:prstGeom>
-          <a:solidFill>
-            <a:srgbClr val="FFFFFF"/>
-          </a:solidFill>
-          <a:ln w="12700">
-            <a:solidFill>
-              <a:srgbClr val="DB2777"/>
-            </a:solidFill>
-            <a:prstDash val="solid"/>
-          </a:ln>
-        </p:spPr>
-      </p:sp>
-      <p:sp>
-        <p:nvSpPr>
-          <p:cNvPr id="51" name="Text 49"/>
-          <p:cNvSpPr/>
-          <p:nvPr/>
-        </p:nvSpPr>
-        <p:spPr>
-          <a:xfrm>
-            <a:off x="4130274" y="4169664"/>
-            <a:ext cx="493776" cy="475488"/>
-          </a:xfrm>
-          <a:prstGeom prst="rect">
-            <a:avLst/>
-          </a:prstGeom>
-          <a:noFill/>
-          <a:ln/>
-        </p:spPr>
-        <p:txBody>
-          <a:bodyPr wrap="square" lIns="0" tIns="0" rIns="0" bIns="0" rtlCol="0" anchor="ctr"/>
-          <a:lstStyle/>
-          <a:p>
-            <a:pPr algn="ctr" indent="0" marL="0">
-              <a:buNone/>
-            </a:pPr>
-            <a:r>
-              <a:rPr lang="en-US" sz="900" b="1" dirty="0">
-                <a:solidFill>
-                  <a:srgbClr val="9D174D"/>
-                </a:solidFill>
-                <a:latin typeface="Trebuchet MS" pitchFamily="34" charset="0"/>
-                <a:ea typeface="Trebuchet MS" pitchFamily="34" charset="-122"/>
-                <a:cs typeface="Trebuchet MS" pitchFamily="34" charset="-120"/>
-              </a:rPr>
-              <a:t>pp</a:t>
-            </a:r>
-            <a:endParaRPr lang="en-US" sz="900" dirty="0"/>
-          </a:p>
-        </p:txBody>
-      </p:sp>
-      <p:sp>
-        <p:nvSpPr>
-          <p:cNvPr id="52" name="Shape 50"/>
-          <p:cNvSpPr/>
-          <p:nvPr/>
-        </p:nvSpPr>
-        <p:spPr>
-          <a:xfrm>
-            <a:off x="4674694" y="4169664"/>
-            <a:ext cx="493776" cy="475488"/>
-          </a:xfrm>
-          <a:prstGeom prst="rect">
-            <a:avLst>
-              <a:gd name="adj" fmla="val 7692"/>
-            </a:avLst>
-          </a:prstGeom>
-          <a:solidFill>
-            <a:srgbClr val="FFFFFF"/>
-          </a:solidFill>
-          <a:ln w="12700">
-            <a:solidFill>
-              <a:srgbClr val="DB2777"/>
-            </a:solidFill>
-            <a:prstDash val="solid"/>
-          </a:ln>
-        </p:spPr>
-      </p:sp>
-      <p:sp>
-        <p:nvSpPr>
-          <p:cNvPr id="53" name="Text 51"/>
-          <p:cNvSpPr/>
-          <p:nvPr/>
-        </p:nvSpPr>
-        <p:spPr>
-          <a:xfrm>
-            <a:off x="4674694" y="4169664"/>
-            <a:ext cx="493776" cy="475488"/>
-          </a:xfrm>
-          <a:prstGeom prst="rect">
-            <a:avLst/>
-          </a:prstGeom>
-          <a:noFill/>
-          <a:ln/>
-        </p:spPr>
-        <p:txBody>
-          <a:bodyPr wrap="square" lIns="0" tIns="0" rIns="0" bIns="0" rtlCol="0" anchor="ctr"/>
-          <a:lstStyle/>
-          <a:p>
-            <a:pPr algn="ctr" indent="0" marL="0">
-              <a:buNone/>
-            </a:pPr>
-            <a:r>
-              <a:rPr lang="en-US" sz="900" b="1" dirty="0">
-                <a:solidFill>
-                  <a:srgbClr val="9D174D"/>
-                </a:solidFill>
-                <a:latin typeface="Trebuchet MS" pitchFamily="34" charset="0"/>
-                <a:ea typeface="Trebuchet MS" pitchFamily="34" charset="-122"/>
-                <a:cs typeface="Trebuchet MS" pitchFamily="34" charset="-120"/>
-              </a:rPr>
-              <a:t>oi</a:t>
-            </a:r>
-            <a:endParaRPr lang="en-US" sz="900" dirty="0"/>
-          </a:p>
-        </p:txBody>
-      </p:sp>
-      <p:sp>
-        <p:nvSpPr>
-          <p:cNvPr id="54" name="Shape 52"/>
-          <p:cNvSpPr/>
-          <p:nvPr/>
-        </p:nvSpPr>
-        <p:spPr>
-          <a:xfrm>
-            <a:off x="5219114" y="4169664"/>
-            <a:ext cx="493776" cy="475488"/>
-          </a:xfrm>
-          <a:prstGeom prst="rect">
-            <a:avLst>
-              <a:gd name="adj" fmla="val 7692"/>
-            </a:avLst>
-          </a:prstGeom>
-          <a:solidFill>
-            <a:srgbClr val="FFFFFF"/>
-          </a:solidFill>
-          <a:ln w="12700">
-            <a:solidFill>
-              <a:srgbClr val="DB2777"/>
-            </a:solidFill>
-            <a:prstDash val="solid"/>
-          </a:ln>
-        </p:spPr>
-      </p:sp>
-      <p:sp>
-        <p:nvSpPr>
-          <p:cNvPr id="55" name="Text 53"/>
-          <p:cNvSpPr/>
-          <p:nvPr/>
-        </p:nvSpPr>
-        <p:spPr>
-          <a:xfrm>
-            <a:off x="5219114" y="4169664"/>
-            <a:ext cx="493776" cy="475488"/>
-          </a:xfrm>
-          <a:prstGeom prst="rect">
-            <a:avLst/>
-          </a:prstGeom>
-          <a:noFill/>
-          <a:ln/>
-        </p:spPr>
-        <p:txBody>
-          <a:bodyPr wrap="square" lIns="0" tIns="0" rIns="0" bIns="0" rtlCol="0" anchor="ctr"/>
-          <a:lstStyle/>
-          <a:p>
-            <a:pPr algn="ctr" indent="0" marL="0">
-              <a:buNone/>
-            </a:pPr>
-            <a:r>
-              <a:rPr lang="en-US" sz="900" b="1" dirty="0">
-                <a:solidFill>
-                  <a:srgbClr val="9D174D"/>
-                </a:solidFill>
-                <a:latin typeface="Trebuchet MS" pitchFamily="34" charset="0"/>
-                <a:ea typeface="Trebuchet MS" pitchFamily="34" charset="-122"/>
-                <a:cs typeface="Trebuchet MS" pitchFamily="34" charset="-120"/>
-              </a:rPr>
-              <a:t>n</a:t>
-            </a:r>
-            <a:endParaRPr lang="en-US" sz="900" dirty="0"/>
-          </a:p>
-        </p:txBody>
-      </p:sp>
-      <p:sp>
-        <p:nvSpPr>
-          <p:cNvPr id="56" name="Shape 54"/>
-          <p:cNvSpPr/>
-          <p:nvPr/>
-        </p:nvSpPr>
-        <p:spPr>
-          <a:xfrm>
-            <a:off x="5763534" y="4169664"/>
-            <a:ext cx="493776" cy="475488"/>
-          </a:xfrm>
-          <a:prstGeom prst="rect">
-            <a:avLst>
-              <a:gd name="adj" fmla="val 7692"/>
-            </a:avLst>
-          </a:prstGeom>
-          <a:solidFill>
-            <a:srgbClr val="FFFFFF"/>
-          </a:solidFill>
-          <a:ln w="12700">
-            <a:solidFill>
-              <a:srgbClr val="DB2777"/>
-            </a:solidFill>
-            <a:prstDash val="solid"/>
-          </a:ln>
-        </p:spPr>
-      </p:sp>
-      <p:sp>
-        <p:nvSpPr>
-          <p:cNvPr id="57" name="Text 55"/>
-          <p:cNvSpPr/>
-          <p:nvPr/>
-        </p:nvSpPr>
-        <p:spPr>
-          <a:xfrm>
-            <a:off x="5763534" y="4169664"/>
-            <a:ext cx="493776" cy="475488"/>
-          </a:xfrm>
-          <a:prstGeom prst="rect">
-            <a:avLst/>
-          </a:prstGeom>
-          <a:noFill/>
-          <a:ln/>
-        </p:spPr>
-        <p:txBody>
-          <a:bodyPr wrap="square" lIns="0" tIns="0" rIns="0" bIns="0" rtlCol="0" anchor="ctr"/>
-          <a:lstStyle/>
-          <a:p>
-            <a:pPr algn="ctr" indent="0" marL="0">
-              <a:buNone/>
-            </a:pPr>
-            <a:r>
-              <a:rPr lang="en-US" sz="900" b="1" dirty="0">
-                <a:solidFill>
-                  <a:srgbClr val="9D174D"/>
-                </a:solidFill>
-                <a:latin typeface="Trebuchet MS" pitchFamily="34" charset="0"/>
-                <a:ea typeface="Trebuchet MS" pitchFamily="34" charset="-122"/>
-                <a:cs typeface="Trebuchet MS" pitchFamily="34" charset="-120"/>
-              </a:rPr>
-              <a:t>t</a:t>
-            </a:r>
-            <a:endParaRPr lang="en-US" sz="900" dirty="0"/>
-          </a:p>
-        </p:txBody>
-      </p:sp>
-      <p:sp>
-        <p:nvSpPr>
-          <p:cNvPr id="58" name="Shape 56"/>
-          <p:cNvSpPr/>
-          <p:nvPr/>
-        </p:nvSpPr>
-        <p:spPr>
-          <a:xfrm>
-            <a:off x="6307953" y="4169664"/>
-            <a:ext cx="493776" cy="475488"/>
-          </a:xfrm>
-          <a:prstGeom prst="rect">
-            <a:avLst>
-              <a:gd name="adj" fmla="val 7692"/>
-            </a:avLst>
-          </a:prstGeom>
-          <a:solidFill>
-            <a:srgbClr val="FFFFFF"/>
-          </a:solidFill>
-          <a:ln w="12700">
-            <a:solidFill>
-              <a:srgbClr val="DB2777"/>
-            </a:solidFill>
-            <a:prstDash val="solid"/>
-          </a:ln>
-        </p:spPr>
-      </p:sp>
-      <p:sp>
-        <p:nvSpPr>
-          <p:cNvPr id="59" name="Text 57"/>
-          <p:cNvSpPr/>
-          <p:nvPr/>
-        </p:nvSpPr>
-        <p:spPr>
-          <a:xfrm>
-            <a:off x="6307953" y="4169664"/>
-            <a:ext cx="493776" cy="475488"/>
-          </a:xfrm>
-          <a:prstGeom prst="rect">
-            <a:avLst/>
-          </a:prstGeom>
-          <a:noFill/>
-          <a:ln/>
-        </p:spPr>
-        <p:txBody>
-          <a:bodyPr wrap="square" lIns="0" tIns="0" rIns="0" bIns="0" rtlCol="0" anchor="ctr"/>
-          <a:lstStyle/>
-          <a:p>
-            <a:pPr algn="ctr" indent="0" marL="0">
-              <a:buNone/>
-            </a:pPr>
-            <a:r>
-              <a:rPr lang="en-US" sz="900" b="1" dirty="0">
-                <a:solidFill>
-                  <a:srgbClr val="9D174D"/>
-                </a:solidFill>
-                <a:latin typeface="Trebuchet MS" pitchFamily="34" charset="0"/>
-                <a:ea typeface="Trebuchet MS" pitchFamily="34" charset="-122"/>
-                <a:cs typeface="Trebuchet MS" pitchFamily="34" charset="-120"/>
-              </a:rPr>
-              <a:t>m</a:t>
-            </a:r>
-            <a:endParaRPr lang="en-US" sz="900" dirty="0"/>
-          </a:p>
-        </p:txBody>
-      </p:sp>
-      <p:sp>
-        <p:nvSpPr>
-          <p:cNvPr id="60" name="Shape 58"/>
-          <p:cNvSpPr/>
-          <p:nvPr/>
-        </p:nvSpPr>
-        <p:spPr>
-          <a:xfrm>
-            <a:off x="6852373" y="4169664"/>
-            <a:ext cx="493776" cy="475488"/>
-          </a:xfrm>
-          <a:prstGeom prst="rect">
-            <a:avLst>
-              <a:gd name="adj" fmla="val 7692"/>
-            </a:avLst>
-          </a:prstGeom>
-          <a:solidFill>
-            <a:srgbClr val="FFFFFF"/>
-          </a:solidFill>
-          <a:ln w="12700">
-            <a:solidFill>
-              <a:srgbClr val="DB2777"/>
-            </a:solidFill>
-            <a:prstDash val="solid"/>
-          </a:ln>
-        </p:spPr>
-      </p:sp>
-      <p:sp>
-        <p:nvSpPr>
-          <p:cNvPr id="61" name="Text 59"/>
-          <p:cNvSpPr/>
-          <p:nvPr/>
-        </p:nvSpPr>
-        <p:spPr>
-          <a:xfrm>
-            <a:off x="6852373" y="4169664"/>
-            <a:ext cx="493776" cy="475488"/>
-          </a:xfrm>
-          <a:prstGeom prst="rect">
-            <a:avLst/>
-          </a:prstGeom>
-          <a:noFill/>
-          <a:ln/>
-        </p:spPr>
-        <p:txBody>
-          <a:bodyPr wrap="square" lIns="0" tIns="0" rIns="0" bIns="0" rtlCol="0" anchor="ctr"/>
-          <a:lstStyle/>
-          <a:p>
-            <a:pPr algn="ctr" indent="0" marL="0">
-              <a:buNone/>
-            </a:pPr>
-            <a:r>
-              <a:rPr lang="en-US" sz="900" b="1" dirty="0">
-                <a:solidFill>
-                  <a:srgbClr val="9D174D"/>
-                </a:solidFill>
-                <a:latin typeface="Trebuchet MS" pitchFamily="34" charset="0"/>
-                <a:ea typeface="Trebuchet MS" pitchFamily="34" charset="-122"/>
-                <a:cs typeface="Trebuchet MS" pitchFamily="34" charset="-120"/>
-              </a:rPr>
-              <a:t>e</a:t>
-            </a:r>
-            <a:endParaRPr lang="en-US" sz="900" dirty="0"/>
-          </a:p>
-        </p:txBody>
-      </p:sp>
-      <p:sp>
-        <p:nvSpPr>
-          <p:cNvPr id="62" name="Shape 60"/>
-          <p:cNvSpPr/>
-          <p:nvPr/>
-        </p:nvSpPr>
-        <p:spPr>
-          <a:xfrm>
-            <a:off x="7396793" y="4169664"/>
-            <a:ext cx="493776" cy="475488"/>
-          </a:xfrm>
-          <a:prstGeom prst="rect">
-            <a:avLst>
-              <a:gd name="adj" fmla="val 7692"/>
-            </a:avLst>
-          </a:prstGeom>
-          <a:solidFill>
-            <a:srgbClr val="FFFFFF"/>
-          </a:solidFill>
-          <a:ln w="12700">
-            <a:solidFill>
-              <a:srgbClr val="DB2777"/>
-            </a:solidFill>
-            <a:prstDash val="solid"/>
-          </a:ln>
-        </p:spPr>
-      </p:sp>
-      <p:sp>
-        <p:nvSpPr>
-          <p:cNvPr id="63" name="Text 61"/>
-          <p:cNvSpPr/>
-          <p:nvPr/>
-        </p:nvSpPr>
-        <p:spPr>
-          <a:xfrm>
-            <a:off x="7396793" y="4169664"/>
-            <a:ext cx="493776" cy="475488"/>
-          </a:xfrm>
-          <a:prstGeom prst="rect">
-            <a:avLst/>
-          </a:prstGeom>
-          <a:noFill/>
-          <a:ln/>
-        </p:spPr>
-        <p:txBody>
-          <a:bodyPr wrap="square" lIns="0" tIns="0" rIns="0" bIns="0" rtlCol="0" anchor="ctr"/>
-          <a:lstStyle/>
-          <a:p>
-            <a:pPr algn="ctr" indent="0" marL="0">
-              <a:buNone/>
-            </a:pPr>
-            <a:r>
-              <a:rPr lang="en-US" sz="900" b="1" dirty="0">
-                <a:solidFill>
-                  <a:srgbClr val="9D174D"/>
-                </a:solidFill>
-                <a:latin typeface="Trebuchet MS" pitchFamily="34" charset="0"/>
-                <a:ea typeface="Trebuchet MS" pitchFamily="34" charset="-122"/>
-                <a:cs typeface="Trebuchet MS" pitchFamily="34" charset="-120"/>
-              </a:rPr>
-              <a:t>n</a:t>
-            </a:r>
-            <a:endParaRPr lang="en-US" sz="900" dirty="0"/>
-          </a:p>
-        </p:txBody>
-      </p:sp>
-      <p:sp>
-        <p:nvSpPr>
-          <p:cNvPr id="64" name="Shape 62"/>
-          <p:cNvSpPr/>
-          <p:nvPr/>
-        </p:nvSpPr>
-        <p:spPr>
-          <a:xfrm>
-            <a:off x="7941212" y="4169664"/>
-            <a:ext cx="493776" cy="475488"/>
-          </a:xfrm>
-          <a:prstGeom prst="rect">
-            <a:avLst>
-              <a:gd name="adj" fmla="val 7692"/>
-            </a:avLst>
-          </a:prstGeom>
-          <a:solidFill>
-            <a:srgbClr val="FFFFFF"/>
-          </a:solidFill>
-          <a:ln w="12700">
-            <a:solidFill>
-              <a:srgbClr val="DB2777"/>
-            </a:solidFill>
-            <a:prstDash val="solid"/>
-          </a:ln>
-        </p:spPr>
-      </p:sp>
-      <p:sp>
-        <p:nvSpPr>
-          <p:cNvPr id="65" name="Text 63"/>
-          <p:cNvSpPr/>
-          <p:nvPr/>
-        </p:nvSpPr>
-        <p:spPr>
-          <a:xfrm>
-            <a:off x="7941212" y="4169664"/>
-            <a:ext cx="493776" cy="475488"/>
-          </a:xfrm>
-          <a:prstGeom prst="rect">
-            <a:avLst/>
-          </a:prstGeom>
-          <a:noFill/>
-          <a:ln/>
-        </p:spPr>
-        <p:txBody>
-          <a:bodyPr wrap="square" lIns="0" tIns="0" rIns="0" bIns="0" rtlCol="0" anchor="ctr"/>
-          <a:lstStyle/>
-          <a:p>
-            <a:pPr algn="ctr" indent="0" marL="0">
-              <a:buNone/>
-            </a:pPr>
-            <a:r>
-              <a:rPr lang="en-US" sz="900" b="1" dirty="0">
-                <a:solidFill>
-                  <a:srgbClr val="9D174D"/>
-                </a:solidFill>
-                <a:latin typeface="Trebuchet MS" pitchFamily="34" charset="0"/>
-                <a:ea typeface="Trebuchet MS" pitchFamily="34" charset="-122"/>
-                <a:cs typeface="Trebuchet MS" pitchFamily="34" charset="-120"/>
-              </a:rPr>
-              <a:t>t</a:t>
-            </a:r>
-            <a:endParaRPr lang="en-US" sz="900" dirty="0"/>
+              <a:t>/eer/</a:t>
+            </a:r>
+            <a:endParaRPr lang="en-US" sz="750" dirty="0"/>
           </a:p>
         </p:txBody>
       </p:sp>
@@ -35935,7 +35574,7 @@
                 <a:ea typeface="Trebuchet MS" pitchFamily="34" charset="-122"/>
                 <a:cs typeface="Trebuchet MS" pitchFamily="34" charset="-120"/>
               </a:rPr>
-              <a:t>cover</a:t>
+              <a:t>connect</a:t>
             </a:r>
             <a:endParaRPr lang="en-US" sz="1300" dirty="0"/>
           </a:p>
@@ -36088,7 +35727,7 @@
                 <a:ea typeface="Trebuchet MS" pitchFamily="34" charset="-122"/>
                 <a:cs typeface="Trebuchet MS" pitchFamily="34" charset="-120"/>
               </a:rPr>
-              <a:t>connect</a:t>
+              <a:t>appear</a:t>
             </a:r>
             <a:endParaRPr lang="en-US" sz="1300" dirty="0"/>
           </a:p>
@@ -36241,7 +35880,7 @@
                 <a:ea typeface="Trebuchet MS" pitchFamily="34" charset="-122"/>
                 <a:cs typeface="Trebuchet MS" pitchFamily="34" charset="-120"/>
               </a:rPr>
-              <a:t>honest</a:t>
+              <a:t>cover</a:t>
             </a:r>
             <a:endParaRPr lang="en-US" sz="1300" dirty="0"/>
           </a:p>
@@ -36305,7 +35944,7 @@
                 <a:ea typeface="Trebuchet MS" pitchFamily="34" charset="-122"/>
                 <a:cs typeface="Trebuchet MS" pitchFamily="34" charset="-120"/>
               </a:rPr>
-              <a:t>-ful</a:t>
+              <a:t>-ly</a:t>
             </a:r>
             <a:endParaRPr lang="en-US" sz="1300" dirty="0"/>
           </a:p>
@@ -36394,7 +36033,7 @@
                 <a:ea typeface="Trebuchet MS" pitchFamily="34" charset="-122"/>
                 <a:cs typeface="Trebuchet MS" pitchFamily="34" charset="-120"/>
               </a:rPr>
-              <a:t>appear</a:t>
+              <a:t>honest</a:t>
             </a:r>
             <a:endParaRPr lang="en-US" sz="1300" dirty="0"/>
           </a:p>
@@ -36458,7 +36097,7 @@
                 <a:ea typeface="Trebuchet MS" pitchFamily="34" charset="-122"/>
                 <a:cs typeface="Trebuchet MS" pitchFamily="34" charset="-120"/>
               </a:rPr>
-              <a:t>-ly</a:t>
+              <a:t>-ance</a:t>
             </a:r>
             <a:endParaRPr lang="en-US" sz="1300" dirty="0"/>
           </a:p>
@@ -36629,7 +36268,7 @@
                 <a:ea typeface="Trebuchet MS" pitchFamily="34" charset="-122"/>
                 <a:cs typeface="Trebuchet MS" pitchFamily="34" charset="-120"/>
               </a:rPr>
-              <a:t>discover</a:t>
+              <a:t>disappear</a:t>
             </a:r>
             <a:endParaRPr lang="en-US" sz="1200" dirty="0"/>
           </a:p>
@@ -36695,7 +36334,7 @@
                 <a:ea typeface="Trebuchet MS" pitchFamily="34" charset="-122"/>
                 <a:cs typeface="Trebuchet MS" pitchFamily="34" charset="-120"/>
               </a:rPr>
-              <a:t>disappear</a:t>
+              <a:t>discover</a:t>
             </a:r>
             <a:endParaRPr lang="en-US" sz="1200" dirty="0"/>
           </a:p>
@@ -36959,7 +36598,7 @@
                 <a:ea typeface="Trebuchet MS" pitchFamily="34" charset="-122"/>
                 <a:cs typeface="Trebuchet MS" pitchFamily="34" charset="-120"/>
               </a:rPr>
-              <a:t>disrespect</a:t>
+              <a:t>display</a:t>
             </a:r>
             <a:endParaRPr lang="en-US" sz="1200" dirty="0"/>
           </a:p>
@@ -37025,7 +36664,7 @@
                 <a:ea typeface="Trebuchet MS" pitchFamily="34" charset="-122"/>
                 <a:cs typeface="Trebuchet MS" pitchFamily="34" charset="-120"/>
               </a:rPr>
-              <a:t>disappoint</a:t>
+              <a:t>disbelief</a:t>
             </a:r>
             <a:endParaRPr lang="en-US" sz="1200" dirty="0"/>
           </a:p>
@@ -38352,7 +37991,7 @@
                 <a:ea typeface="Calibri" pitchFamily="34" charset="-122"/>
                 <a:cs typeface="Calibri" pitchFamily="34" charset="-120"/>
               </a:rPr>
-              <a:t>2.  The word 'display' uses 'dis-' to mean 'not show'.</a:t>
+              <a:t>2.  'Dis-' comes from Latin.</a:t>
             </a:r>
             <a:endParaRPr lang="en-US" sz="1300" dirty="0"/>
           </a:p>
@@ -38375,11 +38014,11 @@
             </a:avLst>
           </a:prstGeom>
           <a:solidFill>
-            <a:srgbClr val="FEE2E2"/>
-          </a:solidFill>
-          <a:ln w="12700">
-            <a:solidFill>
-              <a:srgbClr val="DC2626"/>
+            <a:srgbClr val="DCFCE7"/>
+          </a:solidFill>
+          <a:ln w="12700">
+            <a:solidFill>
+              <a:srgbClr val="16A34A"/>
             </a:solidFill>
             <a:prstDash val="solid"/>
           </a:ln>
@@ -38412,13 +38051,13 @@
             <a:r>
               <a:rPr lang="en-US" sz="1100" b="1" dirty="0">
                 <a:solidFill>
-                  <a:srgbClr val="DC2626"/>
+                  <a:srgbClr val="16A34A"/>
                 </a:solidFill>
                 <a:latin typeface="Trebuchet MS" pitchFamily="34" charset="0"/>
                 <a:ea typeface="Trebuchet MS" pitchFamily="34" charset="-122"/>
                 <a:cs typeface="Trebuchet MS" pitchFamily="34" charset="-120"/>
               </a:rPr>
-              <a:t>FALSE</a:t>
+              <a:t>TRUE</a:t>
             </a:r>
             <a:endParaRPr lang="en-US" sz="1100" dirty="0"/>
           </a:p>
@@ -38491,7 +38130,7 @@
                 <a:ea typeface="Calibri" pitchFamily="34" charset="-122"/>
                 <a:cs typeface="Calibri" pitchFamily="34" charset="-120"/>
               </a:rPr>
-              <a:t>3.  Adding 'dis-' to 'agree' makes a word that means the opposite of agree.</a:t>
+              <a:t>3.  The word 'discuss' contains the prefix 'dis-' meaning 'not'.</a:t>
             </a:r>
             <a:endParaRPr lang="en-US" sz="1300" dirty="0"/>
           </a:p>
@@ -38514,11 +38153,11 @@
             </a:avLst>
           </a:prstGeom>
           <a:solidFill>
-            <a:srgbClr val="DCFCE7"/>
-          </a:solidFill>
-          <a:ln w="12700">
-            <a:solidFill>
-              <a:srgbClr val="16A34A"/>
+            <a:srgbClr val="FEE2E2"/>
+          </a:solidFill>
+          <a:ln w="12700">
+            <a:solidFill>
+              <a:srgbClr val="DC2626"/>
             </a:solidFill>
             <a:prstDash val="solid"/>
           </a:ln>
@@ -38551,13 +38190,13 @@
             <a:r>
               <a:rPr lang="en-US" sz="1100" b="1" dirty="0">
                 <a:solidFill>
-                  <a:srgbClr val="16A34A"/>
+                  <a:srgbClr val="DC2626"/>
                 </a:solidFill>
                 <a:latin typeface="Trebuchet MS" pitchFamily="34" charset="0"/>
                 <a:ea typeface="Trebuchet MS" pitchFamily="34" charset="-122"/>
                 <a:cs typeface="Trebuchet MS" pitchFamily="34" charset="-120"/>
               </a:rPr>
-              <a:t>TRUE</a:t>
+              <a:t>FALSE</a:t>
             </a:r>
             <a:endParaRPr lang="en-US" sz="1100" dirty="0"/>
           </a:p>
@@ -38630,7 +38269,7 @@
                 <a:ea typeface="Calibri" pitchFamily="34" charset="-122"/>
                 <a:cs typeface="Calibri" pitchFamily="34" charset="-120"/>
               </a:rPr>
-              <a:t>4.  The prefix 'dis-' comes from Latin.</a:t>
+              <a:t>4.  Adding 'dis-' to 'agree' makes a word that means to not agree.</a:t>
             </a:r>
             <a:endParaRPr lang="en-US" sz="1300" dirty="0"/>
           </a:p>
@@ -38769,7 +38408,7 @@
                 <a:ea typeface="Calibri" pitchFamily="34" charset="-122"/>
                 <a:cs typeface="Calibri" pitchFamily="34" charset="-120"/>
               </a:rPr>
-              <a:t>5.  The prefix 'dis-' always makes a word mean 'do again'.</a:t>
+              <a:t>5.  The prefix 'dis-' always makes a word mean the opposite of the base word.</a:t>
             </a:r>
             <a:endParaRPr lang="en-US" sz="1300" dirty="0"/>
           </a:p>
@@ -39474,7 +39113,7 @@
                 <a:ea typeface="Trebuchet MS" pitchFamily="34" charset="-122"/>
                 <a:cs typeface="Trebuchet MS" pitchFamily="34" charset="-120"/>
               </a:rPr>
-              <a:t>discover</a:t>
+              <a:t>disappear</a:t>
             </a:r>
             <a:endParaRPr lang="en-US" sz="1300" dirty="0"/>
           </a:p>
@@ -39540,7 +39179,7 @@
                 <a:ea typeface="Trebuchet MS" pitchFamily="34" charset="-122"/>
                 <a:cs typeface="Trebuchet MS" pitchFamily="34" charset="-120"/>
               </a:rPr>
-              <a:t>disappear</a:t>
+              <a:t>discover</a:t>
             </a:r>
             <a:endParaRPr lang="en-US" sz="1300" dirty="0"/>
           </a:p>
@@ -39804,7 +39443,7 @@
                 <a:ea typeface="Trebuchet MS" pitchFamily="34" charset="-122"/>
                 <a:cs typeface="Trebuchet MS" pitchFamily="34" charset="-120"/>
               </a:rPr>
-              <a:t>disrespect</a:t>
+              <a:t>display</a:t>
             </a:r>
             <a:endParaRPr lang="en-US" sz="1300" dirty="0"/>
           </a:p>
@@ -40614,7 +40253,7 @@
                 <a:ea typeface="Trebuchet MS" pitchFamily="34" charset="-122"/>
                 <a:cs typeface="Trebuchet MS" pitchFamily="34" charset="-120"/>
               </a:rPr>
-              <a:t>cover</a:t>
+              <a:t>connect</a:t>
             </a:r>
             <a:endParaRPr lang="en-US" sz="1300" dirty="0"/>
           </a:p>
@@ -40767,7 +40406,7 @@
                 <a:ea typeface="Trebuchet MS" pitchFamily="34" charset="-122"/>
                 <a:cs typeface="Trebuchet MS" pitchFamily="34" charset="-120"/>
               </a:rPr>
-              <a:t>connect</a:t>
+              <a:t>appear</a:t>
             </a:r>
             <a:endParaRPr lang="en-US" sz="1300" dirty="0"/>
           </a:p>
@@ -40920,7 +40559,7 @@
                 <a:ea typeface="Trebuchet MS" pitchFamily="34" charset="-122"/>
                 <a:cs typeface="Trebuchet MS" pitchFamily="34" charset="-120"/>
               </a:rPr>
-              <a:t>honest</a:t>
+              <a:t>cover</a:t>
             </a:r>
             <a:endParaRPr lang="en-US" sz="1300" dirty="0"/>
           </a:p>
@@ -40984,7 +40623,7 @@
                 <a:ea typeface="Trebuchet MS" pitchFamily="34" charset="-122"/>
                 <a:cs typeface="Trebuchet MS" pitchFamily="34" charset="-120"/>
               </a:rPr>
-              <a:t>-ful</a:t>
+              <a:t>-ly</a:t>
             </a:r>
             <a:endParaRPr lang="en-US" sz="1300" dirty="0"/>
           </a:p>
@@ -41073,7 +40712,7 @@
                 <a:ea typeface="Trebuchet MS" pitchFamily="34" charset="-122"/>
                 <a:cs typeface="Trebuchet MS" pitchFamily="34" charset="-120"/>
               </a:rPr>
-              <a:t>appear</a:t>
+              <a:t>honest</a:t>
             </a:r>
             <a:endParaRPr lang="en-US" sz="1300" dirty="0"/>
           </a:p>
@@ -41137,7 +40776,7 @@
                 <a:ea typeface="Trebuchet MS" pitchFamily="34" charset="-122"/>
                 <a:cs typeface="Trebuchet MS" pitchFamily="34" charset="-120"/>
               </a:rPr>
-              <a:t>-ly</a:t>
+              <a:t>-ance</a:t>
             </a:r>
             <a:endParaRPr lang="en-US" sz="1300" dirty="0"/>
           </a:p>
@@ -42048,7 +41687,7 @@
                 <a:ea typeface="Calibri" pitchFamily="34" charset="-122"/>
                 <a:cs typeface="Calibri" pitchFamily="34" charset="-120"/>
               </a:rPr>
-              <a:t>To separate or break the link between two things.</a:t>
+              <a:t>To separate or break a connection between things.</a:t>
             </a:r>
             <a:endParaRPr lang="en-US" sz="1200" dirty="0"/>
           </a:p>
@@ -42121,7 +41760,7 @@
                 <a:ea typeface="Trebuchet MS" pitchFamily="34" charset="-122"/>
                 <a:cs typeface="Trebuchet MS" pitchFamily="34" charset="-120"/>
               </a:rPr>
-              <a:t>discover</a:t>
+              <a:t>disappear</a:t>
             </a:r>
             <a:endParaRPr lang="en-US" sz="1200" dirty="0"/>
           </a:p>
@@ -42187,7 +41826,7 @@
                 <a:ea typeface="Calibri" pitchFamily="34" charset="-122"/>
                 <a:cs typeface="Calibri" pitchFamily="34" charset="-120"/>
               </a:rPr>
-              <a:t>Treating someone rudely or without proper care.</a:t>
+              <a:t>To put something out so others can see it.</a:t>
             </a:r>
             <a:endParaRPr lang="en-US" sz="1200" dirty="0"/>
           </a:p>
@@ -42260,7 +41899,7 @@
                 <a:ea typeface="Trebuchet MS" pitchFamily="34" charset="-122"/>
                 <a:cs typeface="Trebuchet MS" pitchFamily="34" charset="-120"/>
               </a:rPr>
-              <a:t>disappear</a:t>
+              <a:t>discover</a:t>
             </a:r>
             <a:endParaRPr lang="en-US" sz="1200" dirty="0"/>
           </a:p>
@@ -42326,7 +41965,7 @@
                 <a:ea typeface="Calibri" pitchFamily="34" charset="-122"/>
                 <a:cs typeface="Calibri" pitchFamily="34" charset="-120"/>
               </a:rPr>
-              <a:t>To have a different opinion from someone else; to not agree.</a:t>
+              <a:t>To have a different opinion from someone else.</a:t>
             </a:r>
             <a:endParaRPr lang="en-US" sz="1200" dirty="0"/>
           </a:p>
@@ -42465,7 +42104,7 @@
                 <a:ea typeface="Calibri" pitchFamily="34" charset="-122"/>
                 <a:cs typeface="Calibri" pitchFamily="34" charset="-120"/>
               </a:rPr>
-              <a:t>A feeling of being slightly uncomfortable or uneasy.</a:t>
+              <a:t>A feeling of slight pain or unease.</a:t>
             </a:r>
             <a:endParaRPr lang="en-US" sz="1200" dirty="0"/>
           </a:p>
@@ -42604,7 +42243,7 @@
                 <a:ea typeface="Calibri" pitchFamily="34" charset="-122"/>
                 <a:cs typeface="Calibri" pitchFamily="34" charset="-120"/>
               </a:rPr>
-              <a:t>To go out of sight; to stop being visible.</a:t>
+              <a:t>To find or learn something for the first time.</a:t>
             </a:r>
             <a:endParaRPr lang="en-US" sz="1200" dirty="0"/>
           </a:p>
@@ -42743,7 +42382,7 @@
                 <a:ea typeface="Calibri" pitchFamily="34" charset="-122"/>
                 <a:cs typeface="Calibri" pitchFamily="34" charset="-120"/>
               </a:rPr>
-              <a:t>Not telling the truth; being untruthful or unfair.</a:t>
+              <a:t>Not telling the truth; likely to cheat or lie.</a:t>
             </a:r>
             <a:endParaRPr lang="en-US" sz="1200" dirty="0"/>
           </a:p>
@@ -42816,7 +42455,7 @@
                 <a:ea typeface="Trebuchet MS" pitchFamily="34" charset="-122"/>
                 <a:cs typeface="Trebuchet MS" pitchFamily="34" charset="-120"/>
               </a:rPr>
-              <a:t>disrespect</a:t>
+              <a:t>display</a:t>
             </a:r>
             <a:endParaRPr lang="en-US" sz="1200" dirty="0"/>
           </a:p>
@@ -42882,7 +42521,7 @@
                 <a:ea typeface="Calibri" pitchFamily="34" charset="-122"/>
                 <a:cs typeface="Calibri" pitchFamily="34" charset="-120"/>
               </a:rPr>
-              <a:t>To find or learn about something for the first time.</a:t>
+              <a:t>To go out of sight or stop being visible.</a:t>
             </a:r>
             <a:endParaRPr lang="en-US" sz="1200" dirty="0"/>
           </a:p>
@@ -43377,7 +43016,7 @@
                 <a:ea typeface="Calibri" pitchFamily="34" charset="-122"/>
                 <a:cs typeface="Calibri" pitchFamily="34" charset="-120"/>
               </a:rPr>
-              <a:t>The friends began to disagree about which game to play at lunchtime.</a:t>
+              <a:t>The magician made the rabbit disappear in a puff of smoke.</a:t>
             </a:r>
             <a:endParaRPr lang="en-US" sz="1500" dirty="0"/>
           </a:p>
@@ -43541,7 +43180,7 @@
                 <a:ea typeface="Calibri" pitchFamily="34" charset="-122"/>
                 <a:cs typeface="Calibri" pitchFamily="34" charset="-120"/>
               </a:rPr>
-              <a:t>She was disappointed when it rained on the day of the school carnival.</a:t>
+              <a:t>It is important to be honest and not dishonest with your friends.</a:t>
             </a:r>
             <a:endParaRPr lang="en-US" sz="1500" dirty="0"/>
           </a:p>
@@ -43705,7 +43344,7 @@
                 <a:ea typeface="Calibri" pitchFamily="34" charset="-122"/>
                 <a:cs typeface="Calibri" pitchFamily="34" charset="-120"/>
               </a:rPr>
-              <a:t>The magician made the coin disappear right before our eyes!</a:t>
+              <a:t>The students began to disagree about which book was the best.</a:t>
             </a:r>
             <a:endParaRPr lang="en-US" sz="1500" dirty="0"/>
           </a:p>

--- a/output/wordlabs-dis-prefix-3day.pptx
+++ b/output/wordlabs-dis-prefix-3day.pptx
@@ -4240,7 +4240,7 @@
                 <a:ea typeface="Calibri" pitchFamily="34" charset="-122"/>
                 <a:cs typeface="Calibri" pitchFamily="34" charset="-120"/>
               </a:rPr>
-              <a:t>"not, opposite, away"</a:t>
+              <a:t>"not; opposite; apart"</a:t>
             </a:r>
             <a:endParaRPr lang="en-US" sz="2200" dirty="0"/>
           </a:p>
@@ -4279,7 +4279,7 @@
                 <a:ea typeface="Calibri" pitchFamily="34" charset="-122"/>
                 <a:cs typeface="Calibri" pitchFamily="34" charset="-120"/>
               </a:rPr>
-              <a:t>Origin: Latin: dis-</a:t>
+              <a:t>Origin: Prefix</a:t>
             </a:r>
             <a:endParaRPr lang="en-US" sz="1300" dirty="0"/>
           </a:p>
@@ -5288,7 +5288,7 @@
                 <a:ea typeface="Calibri" pitchFamily="34" charset="-122"/>
                 <a:cs typeface="Calibri" pitchFamily="34" charset="-120"/>
               </a:rPr>
-              <a:t>Word Labs  •  wordlabs.app  •  Prefix: 'dis-' = not, opposite, away</a:t>
+              <a:t>Word Labs  •  wordlabs.app  •  Prefix: 'dis-' = not; opposite; apart</a:t>
             </a:r>
             <a:endParaRPr lang="en-US" sz="800" dirty="0"/>
           </a:p>
@@ -5622,7 +5622,7 @@
                 <a:ea typeface="Trebuchet MS" pitchFamily="34" charset="-122"/>
                 <a:cs typeface="Trebuchet MS" pitchFamily="34" charset="-120"/>
               </a:rPr>
-              <a:t>1</a:t>
+              <a:t>0</a:t>
             </a:r>
             <a:pPr algn="ctr" indent="0" marL="0">
               <a:buNone/>
@@ -5928,7 +5928,7 @@
                 <a:ea typeface="Calibri" pitchFamily="34" charset="-122"/>
                 <a:cs typeface="Calibri" pitchFamily="34" charset="-120"/>
               </a:rPr>
-              <a:t>Word Labs  •  wordlabs.app  •  Prefix: 'dis-' = not, opposite, away</a:t>
+              <a:t>Word Labs  •  wordlabs.app  •  Prefix: 'dis-' = not; opposite; apart</a:t>
             </a:r>
             <a:endParaRPr lang="en-US" sz="800" dirty="0"/>
           </a:p>
@@ -6040,7 +6040,7 @@
                 <a:ea typeface="Calibri" pitchFamily="34" charset="-122"/>
                 <a:cs typeface="Calibri" pitchFamily="34" charset="-120"/>
               </a:rPr>
-              <a:t>She felt great </a:t>
+              <a:t>The report contained several </a:t>
             </a:r>
             <a:pPr algn="l" indent="0" marL="0">
               <a:buNone/>
@@ -6057,7 +6057,7 @@
                 <a:ea typeface="Calibri" pitchFamily="34" charset="-122"/>
                 <a:cs typeface="Calibri" pitchFamily="34" charset="-120"/>
               </a:rPr>
-              <a:t>discomfort</a:t>
+              <a:t>disclosures</a:t>
             </a:r>
             <a:pPr algn="l" indent="0" marL="0">
               <a:buNone/>
@@ -6071,7 +6071,7 @@
                 <a:ea typeface="Calibri" pitchFamily="34" charset="-122"/>
                 <a:cs typeface="Calibri" pitchFamily="34" charset="-120"/>
               </a:rPr>
-              <a:t> when she had to </a:t>
+              <a:t> about the company's finances. The loud music caused a </a:t>
             </a:r>
             <a:pPr algn="l" indent="0" marL="0">
               <a:buNone/>
@@ -6088,7 +6088,7 @@
                 <a:ea typeface="Calibri" pitchFamily="34" charset="-122"/>
                 <a:cs typeface="Calibri" pitchFamily="34" charset="-120"/>
               </a:rPr>
-              <a:t>disconnect</a:t>
+              <a:t>disturbance</a:t>
             </a:r>
             <a:pPr algn="l" indent="0" marL="0">
               <a:buNone/>
@@ -6102,7 +6102,7 @@
                 <a:ea typeface="Calibri" pitchFamily="34" charset="-122"/>
                 <a:cs typeface="Calibri" pitchFamily="34" charset="-120"/>
               </a:rPr>
-              <a:t> the power lead.</a:t>
+              <a:t> in the quiet neighbourhood.</a:t>
             </a:r>
             <a:endParaRPr lang="en-US" sz="1800" dirty="0"/>
           </a:p>
@@ -6257,7 +6257,7 @@
                 <a:ea typeface="Trebuchet MS" pitchFamily="34" charset="-122"/>
                 <a:cs typeface="Trebuchet MS" pitchFamily="34" charset="-120"/>
               </a:rPr>
-              <a:t>discomfort</a:t>
+              <a:t>disclosures</a:t>
             </a:r>
             <a:endParaRPr lang="en-US" sz="1400" dirty="0"/>
           </a:p>
@@ -6385,7 +6385,7 @@
                 <a:ea typeface="Trebuchet MS" pitchFamily="34" charset="-122"/>
                 <a:cs typeface="Trebuchet MS" pitchFamily="34" charset="-120"/>
               </a:rPr>
-              <a:t>disconnect</a:t>
+              <a:t>disturbance</a:t>
             </a:r>
             <a:endParaRPr lang="en-US" sz="1400" dirty="0"/>
           </a:p>
@@ -6716,7 +6716,7 @@
                 <a:ea typeface="Calibri" pitchFamily="34" charset="-122"/>
                 <a:cs typeface="Calibri" pitchFamily="34" charset="-120"/>
               </a:rPr>
-              <a:t>Word Labs  •  wordlabs.app  •  Prefix: 'dis-' = not, opposite, away</a:t>
+              <a:t>Word Labs  •  wordlabs.app  •  Prefix: 'dis-' = not; opposite; apart</a:t>
             </a:r>
             <a:endParaRPr lang="en-US" sz="800" dirty="0"/>
           </a:p>
@@ -6855,7 +6855,7 @@
                 <a:ea typeface="Trebuchet MS" pitchFamily="34" charset="-122"/>
                 <a:cs typeface="Trebuchet MS" pitchFamily="34" charset="-120"/>
               </a:rPr>
-              <a:t>discomfort</a:t>
+              <a:t>disclosures</a:t>
             </a:r>
             <a:endParaRPr lang="en-US" sz="2800" dirty="0"/>
           </a:p>
@@ -7543,7 +7543,7 @@
                 <a:ea typeface="Calibri" pitchFamily="34" charset="-122"/>
                 <a:cs typeface="Calibri" pitchFamily="34" charset="-120"/>
               </a:rPr>
-              <a:t>Word Labs  •  wordlabs.app  •  Prefix: 'dis-' = not, opposite, away</a:t>
+              <a:t>Word Labs  •  wordlabs.app  •  Prefix: 'dis-' = not; opposite; apart</a:t>
             </a:r>
             <a:endParaRPr lang="en-US" sz="800" dirty="0"/>
           </a:p>
@@ -7682,7 +7682,7 @@
                 <a:ea typeface="Trebuchet MS" pitchFamily="34" charset="-122"/>
                 <a:cs typeface="Trebuchet MS" pitchFamily="34" charset="-120"/>
               </a:rPr>
-              <a:t>discomfort</a:t>
+              <a:t>disclosures</a:t>
             </a:r>
             <a:endParaRPr lang="en-US" sz="2800" dirty="0"/>
           </a:p>
@@ -7762,8 +7762,8 @@
         </p:nvSpPr>
         <p:spPr>
           <a:xfrm>
-            <a:off x="2938272" y="2258568"/>
-            <a:ext cx="1828800" cy="292608"/>
+            <a:off x="1989734" y="2258568"/>
+            <a:ext cx="1581912" cy="292608"/>
           </a:xfrm>
           <a:prstGeom prst="rect">
             <a:avLst>
@@ -7796,8 +7796,8 @@
         </p:nvSpPr>
         <p:spPr>
           <a:xfrm>
-            <a:off x="2938272" y="2258568"/>
-            <a:ext cx="1828800" cy="292608"/>
+            <a:off x="1989734" y="2258568"/>
+            <a:ext cx="1581912" cy="292608"/>
           </a:xfrm>
           <a:prstGeom prst="rect">
             <a:avLst/>
@@ -7835,8 +7835,8 @@
         </p:nvSpPr>
         <p:spPr>
           <a:xfrm>
-            <a:off x="2938272" y="2569464"/>
-            <a:ext cx="1828800" cy="201168"/>
+            <a:off x="1989734" y="2569464"/>
+            <a:ext cx="1581912" cy="201168"/>
           </a:xfrm>
           <a:prstGeom prst="rect">
             <a:avLst/>
@@ -7860,7 +7860,7 @@
                 <a:ea typeface="Calibri" pitchFamily="34" charset="-122"/>
                 <a:cs typeface="Calibri" pitchFamily="34" charset="-120"/>
               </a:rPr>
-              <a:t>not, opposite</a:t>
+              <a:t>not; opposite; apart</a:t>
             </a:r>
             <a:endParaRPr lang="en-US" sz="850" dirty="0"/>
           </a:p>
@@ -7874,8 +7874,8 @@
         </p:nvSpPr>
         <p:spPr>
           <a:xfrm>
-            <a:off x="5803392" y="2258568"/>
-            <a:ext cx="1828800" cy="292608"/>
+            <a:off x="3659429" y="2258568"/>
+            <a:ext cx="1581912" cy="292608"/>
           </a:xfrm>
           <a:prstGeom prst="rect">
             <a:avLst>
@@ -7908,8 +7908,8 @@
         </p:nvSpPr>
         <p:spPr>
           <a:xfrm>
-            <a:off x="5803392" y="2258568"/>
-            <a:ext cx="1828800" cy="292608"/>
+            <a:off x="3659429" y="2258568"/>
+            <a:ext cx="1581912" cy="292608"/>
           </a:xfrm>
           <a:prstGeom prst="rect">
             <a:avLst/>
@@ -7933,7 +7933,7 @@
                 <a:ea typeface="Trebuchet MS" pitchFamily="34" charset="-122"/>
                 <a:cs typeface="Trebuchet MS" pitchFamily="34" charset="-120"/>
               </a:rPr>
-              <a:t>comfort</a:t>
+              <a:t>clos</a:t>
             </a:r>
             <a:endParaRPr lang="en-US" sz="1300" dirty="0"/>
           </a:p>
@@ -7947,8 +7947,8 @@
         </p:nvSpPr>
         <p:spPr>
           <a:xfrm>
-            <a:off x="5803392" y="2569464"/>
-            <a:ext cx="1828800" cy="201168"/>
+            <a:off x="3659429" y="2569464"/>
+            <a:ext cx="1581912" cy="201168"/>
           </a:xfrm>
           <a:prstGeom prst="rect">
             <a:avLst/>
@@ -7972,7 +7972,7 @@
                 <a:ea typeface="Calibri" pitchFamily="34" charset="-122"/>
                 <a:cs typeface="Calibri" pitchFamily="34" charset="-120"/>
               </a:rPr>
-              <a:t>ease, wellbeing</a:t>
+              <a:t>close</a:t>
             </a:r>
             <a:endParaRPr lang="en-US" sz="850" dirty="0"/>
           </a:p>
@@ -7981,6 +7981,230 @@
       <p:sp>
         <p:nvSpPr>
           <p:cNvPr id="22" name="Shape 20"/>
+          <p:cNvSpPr/>
+          <p:nvPr/>
+        </p:nvSpPr>
+        <p:spPr>
+          <a:xfrm>
+            <a:off x="5329123" y="2258568"/>
+            <a:ext cx="1581912" cy="292608"/>
+          </a:xfrm>
+          <a:prstGeom prst="rect">
+            <a:avLst>
+              <a:gd name="adj" fmla="val 25000"/>
+            </a:avLst>
+          </a:prstGeom>
+          <a:solidFill>
+            <a:srgbClr val="FCE7F3"/>
+          </a:solidFill>
+          <a:ln w="19050">
+            <a:solidFill>
+              <a:srgbClr val="DB2777"/>
+            </a:solidFill>
+            <a:prstDash val="solid"/>
+          </a:ln>
+          <a:effectLst>
+            <a:outerShdw sx="100000" sy="100000" kx="0" ky="0" algn="bl" rotWithShape="0" blurRad="101600" dist="38100" dir="8100000">
+              <a:srgbClr val="000000">
+                <a:alpha val="12000"/>
+              </a:srgbClr>
+            </a:outerShdw>
+          </a:effectLst>
+        </p:spPr>
+      </p:sp>
+      <p:sp>
+        <p:nvSpPr>
+          <p:cNvPr id="23" name="Text 21"/>
+          <p:cNvSpPr/>
+          <p:nvPr/>
+        </p:nvSpPr>
+        <p:spPr>
+          <a:xfrm>
+            <a:off x="5329123" y="2258568"/>
+            <a:ext cx="1581912" cy="292608"/>
+          </a:xfrm>
+          <a:prstGeom prst="rect">
+            <a:avLst/>
+          </a:prstGeom>
+          <a:noFill/>
+          <a:ln/>
+        </p:spPr>
+        <p:txBody>
+          <a:bodyPr wrap="square" lIns="0" tIns="0" rIns="0" bIns="0" rtlCol="0" anchor="ctr"/>
+          <a:lstStyle/>
+          <a:p>
+            <a:pPr algn="ctr" indent="0" marL="0">
+              <a:buNone/>
+            </a:pPr>
+            <a:r>
+              <a:rPr lang="en-US" sz="1300" b="1" dirty="0">
+                <a:solidFill>
+                  <a:srgbClr val="9D174D"/>
+                </a:solidFill>
+                <a:latin typeface="Trebuchet MS" pitchFamily="34" charset="0"/>
+                <a:ea typeface="Trebuchet MS" pitchFamily="34" charset="-122"/>
+                <a:cs typeface="Trebuchet MS" pitchFamily="34" charset="-120"/>
+              </a:rPr>
+              <a:t>ure</a:t>
+            </a:r>
+            <a:endParaRPr lang="en-US" sz="1300" dirty="0"/>
+          </a:p>
+        </p:txBody>
+      </p:sp>
+      <p:sp>
+        <p:nvSpPr>
+          <p:cNvPr id="24" name="Text 22"/>
+          <p:cNvSpPr/>
+          <p:nvPr/>
+        </p:nvSpPr>
+        <p:spPr>
+          <a:xfrm>
+            <a:off x="5329123" y="2569464"/>
+            <a:ext cx="1581912" cy="201168"/>
+          </a:xfrm>
+          <a:prstGeom prst="rect">
+            <a:avLst/>
+          </a:prstGeom>
+          <a:noFill/>
+          <a:ln/>
+        </p:spPr>
+        <p:txBody>
+          <a:bodyPr wrap="square" lIns="0" tIns="0" rIns="0" bIns="0" rtlCol="0" anchor="t"/>
+          <a:lstStyle/>
+          <a:p>
+            <a:pPr algn="ctr" indent="0" marL="0">
+              <a:buNone/>
+            </a:pPr>
+            <a:r>
+              <a:rPr lang="en-US" sz="850" dirty="0">
+                <a:solidFill>
+                  <a:srgbClr val="475569"/>
+                </a:solidFill>
+                <a:latin typeface="Calibri" pitchFamily="34" charset="0"/>
+                <a:ea typeface="Calibri" pitchFamily="34" charset="-122"/>
+                <a:cs typeface="Calibri" pitchFamily="34" charset="-120"/>
+              </a:rPr>
+              <a:t>result of</a:t>
+            </a:r>
+            <a:endParaRPr lang="en-US" sz="850" dirty="0"/>
+          </a:p>
+        </p:txBody>
+      </p:sp>
+      <p:sp>
+        <p:nvSpPr>
+          <p:cNvPr id="25" name="Shape 23"/>
+          <p:cNvSpPr/>
+          <p:nvPr/>
+        </p:nvSpPr>
+        <p:spPr>
+          <a:xfrm>
+            <a:off x="6998818" y="2258568"/>
+            <a:ext cx="1581912" cy="292608"/>
+          </a:xfrm>
+          <a:prstGeom prst="rect">
+            <a:avLst>
+              <a:gd name="adj" fmla="val 25000"/>
+            </a:avLst>
+          </a:prstGeom>
+          <a:solidFill>
+            <a:srgbClr val="FCE7F3"/>
+          </a:solidFill>
+          <a:ln w="19050">
+            <a:solidFill>
+              <a:srgbClr val="DB2777"/>
+            </a:solidFill>
+            <a:prstDash val="solid"/>
+          </a:ln>
+          <a:effectLst>
+            <a:outerShdw sx="100000" sy="100000" kx="0" ky="0" algn="bl" rotWithShape="0" blurRad="101600" dist="38100" dir="8100000">
+              <a:srgbClr val="000000">
+                <a:alpha val="12000"/>
+              </a:srgbClr>
+            </a:outerShdw>
+          </a:effectLst>
+        </p:spPr>
+      </p:sp>
+      <p:sp>
+        <p:nvSpPr>
+          <p:cNvPr id="26" name="Text 24"/>
+          <p:cNvSpPr/>
+          <p:nvPr/>
+        </p:nvSpPr>
+        <p:spPr>
+          <a:xfrm>
+            <a:off x="6998818" y="2258568"/>
+            <a:ext cx="1581912" cy="292608"/>
+          </a:xfrm>
+          <a:prstGeom prst="rect">
+            <a:avLst/>
+          </a:prstGeom>
+          <a:noFill/>
+          <a:ln/>
+        </p:spPr>
+        <p:txBody>
+          <a:bodyPr wrap="square" lIns="0" tIns="0" rIns="0" bIns="0" rtlCol="0" anchor="ctr"/>
+          <a:lstStyle/>
+          <a:p>
+            <a:pPr algn="ctr" indent="0" marL="0">
+              <a:buNone/>
+            </a:pPr>
+            <a:r>
+              <a:rPr lang="en-US" sz="1300" b="1" dirty="0">
+                <a:solidFill>
+                  <a:srgbClr val="9D174D"/>
+                </a:solidFill>
+                <a:latin typeface="Trebuchet MS" pitchFamily="34" charset="0"/>
+                <a:ea typeface="Trebuchet MS" pitchFamily="34" charset="-122"/>
+                <a:cs typeface="Trebuchet MS" pitchFamily="34" charset="-120"/>
+              </a:rPr>
+              <a:t>s</a:t>
+            </a:r>
+            <a:endParaRPr lang="en-US" sz="1300" dirty="0"/>
+          </a:p>
+        </p:txBody>
+      </p:sp>
+      <p:sp>
+        <p:nvSpPr>
+          <p:cNvPr id="27" name="Text 25"/>
+          <p:cNvSpPr/>
+          <p:nvPr/>
+        </p:nvSpPr>
+        <p:spPr>
+          <a:xfrm>
+            <a:off x="6998818" y="2569464"/>
+            <a:ext cx="1581912" cy="201168"/>
+          </a:xfrm>
+          <a:prstGeom prst="rect">
+            <a:avLst/>
+          </a:prstGeom>
+          <a:noFill/>
+          <a:ln/>
+        </p:spPr>
+        <p:txBody>
+          <a:bodyPr wrap="square" lIns="0" tIns="0" rIns="0" bIns="0" rtlCol="0" anchor="t"/>
+          <a:lstStyle/>
+          <a:p>
+            <a:pPr algn="ctr" indent="0" marL="0">
+              <a:buNone/>
+            </a:pPr>
+            <a:r>
+              <a:rPr lang="en-US" sz="850" dirty="0">
+                <a:solidFill>
+                  <a:srgbClr val="475569"/>
+                </a:solidFill>
+                <a:latin typeface="Calibri" pitchFamily="34" charset="0"/>
+                <a:ea typeface="Calibri" pitchFamily="34" charset="-122"/>
+                <a:cs typeface="Calibri" pitchFamily="34" charset="-120"/>
+              </a:rPr>
+              <a:t>plural or present tense</a:t>
+            </a:r>
+            <a:endParaRPr lang="en-US" sz="850" dirty="0"/>
+          </a:p>
+        </p:txBody>
+      </p:sp>
+      <p:sp>
+        <p:nvSpPr>
+          <p:cNvPr id="28" name="Shape 26"/>
           <p:cNvSpPr/>
           <p:nvPr/>
         </p:nvSpPr>
@@ -8007,7 +8231,7 @@
       </p:sp>
       <p:sp>
         <p:nvSpPr>
-          <p:cNvPr id="23" name="Text 21"/>
+          <p:cNvPr id="29" name="Text 27"/>
           <p:cNvSpPr/>
           <p:nvPr/>
         </p:nvSpPr>
@@ -8046,7 +8270,7 @@
       </p:sp>
       <p:sp>
         <p:nvSpPr>
-          <p:cNvPr id="24" name="Shape 22"/>
+          <p:cNvPr id="30" name="Shape 28"/>
           <p:cNvSpPr/>
           <p:nvPr/>
         </p:nvSpPr>
@@ -8073,7 +8297,7 @@
       </p:sp>
       <p:sp>
         <p:nvSpPr>
-          <p:cNvPr id="25" name="Text 23"/>
+          <p:cNvPr id="31" name="Text 29"/>
           <p:cNvSpPr/>
           <p:nvPr/>
         </p:nvSpPr>
@@ -8112,7 +8336,7 @@
       </p:sp>
       <p:sp>
         <p:nvSpPr>
-          <p:cNvPr id="26" name="Shape 24"/>
+          <p:cNvPr id="32" name="Shape 30"/>
           <p:cNvSpPr/>
           <p:nvPr/>
         </p:nvSpPr>
@@ -8139,7 +8363,7 @@
       </p:sp>
       <p:sp>
         <p:nvSpPr>
-          <p:cNvPr id="27" name="Text 25"/>
+          <p:cNvPr id="33" name="Text 31"/>
           <p:cNvSpPr/>
           <p:nvPr/>
         </p:nvSpPr>
@@ -8178,7 +8402,7 @@
       </p:sp>
       <p:sp>
         <p:nvSpPr>
-          <p:cNvPr id="28" name="Shape 26"/>
+          <p:cNvPr id="34" name="Shape 32"/>
           <p:cNvSpPr/>
           <p:nvPr/>
         </p:nvSpPr>
@@ -8205,7 +8429,7 @@
       </p:sp>
       <p:sp>
         <p:nvSpPr>
-          <p:cNvPr id="29" name="Text 27"/>
+          <p:cNvPr id="35" name="Text 33"/>
           <p:cNvSpPr/>
           <p:nvPr/>
         </p:nvSpPr>
@@ -8528,7 +8752,7 @@
                 <a:ea typeface="Calibri" pitchFamily="34" charset="-122"/>
                 <a:cs typeface="Calibri" pitchFamily="34" charset="-120"/>
               </a:rPr>
-              <a:t>Word Labs  •  wordlabs.app  •  Prefix: 'dis-' = not, opposite, away</a:t>
+              <a:t>Word Labs  •  wordlabs.app  •  Prefix: 'dis-' = not; opposite; apart</a:t>
             </a:r>
             <a:endParaRPr lang="en-US" sz="800" dirty="0"/>
           </a:p>
@@ -8667,7 +8891,7 @@
                 <a:ea typeface="Trebuchet MS" pitchFamily="34" charset="-122"/>
                 <a:cs typeface="Trebuchet MS" pitchFamily="34" charset="-120"/>
               </a:rPr>
-              <a:t>discomfort</a:t>
+              <a:t>disclosures</a:t>
             </a:r>
             <a:endParaRPr lang="en-US" sz="2800" dirty="0"/>
           </a:p>
@@ -8747,8 +8971,8 @@
         </p:nvSpPr>
         <p:spPr>
           <a:xfrm>
-            <a:off x="2938272" y="2258568"/>
-            <a:ext cx="1828800" cy="292608"/>
+            <a:off x="1989734" y="2258568"/>
+            <a:ext cx="1581912" cy="292608"/>
           </a:xfrm>
           <a:prstGeom prst="rect">
             <a:avLst>
@@ -8781,8 +9005,8 @@
         </p:nvSpPr>
         <p:spPr>
           <a:xfrm>
-            <a:off x="2938272" y="2258568"/>
-            <a:ext cx="1828800" cy="292608"/>
+            <a:off x="1989734" y="2258568"/>
+            <a:ext cx="1581912" cy="292608"/>
           </a:xfrm>
           <a:prstGeom prst="rect">
             <a:avLst/>
@@ -8820,8 +9044,8 @@
         </p:nvSpPr>
         <p:spPr>
           <a:xfrm>
-            <a:off x="2938272" y="2569464"/>
-            <a:ext cx="1828800" cy="201168"/>
+            <a:off x="1989734" y="2569464"/>
+            <a:ext cx="1581912" cy="201168"/>
           </a:xfrm>
           <a:prstGeom prst="rect">
             <a:avLst/>
@@ -8845,7 +9069,7 @@
                 <a:ea typeface="Calibri" pitchFamily="34" charset="-122"/>
                 <a:cs typeface="Calibri" pitchFamily="34" charset="-120"/>
               </a:rPr>
-              <a:t>not, opposite</a:t>
+              <a:t>not; opposite; apart</a:t>
             </a:r>
             <a:endParaRPr lang="en-US" sz="850" dirty="0"/>
           </a:p>
@@ -8859,8 +9083,8 @@
         </p:nvSpPr>
         <p:spPr>
           <a:xfrm>
-            <a:off x="5803392" y="2258568"/>
-            <a:ext cx="1828800" cy="292608"/>
+            <a:off x="3659429" y="2258568"/>
+            <a:ext cx="1581912" cy="292608"/>
           </a:xfrm>
           <a:prstGeom prst="rect">
             <a:avLst>
@@ -8893,8 +9117,8 @@
         </p:nvSpPr>
         <p:spPr>
           <a:xfrm>
-            <a:off x="5803392" y="2258568"/>
-            <a:ext cx="1828800" cy="292608"/>
+            <a:off x="3659429" y="2258568"/>
+            <a:ext cx="1581912" cy="292608"/>
           </a:xfrm>
           <a:prstGeom prst="rect">
             <a:avLst/>
@@ -8918,7 +9142,7 @@
                 <a:ea typeface="Trebuchet MS" pitchFamily="34" charset="-122"/>
                 <a:cs typeface="Trebuchet MS" pitchFamily="34" charset="-120"/>
               </a:rPr>
-              <a:t>comfort</a:t>
+              <a:t>clos</a:t>
             </a:r>
             <a:endParaRPr lang="en-US" sz="1300" dirty="0"/>
           </a:p>
@@ -8932,8 +9156,8 @@
         </p:nvSpPr>
         <p:spPr>
           <a:xfrm>
-            <a:off x="5803392" y="2569464"/>
-            <a:ext cx="1828800" cy="201168"/>
+            <a:off x="3659429" y="2569464"/>
+            <a:ext cx="1581912" cy="201168"/>
           </a:xfrm>
           <a:prstGeom prst="rect">
             <a:avLst/>
@@ -8957,7 +9181,7 @@
                 <a:ea typeface="Calibri" pitchFamily="34" charset="-122"/>
                 <a:cs typeface="Calibri" pitchFamily="34" charset="-120"/>
               </a:rPr>
-              <a:t>ease, wellbeing</a:t>
+              <a:t>close</a:t>
             </a:r>
             <a:endParaRPr lang="en-US" sz="850" dirty="0"/>
           </a:p>
@@ -8966,6 +9190,230 @@
       <p:sp>
         <p:nvSpPr>
           <p:cNvPr id="22" name="Shape 20"/>
+          <p:cNvSpPr/>
+          <p:nvPr/>
+        </p:nvSpPr>
+        <p:spPr>
+          <a:xfrm>
+            <a:off x="5329123" y="2258568"/>
+            <a:ext cx="1581912" cy="292608"/>
+          </a:xfrm>
+          <a:prstGeom prst="rect">
+            <a:avLst>
+              <a:gd name="adj" fmla="val 25000"/>
+            </a:avLst>
+          </a:prstGeom>
+          <a:solidFill>
+            <a:srgbClr val="FCE7F3"/>
+          </a:solidFill>
+          <a:ln w="19050">
+            <a:solidFill>
+              <a:srgbClr val="DB2777"/>
+            </a:solidFill>
+            <a:prstDash val="solid"/>
+          </a:ln>
+          <a:effectLst>
+            <a:outerShdw sx="100000" sy="100000" kx="0" ky="0" algn="bl" rotWithShape="0" blurRad="101600" dist="38100" dir="8100000">
+              <a:srgbClr val="000000">
+                <a:alpha val="12000"/>
+              </a:srgbClr>
+            </a:outerShdw>
+          </a:effectLst>
+        </p:spPr>
+      </p:sp>
+      <p:sp>
+        <p:nvSpPr>
+          <p:cNvPr id="23" name="Text 21"/>
+          <p:cNvSpPr/>
+          <p:nvPr/>
+        </p:nvSpPr>
+        <p:spPr>
+          <a:xfrm>
+            <a:off x="5329123" y="2258568"/>
+            <a:ext cx="1581912" cy="292608"/>
+          </a:xfrm>
+          <a:prstGeom prst="rect">
+            <a:avLst/>
+          </a:prstGeom>
+          <a:noFill/>
+          <a:ln/>
+        </p:spPr>
+        <p:txBody>
+          <a:bodyPr wrap="square" lIns="0" tIns="0" rIns="0" bIns="0" rtlCol="0" anchor="ctr"/>
+          <a:lstStyle/>
+          <a:p>
+            <a:pPr algn="ctr" indent="0" marL="0">
+              <a:buNone/>
+            </a:pPr>
+            <a:r>
+              <a:rPr lang="en-US" sz="1300" b="1" dirty="0">
+                <a:solidFill>
+                  <a:srgbClr val="9D174D"/>
+                </a:solidFill>
+                <a:latin typeface="Trebuchet MS" pitchFamily="34" charset="0"/>
+                <a:ea typeface="Trebuchet MS" pitchFamily="34" charset="-122"/>
+                <a:cs typeface="Trebuchet MS" pitchFamily="34" charset="-120"/>
+              </a:rPr>
+              <a:t>ure</a:t>
+            </a:r>
+            <a:endParaRPr lang="en-US" sz="1300" dirty="0"/>
+          </a:p>
+        </p:txBody>
+      </p:sp>
+      <p:sp>
+        <p:nvSpPr>
+          <p:cNvPr id="24" name="Text 22"/>
+          <p:cNvSpPr/>
+          <p:nvPr/>
+        </p:nvSpPr>
+        <p:spPr>
+          <a:xfrm>
+            <a:off x="5329123" y="2569464"/>
+            <a:ext cx="1581912" cy="201168"/>
+          </a:xfrm>
+          <a:prstGeom prst="rect">
+            <a:avLst/>
+          </a:prstGeom>
+          <a:noFill/>
+          <a:ln/>
+        </p:spPr>
+        <p:txBody>
+          <a:bodyPr wrap="square" lIns="0" tIns="0" rIns="0" bIns="0" rtlCol="0" anchor="t"/>
+          <a:lstStyle/>
+          <a:p>
+            <a:pPr algn="ctr" indent="0" marL="0">
+              <a:buNone/>
+            </a:pPr>
+            <a:r>
+              <a:rPr lang="en-US" sz="850" dirty="0">
+                <a:solidFill>
+                  <a:srgbClr val="475569"/>
+                </a:solidFill>
+                <a:latin typeface="Calibri" pitchFamily="34" charset="0"/>
+                <a:ea typeface="Calibri" pitchFamily="34" charset="-122"/>
+                <a:cs typeface="Calibri" pitchFamily="34" charset="-120"/>
+              </a:rPr>
+              <a:t>result of</a:t>
+            </a:r>
+            <a:endParaRPr lang="en-US" sz="850" dirty="0"/>
+          </a:p>
+        </p:txBody>
+      </p:sp>
+      <p:sp>
+        <p:nvSpPr>
+          <p:cNvPr id="25" name="Shape 23"/>
+          <p:cNvSpPr/>
+          <p:nvPr/>
+        </p:nvSpPr>
+        <p:spPr>
+          <a:xfrm>
+            <a:off x="6998818" y="2258568"/>
+            <a:ext cx="1581912" cy="292608"/>
+          </a:xfrm>
+          <a:prstGeom prst="rect">
+            <a:avLst>
+              <a:gd name="adj" fmla="val 25000"/>
+            </a:avLst>
+          </a:prstGeom>
+          <a:solidFill>
+            <a:srgbClr val="FCE7F3"/>
+          </a:solidFill>
+          <a:ln w="19050">
+            <a:solidFill>
+              <a:srgbClr val="DB2777"/>
+            </a:solidFill>
+            <a:prstDash val="solid"/>
+          </a:ln>
+          <a:effectLst>
+            <a:outerShdw sx="100000" sy="100000" kx="0" ky="0" algn="bl" rotWithShape="0" blurRad="101600" dist="38100" dir="8100000">
+              <a:srgbClr val="000000">
+                <a:alpha val="12000"/>
+              </a:srgbClr>
+            </a:outerShdw>
+          </a:effectLst>
+        </p:spPr>
+      </p:sp>
+      <p:sp>
+        <p:nvSpPr>
+          <p:cNvPr id="26" name="Text 24"/>
+          <p:cNvSpPr/>
+          <p:nvPr/>
+        </p:nvSpPr>
+        <p:spPr>
+          <a:xfrm>
+            <a:off x="6998818" y="2258568"/>
+            <a:ext cx="1581912" cy="292608"/>
+          </a:xfrm>
+          <a:prstGeom prst="rect">
+            <a:avLst/>
+          </a:prstGeom>
+          <a:noFill/>
+          <a:ln/>
+        </p:spPr>
+        <p:txBody>
+          <a:bodyPr wrap="square" lIns="0" tIns="0" rIns="0" bIns="0" rtlCol="0" anchor="ctr"/>
+          <a:lstStyle/>
+          <a:p>
+            <a:pPr algn="ctr" indent="0" marL="0">
+              <a:buNone/>
+            </a:pPr>
+            <a:r>
+              <a:rPr lang="en-US" sz="1300" b="1" dirty="0">
+                <a:solidFill>
+                  <a:srgbClr val="9D174D"/>
+                </a:solidFill>
+                <a:latin typeface="Trebuchet MS" pitchFamily="34" charset="0"/>
+                <a:ea typeface="Trebuchet MS" pitchFamily="34" charset="-122"/>
+                <a:cs typeface="Trebuchet MS" pitchFamily="34" charset="-120"/>
+              </a:rPr>
+              <a:t>s</a:t>
+            </a:r>
+            <a:endParaRPr lang="en-US" sz="1300" dirty="0"/>
+          </a:p>
+        </p:txBody>
+      </p:sp>
+      <p:sp>
+        <p:nvSpPr>
+          <p:cNvPr id="27" name="Text 25"/>
+          <p:cNvSpPr/>
+          <p:nvPr/>
+        </p:nvSpPr>
+        <p:spPr>
+          <a:xfrm>
+            <a:off x="6998818" y="2569464"/>
+            <a:ext cx="1581912" cy="201168"/>
+          </a:xfrm>
+          <a:prstGeom prst="rect">
+            <a:avLst/>
+          </a:prstGeom>
+          <a:noFill/>
+          <a:ln/>
+        </p:spPr>
+        <p:txBody>
+          <a:bodyPr wrap="square" lIns="0" tIns="0" rIns="0" bIns="0" rtlCol="0" anchor="t"/>
+          <a:lstStyle/>
+          <a:p>
+            <a:pPr algn="ctr" indent="0" marL="0">
+              <a:buNone/>
+            </a:pPr>
+            <a:r>
+              <a:rPr lang="en-US" sz="850" dirty="0">
+                <a:solidFill>
+                  <a:srgbClr val="475569"/>
+                </a:solidFill>
+                <a:latin typeface="Calibri" pitchFamily="34" charset="0"/>
+                <a:ea typeface="Calibri" pitchFamily="34" charset="-122"/>
+                <a:cs typeface="Calibri" pitchFamily="34" charset="-120"/>
+              </a:rPr>
+              <a:t>plural or present tense</a:t>
+            </a:r>
+            <a:endParaRPr lang="en-US" sz="850" dirty="0"/>
+          </a:p>
+        </p:txBody>
+      </p:sp>
+      <p:sp>
+        <p:nvSpPr>
+          <p:cNvPr id="28" name="Shape 26"/>
           <p:cNvSpPr/>
           <p:nvPr/>
         </p:nvSpPr>
@@ -8992,7 +9440,7 @@
       </p:sp>
       <p:sp>
         <p:nvSpPr>
-          <p:cNvPr id="23" name="Text 21"/>
+          <p:cNvPr id="29" name="Text 27"/>
           <p:cNvSpPr/>
           <p:nvPr/>
         </p:nvSpPr>
@@ -9031,7 +9479,7 @@
       </p:sp>
       <p:sp>
         <p:nvSpPr>
-          <p:cNvPr id="24" name="Shape 22"/>
+          <p:cNvPr id="30" name="Shape 28"/>
           <p:cNvSpPr/>
           <p:nvPr/>
         </p:nvSpPr>
@@ -9058,7 +9506,7 @@
       </p:sp>
       <p:sp>
         <p:nvSpPr>
-          <p:cNvPr id="25" name="Shape 23"/>
+          <p:cNvPr id="31" name="Shape 29"/>
           <p:cNvSpPr/>
           <p:nvPr/>
         </p:nvSpPr>
@@ -9085,7 +9533,7 @@
       </p:sp>
       <p:sp>
         <p:nvSpPr>
-          <p:cNvPr id="26" name="Text 24"/>
+          <p:cNvPr id="32" name="Text 30"/>
           <p:cNvSpPr/>
           <p:nvPr/>
         </p:nvSpPr>
@@ -9124,7 +9572,7 @@
       </p:sp>
       <p:sp>
         <p:nvSpPr>
-          <p:cNvPr id="27" name="Text 25"/>
+          <p:cNvPr id="33" name="Text 31"/>
           <p:cNvSpPr/>
           <p:nvPr/>
         </p:nvSpPr>
@@ -9163,7 +9611,7 @@
       </p:sp>
       <p:sp>
         <p:nvSpPr>
-          <p:cNvPr id="28" name="Shape 26"/>
+          <p:cNvPr id="34" name="Shape 32"/>
           <p:cNvSpPr/>
           <p:nvPr/>
         </p:nvSpPr>
@@ -9190,7 +9638,7 @@
       </p:sp>
       <p:sp>
         <p:nvSpPr>
-          <p:cNvPr id="29" name="Text 27"/>
+          <p:cNvPr id="35" name="Text 33"/>
           <p:cNvSpPr/>
           <p:nvPr/>
         </p:nvSpPr>
@@ -9221,7 +9669,7 @@
                 <a:ea typeface="Trebuchet MS" pitchFamily="34" charset="-122"/>
                 <a:cs typeface="Trebuchet MS" pitchFamily="34" charset="-120"/>
               </a:rPr>
-              <a:t>com</a:t>
+              <a:t>clo</a:t>
             </a:r>
             <a:endParaRPr lang="en-US" sz="1400" dirty="0"/>
           </a:p>
@@ -9229,7 +9677,7 @@
       </p:sp>
       <p:sp>
         <p:nvSpPr>
-          <p:cNvPr id="30" name="Text 28"/>
+          <p:cNvPr id="36" name="Text 34"/>
           <p:cNvSpPr/>
           <p:nvPr/>
         </p:nvSpPr>
@@ -9268,7 +9716,7 @@
       </p:sp>
       <p:sp>
         <p:nvSpPr>
-          <p:cNvPr id="31" name="Shape 29"/>
+          <p:cNvPr id="37" name="Shape 35"/>
           <p:cNvSpPr/>
           <p:nvPr/>
         </p:nvSpPr>
@@ -9295,7 +9743,7 @@
       </p:sp>
       <p:sp>
         <p:nvSpPr>
-          <p:cNvPr id="32" name="Text 30"/>
+          <p:cNvPr id="38" name="Text 36"/>
           <p:cNvSpPr/>
           <p:nvPr/>
         </p:nvSpPr>
@@ -9326,7 +9774,7 @@
                 <a:ea typeface="Trebuchet MS" pitchFamily="34" charset="-122"/>
                 <a:cs typeface="Trebuchet MS" pitchFamily="34" charset="-120"/>
               </a:rPr>
-              <a:t>fort</a:t>
+              <a:t>sures</a:t>
             </a:r>
             <a:endParaRPr lang="en-US" sz="1400" dirty="0"/>
           </a:p>
@@ -9334,7 +9782,7 @@
       </p:sp>
       <p:sp>
         <p:nvSpPr>
-          <p:cNvPr id="33" name="Shape 31"/>
+          <p:cNvPr id="39" name="Shape 37"/>
           <p:cNvSpPr/>
           <p:nvPr/>
         </p:nvSpPr>
@@ -9361,7 +9809,7 @@
       </p:sp>
       <p:sp>
         <p:nvSpPr>
-          <p:cNvPr id="34" name="Text 32"/>
+          <p:cNvPr id="40" name="Text 38"/>
           <p:cNvSpPr/>
           <p:nvPr/>
         </p:nvSpPr>
@@ -9400,7 +9848,7 @@
       </p:sp>
       <p:sp>
         <p:nvSpPr>
-          <p:cNvPr id="35" name="Shape 33"/>
+          <p:cNvPr id="41" name="Shape 39"/>
           <p:cNvSpPr/>
           <p:nvPr/>
         </p:nvSpPr>
@@ -9427,7 +9875,7 @@
       </p:sp>
       <p:sp>
         <p:nvSpPr>
-          <p:cNvPr id="36" name="Text 34"/>
+          <p:cNvPr id="42" name="Text 40"/>
           <p:cNvSpPr/>
           <p:nvPr/>
         </p:nvSpPr>
@@ -9750,7 +10198,7 @@
                 <a:ea typeface="Calibri" pitchFamily="34" charset="-122"/>
                 <a:cs typeface="Calibri" pitchFamily="34" charset="-120"/>
               </a:rPr>
-              <a:t>Word Labs  •  wordlabs.app  •  Prefix: 'dis-' = not, opposite, away</a:t>
+              <a:t>Word Labs  •  wordlabs.app  •  Prefix: 'dis-' = not; opposite; apart</a:t>
             </a:r>
             <a:endParaRPr lang="en-US" sz="800" dirty="0"/>
           </a:p>
@@ -9889,7 +10337,7 @@
                 <a:ea typeface="Trebuchet MS" pitchFamily="34" charset="-122"/>
                 <a:cs typeface="Trebuchet MS" pitchFamily="34" charset="-120"/>
               </a:rPr>
-              <a:t>discomfort</a:t>
+              <a:t>disclosures</a:t>
             </a:r>
             <a:endParaRPr lang="en-US" sz="2800" dirty="0"/>
           </a:p>
@@ -9969,8 +10417,8 @@
         </p:nvSpPr>
         <p:spPr>
           <a:xfrm>
-            <a:off x="2938272" y="2258568"/>
-            <a:ext cx="1828800" cy="292608"/>
+            <a:off x="1989734" y="2258568"/>
+            <a:ext cx="1581912" cy="292608"/>
           </a:xfrm>
           <a:prstGeom prst="rect">
             <a:avLst>
@@ -10003,8 +10451,8 @@
         </p:nvSpPr>
         <p:spPr>
           <a:xfrm>
-            <a:off x="2938272" y="2258568"/>
-            <a:ext cx="1828800" cy="292608"/>
+            <a:off x="1989734" y="2258568"/>
+            <a:ext cx="1581912" cy="292608"/>
           </a:xfrm>
           <a:prstGeom prst="rect">
             <a:avLst/>
@@ -10042,8 +10490,8 @@
         </p:nvSpPr>
         <p:spPr>
           <a:xfrm>
-            <a:off x="2938272" y="2569464"/>
-            <a:ext cx="1828800" cy="201168"/>
+            <a:off x="1989734" y="2569464"/>
+            <a:ext cx="1581912" cy="201168"/>
           </a:xfrm>
           <a:prstGeom prst="rect">
             <a:avLst/>
@@ -10067,7 +10515,7 @@
                 <a:ea typeface="Calibri" pitchFamily="34" charset="-122"/>
                 <a:cs typeface="Calibri" pitchFamily="34" charset="-120"/>
               </a:rPr>
-              <a:t>not, opposite</a:t>
+              <a:t>not; opposite; apart</a:t>
             </a:r>
             <a:endParaRPr lang="en-US" sz="850" dirty="0"/>
           </a:p>
@@ -10081,8 +10529,8 @@
         </p:nvSpPr>
         <p:spPr>
           <a:xfrm>
-            <a:off x="5803392" y="2258568"/>
-            <a:ext cx="1828800" cy="292608"/>
+            <a:off x="3659429" y="2258568"/>
+            <a:ext cx="1581912" cy="292608"/>
           </a:xfrm>
           <a:prstGeom prst="rect">
             <a:avLst>
@@ -10115,8 +10563,8 @@
         </p:nvSpPr>
         <p:spPr>
           <a:xfrm>
-            <a:off x="5803392" y="2258568"/>
-            <a:ext cx="1828800" cy="292608"/>
+            <a:off x="3659429" y="2258568"/>
+            <a:ext cx="1581912" cy="292608"/>
           </a:xfrm>
           <a:prstGeom prst="rect">
             <a:avLst/>
@@ -10140,7 +10588,7 @@
                 <a:ea typeface="Trebuchet MS" pitchFamily="34" charset="-122"/>
                 <a:cs typeface="Trebuchet MS" pitchFamily="34" charset="-120"/>
               </a:rPr>
-              <a:t>comfort</a:t>
+              <a:t>clos</a:t>
             </a:r>
             <a:endParaRPr lang="en-US" sz="1300" dirty="0"/>
           </a:p>
@@ -10154,8 +10602,8 @@
         </p:nvSpPr>
         <p:spPr>
           <a:xfrm>
-            <a:off x="5803392" y="2569464"/>
-            <a:ext cx="1828800" cy="201168"/>
+            <a:off x="3659429" y="2569464"/>
+            <a:ext cx="1581912" cy="201168"/>
           </a:xfrm>
           <a:prstGeom prst="rect">
             <a:avLst/>
@@ -10179,7 +10627,7 @@
                 <a:ea typeface="Calibri" pitchFamily="34" charset="-122"/>
                 <a:cs typeface="Calibri" pitchFamily="34" charset="-120"/>
               </a:rPr>
-              <a:t>ease, wellbeing</a:t>
+              <a:t>close</a:t>
             </a:r>
             <a:endParaRPr lang="en-US" sz="850" dirty="0"/>
           </a:p>
@@ -10188,6 +10636,230 @@
       <p:sp>
         <p:nvSpPr>
           <p:cNvPr id="22" name="Shape 20"/>
+          <p:cNvSpPr/>
+          <p:nvPr/>
+        </p:nvSpPr>
+        <p:spPr>
+          <a:xfrm>
+            <a:off x="5329123" y="2258568"/>
+            <a:ext cx="1581912" cy="292608"/>
+          </a:xfrm>
+          <a:prstGeom prst="rect">
+            <a:avLst>
+              <a:gd name="adj" fmla="val 25000"/>
+            </a:avLst>
+          </a:prstGeom>
+          <a:solidFill>
+            <a:srgbClr val="FCE7F3"/>
+          </a:solidFill>
+          <a:ln w="19050">
+            <a:solidFill>
+              <a:srgbClr val="DB2777"/>
+            </a:solidFill>
+            <a:prstDash val="solid"/>
+          </a:ln>
+          <a:effectLst>
+            <a:outerShdw sx="100000" sy="100000" kx="0" ky="0" algn="bl" rotWithShape="0" blurRad="101600" dist="38100" dir="8100000">
+              <a:srgbClr val="000000">
+                <a:alpha val="12000"/>
+              </a:srgbClr>
+            </a:outerShdw>
+          </a:effectLst>
+        </p:spPr>
+      </p:sp>
+      <p:sp>
+        <p:nvSpPr>
+          <p:cNvPr id="23" name="Text 21"/>
+          <p:cNvSpPr/>
+          <p:nvPr/>
+        </p:nvSpPr>
+        <p:spPr>
+          <a:xfrm>
+            <a:off x="5329123" y="2258568"/>
+            <a:ext cx="1581912" cy="292608"/>
+          </a:xfrm>
+          <a:prstGeom prst="rect">
+            <a:avLst/>
+          </a:prstGeom>
+          <a:noFill/>
+          <a:ln/>
+        </p:spPr>
+        <p:txBody>
+          <a:bodyPr wrap="square" lIns="0" tIns="0" rIns="0" bIns="0" rtlCol="0" anchor="ctr"/>
+          <a:lstStyle/>
+          <a:p>
+            <a:pPr algn="ctr" indent="0" marL="0">
+              <a:buNone/>
+            </a:pPr>
+            <a:r>
+              <a:rPr lang="en-US" sz="1300" b="1" dirty="0">
+                <a:solidFill>
+                  <a:srgbClr val="9D174D"/>
+                </a:solidFill>
+                <a:latin typeface="Trebuchet MS" pitchFamily="34" charset="0"/>
+                <a:ea typeface="Trebuchet MS" pitchFamily="34" charset="-122"/>
+                <a:cs typeface="Trebuchet MS" pitchFamily="34" charset="-120"/>
+              </a:rPr>
+              <a:t>ure</a:t>
+            </a:r>
+            <a:endParaRPr lang="en-US" sz="1300" dirty="0"/>
+          </a:p>
+        </p:txBody>
+      </p:sp>
+      <p:sp>
+        <p:nvSpPr>
+          <p:cNvPr id="24" name="Text 22"/>
+          <p:cNvSpPr/>
+          <p:nvPr/>
+        </p:nvSpPr>
+        <p:spPr>
+          <a:xfrm>
+            <a:off x="5329123" y="2569464"/>
+            <a:ext cx="1581912" cy="201168"/>
+          </a:xfrm>
+          <a:prstGeom prst="rect">
+            <a:avLst/>
+          </a:prstGeom>
+          <a:noFill/>
+          <a:ln/>
+        </p:spPr>
+        <p:txBody>
+          <a:bodyPr wrap="square" lIns="0" tIns="0" rIns="0" bIns="0" rtlCol="0" anchor="t"/>
+          <a:lstStyle/>
+          <a:p>
+            <a:pPr algn="ctr" indent="0" marL="0">
+              <a:buNone/>
+            </a:pPr>
+            <a:r>
+              <a:rPr lang="en-US" sz="850" dirty="0">
+                <a:solidFill>
+                  <a:srgbClr val="475569"/>
+                </a:solidFill>
+                <a:latin typeface="Calibri" pitchFamily="34" charset="0"/>
+                <a:ea typeface="Calibri" pitchFamily="34" charset="-122"/>
+                <a:cs typeface="Calibri" pitchFamily="34" charset="-120"/>
+              </a:rPr>
+              <a:t>result of</a:t>
+            </a:r>
+            <a:endParaRPr lang="en-US" sz="850" dirty="0"/>
+          </a:p>
+        </p:txBody>
+      </p:sp>
+      <p:sp>
+        <p:nvSpPr>
+          <p:cNvPr id="25" name="Shape 23"/>
+          <p:cNvSpPr/>
+          <p:nvPr/>
+        </p:nvSpPr>
+        <p:spPr>
+          <a:xfrm>
+            <a:off x="6998818" y="2258568"/>
+            <a:ext cx="1581912" cy="292608"/>
+          </a:xfrm>
+          <a:prstGeom prst="rect">
+            <a:avLst>
+              <a:gd name="adj" fmla="val 25000"/>
+            </a:avLst>
+          </a:prstGeom>
+          <a:solidFill>
+            <a:srgbClr val="FCE7F3"/>
+          </a:solidFill>
+          <a:ln w="19050">
+            <a:solidFill>
+              <a:srgbClr val="DB2777"/>
+            </a:solidFill>
+            <a:prstDash val="solid"/>
+          </a:ln>
+          <a:effectLst>
+            <a:outerShdw sx="100000" sy="100000" kx="0" ky="0" algn="bl" rotWithShape="0" blurRad="101600" dist="38100" dir="8100000">
+              <a:srgbClr val="000000">
+                <a:alpha val="12000"/>
+              </a:srgbClr>
+            </a:outerShdw>
+          </a:effectLst>
+        </p:spPr>
+      </p:sp>
+      <p:sp>
+        <p:nvSpPr>
+          <p:cNvPr id="26" name="Text 24"/>
+          <p:cNvSpPr/>
+          <p:nvPr/>
+        </p:nvSpPr>
+        <p:spPr>
+          <a:xfrm>
+            <a:off x="6998818" y="2258568"/>
+            <a:ext cx="1581912" cy="292608"/>
+          </a:xfrm>
+          <a:prstGeom prst="rect">
+            <a:avLst/>
+          </a:prstGeom>
+          <a:noFill/>
+          <a:ln/>
+        </p:spPr>
+        <p:txBody>
+          <a:bodyPr wrap="square" lIns="0" tIns="0" rIns="0" bIns="0" rtlCol="0" anchor="ctr"/>
+          <a:lstStyle/>
+          <a:p>
+            <a:pPr algn="ctr" indent="0" marL="0">
+              <a:buNone/>
+            </a:pPr>
+            <a:r>
+              <a:rPr lang="en-US" sz="1300" b="1" dirty="0">
+                <a:solidFill>
+                  <a:srgbClr val="9D174D"/>
+                </a:solidFill>
+                <a:latin typeface="Trebuchet MS" pitchFamily="34" charset="0"/>
+                <a:ea typeface="Trebuchet MS" pitchFamily="34" charset="-122"/>
+                <a:cs typeface="Trebuchet MS" pitchFamily="34" charset="-120"/>
+              </a:rPr>
+              <a:t>s</a:t>
+            </a:r>
+            <a:endParaRPr lang="en-US" sz="1300" dirty="0"/>
+          </a:p>
+        </p:txBody>
+      </p:sp>
+      <p:sp>
+        <p:nvSpPr>
+          <p:cNvPr id="27" name="Text 25"/>
+          <p:cNvSpPr/>
+          <p:nvPr/>
+        </p:nvSpPr>
+        <p:spPr>
+          <a:xfrm>
+            <a:off x="6998818" y="2569464"/>
+            <a:ext cx="1581912" cy="201168"/>
+          </a:xfrm>
+          <a:prstGeom prst="rect">
+            <a:avLst/>
+          </a:prstGeom>
+          <a:noFill/>
+          <a:ln/>
+        </p:spPr>
+        <p:txBody>
+          <a:bodyPr wrap="square" lIns="0" tIns="0" rIns="0" bIns="0" rtlCol="0" anchor="t"/>
+          <a:lstStyle/>
+          <a:p>
+            <a:pPr algn="ctr" indent="0" marL="0">
+              <a:buNone/>
+            </a:pPr>
+            <a:r>
+              <a:rPr lang="en-US" sz="850" dirty="0">
+                <a:solidFill>
+                  <a:srgbClr val="475569"/>
+                </a:solidFill>
+                <a:latin typeface="Calibri" pitchFamily="34" charset="0"/>
+                <a:ea typeface="Calibri" pitchFamily="34" charset="-122"/>
+                <a:cs typeface="Calibri" pitchFamily="34" charset="-120"/>
+              </a:rPr>
+              <a:t>plural or present tense</a:t>
+            </a:r>
+            <a:endParaRPr lang="en-US" sz="850" dirty="0"/>
+          </a:p>
+        </p:txBody>
+      </p:sp>
+      <p:sp>
+        <p:nvSpPr>
+          <p:cNvPr id="28" name="Shape 26"/>
           <p:cNvSpPr/>
           <p:nvPr/>
         </p:nvSpPr>
@@ -10214,7 +10886,7 @@
       </p:sp>
       <p:sp>
         <p:nvSpPr>
-          <p:cNvPr id="23" name="Text 21"/>
+          <p:cNvPr id="29" name="Text 27"/>
           <p:cNvSpPr/>
           <p:nvPr/>
         </p:nvSpPr>
@@ -10253,7 +10925,7 @@
       </p:sp>
       <p:sp>
         <p:nvSpPr>
-          <p:cNvPr id="24" name="Shape 22"/>
+          <p:cNvPr id="30" name="Shape 28"/>
           <p:cNvSpPr/>
           <p:nvPr/>
         </p:nvSpPr>
@@ -10280,7 +10952,7 @@
       </p:sp>
       <p:sp>
         <p:nvSpPr>
-          <p:cNvPr id="25" name="Shape 23"/>
+          <p:cNvPr id="31" name="Shape 29"/>
           <p:cNvSpPr/>
           <p:nvPr/>
         </p:nvSpPr>
@@ -10307,7 +10979,7 @@
       </p:sp>
       <p:sp>
         <p:nvSpPr>
-          <p:cNvPr id="26" name="Text 24"/>
+          <p:cNvPr id="32" name="Text 30"/>
           <p:cNvSpPr/>
           <p:nvPr/>
         </p:nvSpPr>
@@ -10346,7 +11018,7 @@
       </p:sp>
       <p:sp>
         <p:nvSpPr>
-          <p:cNvPr id="27" name="Text 25"/>
+          <p:cNvPr id="33" name="Text 31"/>
           <p:cNvSpPr/>
           <p:nvPr/>
         </p:nvSpPr>
@@ -10385,7 +11057,7 @@
       </p:sp>
       <p:sp>
         <p:nvSpPr>
-          <p:cNvPr id="28" name="Shape 26"/>
+          <p:cNvPr id="34" name="Shape 32"/>
           <p:cNvSpPr/>
           <p:nvPr/>
         </p:nvSpPr>
@@ -10412,7 +11084,7 @@
       </p:sp>
       <p:sp>
         <p:nvSpPr>
-          <p:cNvPr id="29" name="Text 27"/>
+          <p:cNvPr id="35" name="Text 33"/>
           <p:cNvSpPr/>
           <p:nvPr/>
         </p:nvSpPr>
@@ -10443,7 +11115,7 @@
                 <a:ea typeface="Trebuchet MS" pitchFamily="34" charset="-122"/>
                 <a:cs typeface="Trebuchet MS" pitchFamily="34" charset="-120"/>
               </a:rPr>
-              <a:t>com</a:t>
+              <a:t>clo</a:t>
             </a:r>
             <a:endParaRPr lang="en-US" sz="1400" dirty="0"/>
           </a:p>
@@ -10451,7 +11123,7 @@
       </p:sp>
       <p:sp>
         <p:nvSpPr>
-          <p:cNvPr id="30" name="Text 28"/>
+          <p:cNvPr id="36" name="Text 34"/>
           <p:cNvSpPr/>
           <p:nvPr/>
         </p:nvSpPr>
@@ -10490,7 +11162,7 @@
       </p:sp>
       <p:sp>
         <p:nvSpPr>
-          <p:cNvPr id="31" name="Shape 29"/>
+          <p:cNvPr id="37" name="Shape 35"/>
           <p:cNvSpPr/>
           <p:nvPr/>
         </p:nvSpPr>
@@ -10517,7 +11189,7 @@
       </p:sp>
       <p:sp>
         <p:nvSpPr>
-          <p:cNvPr id="32" name="Text 30"/>
+          <p:cNvPr id="38" name="Text 36"/>
           <p:cNvSpPr/>
           <p:nvPr/>
         </p:nvSpPr>
@@ -10548,7 +11220,7 @@
                 <a:ea typeface="Trebuchet MS" pitchFamily="34" charset="-122"/>
                 <a:cs typeface="Trebuchet MS" pitchFamily="34" charset="-120"/>
               </a:rPr>
-              <a:t>fort</a:t>
+              <a:t>sures</a:t>
             </a:r>
             <a:endParaRPr lang="en-US" sz="1400" dirty="0"/>
           </a:p>
@@ -10556,7 +11228,7 @@
       </p:sp>
       <p:sp>
         <p:nvSpPr>
-          <p:cNvPr id="33" name="Shape 31"/>
+          <p:cNvPr id="39" name="Shape 37"/>
           <p:cNvSpPr/>
           <p:nvPr/>
         </p:nvSpPr>
@@ -10583,7 +11255,7 @@
       </p:sp>
       <p:sp>
         <p:nvSpPr>
-          <p:cNvPr id="34" name="Text 32"/>
+          <p:cNvPr id="40" name="Text 38"/>
           <p:cNvSpPr/>
           <p:nvPr/>
         </p:nvSpPr>
@@ -10622,7 +11294,7 @@
       </p:sp>
       <p:sp>
         <p:nvSpPr>
-          <p:cNvPr id="35" name="Shape 33"/>
+          <p:cNvPr id="41" name="Shape 39"/>
           <p:cNvSpPr/>
           <p:nvPr/>
         </p:nvSpPr>
@@ -10649,7 +11321,7 @@
       </p:sp>
       <p:sp>
         <p:nvSpPr>
-          <p:cNvPr id="36" name="Shape 34"/>
+          <p:cNvPr id="42" name="Shape 40"/>
           <p:cNvSpPr/>
           <p:nvPr/>
         </p:nvSpPr>
@@ -10676,7 +11348,7 @@
       </p:sp>
       <p:sp>
         <p:nvSpPr>
-          <p:cNvPr id="37" name="Text 35"/>
+          <p:cNvPr id="43" name="Text 41"/>
           <p:cNvSpPr/>
           <p:nvPr/>
         </p:nvSpPr>
@@ -10715,7 +11387,7 @@
       </p:sp>
       <p:sp>
         <p:nvSpPr>
-          <p:cNvPr id="38" name="Shape 36"/>
+          <p:cNvPr id="44" name="Shape 42"/>
           <p:cNvSpPr/>
           <p:nvPr/>
         </p:nvSpPr>
@@ -10742,7 +11414,7 @@
       </p:sp>
       <p:sp>
         <p:nvSpPr>
-          <p:cNvPr id="39" name="Text 37"/>
+          <p:cNvPr id="45" name="Text 43"/>
           <p:cNvSpPr/>
           <p:nvPr/>
         </p:nvSpPr>
@@ -10781,7 +11453,7 @@
       </p:sp>
       <p:sp>
         <p:nvSpPr>
-          <p:cNvPr id="40" name="Shape 38"/>
+          <p:cNvPr id="46" name="Shape 44"/>
           <p:cNvSpPr/>
           <p:nvPr/>
         </p:nvSpPr>
@@ -10808,7 +11480,7 @@
       </p:sp>
       <p:sp>
         <p:nvSpPr>
-          <p:cNvPr id="41" name="Text 39"/>
+          <p:cNvPr id="47" name="Text 45"/>
           <p:cNvSpPr/>
           <p:nvPr/>
         </p:nvSpPr>
@@ -10847,7 +11519,7 @@
       </p:sp>
       <p:sp>
         <p:nvSpPr>
-          <p:cNvPr id="42" name="Shape 40"/>
+          <p:cNvPr id="48" name="Shape 46"/>
           <p:cNvSpPr/>
           <p:nvPr/>
         </p:nvSpPr>
@@ -10874,7 +11546,7 @@
       </p:sp>
       <p:sp>
         <p:nvSpPr>
-          <p:cNvPr id="43" name="Text 41"/>
+          <p:cNvPr id="49" name="Text 47"/>
           <p:cNvSpPr/>
           <p:nvPr/>
         </p:nvSpPr>
@@ -10913,7 +11585,7 @@
       </p:sp>
       <p:sp>
         <p:nvSpPr>
-          <p:cNvPr id="44" name="Shape 42"/>
+          <p:cNvPr id="50" name="Shape 48"/>
           <p:cNvSpPr/>
           <p:nvPr/>
         </p:nvSpPr>
@@ -10940,7 +11612,7 @@
       </p:sp>
       <p:sp>
         <p:nvSpPr>
-          <p:cNvPr id="45" name="Text 43"/>
+          <p:cNvPr id="51" name="Text 49"/>
           <p:cNvSpPr/>
           <p:nvPr/>
         </p:nvSpPr>
@@ -10971,7 +11643,7 @@
                 <a:ea typeface="Trebuchet MS" pitchFamily="34" charset="-122"/>
                 <a:cs typeface="Trebuchet MS" pitchFamily="34" charset="-120"/>
               </a:rPr>
-              <a:t>o</a:t>
+              <a:t>l</a:t>
             </a:r>
             <a:endParaRPr lang="en-US" sz="900" dirty="0"/>
           </a:p>
@@ -10979,7 +11651,7 @@
       </p:sp>
       <p:sp>
         <p:nvSpPr>
-          <p:cNvPr id="46" name="Shape 44"/>
+          <p:cNvPr id="52" name="Shape 50"/>
           <p:cNvSpPr/>
           <p:nvPr/>
         </p:nvSpPr>
@@ -11006,7 +11678,7 @@
       </p:sp>
       <p:sp>
         <p:nvSpPr>
-          <p:cNvPr id="47" name="Text 45"/>
+          <p:cNvPr id="53" name="Text 51"/>
           <p:cNvSpPr/>
           <p:nvPr/>
         </p:nvSpPr>
@@ -11037,7 +11709,7 @@
                 <a:ea typeface="Trebuchet MS" pitchFamily="34" charset="-122"/>
                 <a:cs typeface="Trebuchet MS" pitchFamily="34" charset="-120"/>
               </a:rPr>
-              <a:t>m</a:t>
+              <a:t>o</a:t>
             </a:r>
             <a:endParaRPr lang="en-US" sz="900" dirty="0"/>
           </a:p>
@@ -11045,7 +11717,7 @@
       </p:sp>
       <p:sp>
         <p:nvSpPr>
-          <p:cNvPr id="48" name="Shape 46"/>
+          <p:cNvPr id="54" name="Shape 52"/>
           <p:cNvSpPr/>
           <p:nvPr/>
         </p:nvSpPr>
@@ -11072,7 +11744,7 @@
       </p:sp>
       <p:sp>
         <p:nvSpPr>
-          <p:cNvPr id="49" name="Text 47"/>
+          <p:cNvPr id="55" name="Text 53"/>
           <p:cNvSpPr/>
           <p:nvPr/>
         </p:nvSpPr>
@@ -11103,7 +11775,7 @@
                 <a:ea typeface="Trebuchet MS" pitchFamily="34" charset="-122"/>
                 <a:cs typeface="Trebuchet MS" pitchFamily="34" charset="-120"/>
               </a:rPr>
-              <a:t>f</a:t>
+              <a:t>s</a:t>
             </a:r>
             <a:endParaRPr lang="en-US" sz="900" dirty="0"/>
           </a:p>
@@ -11111,7 +11783,7 @@
       </p:sp>
       <p:sp>
         <p:nvSpPr>
-          <p:cNvPr id="50" name="Shape 48"/>
+          <p:cNvPr id="56" name="Shape 54"/>
           <p:cNvSpPr/>
           <p:nvPr/>
         </p:nvSpPr>
@@ -11138,7 +11810,7 @@
       </p:sp>
       <p:sp>
         <p:nvSpPr>
-          <p:cNvPr id="51" name="Text 49"/>
+          <p:cNvPr id="57" name="Text 55"/>
           <p:cNvSpPr/>
           <p:nvPr/>
         </p:nvSpPr>
@@ -11169,7 +11841,7 @@
                 <a:ea typeface="Trebuchet MS" pitchFamily="34" charset="-122"/>
                 <a:cs typeface="Trebuchet MS" pitchFamily="34" charset="-120"/>
               </a:rPr>
-              <a:t>or</a:t>
+              <a:t>ure</a:t>
             </a:r>
             <a:endParaRPr lang="en-US" sz="900" dirty="0"/>
           </a:p>
@@ -11177,7 +11849,7 @@
       </p:sp>
       <p:sp>
         <p:nvSpPr>
-          <p:cNvPr id="52" name="Shape 50"/>
+          <p:cNvPr id="58" name="Shape 56"/>
           <p:cNvSpPr/>
           <p:nvPr/>
         </p:nvSpPr>
@@ -11204,7 +11876,7 @@
       </p:sp>
       <p:sp>
         <p:nvSpPr>
-          <p:cNvPr id="53" name="Text 51"/>
+          <p:cNvPr id="59" name="Text 57"/>
           <p:cNvSpPr/>
           <p:nvPr/>
         </p:nvSpPr>
@@ -11235,7 +11907,7 @@
                 <a:ea typeface="Trebuchet MS" pitchFamily="34" charset="-122"/>
                 <a:cs typeface="Trebuchet MS" pitchFamily="34" charset="-120"/>
               </a:rPr>
-              <a:t>t</a:t>
+              <a:t>s</a:t>
             </a:r>
             <a:endParaRPr lang="en-US" sz="900" dirty="0"/>
           </a:p>
@@ -11527,7 +12199,7 @@
                 <a:ea typeface="Calibri" pitchFamily="34" charset="-122"/>
                 <a:cs typeface="Calibri" pitchFamily="34" charset="-120"/>
               </a:rPr>
-              <a:t>Word Labs  •  wordlabs.app  •  Prefix: 'dis-' = not, opposite, away</a:t>
+              <a:t>Word Labs  •  wordlabs.app  •  Prefix: 'dis-' = not; opposite; apart</a:t>
             </a:r>
             <a:endParaRPr lang="en-US" sz="800" dirty="0"/>
           </a:p>
@@ -11666,7 +12338,7 @@
                 <a:ea typeface="Trebuchet MS" pitchFamily="34" charset="-122"/>
                 <a:cs typeface="Trebuchet MS" pitchFamily="34" charset="-120"/>
               </a:rPr>
-              <a:t>disconnect</a:t>
+              <a:t>disturbance</a:t>
             </a:r>
             <a:endParaRPr lang="en-US" sz="2800" dirty="0"/>
           </a:p>
@@ -12354,7 +13026,7 @@
                 <a:ea typeface="Calibri" pitchFamily="34" charset="-122"/>
                 <a:cs typeface="Calibri" pitchFamily="34" charset="-120"/>
               </a:rPr>
-              <a:t>Word Labs  •  wordlabs.app  •  Prefix: 'dis-' = not, opposite, away</a:t>
+              <a:t>Word Labs  •  wordlabs.app  •  Prefix: 'dis-' = not; opposite; apart</a:t>
             </a:r>
             <a:endParaRPr lang="en-US" sz="800" dirty="0"/>
           </a:p>
@@ -12493,7 +13165,7 @@
                 <a:ea typeface="Trebuchet MS" pitchFamily="34" charset="-122"/>
                 <a:cs typeface="Trebuchet MS" pitchFamily="34" charset="-120"/>
               </a:rPr>
-              <a:t>disconnect</a:t>
+              <a:t>disturbance</a:t>
             </a:r>
             <a:endParaRPr lang="en-US" sz="2800" dirty="0"/>
           </a:p>
@@ -12573,7 +13245,7 @@
         </p:nvSpPr>
         <p:spPr>
           <a:xfrm>
-            <a:off x="2938272" y="2258568"/>
+            <a:off x="2221992" y="2258568"/>
             <a:ext cx="1828800" cy="292608"/>
           </a:xfrm>
           <a:prstGeom prst="rect">
@@ -12607,7 +13279,7 @@
         </p:nvSpPr>
         <p:spPr>
           <a:xfrm>
-            <a:off x="2938272" y="2258568"/>
+            <a:off x="2221992" y="2258568"/>
             <a:ext cx="1828800" cy="292608"/>
           </a:xfrm>
           <a:prstGeom prst="rect">
@@ -12646,7 +13318,7 @@
         </p:nvSpPr>
         <p:spPr>
           <a:xfrm>
-            <a:off x="2938272" y="2569464"/>
+            <a:off x="2221992" y="2569464"/>
             <a:ext cx="1828800" cy="201168"/>
           </a:xfrm>
           <a:prstGeom prst="rect">
@@ -12671,7 +13343,7 @@
                 <a:ea typeface="Calibri" pitchFamily="34" charset="-122"/>
                 <a:cs typeface="Calibri" pitchFamily="34" charset="-120"/>
               </a:rPr>
-              <a:t>not, opposite</a:t>
+              <a:t>not; opposite; apart</a:t>
             </a:r>
             <a:endParaRPr lang="en-US" sz="850" dirty="0"/>
           </a:p>
@@ -12685,7 +13357,7 @@
         </p:nvSpPr>
         <p:spPr>
           <a:xfrm>
-            <a:off x="5803392" y="2258568"/>
+            <a:off x="4370832" y="2258568"/>
             <a:ext cx="1828800" cy="292608"/>
           </a:xfrm>
           <a:prstGeom prst="rect">
@@ -12719,7 +13391,7 @@
         </p:nvSpPr>
         <p:spPr>
           <a:xfrm>
-            <a:off x="5803392" y="2258568"/>
+            <a:off x="4370832" y="2258568"/>
             <a:ext cx="1828800" cy="292608"/>
           </a:xfrm>
           <a:prstGeom prst="rect">
@@ -12744,7 +13416,7 @@
                 <a:ea typeface="Trebuchet MS" pitchFamily="34" charset="-122"/>
                 <a:cs typeface="Trebuchet MS" pitchFamily="34" charset="-120"/>
               </a:rPr>
-              <a:t>connect</a:t>
+              <a:t>turb</a:t>
             </a:r>
             <a:endParaRPr lang="en-US" sz="1300" dirty="0"/>
           </a:p>
@@ -12758,7 +13430,7 @@
         </p:nvSpPr>
         <p:spPr>
           <a:xfrm>
-            <a:off x="5803392" y="2569464"/>
+            <a:off x="4370832" y="2569464"/>
             <a:ext cx="1828800" cy="201168"/>
           </a:xfrm>
           <a:prstGeom prst="rect">
@@ -12783,7 +13455,7 @@
                 <a:ea typeface="Calibri" pitchFamily="34" charset="-122"/>
                 <a:cs typeface="Calibri" pitchFamily="34" charset="-120"/>
               </a:rPr>
-              <a:t>join together</a:t>
+              <a:t>disturb; agitate</a:t>
             </a:r>
             <a:endParaRPr lang="en-US" sz="850" dirty="0"/>
           </a:p>
@@ -12792,6 +13464,118 @@
       <p:sp>
         <p:nvSpPr>
           <p:cNvPr id="22" name="Shape 20"/>
+          <p:cNvSpPr/>
+          <p:nvPr/>
+        </p:nvSpPr>
+        <p:spPr>
+          <a:xfrm>
+            <a:off x="6519672" y="2258568"/>
+            <a:ext cx="1828800" cy="292608"/>
+          </a:xfrm>
+          <a:prstGeom prst="rect">
+            <a:avLst>
+              <a:gd name="adj" fmla="val 25000"/>
+            </a:avLst>
+          </a:prstGeom>
+          <a:solidFill>
+            <a:srgbClr val="FCE7F3"/>
+          </a:solidFill>
+          <a:ln w="19050">
+            <a:solidFill>
+              <a:srgbClr val="DB2777"/>
+            </a:solidFill>
+            <a:prstDash val="solid"/>
+          </a:ln>
+          <a:effectLst>
+            <a:outerShdw sx="100000" sy="100000" kx="0" ky="0" algn="bl" rotWithShape="0" blurRad="101600" dist="38100" dir="8100000">
+              <a:srgbClr val="000000">
+                <a:alpha val="12000"/>
+              </a:srgbClr>
+            </a:outerShdw>
+          </a:effectLst>
+        </p:spPr>
+      </p:sp>
+      <p:sp>
+        <p:nvSpPr>
+          <p:cNvPr id="23" name="Text 21"/>
+          <p:cNvSpPr/>
+          <p:nvPr/>
+        </p:nvSpPr>
+        <p:spPr>
+          <a:xfrm>
+            <a:off x="6519672" y="2258568"/>
+            <a:ext cx="1828800" cy="292608"/>
+          </a:xfrm>
+          <a:prstGeom prst="rect">
+            <a:avLst/>
+          </a:prstGeom>
+          <a:noFill/>
+          <a:ln/>
+        </p:spPr>
+        <p:txBody>
+          <a:bodyPr wrap="square" lIns="0" tIns="0" rIns="0" bIns="0" rtlCol="0" anchor="ctr"/>
+          <a:lstStyle/>
+          <a:p>
+            <a:pPr algn="ctr" indent="0" marL="0">
+              <a:buNone/>
+            </a:pPr>
+            <a:r>
+              <a:rPr lang="en-US" sz="1300" b="1" dirty="0">
+                <a:solidFill>
+                  <a:srgbClr val="9D174D"/>
+                </a:solidFill>
+                <a:latin typeface="Trebuchet MS" pitchFamily="34" charset="0"/>
+                <a:ea typeface="Trebuchet MS" pitchFamily="34" charset="-122"/>
+                <a:cs typeface="Trebuchet MS" pitchFamily="34" charset="-120"/>
+              </a:rPr>
+              <a:t>ance</a:t>
+            </a:r>
+            <a:endParaRPr lang="en-US" sz="1300" dirty="0"/>
+          </a:p>
+        </p:txBody>
+      </p:sp>
+      <p:sp>
+        <p:nvSpPr>
+          <p:cNvPr id="24" name="Text 22"/>
+          <p:cNvSpPr/>
+          <p:nvPr/>
+        </p:nvSpPr>
+        <p:spPr>
+          <a:xfrm>
+            <a:off x="6519672" y="2569464"/>
+            <a:ext cx="1828800" cy="201168"/>
+          </a:xfrm>
+          <a:prstGeom prst="rect">
+            <a:avLst/>
+          </a:prstGeom>
+          <a:noFill/>
+          <a:ln/>
+        </p:spPr>
+        <p:txBody>
+          <a:bodyPr wrap="square" lIns="0" tIns="0" rIns="0" bIns="0" rtlCol="0" anchor="t"/>
+          <a:lstStyle/>
+          <a:p>
+            <a:pPr algn="ctr" indent="0" marL="0">
+              <a:buNone/>
+            </a:pPr>
+            <a:r>
+              <a:rPr lang="en-US" sz="850" dirty="0">
+                <a:solidFill>
+                  <a:srgbClr val="475569"/>
+                </a:solidFill>
+                <a:latin typeface="Calibri" pitchFamily="34" charset="0"/>
+                <a:ea typeface="Calibri" pitchFamily="34" charset="-122"/>
+                <a:cs typeface="Calibri" pitchFamily="34" charset="-120"/>
+              </a:rPr>
+              <a:t>state of</a:t>
+            </a:r>
+            <a:endParaRPr lang="en-US" sz="850" dirty="0"/>
+          </a:p>
+        </p:txBody>
+      </p:sp>
+      <p:sp>
+        <p:nvSpPr>
+          <p:cNvPr id="25" name="Shape 23"/>
           <p:cNvSpPr/>
           <p:nvPr/>
         </p:nvSpPr>
@@ -12818,7 +13602,7 @@
       </p:sp>
       <p:sp>
         <p:nvSpPr>
-          <p:cNvPr id="23" name="Text 21"/>
+          <p:cNvPr id="26" name="Text 24"/>
           <p:cNvSpPr/>
           <p:nvPr/>
         </p:nvSpPr>
@@ -12857,7 +13641,7 @@
       </p:sp>
       <p:sp>
         <p:nvSpPr>
-          <p:cNvPr id="24" name="Shape 22"/>
+          <p:cNvPr id="27" name="Shape 25"/>
           <p:cNvSpPr/>
           <p:nvPr/>
         </p:nvSpPr>
@@ -12884,7 +13668,7 @@
       </p:sp>
       <p:sp>
         <p:nvSpPr>
-          <p:cNvPr id="25" name="Text 23"/>
+          <p:cNvPr id="28" name="Text 26"/>
           <p:cNvSpPr/>
           <p:nvPr/>
         </p:nvSpPr>
@@ -12923,7 +13707,7 @@
       </p:sp>
       <p:sp>
         <p:nvSpPr>
-          <p:cNvPr id="26" name="Shape 24"/>
+          <p:cNvPr id="29" name="Shape 27"/>
           <p:cNvSpPr/>
           <p:nvPr/>
         </p:nvSpPr>
@@ -12950,7 +13734,7 @@
       </p:sp>
       <p:sp>
         <p:nvSpPr>
-          <p:cNvPr id="27" name="Text 25"/>
+          <p:cNvPr id="30" name="Text 28"/>
           <p:cNvSpPr/>
           <p:nvPr/>
         </p:nvSpPr>
@@ -12989,7 +13773,7 @@
       </p:sp>
       <p:sp>
         <p:nvSpPr>
-          <p:cNvPr id="28" name="Shape 26"/>
+          <p:cNvPr id="31" name="Shape 29"/>
           <p:cNvSpPr/>
           <p:nvPr/>
         </p:nvSpPr>
@@ -13016,7 +13800,7 @@
       </p:sp>
       <p:sp>
         <p:nvSpPr>
-          <p:cNvPr id="29" name="Text 27"/>
+          <p:cNvPr id="32" name="Text 30"/>
           <p:cNvSpPr/>
           <p:nvPr/>
         </p:nvSpPr>
@@ -13339,7 +14123,7 @@
                 <a:ea typeface="Calibri" pitchFamily="34" charset="-122"/>
                 <a:cs typeface="Calibri" pitchFamily="34" charset="-120"/>
               </a:rPr>
-              <a:t>Word Labs  •  wordlabs.app  •  Prefix: 'dis-' = not, opposite, away</a:t>
+              <a:t>Word Labs  •  wordlabs.app  •  Prefix: 'dis-' = not; opposite; apart</a:t>
             </a:r>
             <a:endParaRPr lang="en-US" sz="800" dirty="0"/>
           </a:p>
@@ -13478,7 +14262,7 @@
                 <a:ea typeface="Trebuchet MS" pitchFamily="34" charset="-122"/>
                 <a:cs typeface="Trebuchet MS" pitchFamily="34" charset="-120"/>
               </a:rPr>
-              <a:t>disconnect</a:t>
+              <a:t>disturbance</a:t>
             </a:r>
             <a:endParaRPr lang="en-US" sz="2800" dirty="0"/>
           </a:p>
@@ -13558,7 +14342,7 @@
         </p:nvSpPr>
         <p:spPr>
           <a:xfrm>
-            <a:off x="2938272" y="2258568"/>
+            <a:off x="2221992" y="2258568"/>
             <a:ext cx="1828800" cy="292608"/>
           </a:xfrm>
           <a:prstGeom prst="rect">
@@ -13592,7 +14376,7 @@
         </p:nvSpPr>
         <p:spPr>
           <a:xfrm>
-            <a:off x="2938272" y="2258568"/>
+            <a:off x="2221992" y="2258568"/>
             <a:ext cx="1828800" cy="292608"/>
           </a:xfrm>
           <a:prstGeom prst="rect">
@@ -13631,7 +14415,7 @@
         </p:nvSpPr>
         <p:spPr>
           <a:xfrm>
-            <a:off x="2938272" y="2569464"/>
+            <a:off x="2221992" y="2569464"/>
             <a:ext cx="1828800" cy="201168"/>
           </a:xfrm>
           <a:prstGeom prst="rect">
@@ -13656,7 +14440,7 @@
                 <a:ea typeface="Calibri" pitchFamily="34" charset="-122"/>
                 <a:cs typeface="Calibri" pitchFamily="34" charset="-120"/>
               </a:rPr>
-              <a:t>not, opposite</a:t>
+              <a:t>not; opposite; apart</a:t>
             </a:r>
             <a:endParaRPr lang="en-US" sz="850" dirty="0"/>
           </a:p>
@@ -13670,7 +14454,7 @@
         </p:nvSpPr>
         <p:spPr>
           <a:xfrm>
-            <a:off x="5803392" y="2258568"/>
+            <a:off x="4370832" y="2258568"/>
             <a:ext cx="1828800" cy="292608"/>
           </a:xfrm>
           <a:prstGeom prst="rect">
@@ -13704,7 +14488,7 @@
         </p:nvSpPr>
         <p:spPr>
           <a:xfrm>
-            <a:off x="5803392" y="2258568"/>
+            <a:off x="4370832" y="2258568"/>
             <a:ext cx="1828800" cy="292608"/>
           </a:xfrm>
           <a:prstGeom prst="rect">
@@ -13729,7 +14513,7 @@
                 <a:ea typeface="Trebuchet MS" pitchFamily="34" charset="-122"/>
                 <a:cs typeface="Trebuchet MS" pitchFamily="34" charset="-120"/>
               </a:rPr>
-              <a:t>connect</a:t>
+              <a:t>turb</a:t>
             </a:r>
             <a:endParaRPr lang="en-US" sz="1300" dirty="0"/>
           </a:p>
@@ -13743,7 +14527,7 @@
         </p:nvSpPr>
         <p:spPr>
           <a:xfrm>
-            <a:off x="5803392" y="2569464"/>
+            <a:off x="4370832" y="2569464"/>
             <a:ext cx="1828800" cy="201168"/>
           </a:xfrm>
           <a:prstGeom prst="rect">
@@ -13768,7 +14552,7 @@
                 <a:ea typeface="Calibri" pitchFamily="34" charset="-122"/>
                 <a:cs typeface="Calibri" pitchFamily="34" charset="-120"/>
               </a:rPr>
-              <a:t>join together</a:t>
+              <a:t>disturb; agitate</a:t>
             </a:r>
             <a:endParaRPr lang="en-US" sz="850" dirty="0"/>
           </a:p>
@@ -13777,6 +14561,118 @@
       <p:sp>
         <p:nvSpPr>
           <p:cNvPr id="22" name="Shape 20"/>
+          <p:cNvSpPr/>
+          <p:nvPr/>
+        </p:nvSpPr>
+        <p:spPr>
+          <a:xfrm>
+            <a:off x="6519672" y="2258568"/>
+            <a:ext cx="1828800" cy="292608"/>
+          </a:xfrm>
+          <a:prstGeom prst="rect">
+            <a:avLst>
+              <a:gd name="adj" fmla="val 25000"/>
+            </a:avLst>
+          </a:prstGeom>
+          <a:solidFill>
+            <a:srgbClr val="FCE7F3"/>
+          </a:solidFill>
+          <a:ln w="19050">
+            <a:solidFill>
+              <a:srgbClr val="DB2777"/>
+            </a:solidFill>
+            <a:prstDash val="solid"/>
+          </a:ln>
+          <a:effectLst>
+            <a:outerShdw sx="100000" sy="100000" kx="0" ky="0" algn="bl" rotWithShape="0" blurRad="101600" dist="38100" dir="8100000">
+              <a:srgbClr val="000000">
+                <a:alpha val="12000"/>
+              </a:srgbClr>
+            </a:outerShdw>
+          </a:effectLst>
+        </p:spPr>
+      </p:sp>
+      <p:sp>
+        <p:nvSpPr>
+          <p:cNvPr id="23" name="Text 21"/>
+          <p:cNvSpPr/>
+          <p:nvPr/>
+        </p:nvSpPr>
+        <p:spPr>
+          <a:xfrm>
+            <a:off x="6519672" y="2258568"/>
+            <a:ext cx="1828800" cy="292608"/>
+          </a:xfrm>
+          <a:prstGeom prst="rect">
+            <a:avLst/>
+          </a:prstGeom>
+          <a:noFill/>
+          <a:ln/>
+        </p:spPr>
+        <p:txBody>
+          <a:bodyPr wrap="square" lIns="0" tIns="0" rIns="0" bIns="0" rtlCol="0" anchor="ctr"/>
+          <a:lstStyle/>
+          <a:p>
+            <a:pPr algn="ctr" indent="0" marL="0">
+              <a:buNone/>
+            </a:pPr>
+            <a:r>
+              <a:rPr lang="en-US" sz="1300" b="1" dirty="0">
+                <a:solidFill>
+                  <a:srgbClr val="9D174D"/>
+                </a:solidFill>
+                <a:latin typeface="Trebuchet MS" pitchFamily="34" charset="0"/>
+                <a:ea typeface="Trebuchet MS" pitchFamily="34" charset="-122"/>
+                <a:cs typeface="Trebuchet MS" pitchFamily="34" charset="-120"/>
+              </a:rPr>
+              <a:t>ance</a:t>
+            </a:r>
+            <a:endParaRPr lang="en-US" sz="1300" dirty="0"/>
+          </a:p>
+        </p:txBody>
+      </p:sp>
+      <p:sp>
+        <p:nvSpPr>
+          <p:cNvPr id="24" name="Text 22"/>
+          <p:cNvSpPr/>
+          <p:nvPr/>
+        </p:nvSpPr>
+        <p:spPr>
+          <a:xfrm>
+            <a:off x="6519672" y="2569464"/>
+            <a:ext cx="1828800" cy="201168"/>
+          </a:xfrm>
+          <a:prstGeom prst="rect">
+            <a:avLst/>
+          </a:prstGeom>
+          <a:noFill/>
+          <a:ln/>
+        </p:spPr>
+        <p:txBody>
+          <a:bodyPr wrap="square" lIns="0" tIns="0" rIns="0" bIns="0" rtlCol="0" anchor="t"/>
+          <a:lstStyle/>
+          <a:p>
+            <a:pPr algn="ctr" indent="0" marL="0">
+              <a:buNone/>
+            </a:pPr>
+            <a:r>
+              <a:rPr lang="en-US" sz="850" dirty="0">
+                <a:solidFill>
+                  <a:srgbClr val="475569"/>
+                </a:solidFill>
+                <a:latin typeface="Calibri" pitchFamily="34" charset="0"/>
+                <a:ea typeface="Calibri" pitchFamily="34" charset="-122"/>
+                <a:cs typeface="Calibri" pitchFamily="34" charset="-120"/>
+              </a:rPr>
+              <a:t>state of</a:t>
+            </a:r>
+            <a:endParaRPr lang="en-US" sz="850" dirty="0"/>
+          </a:p>
+        </p:txBody>
+      </p:sp>
+      <p:sp>
+        <p:nvSpPr>
+          <p:cNvPr id="25" name="Shape 23"/>
           <p:cNvSpPr/>
           <p:nvPr/>
         </p:nvSpPr>
@@ -13803,7 +14699,7 @@
       </p:sp>
       <p:sp>
         <p:nvSpPr>
-          <p:cNvPr id="23" name="Text 21"/>
+          <p:cNvPr id="26" name="Text 24"/>
           <p:cNvSpPr/>
           <p:nvPr/>
         </p:nvSpPr>
@@ -13842,7 +14738,7 @@
       </p:sp>
       <p:sp>
         <p:nvSpPr>
-          <p:cNvPr id="24" name="Shape 22"/>
+          <p:cNvPr id="27" name="Shape 25"/>
           <p:cNvSpPr/>
           <p:nvPr/>
         </p:nvSpPr>
@@ -13869,7 +14765,7 @@
       </p:sp>
       <p:sp>
         <p:nvSpPr>
-          <p:cNvPr id="25" name="Shape 23"/>
+          <p:cNvPr id="28" name="Shape 26"/>
           <p:cNvSpPr/>
           <p:nvPr/>
         </p:nvSpPr>
@@ -13896,7 +14792,7 @@
       </p:sp>
       <p:sp>
         <p:nvSpPr>
-          <p:cNvPr id="26" name="Text 24"/>
+          <p:cNvPr id="29" name="Text 27"/>
           <p:cNvSpPr/>
           <p:nvPr/>
         </p:nvSpPr>
@@ -13935,7 +14831,7 @@
       </p:sp>
       <p:sp>
         <p:nvSpPr>
-          <p:cNvPr id="27" name="Text 25"/>
+          <p:cNvPr id="30" name="Text 28"/>
           <p:cNvSpPr/>
           <p:nvPr/>
         </p:nvSpPr>
@@ -13974,7 +14870,7 @@
       </p:sp>
       <p:sp>
         <p:nvSpPr>
-          <p:cNvPr id="28" name="Shape 26"/>
+          <p:cNvPr id="31" name="Shape 29"/>
           <p:cNvSpPr/>
           <p:nvPr/>
         </p:nvSpPr>
@@ -14001,7 +14897,7 @@
       </p:sp>
       <p:sp>
         <p:nvSpPr>
-          <p:cNvPr id="29" name="Text 27"/>
+          <p:cNvPr id="32" name="Text 30"/>
           <p:cNvSpPr/>
           <p:nvPr/>
         </p:nvSpPr>
@@ -14032,7 +14928,7 @@
                 <a:ea typeface="Trebuchet MS" pitchFamily="34" charset="-122"/>
                 <a:cs typeface="Trebuchet MS" pitchFamily="34" charset="-120"/>
               </a:rPr>
-              <a:t>con</a:t>
+              <a:t>turb</a:t>
             </a:r>
             <a:endParaRPr lang="en-US" sz="1400" dirty="0"/>
           </a:p>
@@ -14040,7 +14936,7 @@
       </p:sp>
       <p:sp>
         <p:nvSpPr>
-          <p:cNvPr id="30" name="Text 28"/>
+          <p:cNvPr id="33" name="Text 31"/>
           <p:cNvSpPr/>
           <p:nvPr/>
         </p:nvSpPr>
@@ -14079,7 +14975,7 @@
       </p:sp>
       <p:sp>
         <p:nvSpPr>
-          <p:cNvPr id="31" name="Shape 29"/>
+          <p:cNvPr id="34" name="Shape 32"/>
           <p:cNvSpPr/>
           <p:nvPr/>
         </p:nvSpPr>
@@ -14106,7 +15002,7 @@
       </p:sp>
       <p:sp>
         <p:nvSpPr>
-          <p:cNvPr id="32" name="Text 30"/>
+          <p:cNvPr id="35" name="Text 33"/>
           <p:cNvSpPr/>
           <p:nvPr/>
         </p:nvSpPr>
@@ -14137,7 +15033,7 @@
                 <a:ea typeface="Trebuchet MS" pitchFamily="34" charset="-122"/>
                 <a:cs typeface="Trebuchet MS" pitchFamily="34" charset="-120"/>
               </a:rPr>
-              <a:t>nect</a:t>
+              <a:t>ance</a:t>
             </a:r>
             <a:endParaRPr lang="en-US" sz="1400" dirty="0"/>
           </a:p>
@@ -14145,7 +15041,7 @@
       </p:sp>
       <p:sp>
         <p:nvSpPr>
-          <p:cNvPr id="33" name="Shape 31"/>
+          <p:cNvPr id="36" name="Shape 34"/>
           <p:cNvSpPr/>
           <p:nvPr/>
         </p:nvSpPr>
@@ -14172,7 +15068,7 @@
       </p:sp>
       <p:sp>
         <p:nvSpPr>
-          <p:cNvPr id="34" name="Text 32"/>
+          <p:cNvPr id="37" name="Text 35"/>
           <p:cNvSpPr/>
           <p:nvPr/>
         </p:nvSpPr>
@@ -14211,7 +15107,7 @@
       </p:sp>
       <p:sp>
         <p:nvSpPr>
-          <p:cNvPr id="35" name="Shape 33"/>
+          <p:cNvPr id="38" name="Shape 36"/>
           <p:cNvSpPr/>
           <p:nvPr/>
         </p:nvSpPr>
@@ -14238,7 +15134,7 @@
       </p:sp>
       <p:sp>
         <p:nvSpPr>
-          <p:cNvPr id="36" name="Text 34"/>
+          <p:cNvPr id="39" name="Text 37"/>
           <p:cNvSpPr/>
           <p:nvPr/>
         </p:nvSpPr>
@@ -14470,7 +15366,7 @@
                 <a:ea typeface="Calibri" pitchFamily="34" charset="-122"/>
                 <a:cs typeface="Calibri" pitchFamily="34" charset="-120"/>
               </a:rPr>
-              <a:t>Prefix 'dis-' — not, opposite, away</a:t>
+              <a:t>Prefix 'dis-' — not; opposite; apart</a:t>
             </a:r>
             <a:endParaRPr lang="en-US" sz="1600" dirty="0"/>
           </a:p>
@@ -14826,7 +15722,7 @@
                 <a:ea typeface="Calibri" pitchFamily="34" charset="-122"/>
                 <a:cs typeface="Calibri" pitchFamily="34" charset="-120"/>
               </a:rPr>
-              <a:t>Word Labs  •  wordlabs.app  •  Prefix: 'dis-' = not, opposite, away</a:t>
+              <a:t>Word Labs  •  wordlabs.app  •  Prefix: 'dis-' = not; opposite; apart</a:t>
             </a:r>
             <a:endParaRPr lang="en-US" sz="800" dirty="0"/>
           </a:p>
@@ -14965,7 +15861,7 @@
                 <a:ea typeface="Trebuchet MS" pitchFamily="34" charset="-122"/>
                 <a:cs typeface="Trebuchet MS" pitchFamily="34" charset="-120"/>
               </a:rPr>
-              <a:t>disconnect</a:t>
+              <a:t>disturbance</a:t>
             </a:r>
             <a:endParaRPr lang="en-US" sz="2800" dirty="0"/>
           </a:p>
@@ -15045,7 +15941,7 @@
         </p:nvSpPr>
         <p:spPr>
           <a:xfrm>
-            <a:off x="2938272" y="2258568"/>
+            <a:off x="2221992" y="2258568"/>
             <a:ext cx="1828800" cy="292608"/>
           </a:xfrm>
           <a:prstGeom prst="rect">
@@ -15079,7 +15975,7 @@
         </p:nvSpPr>
         <p:spPr>
           <a:xfrm>
-            <a:off x="2938272" y="2258568"/>
+            <a:off x="2221992" y="2258568"/>
             <a:ext cx="1828800" cy="292608"/>
           </a:xfrm>
           <a:prstGeom prst="rect">
@@ -15118,7 +16014,7 @@
         </p:nvSpPr>
         <p:spPr>
           <a:xfrm>
-            <a:off x="2938272" y="2569464"/>
+            <a:off x="2221992" y="2569464"/>
             <a:ext cx="1828800" cy="201168"/>
           </a:xfrm>
           <a:prstGeom prst="rect">
@@ -15143,7 +16039,7 @@
                 <a:ea typeface="Calibri" pitchFamily="34" charset="-122"/>
                 <a:cs typeface="Calibri" pitchFamily="34" charset="-120"/>
               </a:rPr>
-              <a:t>not, opposite</a:t>
+              <a:t>not; opposite; apart</a:t>
             </a:r>
             <a:endParaRPr lang="en-US" sz="850" dirty="0"/>
           </a:p>
@@ -15157,7 +16053,7 @@
         </p:nvSpPr>
         <p:spPr>
           <a:xfrm>
-            <a:off x="5803392" y="2258568"/>
+            <a:off x="4370832" y="2258568"/>
             <a:ext cx="1828800" cy="292608"/>
           </a:xfrm>
           <a:prstGeom prst="rect">
@@ -15191,7 +16087,7 @@
         </p:nvSpPr>
         <p:spPr>
           <a:xfrm>
-            <a:off x="5803392" y="2258568"/>
+            <a:off x="4370832" y="2258568"/>
             <a:ext cx="1828800" cy="292608"/>
           </a:xfrm>
           <a:prstGeom prst="rect">
@@ -15216,7 +16112,7 @@
                 <a:ea typeface="Trebuchet MS" pitchFamily="34" charset="-122"/>
                 <a:cs typeface="Trebuchet MS" pitchFamily="34" charset="-120"/>
               </a:rPr>
-              <a:t>connect</a:t>
+              <a:t>turb</a:t>
             </a:r>
             <a:endParaRPr lang="en-US" sz="1300" dirty="0"/>
           </a:p>
@@ -15230,7 +16126,7 @@
         </p:nvSpPr>
         <p:spPr>
           <a:xfrm>
-            <a:off x="5803392" y="2569464"/>
+            <a:off x="4370832" y="2569464"/>
             <a:ext cx="1828800" cy="201168"/>
           </a:xfrm>
           <a:prstGeom prst="rect">
@@ -15255,7 +16151,7 @@
                 <a:ea typeface="Calibri" pitchFamily="34" charset="-122"/>
                 <a:cs typeface="Calibri" pitchFamily="34" charset="-120"/>
               </a:rPr>
-              <a:t>join together</a:t>
+              <a:t>disturb; agitate</a:t>
             </a:r>
             <a:endParaRPr lang="en-US" sz="850" dirty="0"/>
           </a:p>
@@ -15264,6 +16160,118 @@
       <p:sp>
         <p:nvSpPr>
           <p:cNvPr id="22" name="Shape 20"/>
+          <p:cNvSpPr/>
+          <p:nvPr/>
+        </p:nvSpPr>
+        <p:spPr>
+          <a:xfrm>
+            <a:off x="6519672" y="2258568"/>
+            <a:ext cx="1828800" cy="292608"/>
+          </a:xfrm>
+          <a:prstGeom prst="rect">
+            <a:avLst>
+              <a:gd name="adj" fmla="val 25000"/>
+            </a:avLst>
+          </a:prstGeom>
+          <a:solidFill>
+            <a:srgbClr val="FCE7F3"/>
+          </a:solidFill>
+          <a:ln w="19050">
+            <a:solidFill>
+              <a:srgbClr val="DB2777"/>
+            </a:solidFill>
+            <a:prstDash val="solid"/>
+          </a:ln>
+          <a:effectLst>
+            <a:outerShdw sx="100000" sy="100000" kx="0" ky="0" algn="bl" rotWithShape="0" blurRad="101600" dist="38100" dir="8100000">
+              <a:srgbClr val="000000">
+                <a:alpha val="12000"/>
+              </a:srgbClr>
+            </a:outerShdw>
+          </a:effectLst>
+        </p:spPr>
+      </p:sp>
+      <p:sp>
+        <p:nvSpPr>
+          <p:cNvPr id="23" name="Text 21"/>
+          <p:cNvSpPr/>
+          <p:nvPr/>
+        </p:nvSpPr>
+        <p:spPr>
+          <a:xfrm>
+            <a:off x="6519672" y="2258568"/>
+            <a:ext cx="1828800" cy="292608"/>
+          </a:xfrm>
+          <a:prstGeom prst="rect">
+            <a:avLst/>
+          </a:prstGeom>
+          <a:noFill/>
+          <a:ln/>
+        </p:spPr>
+        <p:txBody>
+          <a:bodyPr wrap="square" lIns="0" tIns="0" rIns="0" bIns="0" rtlCol="0" anchor="ctr"/>
+          <a:lstStyle/>
+          <a:p>
+            <a:pPr algn="ctr" indent="0" marL="0">
+              <a:buNone/>
+            </a:pPr>
+            <a:r>
+              <a:rPr lang="en-US" sz="1300" b="1" dirty="0">
+                <a:solidFill>
+                  <a:srgbClr val="9D174D"/>
+                </a:solidFill>
+                <a:latin typeface="Trebuchet MS" pitchFamily="34" charset="0"/>
+                <a:ea typeface="Trebuchet MS" pitchFamily="34" charset="-122"/>
+                <a:cs typeface="Trebuchet MS" pitchFamily="34" charset="-120"/>
+              </a:rPr>
+              <a:t>ance</a:t>
+            </a:r>
+            <a:endParaRPr lang="en-US" sz="1300" dirty="0"/>
+          </a:p>
+        </p:txBody>
+      </p:sp>
+      <p:sp>
+        <p:nvSpPr>
+          <p:cNvPr id="24" name="Text 22"/>
+          <p:cNvSpPr/>
+          <p:nvPr/>
+        </p:nvSpPr>
+        <p:spPr>
+          <a:xfrm>
+            <a:off x="6519672" y="2569464"/>
+            <a:ext cx="1828800" cy="201168"/>
+          </a:xfrm>
+          <a:prstGeom prst="rect">
+            <a:avLst/>
+          </a:prstGeom>
+          <a:noFill/>
+          <a:ln/>
+        </p:spPr>
+        <p:txBody>
+          <a:bodyPr wrap="square" lIns="0" tIns="0" rIns="0" bIns="0" rtlCol="0" anchor="t"/>
+          <a:lstStyle/>
+          <a:p>
+            <a:pPr algn="ctr" indent="0" marL="0">
+              <a:buNone/>
+            </a:pPr>
+            <a:r>
+              <a:rPr lang="en-US" sz="850" dirty="0">
+                <a:solidFill>
+                  <a:srgbClr val="475569"/>
+                </a:solidFill>
+                <a:latin typeface="Calibri" pitchFamily="34" charset="0"/>
+                <a:ea typeface="Calibri" pitchFamily="34" charset="-122"/>
+                <a:cs typeface="Calibri" pitchFamily="34" charset="-120"/>
+              </a:rPr>
+              <a:t>state of</a:t>
+            </a:r>
+            <a:endParaRPr lang="en-US" sz="850" dirty="0"/>
+          </a:p>
+        </p:txBody>
+      </p:sp>
+      <p:sp>
+        <p:nvSpPr>
+          <p:cNvPr id="25" name="Shape 23"/>
           <p:cNvSpPr/>
           <p:nvPr/>
         </p:nvSpPr>
@@ -15290,7 +16298,7 @@
       </p:sp>
       <p:sp>
         <p:nvSpPr>
-          <p:cNvPr id="23" name="Text 21"/>
+          <p:cNvPr id="26" name="Text 24"/>
           <p:cNvSpPr/>
           <p:nvPr/>
         </p:nvSpPr>
@@ -15329,7 +16337,7 @@
       </p:sp>
       <p:sp>
         <p:nvSpPr>
-          <p:cNvPr id="24" name="Shape 22"/>
+          <p:cNvPr id="27" name="Shape 25"/>
           <p:cNvSpPr/>
           <p:nvPr/>
         </p:nvSpPr>
@@ -15356,7 +16364,7 @@
       </p:sp>
       <p:sp>
         <p:nvSpPr>
-          <p:cNvPr id="25" name="Shape 23"/>
+          <p:cNvPr id="28" name="Shape 26"/>
           <p:cNvSpPr/>
           <p:nvPr/>
         </p:nvSpPr>
@@ -15383,7 +16391,7 @@
       </p:sp>
       <p:sp>
         <p:nvSpPr>
-          <p:cNvPr id="26" name="Text 24"/>
+          <p:cNvPr id="29" name="Text 27"/>
           <p:cNvSpPr/>
           <p:nvPr/>
         </p:nvSpPr>
@@ -15422,7 +16430,7 @@
       </p:sp>
       <p:sp>
         <p:nvSpPr>
-          <p:cNvPr id="27" name="Text 25"/>
+          <p:cNvPr id="30" name="Text 28"/>
           <p:cNvSpPr/>
           <p:nvPr/>
         </p:nvSpPr>
@@ -15461,7 +16469,7 @@
       </p:sp>
       <p:sp>
         <p:nvSpPr>
-          <p:cNvPr id="28" name="Shape 26"/>
+          <p:cNvPr id="31" name="Shape 29"/>
           <p:cNvSpPr/>
           <p:nvPr/>
         </p:nvSpPr>
@@ -15488,7 +16496,7 @@
       </p:sp>
       <p:sp>
         <p:nvSpPr>
-          <p:cNvPr id="29" name="Text 27"/>
+          <p:cNvPr id="32" name="Text 30"/>
           <p:cNvSpPr/>
           <p:nvPr/>
         </p:nvSpPr>
@@ -15519,7 +16527,7 @@
                 <a:ea typeface="Trebuchet MS" pitchFamily="34" charset="-122"/>
                 <a:cs typeface="Trebuchet MS" pitchFamily="34" charset="-120"/>
               </a:rPr>
-              <a:t>con</a:t>
+              <a:t>turb</a:t>
             </a:r>
             <a:endParaRPr lang="en-US" sz="1400" dirty="0"/>
           </a:p>
@@ -15527,7 +16535,7 @@
       </p:sp>
       <p:sp>
         <p:nvSpPr>
-          <p:cNvPr id="30" name="Text 28"/>
+          <p:cNvPr id="33" name="Text 31"/>
           <p:cNvSpPr/>
           <p:nvPr/>
         </p:nvSpPr>
@@ -15566,7 +16574,7 @@
       </p:sp>
       <p:sp>
         <p:nvSpPr>
-          <p:cNvPr id="31" name="Shape 29"/>
+          <p:cNvPr id="34" name="Shape 32"/>
           <p:cNvSpPr/>
           <p:nvPr/>
         </p:nvSpPr>
@@ -15593,7 +16601,7 @@
       </p:sp>
       <p:sp>
         <p:nvSpPr>
-          <p:cNvPr id="32" name="Text 30"/>
+          <p:cNvPr id="35" name="Text 33"/>
           <p:cNvSpPr/>
           <p:nvPr/>
         </p:nvSpPr>
@@ -15624,7 +16632,7 @@
                 <a:ea typeface="Trebuchet MS" pitchFamily="34" charset="-122"/>
                 <a:cs typeface="Trebuchet MS" pitchFamily="34" charset="-120"/>
               </a:rPr>
-              <a:t>nect</a:t>
+              <a:t>ance</a:t>
             </a:r>
             <a:endParaRPr lang="en-US" sz="1400" dirty="0"/>
           </a:p>
@@ -15632,7 +16640,7 @@
       </p:sp>
       <p:sp>
         <p:nvSpPr>
-          <p:cNvPr id="33" name="Shape 31"/>
+          <p:cNvPr id="36" name="Shape 34"/>
           <p:cNvSpPr/>
           <p:nvPr/>
         </p:nvSpPr>
@@ -15659,7 +16667,7 @@
       </p:sp>
       <p:sp>
         <p:nvSpPr>
-          <p:cNvPr id="34" name="Text 32"/>
+          <p:cNvPr id="37" name="Text 35"/>
           <p:cNvSpPr/>
           <p:nvPr/>
         </p:nvSpPr>
@@ -15698,18 +16706,18 @@
       </p:sp>
       <p:sp>
         <p:nvSpPr>
-          <p:cNvPr id="35" name="Shape 33"/>
+          <p:cNvPr id="38" name="Shape 36"/>
           <p:cNvSpPr/>
           <p:nvPr/>
         </p:nvSpPr>
         <p:spPr>
           <a:xfrm>
             <a:off x="1874520" y="4096512"/>
-            <a:ext cx="6903720" cy="804672"/>
+            <a:ext cx="6903720" cy="658368"/>
           </a:xfrm>
           <a:prstGeom prst="rect">
             <a:avLst>
-              <a:gd name="adj" fmla="val 6818"/>
+              <a:gd name="adj" fmla="val 8333"/>
             </a:avLst>
           </a:prstGeom>
           <a:solidFill>
@@ -15725,18 +16733,18 @@
       </p:sp>
       <p:sp>
         <p:nvSpPr>
-          <p:cNvPr id="36" name="Shape 34"/>
-          <p:cNvSpPr/>
-          <p:nvPr/>
-        </p:nvSpPr>
-        <p:spPr>
-          <a:xfrm>
-            <a:off x="2023872" y="4169664"/>
-            <a:ext cx="685800" cy="384048"/>
+          <p:cNvPr id="39" name="Shape 37"/>
+          <p:cNvSpPr/>
+          <p:nvPr/>
+        </p:nvSpPr>
+        <p:spPr>
+          <a:xfrm>
+            <a:off x="1951828" y="4169664"/>
+            <a:ext cx="603504" cy="475488"/>
           </a:xfrm>
           <a:prstGeom prst="rect">
             <a:avLst>
-              <a:gd name="adj" fmla="val 9524"/>
+              <a:gd name="adj" fmla="val 7692"/>
             </a:avLst>
           </a:prstGeom>
           <a:solidFill>
@@ -15752,14 +16760,14 @@
       </p:sp>
       <p:sp>
         <p:nvSpPr>
-          <p:cNvPr id="37" name="Text 35"/>
-          <p:cNvSpPr/>
-          <p:nvPr/>
-        </p:nvSpPr>
-        <p:spPr>
-          <a:xfrm>
-            <a:off x="2023872" y="4169664"/>
-            <a:ext cx="685800" cy="384048"/>
+          <p:cNvPr id="40" name="Text 38"/>
+          <p:cNvSpPr/>
+          <p:nvPr/>
+        </p:nvSpPr>
+        <p:spPr>
+          <a:xfrm>
+            <a:off x="1951828" y="4169664"/>
+            <a:ext cx="603504" cy="475488"/>
           </a:xfrm>
           <a:prstGeom prst="rect">
             <a:avLst/>
@@ -15791,18 +16799,18 @@
       </p:sp>
       <p:sp>
         <p:nvSpPr>
-          <p:cNvPr id="38" name="Shape 36"/>
-          <p:cNvSpPr/>
-          <p:nvPr/>
-        </p:nvSpPr>
-        <p:spPr>
-          <a:xfrm>
-            <a:off x="2831592" y="4169664"/>
-            <a:ext cx="685800" cy="384048"/>
+          <p:cNvPr id="41" name="Shape 39"/>
+          <p:cNvSpPr/>
+          <p:nvPr/>
+        </p:nvSpPr>
+        <p:spPr>
+          <a:xfrm>
+            <a:off x="2605209" y="4169664"/>
+            <a:ext cx="603504" cy="475488"/>
           </a:xfrm>
           <a:prstGeom prst="rect">
             <a:avLst>
-              <a:gd name="adj" fmla="val 9524"/>
+              <a:gd name="adj" fmla="val 7692"/>
             </a:avLst>
           </a:prstGeom>
           <a:solidFill>
@@ -15818,14 +16826,14 @@
       </p:sp>
       <p:sp>
         <p:nvSpPr>
-          <p:cNvPr id="39" name="Text 37"/>
-          <p:cNvSpPr/>
-          <p:nvPr/>
-        </p:nvSpPr>
-        <p:spPr>
-          <a:xfrm>
-            <a:off x="2831592" y="4169664"/>
-            <a:ext cx="685800" cy="384048"/>
+          <p:cNvPr id="42" name="Text 40"/>
+          <p:cNvSpPr/>
+          <p:nvPr/>
+        </p:nvSpPr>
+        <p:spPr>
+          <a:xfrm>
+            <a:off x="2605209" y="4169664"/>
+            <a:ext cx="603504" cy="475488"/>
           </a:xfrm>
           <a:prstGeom prst="rect">
             <a:avLst/>
@@ -15857,18 +16865,18 @@
       </p:sp>
       <p:sp>
         <p:nvSpPr>
-          <p:cNvPr id="40" name="Shape 38"/>
-          <p:cNvSpPr/>
-          <p:nvPr/>
-        </p:nvSpPr>
-        <p:spPr>
-          <a:xfrm>
-            <a:off x="3639312" y="4169664"/>
-            <a:ext cx="685800" cy="384048"/>
+          <p:cNvPr id="43" name="Shape 41"/>
+          <p:cNvSpPr/>
+          <p:nvPr/>
+        </p:nvSpPr>
+        <p:spPr>
+          <a:xfrm>
+            <a:off x="3258589" y="4169664"/>
+            <a:ext cx="603504" cy="475488"/>
           </a:xfrm>
           <a:prstGeom prst="rect">
             <a:avLst>
-              <a:gd name="adj" fmla="val 9524"/>
+              <a:gd name="adj" fmla="val 7692"/>
             </a:avLst>
           </a:prstGeom>
           <a:solidFill>
@@ -15884,14 +16892,14 @@
       </p:sp>
       <p:sp>
         <p:nvSpPr>
-          <p:cNvPr id="41" name="Text 39"/>
-          <p:cNvSpPr/>
-          <p:nvPr/>
-        </p:nvSpPr>
-        <p:spPr>
-          <a:xfrm>
-            <a:off x="3639312" y="4169664"/>
-            <a:ext cx="685800" cy="384048"/>
+          <p:cNvPr id="44" name="Text 42"/>
+          <p:cNvSpPr/>
+          <p:nvPr/>
+        </p:nvSpPr>
+        <p:spPr>
+          <a:xfrm>
+            <a:off x="3258589" y="4169664"/>
+            <a:ext cx="603504" cy="475488"/>
           </a:xfrm>
           <a:prstGeom prst="rect">
             <a:avLst/>
@@ -15923,18 +16931,18 @@
       </p:sp>
       <p:sp>
         <p:nvSpPr>
-          <p:cNvPr id="42" name="Shape 40"/>
-          <p:cNvSpPr/>
-          <p:nvPr/>
-        </p:nvSpPr>
-        <p:spPr>
-          <a:xfrm>
-            <a:off x="4447032" y="4169664"/>
-            <a:ext cx="685800" cy="384048"/>
+          <p:cNvPr id="45" name="Shape 43"/>
+          <p:cNvSpPr/>
+          <p:nvPr/>
+        </p:nvSpPr>
+        <p:spPr>
+          <a:xfrm>
+            <a:off x="3911969" y="4169664"/>
+            <a:ext cx="603504" cy="475488"/>
           </a:xfrm>
           <a:prstGeom prst="rect">
             <a:avLst>
-              <a:gd name="adj" fmla="val 9524"/>
+              <a:gd name="adj" fmla="val 7692"/>
             </a:avLst>
           </a:prstGeom>
           <a:solidFill>
@@ -15950,14 +16958,14 @@
       </p:sp>
       <p:sp>
         <p:nvSpPr>
-          <p:cNvPr id="43" name="Text 41"/>
-          <p:cNvSpPr/>
-          <p:nvPr/>
-        </p:nvSpPr>
-        <p:spPr>
-          <a:xfrm>
-            <a:off x="4447032" y="4169664"/>
-            <a:ext cx="685800" cy="384048"/>
+          <p:cNvPr id="46" name="Text 44"/>
+          <p:cNvSpPr/>
+          <p:nvPr/>
+        </p:nvSpPr>
+        <p:spPr>
+          <a:xfrm>
+            <a:off x="3911969" y="4169664"/>
+            <a:ext cx="603504" cy="475488"/>
           </a:xfrm>
           <a:prstGeom prst="rect">
             <a:avLst/>
@@ -15981,7 +16989,7 @@
                 <a:ea typeface="Trebuchet MS" pitchFamily="34" charset="-122"/>
                 <a:cs typeface="Trebuchet MS" pitchFamily="34" charset="-120"/>
               </a:rPr>
-              <a:t>c</a:t>
+              <a:t>t</a:t>
             </a:r>
             <a:endParaRPr lang="en-US" sz="900" dirty="0"/>
           </a:p>
@@ -15989,18 +16997,18 @@
       </p:sp>
       <p:sp>
         <p:nvSpPr>
-          <p:cNvPr id="44" name="Shape 42"/>
-          <p:cNvSpPr/>
-          <p:nvPr/>
-        </p:nvSpPr>
-        <p:spPr>
-          <a:xfrm>
-            <a:off x="5254752" y="4169664"/>
-            <a:ext cx="685800" cy="384048"/>
+          <p:cNvPr id="47" name="Shape 45"/>
+          <p:cNvSpPr/>
+          <p:nvPr/>
+        </p:nvSpPr>
+        <p:spPr>
+          <a:xfrm>
+            <a:off x="4565350" y="4169664"/>
+            <a:ext cx="603504" cy="475488"/>
           </a:xfrm>
           <a:prstGeom prst="rect">
             <a:avLst>
-              <a:gd name="adj" fmla="val 9524"/>
+              <a:gd name="adj" fmla="val 7692"/>
             </a:avLst>
           </a:prstGeom>
           <a:solidFill>
@@ -16016,14 +17024,14 @@
       </p:sp>
       <p:sp>
         <p:nvSpPr>
-          <p:cNvPr id="45" name="Text 43"/>
-          <p:cNvSpPr/>
-          <p:nvPr/>
-        </p:nvSpPr>
-        <p:spPr>
-          <a:xfrm>
-            <a:off x="5254752" y="4169664"/>
-            <a:ext cx="685800" cy="384048"/>
+          <p:cNvPr id="48" name="Text 46"/>
+          <p:cNvSpPr/>
+          <p:nvPr/>
+        </p:nvSpPr>
+        <p:spPr>
+          <a:xfrm>
+            <a:off x="4565350" y="4169664"/>
+            <a:ext cx="603504" cy="475488"/>
           </a:xfrm>
           <a:prstGeom prst="rect">
             <a:avLst/>
@@ -16047,7 +17055,7 @@
                 <a:ea typeface="Trebuchet MS" pitchFamily="34" charset="-122"/>
                 <a:cs typeface="Trebuchet MS" pitchFamily="34" charset="-120"/>
               </a:rPr>
-              <a:t>o</a:t>
+              <a:t>ur</a:t>
             </a:r>
             <a:endParaRPr lang="en-US" sz="900" dirty="0"/>
           </a:p>
@@ -16055,18 +17063,18 @@
       </p:sp>
       <p:sp>
         <p:nvSpPr>
-          <p:cNvPr id="46" name="Shape 44"/>
-          <p:cNvSpPr/>
-          <p:nvPr/>
-        </p:nvSpPr>
-        <p:spPr>
-          <a:xfrm>
-            <a:off x="6062472" y="4169664"/>
-            <a:ext cx="685800" cy="384048"/>
+          <p:cNvPr id="49" name="Shape 47"/>
+          <p:cNvSpPr/>
+          <p:nvPr/>
+        </p:nvSpPr>
+        <p:spPr>
+          <a:xfrm>
+            <a:off x="5218730" y="4169664"/>
+            <a:ext cx="603504" cy="475488"/>
           </a:xfrm>
           <a:prstGeom prst="rect">
             <a:avLst>
-              <a:gd name="adj" fmla="val 9524"/>
+              <a:gd name="adj" fmla="val 7692"/>
             </a:avLst>
           </a:prstGeom>
           <a:solidFill>
@@ -16082,14 +17090,14 @@
       </p:sp>
       <p:sp>
         <p:nvSpPr>
-          <p:cNvPr id="47" name="Text 45"/>
-          <p:cNvSpPr/>
-          <p:nvPr/>
-        </p:nvSpPr>
-        <p:spPr>
-          <a:xfrm>
-            <a:off x="6062472" y="4169664"/>
-            <a:ext cx="685800" cy="384048"/>
+          <p:cNvPr id="50" name="Text 48"/>
+          <p:cNvSpPr/>
+          <p:nvPr/>
+        </p:nvSpPr>
+        <p:spPr>
+          <a:xfrm>
+            <a:off x="5218730" y="4169664"/>
+            <a:ext cx="603504" cy="475488"/>
           </a:xfrm>
           <a:prstGeom prst="rect">
             <a:avLst/>
@@ -16113,7 +17121,7 @@
                 <a:ea typeface="Trebuchet MS" pitchFamily="34" charset="-122"/>
                 <a:cs typeface="Trebuchet MS" pitchFamily="34" charset="-120"/>
               </a:rPr>
-              <a:t>nn</a:t>
+              <a:t>b</a:t>
             </a:r>
             <a:endParaRPr lang="en-US" sz="900" dirty="0"/>
           </a:p>
@@ -16121,18 +17129,18 @@
       </p:sp>
       <p:sp>
         <p:nvSpPr>
-          <p:cNvPr id="48" name="Shape 46"/>
-          <p:cNvSpPr/>
-          <p:nvPr/>
-        </p:nvSpPr>
-        <p:spPr>
-          <a:xfrm>
-            <a:off x="6870192" y="4169664"/>
-            <a:ext cx="685800" cy="384048"/>
+          <p:cNvPr id="51" name="Shape 49"/>
+          <p:cNvSpPr/>
+          <p:nvPr/>
+        </p:nvSpPr>
+        <p:spPr>
+          <a:xfrm>
+            <a:off x="5872111" y="4169664"/>
+            <a:ext cx="603504" cy="475488"/>
           </a:xfrm>
           <a:prstGeom prst="rect">
             <a:avLst>
-              <a:gd name="adj" fmla="val 9524"/>
+              <a:gd name="adj" fmla="val 7692"/>
             </a:avLst>
           </a:prstGeom>
           <a:solidFill>
@@ -16148,14 +17156,14 @@
       </p:sp>
       <p:sp>
         <p:nvSpPr>
-          <p:cNvPr id="49" name="Text 47"/>
-          <p:cNvSpPr/>
-          <p:nvPr/>
-        </p:nvSpPr>
-        <p:spPr>
-          <a:xfrm>
-            <a:off x="6870192" y="4169664"/>
-            <a:ext cx="685800" cy="384048"/>
+          <p:cNvPr id="52" name="Text 50"/>
+          <p:cNvSpPr/>
+          <p:nvPr/>
+        </p:nvSpPr>
+        <p:spPr>
+          <a:xfrm>
+            <a:off x="5872111" y="4169664"/>
+            <a:ext cx="603504" cy="475488"/>
           </a:xfrm>
           <a:prstGeom prst="rect">
             <a:avLst/>
@@ -16179,7 +17187,7 @@
                 <a:ea typeface="Trebuchet MS" pitchFamily="34" charset="-122"/>
                 <a:cs typeface="Trebuchet MS" pitchFamily="34" charset="-120"/>
               </a:rPr>
-              <a:t>e</a:t>
+              <a:t>a</a:t>
             </a:r>
             <a:endParaRPr lang="en-US" sz="900" dirty="0"/>
           </a:p>
@@ -16187,18 +17195,18 @@
       </p:sp>
       <p:sp>
         <p:nvSpPr>
-          <p:cNvPr id="50" name="Shape 48"/>
-          <p:cNvSpPr/>
-          <p:nvPr/>
-        </p:nvSpPr>
-        <p:spPr>
-          <a:xfrm>
-            <a:off x="7677912" y="4169664"/>
-            <a:ext cx="685800" cy="384048"/>
+          <p:cNvPr id="53" name="Shape 51"/>
+          <p:cNvSpPr/>
+          <p:nvPr/>
+        </p:nvSpPr>
+        <p:spPr>
+          <a:xfrm>
+            <a:off x="6525491" y="4169664"/>
+            <a:ext cx="603504" cy="475488"/>
           </a:xfrm>
           <a:prstGeom prst="rect">
             <a:avLst>
-              <a:gd name="adj" fmla="val 9524"/>
+              <a:gd name="adj" fmla="val 7692"/>
             </a:avLst>
           </a:prstGeom>
           <a:solidFill>
@@ -16214,14 +17222,14 @@
       </p:sp>
       <p:sp>
         <p:nvSpPr>
-          <p:cNvPr id="51" name="Text 49"/>
-          <p:cNvSpPr/>
-          <p:nvPr/>
-        </p:nvSpPr>
-        <p:spPr>
-          <a:xfrm>
-            <a:off x="7677912" y="4169664"/>
-            <a:ext cx="685800" cy="384048"/>
+          <p:cNvPr id="54" name="Text 52"/>
+          <p:cNvSpPr/>
+          <p:nvPr/>
+        </p:nvSpPr>
+        <p:spPr>
+          <a:xfrm>
+            <a:off x="6525491" y="4169664"/>
+            <a:ext cx="603504" cy="475488"/>
           </a:xfrm>
           <a:prstGeom prst="rect">
             <a:avLst/>
@@ -16245,7 +17253,7 @@
                 <a:ea typeface="Trebuchet MS" pitchFamily="34" charset="-122"/>
                 <a:cs typeface="Trebuchet MS" pitchFamily="34" charset="-120"/>
               </a:rPr>
-              <a:t>ct</a:t>
+              <a:t>n</a:t>
             </a:r>
             <a:endParaRPr lang="en-US" sz="900" dirty="0"/>
           </a:p>
@@ -16253,40 +17261,133 @@
       </p:sp>
       <p:sp>
         <p:nvSpPr>
-          <p:cNvPr id="52" name="Text 50"/>
-          <p:cNvSpPr/>
-          <p:nvPr/>
-        </p:nvSpPr>
-        <p:spPr>
-          <a:xfrm>
-            <a:off x="7677912" y="4572000"/>
-            <a:ext cx="685800" cy="219456"/>
-          </a:xfrm>
-          <a:prstGeom prst="rect">
-            <a:avLst/>
-          </a:prstGeom>
-          <a:noFill/>
-          <a:ln/>
-        </p:spPr>
-        <p:txBody>
-          <a:bodyPr wrap="square" lIns="0" tIns="0" rIns="0" bIns="0" rtlCol="0" anchor="t"/>
-          <a:lstStyle/>
-          <a:p>
-            <a:pPr algn="ctr" indent="0" marL="0">
-              <a:buNone/>
-            </a:pPr>
-            <a:r>
-              <a:rPr lang="en-US" sz="750" i="1" dirty="0">
-                <a:solidFill>
-                  <a:srgbClr val="94A3B8"/>
-                </a:solidFill>
-                <a:latin typeface="Calibri" pitchFamily="34" charset="0"/>
-                <a:ea typeface="Calibri" pitchFamily="34" charset="-122"/>
-                <a:cs typeface="Calibri" pitchFamily="34" charset="-120"/>
-              </a:rPr>
-              <a:t>/kt/</a:t>
-            </a:r>
-            <a:endParaRPr lang="en-US" sz="750" dirty="0"/>
+          <p:cNvPr id="55" name="Shape 53"/>
+          <p:cNvSpPr/>
+          <p:nvPr/>
+        </p:nvSpPr>
+        <p:spPr>
+          <a:xfrm>
+            <a:off x="7178871" y="4169664"/>
+            <a:ext cx="603504" cy="475488"/>
+          </a:xfrm>
+          <a:prstGeom prst="rect">
+            <a:avLst>
+              <a:gd name="adj" fmla="val 7692"/>
+            </a:avLst>
+          </a:prstGeom>
+          <a:solidFill>
+            <a:srgbClr val="FFFFFF"/>
+          </a:solidFill>
+          <a:ln w="12700">
+            <a:solidFill>
+              <a:srgbClr val="DB2777"/>
+            </a:solidFill>
+            <a:prstDash val="solid"/>
+          </a:ln>
+        </p:spPr>
+      </p:sp>
+      <p:sp>
+        <p:nvSpPr>
+          <p:cNvPr id="56" name="Text 54"/>
+          <p:cNvSpPr/>
+          <p:nvPr/>
+        </p:nvSpPr>
+        <p:spPr>
+          <a:xfrm>
+            <a:off x="7178871" y="4169664"/>
+            <a:ext cx="603504" cy="475488"/>
+          </a:xfrm>
+          <a:prstGeom prst="rect">
+            <a:avLst/>
+          </a:prstGeom>
+          <a:noFill/>
+          <a:ln/>
+        </p:spPr>
+        <p:txBody>
+          <a:bodyPr wrap="square" lIns="0" tIns="0" rIns="0" bIns="0" rtlCol="0" anchor="ctr"/>
+          <a:lstStyle/>
+          <a:p>
+            <a:pPr algn="ctr" indent="0" marL="0">
+              <a:buNone/>
+            </a:pPr>
+            <a:r>
+              <a:rPr lang="en-US" sz="900" b="1" dirty="0">
+                <a:solidFill>
+                  <a:srgbClr val="9D174D"/>
+                </a:solidFill>
+                <a:latin typeface="Trebuchet MS" pitchFamily="34" charset="0"/>
+                <a:ea typeface="Trebuchet MS" pitchFamily="34" charset="-122"/>
+                <a:cs typeface="Trebuchet MS" pitchFamily="34" charset="-120"/>
+              </a:rPr>
+              <a:t>c</a:t>
+            </a:r>
+            <a:endParaRPr lang="en-US" sz="900" dirty="0"/>
+          </a:p>
+        </p:txBody>
+      </p:sp>
+      <p:sp>
+        <p:nvSpPr>
+          <p:cNvPr id="57" name="Shape 55"/>
+          <p:cNvSpPr/>
+          <p:nvPr/>
+        </p:nvSpPr>
+        <p:spPr>
+          <a:xfrm>
+            <a:off x="7832252" y="4169664"/>
+            <a:ext cx="603504" cy="475488"/>
+          </a:xfrm>
+          <a:prstGeom prst="rect">
+            <a:avLst>
+              <a:gd name="adj" fmla="val 7692"/>
+            </a:avLst>
+          </a:prstGeom>
+          <a:solidFill>
+            <a:srgbClr val="FFFFFF"/>
+          </a:solidFill>
+          <a:ln w="12700">
+            <a:solidFill>
+              <a:srgbClr val="DB2777"/>
+            </a:solidFill>
+            <a:prstDash val="solid"/>
+          </a:ln>
+        </p:spPr>
+      </p:sp>
+      <p:sp>
+        <p:nvSpPr>
+          <p:cNvPr id="58" name="Text 56"/>
+          <p:cNvSpPr/>
+          <p:nvPr/>
+        </p:nvSpPr>
+        <p:spPr>
+          <a:xfrm>
+            <a:off x="7832252" y="4169664"/>
+            <a:ext cx="603504" cy="475488"/>
+          </a:xfrm>
+          <a:prstGeom prst="rect">
+            <a:avLst/>
+          </a:prstGeom>
+          <a:noFill/>
+          <a:ln/>
+        </p:spPr>
+        <p:txBody>
+          <a:bodyPr wrap="square" lIns="0" tIns="0" rIns="0" bIns="0" rtlCol="0" anchor="ctr"/>
+          <a:lstStyle/>
+          <a:p>
+            <a:pPr algn="ctr" indent="0" marL="0">
+              <a:buNone/>
+            </a:pPr>
+            <a:r>
+              <a:rPr lang="en-US" sz="900" b="1" dirty="0">
+                <a:solidFill>
+                  <a:srgbClr val="9D174D"/>
+                </a:solidFill>
+                <a:latin typeface="Trebuchet MS" pitchFamily="34" charset="0"/>
+                <a:ea typeface="Trebuchet MS" pitchFamily="34" charset="-122"/>
+                <a:cs typeface="Trebuchet MS" pitchFamily="34" charset="-120"/>
+              </a:rPr>
+              <a:t>e</a:t>
+            </a:r>
+            <a:endParaRPr lang="en-US" sz="900" dirty="0"/>
           </a:p>
         </p:txBody>
       </p:sp>
@@ -16858,7 +17959,7 @@
                 <a:ea typeface="Calibri" pitchFamily="34" charset="-122"/>
                 <a:cs typeface="Calibri" pitchFamily="34" charset="-120"/>
               </a:rPr>
-              <a:t>Word Labs  •  wordlabs.app  •  Prefix: 'dis-' = not, opposite, away</a:t>
+              <a:t>Word Labs  •  wordlabs.app  •  Prefix: 'dis-' = not; opposite; apart</a:t>
             </a:r>
             <a:endParaRPr lang="en-US" sz="800" dirty="0"/>
           </a:p>
@@ -17192,7 +18293,7 @@
                 <a:ea typeface="Trebuchet MS" pitchFamily="34" charset="-122"/>
                 <a:cs typeface="Trebuchet MS" pitchFamily="34" charset="-120"/>
               </a:rPr>
-              <a:t>2</a:t>
+              <a:t>0</a:t>
             </a:r>
             <a:pPr algn="ctr" indent="0" marL="0">
               <a:buNone/>
@@ -17206,7 +18307,7 @@
                 <a:ea typeface="Trebuchet MS" pitchFamily="34" charset="-122"/>
                 <a:cs typeface="Trebuchet MS" pitchFamily="34" charset="-120"/>
               </a:rPr>
-              <a:t>  punctuation marks</a:t>
+              <a:t>  punctuation mark</a:t>
             </a:r>
             <a:endParaRPr lang="en-US" sz="2800" dirty="0"/>
           </a:p>
@@ -17498,7 +18599,7 @@
                 <a:ea typeface="Calibri" pitchFamily="34" charset="-122"/>
                 <a:cs typeface="Calibri" pitchFamily="34" charset="-120"/>
               </a:rPr>
-              <a:t>Word Labs  •  wordlabs.app  •  Prefix: 'dis-' = not, opposite, away</a:t>
+              <a:t>Word Labs  •  wordlabs.app  •  Prefix: 'dis-' = not; opposite; apart</a:t>
             </a:r>
             <a:endParaRPr lang="en-US" sz="800" dirty="0"/>
           </a:p>
@@ -17610,7 +18711,7 @@
                 <a:ea typeface="Calibri" pitchFamily="34" charset="-122"/>
                 <a:cs typeface="Calibri" pitchFamily="34" charset="-120"/>
               </a:rPr>
-              <a:t>It was a great </a:t>
+              <a:t>There were several </a:t>
             </a:r>
             <a:pPr algn="l" indent="0" marL="0">
               <a:buNone/>
@@ -17627,7 +18728,7 @@
                 <a:ea typeface="Calibri" pitchFamily="34" charset="-122"/>
                 <a:cs typeface="Calibri" pitchFamily="34" charset="-120"/>
               </a:rPr>
-              <a:t>discovery</a:t>
+              <a:t>disturbances</a:t>
             </a:r>
             <a:pPr algn="l" indent="0" marL="0">
               <a:buNone/>
@@ -17641,7 +18742,7 @@
                 <a:ea typeface="Calibri" pitchFamily="34" charset="-122"/>
                 <a:cs typeface="Calibri" pitchFamily="34" charset="-120"/>
               </a:rPr>
-              <a:t> that the honest explorer did not </a:t>
+              <a:t> in the street after the football match. The flood was a terrible </a:t>
             </a:r>
             <a:pPr algn="l" indent="0" marL="0">
               <a:buNone/>
@@ -17658,7 +18759,7 @@
                 <a:ea typeface="Calibri" pitchFamily="34" charset="-122"/>
                 <a:cs typeface="Calibri" pitchFamily="34" charset="-120"/>
               </a:rPr>
-              <a:t>disappear</a:t>
+              <a:t>disaster</a:t>
             </a:r>
             <a:pPr algn="l" indent="0" marL="0">
               <a:buNone/>
@@ -17672,7 +18773,38 @@
                 <a:ea typeface="Calibri" pitchFamily="34" charset="-122"/>
                 <a:cs typeface="Calibri" pitchFamily="34" charset="-120"/>
               </a:rPr>
-              <a:t> into the jungle.</a:t>
+              <a:t> for the whole town. Scientists study natural </a:t>
+            </a:r>
+            <a:pPr algn="l" indent="0" marL="0">
+              <a:buNone/>
+            </a:pPr>
+            <a:r>
+              <a:rPr lang="en-US" sz="1800" b="1" dirty="0">
+                <a:solidFill>
+                  <a:srgbClr val="0D9488"/>
+                </a:solidFill>
+                <a:highlight>
+                  <a:srgbClr val="CCFBF1"/>
+                </a:highlight>
+                <a:latin typeface="Calibri" pitchFamily="34" charset="0"/>
+                <a:ea typeface="Calibri" pitchFamily="34" charset="-122"/>
+                <a:cs typeface="Calibri" pitchFamily="34" charset="-120"/>
+              </a:rPr>
+              <a:t>disasters</a:t>
+            </a:r>
+            <a:pPr algn="l" indent="0" marL="0">
+              <a:buNone/>
+            </a:pPr>
+            <a:r>
+              <a:rPr lang="en-US" sz="1800" dirty="0">
+                <a:solidFill>
+                  <a:srgbClr val="0F172A"/>
+                </a:solidFill>
+                <a:latin typeface="Calibri" pitchFamily="34" charset="0"/>
+                <a:ea typeface="Calibri" pitchFamily="34" charset="-122"/>
+                <a:cs typeface="Calibri" pitchFamily="34" charset="-120"/>
+              </a:rPr>
+              <a:t> like earthquakes and floods.</a:t>
             </a:r>
             <a:endParaRPr lang="en-US" sz="1800" dirty="0"/>
           </a:p>
@@ -17827,7 +18959,7 @@
                 <a:ea typeface="Trebuchet MS" pitchFamily="34" charset="-122"/>
                 <a:cs typeface="Trebuchet MS" pitchFamily="34" charset="-120"/>
               </a:rPr>
-              <a:t>discovery</a:t>
+              <a:t>disturbances</a:t>
             </a:r>
             <a:endParaRPr lang="en-US" sz="1400" dirty="0"/>
           </a:p>
@@ -17955,7 +19087,7 @@
                 <a:ea typeface="Trebuchet MS" pitchFamily="34" charset="-122"/>
                 <a:cs typeface="Trebuchet MS" pitchFamily="34" charset="-120"/>
               </a:rPr>
-              <a:t>dishonest</a:t>
+              <a:t>disaster</a:t>
             </a:r>
             <a:endParaRPr lang="en-US" sz="1400" dirty="0"/>
           </a:p>
@@ -18083,7 +19215,7 @@
                 <a:ea typeface="Trebuchet MS" pitchFamily="34" charset="-122"/>
                 <a:cs typeface="Trebuchet MS" pitchFamily="34" charset="-120"/>
               </a:rPr>
-              <a:t>disappear</a:t>
+              <a:t>disasters</a:t>
             </a:r>
             <a:endParaRPr lang="en-US" sz="1400" dirty="0"/>
           </a:p>
@@ -18414,7 +19546,7 @@
                 <a:ea typeface="Calibri" pitchFamily="34" charset="-122"/>
                 <a:cs typeface="Calibri" pitchFamily="34" charset="-120"/>
               </a:rPr>
-              <a:t>Word Labs  •  wordlabs.app  •  Prefix: 'dis-' = not, opposite, away</a:t>
+              <a:t>Word Labs  •  wordlabs.app  •  Prefix: 'dis-' = not; opposite; apart</a:t>
             </a:r>
             <a:endParaRPr lang="en-US" sz="800" dirty="0"/>
           </a:p>
@@ -18553,7 +19685,7 @@
                 <a:ea typeface="Trebuchet MS" pitchFamily="34" charset="-122"/>
                 <a:cs typeface="Trebuchet MS" pitchFamily="34" charset="-120"/>
               </a:rPr>
-              <a:t>discovery</a:t>
+              <a:t>disturbances</a:t>
             </a:r>
             <a:endParaRPr lang="en-US" sz="2800" dirty="0"/>
           </a:p>
@@ -19241,7 +20373,7 @@
                 <a:ea typeface="Calibri" pitchFamily="34" charset="-122"/>
                 <a:cs typeface="Calibri" pitchFamily="34" charset="-120"/>
               </a:rPr>
-              <a:t>Word Labs  •  wordlabs.app  •  Prefix: 'dis-' = not, opposite, away</a:t>
+              <a:t>Word Labs  •  wordlabs.app  •  Prefix: 'dis-' = not; opposite; apart</a:t>
             </a:r>
             <a:endParaRPr lang="en-US" sz="800" dirty="0"/>
           </a:p>
@@ -19380,7 +20512,7 @@
                 <a:ea typeface="Trebuchet MS" pitchFamily="34" charset="-122"/>
                 <a:cs typeface="Trebuchet MS" pitchFamily="34" charset="-120"/>
               </a:rPr>
-              <a:t>discovery</a:t>
+              <a:t>disturbances</a:t>
             </a:r>
             <a:endParaRPr lang="en-US" sz="2800" dirty="0"/>
           </a:p>
@@ -19460,8 +20592,8 @@
         </p:nvSpPr>
         <p:spPr>
           <a:xfrm>
-            <a:off x="2221992" y="2258568"/>
-            <a:ext cx="1828800" cy="292608"/>
+            <a:off x="1989734" y="2258568"/>
+            <a:ext cx="1581912" cy="292608"/>
           </a:xfrm>
           <a:prstGeom prst="rect">
             <a:avLst>
@@ -19494,8 +20626,8 @@
         </p:nvSpPr>
         <p:spPr>
           <a:xfrm>
-            <a:off x="2221992" y="2258568"/>
-            <a:ext cx="1828800" cy="292608"/>
+            <a:off x="1989734" y="2258568"/>
+            <a:ext cx="1581912" cy="292608"/>
           </a:xfrm>
           <a:prstGeom prst="rect">
             <a:avLst/>
@@ -19533,8 +20665,8 @@
         </p:nvSpPr>
         <p:spPr>
           <a:xfrm>
-            <a:off x="2221992" y="2569464"/>
-            <a:ext cx="1828800" cy="201168"/>
+            <a:off x="1989734" y="2569464"/>
+            <a:ext cx="1581912" cy="201168"/>
           </a:xfrm>
           <a:prstGeom prst="rect">
             <a:avLst/>
@@ -19558,7 +20690,7 @@
                 <a:ea typeface="Calibri" pitchFamily="34" charset="-122"/>
                 <a:cs typeface="Calibri" pitchFamily="34" charset="-120"/>
               </a:rPr>
-              <a:t>not, opposite</a:t>
+              <a:t>not; opposite; apart</a:t>
             </a:r>
             <a:endParaRPr lang="en-US" sz="850" dirty="0"/>
           </a:p>
@@ -19572,8 +20704,8 @@
         </p:nvSpPr>
         <p:spPr>
           <a:xfrm>
-            <a:off x="4370832" y="2258568"/>
-            <a:ext cx="1828800" cy="292608"/>
+            <a:off x="3659429" y="2258568"/>
+            <a:ext cx="1581912" cy="292608"/>
           </a:xfrm>
           <a:prstGeom prst="rect">
             <a:avLst>
@@ -19606,8 +20738,8 @@
         </p:nvSpPr>
         <p:spPr>
           <a:xfrm>
-            <a:off x="4370832" y="2258568"/>
-            <a:ext cx="1828800" cy="292608"/>
+            <a:off x="3659429" y="2258568"/>
+            <a:ext cx="1581912" cy="292608"/>
           </a:xfrm>
           <a:prstGeom prst="rect">
             <a:avLst/>
@@ -19631,7 +20763,7 @@
                 <a:ea typeface="Trebuchet MS" pitchFamily="34" charset="-122"/>
                 <a:cs typeface="Trebuchet MS" pitchFamily="34" charset="-120"/>
               </a:rPr>
-              <a:t>cover</a:t>
+              <a:t>turb</a:t>
             </a:r>
             <a:endParaRPr lang="en-US" sz="1300" dirty="0"/>
           </a:p>
@@ -19645,8 +20777,8 @@
         </p:nvSpPr>
         <p:spPr>
           <a:xfrm>
-            <a:off x="4370832" y="2569464"/>
-            <a:ext cx="1828800" cy="201168"/>
+            <a:off x="3659429" y="2569464"/>
+            <a:ext cx="1581912" cy="201168"/>
           </a:xfrm>
           <a:prstGeom prst="rect">
             <a:avLst/>
@@ -19670,7 +20802,7 @@
                 <a:ea typeface="Calibri" pitchFamily="34" charset="-122"/>
                 <a:cs typeface="Calibri" pitchFamily="34" charset="-120"/>
               </a:rPr>
-              <a:t>to cover over, conceal</a:t>
+              <a:t>disturb; agitate</a:t>
             </a:r>
             <a:endParaRPr lang="en-US" sz="850" dirty="0"/>
           </a:p>
@@ -19684,8 +20816,8 @@
         </p:nvSpPr>
         <p:spPr>
           <a:xfrm>
-            <a:off x="6519672" y="2258568"/>
-            <a:ext cx="1828800" cy="292608"/>
+            <a:off x="5329123" y="2258568"/>
+            <a:ext cx="1581912" cy="292608"/>
           </a:xfrm>
           <a:prstGeom prst="rect">
             <a:avLst>
@@ -19718,8 +20850,8 @@
         </p:nvSpPr>
         <p:spPr>
           <a:xfrm>
-            <a:off x="6519672" y="2258568"/>
-            <a:ext cx="1828800" cy="292608"/>
+            <a:off x="5329123" y="2258568"/>
+            <a:ext cx="1581912" cy="292608"/>
           </a:xfrm>
           <a:prstGeom prst="rect">
             <a:avLst/>
@@ -19743,7 +20875,7 @@
                 <a:ea typeface="Trebuchet MS" pitchFamily="34" charset="-122"/>
                 <a:cs typeface="Trebuchet MS" pitchFamily="34" charset="-120"/>
               </a:rPr>
-              <a:t>y</a:t>
+              <a:t>ance</a:t>
             </a:r>
             <a:endParaRPr lang="en-US" sz="1300" dirty="0"/>
           </a:p>
@@ -19757,8 +20889,8 @@
         </p:nvSpPr>
         <p:spPr>
           <a:xfrm>
-            <a:off x="6519672" y="2569464"/>
-            <a:ext cx="1828800" cy="201168"/>
+            <a:off x="5329123" y="2569464"/>
+            <a:ext cx="1581912" cy="201168"/>
           </a:xfrm>
           <a:prstGeom prst="rect">
             <a:avLst/>
@@ -19782,7 +20914,7 @@
                 <a:ea typeface="Calibri" pitchFamily="34" charset="-122"/>
                 <a:cs typeface="Calibri" pitchFamily="34" charset="-120"/>
               </a:rPr>
-              <a:t>forms a noun</a:t>
+              <a:t>state of</a:t>
             </a:r>
             <a:endParaRPr lang="en-US" sz="850" dirty="0"/>
           </a:p>
@@ -19791,6 +20923,118 @@
       <p:sp>
         <p:nvSpPr>
           <p:cNvPr id="25" name="Shape 23"/>
+          <p:cNvSpPr/>
+          <p:nvPr/>
+        </p:nvSpPr>
+        <p:spPr>
+          <a:xfrm>
+            <a:off x="6998818" y="2258568"/>
+            <a:ext cx="1581912" cy="292608"/>
+          </a:xfrm>
+          <a:prstGeom prst="rect">
+            <a:avLst>
+              <a:gd name="adj" fmla="val 25000"/>
+            </a:avLst>
+          </a:prstGeom>
+          <a:solidFill>
+            <a:srgbClr val="FCE7F3"/>
+          </a:solidFill>
+          <a:ln w="19050">
+            <a:solidFill>
+              <a:srgbClr val="DB2777"/>
+            </a:solidFill>
+            <a:prstDash val="solid"/>
+          </a:ln>
+          <a:effectLst>
+            <a:outerShdw sx="100000" sy="100000" kx="0" ky="0" algn="bl" rotWithShape="0" blurRad="101600" dist="38100" dir="8100000">
+              <a:srgbClr val="000000">
+                <a:alpha val="12000"/>
+              </a:srgbClr>
+            </a:outerShdw>
+          </a:effectLst>
+        </p:spPr>
+      </p:sp>
+      <p:sp>
+        <p:nvSpPr>
+          <p:cNvPr id="26" name="Text 24"/>
+          <p:cNvSpPr/>
+          <p:nvPr/>
+        </p:nvSpPr>
+        <p:spPr>
+          <a:xfrm>
+            <a:off x="6998818" y="2258568"/>
+            <a:ext cx="1581912" cy="292608"/>
+          </a:xfrm>
+          <a:prstGeom prst="rect">
+            <a:avLst/>
+          </a:prstGeom>
+          <a:noFill/>
+          <a:ln/>
+        </p:spPr>
+        <p:txBody>
+          <a:bodyPr wrap="square" lIns="0" tIns="0" rIns="0" bIns="0" rtlCol="0" anchor="ctr"/>
+          <a:lstStyle/>
+          <a:p>
+            <a:pPr algn="ctr" indent="0" marL="0">
+              <a:buNone/>
+            </a:pPr>
+            <a:r>
+              <a:rPr lang="en-US" sz="1300" b="1" dirty="0">
+                <a:solidFill>
+                  <a:srgbClr val="9D174D"/>
+                </a:solidFill>
+                <a:latin typeface="Trebuchet MS" pitchFamily="34" charset="0"/>
+                <a:ea typeface="Trebuchet MS" pitchFamily="34" charset="-122"/>
+                <a:cs typeface="Trebuchet MS" pitchFamily="34" charset="-120"/>
+              </a:rPr>
+              <a:t>s</a:t>
+            </a:r>
+            <a:endParaRPr lang="en-US" sz="1300" dirty="0"/>
+          </a:p>
+        </p:txBody>
+      </p:sp>
+      <p:sp>
+        <p:nvSpPr>
+          <p:cNvPr id="27" name="Text 25"/>
+          <p:cNvSpPr/>
+          <p:nvPr/>
+        </p:nvSpPr>
+        <p:spPr>
+          <a:xfrm>
+            <a:off x="6998818" y="2569464"/>
+            <a:ext cx="1581912" cy="201168"/>
+          </a:xfrm>
+          <a:prstGeom prst="rect">
+            <a:avLst/>
+          </a:prstGeom>
+          <a:noFill/>
+          <a:ln/>
+        </p:spPr>
+        <p:txBody>
+          <a:bodyPr wrap="square" lIns="0" tIns="0" rIns="0" bIns="0" rtlCol="0" anchor="t"/>
+          <a:lstStyle/>
+          <a:p>
+            <a:pPr algn="ctr" indent="0" marL="0">
+              <a:buNone/>
+            </a:pPr>
+            <a:r>
+              <a:rPr lang="en-US" sz="850" dirty="0">
+                <a:solidFill>
+                  <a:srgbClr val="475569"/>
+                </a:solidFill>
+                <a:latin typeface="Calibri" pitchFamily="34" charset="0"/>
+                <a:ea typeface="Calibri" pitchFamily="34" charset="-122"/>
+                <a:cs typeface="Calibri" pitchFamily="34" charset="-120"/>
+              </a:rPr>
+              <a:t>plural or present tense</a:t>
+            </a:r>
+            <a:endParaRPr lang="en-US" sz="850" dirty="0"/>
+          </a:p>
+        </p:txBody>
+      </p:sp>
+      <p:sp>
+        <p:nvSpPr>
+          <p:cNvPr id="28" name="Shape 26"/>
           <p:cNvSpPr/>
           <p:nvPr/>
         </p:nvSpPr>
@@ -19817,7 +21061,7 @@
       </p:sp>
       <p:sp>
         <p:nvSpPr>
-          <p:cNvPr id="26" name="Text 24"/>
+          <p:cNvPr id="29" name="Text 27"/>
           <p:cNvSpPr/>
           <p:nvPr/>
         </p:nvSpPr>
@@ -19856,7 +21100,7 @@
       </p:sp>
       <p:sp>
         <p:nvSpPr>
-          <p:cNvPr id="27" name="Shape 25"/>
+          <p:cNvPr id="30" name="Shape 28"/>
           <p:cNvSpPr/>
           <p:nvPr/>
         </p:nvSpPr>
@@ -19883,7 +21127,7 @@
       </p:sp>
       <p:sp>
         <p:nvSpPr>
-          <p:cNvPr id="28" name="Text 26"/>
+          <p:cNvPr id="31" name="Text 29"/>
           <p:cNvSpPr/>
           <p:nvPr/>
         </p:nvSpPr>
@@ -19922,7 +21166,7 @@
       </p:sp>
       <p:sp>
         <p:nvSpPr>
-          <p:cNvPr id="29" name="Shape 27"/>
+          <p:cNvPr id="32" name="Shape 30"/>
           <p:cNvSpPr/>
           <p:nvPr/>
         </p:nvSpPr>
@@ -19949,7 +21193,7 @@
       </p:sp>
       <p:sp>
         <p:nvSpPr>
-          <p:cNvPr id="30" name="Text 28"/>
+          <p:cNvPr id="33" name="Text 31"/>
           <p:cNvSpPr/>
           <p:nvPr/>
         </p:nvSpPr>
@@ -19988,7 +21232,7 @@
       </p:sp>
       <p:sp>
         <p:nvSpPr>
-          <p:cNvPr id="31" name="Shape 29"/>
+          <p:cNvPr id="34" name="Shape 32"/>
           <p:cNvSpPr/>
           <p:nvPr/>
         </p:nvSpPr>
@@ -20015,7 +21259,7 @@
       </p:sp>
       <p:sp>
         <p:nvSpPr>
-          <p:cNvPr id="32" name="Text 30"/>
+          <p:cNvPr id="35" name="Text 33"/>
           <p:cNvSpPr/>
           <p:nvPr/>
         </p:nvSpPr>
@@ -20338,7 +21582,7 @@
                 <a:ea typeface="Calibri" pitchFamily="34" charset="-122"/>
                 <a:cs typeface="Calibri" pitchFamily="34" charset="-120"/>
               </a:rPr>
-              <a:t>Word Labs  •  wordlabs.app  •  Prefix: 'dis-' = not, opposite, away</a:t>
+              <a:t>Word Labs  •  wordlabs.app  •  Prefix: 'dis-' = not; opposite; apart</a:t>
             </a:r>
             <a:endParaRPr lang="en-US" sz="800" dirty="0"/>
           </a:p>
@@ -20477,7 +21721,7 @@
                 <a:ea typeface="Trebuchet MS" pitchFamily="34" charset="-122"/>
                 <a:cs typeface="Trebuchet MS" pitchFamily="34" charset="-120"/>
               </a:rPr>
-              <a:t>discovery</a:t>
+              <a:t>disturbances</a:t>
             </a:r>
             <a:endParaRPr lang="en-US" sz="2800" dirty="0"/>
           </a:p>
@@ -20557,8 +21801,8 @@
         </p:nvSpPr>
         <p:spPr>
           <a:xfrm>
-            <a:off x="2221992" y="2258568"/>
-            <a:ext cx="1828800" cy="292608"/>
+            <a:off x="1989734" y="2258568"/>
+            <a:ext cx="1581912" cy="292608"/>
           </a:xfrm>
           <a:prstGeom prst="rect">
             <a:avLst>
@@ -20591,8 +21835,8 @@
         </p:nvSpPr>
         <p:spPr>
           <a:xfrm>
-            <a:off x="2221992" y="2258568"/>
-            <a:ext cx="1828800" cy="292608"/>
+            <a:off x="1989734" y="2258568"/>
+            <a:ext cx="1581912" cy="292608"/>
           </a:xfrm>
           <a:prstGeom prst="rect">
             <a:avLst/>
@@ -20630,8 +21874,8 @@
         </p:nvSpPr>
         <p:spPr>
           <a:xfrm>
-            <a:off x="2221992" y="2569464"/>
-            <a:ext cx="1828800" cy="201168"/>
+            <a:off x="1989734" y="2569464"/>
+            <a:ext cx="1581912" cy="201168"/>
           </a:xfrm>
           <a:prstGeom prst="rect">
             <a:avLst/>
@@ -20655,7 +21899,7 @@
                 <a:ea typeface="Calibri" pitchFamily="34" charset="-122"/>
                 <a:cs typeface="Calibri" pitchFamily="34" charset="-120"/>
               </a:rPr>
-              <a:t>not, opposite</a:t>
+              <a:t>not; opposite; apart</a:t>
             </a:r>
             <a:endParaRPr lang="en-US" sz="850" dirty="0"/>
           </a:p>
@@ -20669,8 +21913,8 @@
         </p:nvSpPr>
         <p:spPr>
           <a:xfrm>
-            <a:off x="4370832" y="2258568"/>
-            <a:ext cx="1828800" cy="292608"/>
+            <a:off x="3659429" y="2258568"/>
+            <a:ext cx="1581912" cy="292608"/>
           </a:xfrm>
           <a:prstGeom prst="rect">
             <a:avLst>
@@ -20703,8 +21947,8 @@
         </p:nvSpPr>
         <p:spPr>
           <a:xfrm>
-            <a:off x="4370832" y="2258568"/>
-            <a:ext cx="1828800" cy="292608"/>
+            <a:off x="3659429" y="2258568"/>
+            <a:ext cx="1581912" cy="292608"/>
           </a:xfrm>
           <a:prstGeom prst="rect">
             <a:avLst/>
@@ -20728,7 +21972,7 @@
                 <a:ea typeface="Trebuchet MS" pitchFamily="34" charset="-122"/>
                 <a:cs typeface="Trebuchet MS" pitchFamily="34" charset="-120"/>
               </a:rPr>
-              <a:t>cover</a:t>
+              <a:t>turb</a:t>
             </a:r>
             <a:endParaRPr lang="en-US" sz="1300" dirty="0"/>
           </a:p>
@@ -20742,8 +21986,8 @@
         </p:nvSpPr>
         <p:spPr>
           <a:xfrm>
-            <a:off x="4370832" y="2569464"/>
-            <a:ext cx="1828800" cy="201168"/>
+            <a:off x="3659429" y="2569464"/>
+            <a:ext cx="1581912" cy="201168"/>
           </a:xfrm>
           <a:prstGeom prst="rect">
             <a:avLst/>
@@ -20767,7 +22011,7 @@
                 <a:ea typeface="Calibri" pitchFamily="34" charset="-122"/>
                 <a:cs typeface="Calibri" pitchFamily="34" charset="-120"/>
               </a:rPr>
-              <a:t>to cover over, conceal</a:t>
+              <a:t>disturb; agitate</a:t>
             </a:r>
             <a:endParaRPr lang="en-US" sz="850" dirty="0"/>
           </a:p>
@@ -20781,8 +22025,8 @@
         </p:nvSpPr>
         <p:spPr>
           <a:xfrm>
-            <a:off x="6519672" y="2258568"/>
-            <a:ext cx="1828800" cy="292608"/>
+            <a:off x="5329123" y="2258568"/>
+            <a:ext cx="1581912" cy="292608"/>
           </a:xfrm>
           <a:prstGeom prst="rect">
             <a:avLst>
@@ -20815,8 +22059,8 @@
         </p:nvSpPr>
         <p:spPr>
           <a:xfrm>
-            <a:off x="6519672" y="2258568"/>
-            <a:ext cx="1828800" cy="292608"/>
+            <a:off x="5329123" y="2258568"/>
+            <a:ext cx="1581912" cy="292608"/>
           </a:xfrm>
           <a:prstGeom prst="rect">
             <a:avLst/>
@@ -20840,7 +22084,7 @@
                 <a:ea typeface="Trebuchet MS" pitchFamily="34" charset="-122"/>
                 <a:cs typeface="Trebuchet MS" pitchFamily="34" charset="-120"/>
               </a:rPr>
-              <a:t>y</a:t>
+              <a:t>ance</a:t>
             </a:r>
             <a:endParaRPr lang="en-US" sz="1300" dirty="0"/>
           </a:p>
@@ -20854,8 +22098,8 @@
         </p:nvSpPr>
         <p:spPr>
           <a:xfrm>
-            <a:off x="6519672" y="2569464"/>
-            <a:ext cx="1828800" cy="201168"/>
+            <a:off x="5329123" y="2569464"/>
+            <a:ext cx="1581912" cy="201168"/>
           </a:xfrm>
           <a:prstGeom prst="rect">
             <a:avLst/>
@@ -20879,7 +22123,7 @@
                 <a:ea typeface="Calibri" pitchFamily="34" charset="-122"/>
                 <a:cs typeface="Calibri" pitchFamily="34" charset="-120"/>
               </a:rPr>
-              <a:t>forms a noun</a:t>
+              <a:t>state of</a:t>
             </a:r>
             <a:endParaRPr lang="en-US" sz="850" dirty="0"/>
           </a:p>
@@ -20888,6 +22132,118 @@
       <p:sp>
         <p:nvSpPr>
           <p:cNvPr id="25" name="Shape 23"/>
+          <p:cNvSpPr/>
+          <p:nvPr/>
+        </p:nvSpPr>
+        <p:spPr>
+          <a:xfrm>
+            <a:off x="6998818" y="2258568"/>
+            <a:ext cx="1581912" cy="292608"/>
+          </a:xfrm>
+          <a:prstGeom prst="rect">
+            <a:avLst>
+              <a:gd name="adj" fmla="val 25000"/>
+            </a:avLst>
+          </a:prstGeom>
+          <a:solidFill>
+            <a:srgbClr val="FCE7F3"/>
+          </a:solidFill>
+          <a:ln w="19050">
+            <a:solidFill>
+              <a:srgbClr val="DB2777"/>
+            </a:solidFill>
+            <a:prstDash val="solid"/>
+          </a:ln>
+          <a:effectLst>
+            <a:outerShdw sx="100000" sy="100000" kx="0" ky="0" algn="bl" rotWithShape="0" blurRad="101600" dist="38100" dir="8100000">
+              <a:srgbClr val="000000">
+                <a:alpha val="12000"/>
+              </a:srgbClr>
+            </a:outerShdw>
+          </a:effectLst>
+        </p:spPr>
+      </p:sp>
+      <p:sp>
+        <p:nvSpPr>
+          <p:cNvPr id="26" name="Text 24"/>
+          <p:cNvSpPr/>
+          <p:nvPr/>
+        </p:nvSpPr>
+        <p:spPr>
+          <a:xfrm>
+            <a:off x="6998818" y="2258568"/>
+            <a:ext cx="1581912" cy="292608"/>
+          </a:xfrm>
+          <a:prstGeom prst="rect">
+            <a:avLst/>
+          </a:prstGeom>
+          <a:noFill/>
+          <a:ln/>
+        </p:spPr>
+        <p:txBody>
+          <a:bodyPr wrap="square" lIns="0" tIns="0" rIns="0" bIns="0" rtlCol="0" anchor="ctr"/>
+          <a:lstStyle/>
+          <a:p>
+            <a:pPr algn="ctr" indent="0" marL="0">
+              <a:buNone/>
+            </a:pPr>
+            <a:r>
+              <a:rPr lang="en-US" sz="1300" b="1" dirty="0">
+                <a:solidFill>
+                  <a:srgbClr val="9D174D"/>
+                </a:solidFill>
+                <a:latin typeface="Trebuchet MS" pitchFamily="34" charset="0"/>
+                <a:ea typeface="Trebuchet MS" pitchFamily="34" charset="-122"/>
+                <a:cs typeface="Trebuchet MS" pitchFamily="34" charset="-120"/>
+              </a:rPr>
+              <a:t>s</a:t>
+            </a:r>
+            <a:endParaRPr lang="en-US" sz="1300" dirty="0"/>
+          </a:p>
+        </p:txBody>
+      </p:sp>
+      <p:sp>
+        <p:nvSpPr>
+          <p:cNvPr id="27" name="Text 25"/>
+          <p:cNvSpPr/>
+          <p:nvPr/>
+        </p:nvSpPr>
+        <p:spPr>
+          <a:xfrm>
+            <a:off x="6998818" y="2569464"/>
+            <a:ext cx="1581912" cy="201168"/>
+          </a:xfrm>
+          <a:prstGeom prst="rect">
+            <a:avLst/>
+          </a:prstGeom>
+          <a:noFill/>
+          <a:ln/>
+        </p:spPr>
+        <p:txBody>
+          <a:bodyPr wrap="square" lIns="0" tIns="0" rIns="0" bIns="0" rtlCol="0" anchor="t"/>
+          <a:lstStyle/>
+          <a:p>
+            <a:pPr algn="ctr" indent="0" marL="0">
+              <a:buNone/>
+            </a:pPr>
+            <a:r>
+              <a:rPr lang="en-US" sz="850" dirty="0">
+                <a:solidFill>
+                  <a:srgbClr val="475569"/>
+                </a:solidFill>
+                <a:latin typeface="Calibri" pitchFamily="34" charset="0"/>
+                <a:ea typeface="Calibri" pitchFamily="34" charset="-122"/>
+                <a:cs typeface="Calibri" pitchFamily="34" charset="-120"/>
+              </a:rPr>
+              <a:t>plural or present tense</a:t>
+            </a:r>
+            <a:endParaRPr lang="en-US" sz="850" dirty="0"/>
+          </a:p>
+        </p:txBody>
+      </p:sp>
+      <p:sp>
+        <p:nvSpPr>
+          <p:cNvPr id="28" name="Shape 26"/>
           <p:cNvSpPr/>
           <p:nvPr/>
         </p:nvSpPr>
@@ -20914,7 +22270,7 @@
       </p:sp>
       <p:sp>
         <p:nvSpPr>
-          <p:cNvPr id="26" name="Text 24"/>
+          <p:cNvPr id="29" name="Text 27"/>
           <p:cNvSpPr/>
           <p:nvPr/>
         </p:nvSpPr>
@@ -20953,7 +22309,7 @@
       </p:sp>
       <p:sp>
         <p:nvSpPr>
-          <p:cNvPr id="27" name="Shape 25"/>
+          <p:cNvPr id="30" name="Shape 28"/>
           <p:cNvSpPr/>
           <p:nvPr/>
         </p:nvSpPr>
@@ -20980,7 +22336,7 @@
       </p:sp>
       <p:sp>
         <p:nvSpPr>
-          <p:cNvPr id="28" name="Shape 26"/>
+          <p:cNvPr id="31" name="Shape 29"/>
           <p:cNvSpPr/>
           <p:nvPr/>
         </p:nvSpPr>
@@ -21007,7 +22363,7 @@
       </p:sp>
       <p:sp>
         <p:nvSpPr>
-          <p:cNvPr id="29" name="Text 27"/>
+          <p:cNvPr id="32" name="Text 30"/>
           <p:cNvSpPr/>
           <p:nvPr/>
         </p:nvSpPr>
@@ -21046,7 +22402,7 @@
       </p:sp>
       <p:sp>
         <p:nvSpPr>
-          <p:cNvPr id="30" name="Text 28"/>
+          <p:cNvPr id="33" name="Text 31"/>
           <p:cNvSpPr/>
           <p:nvPr/>
         </p:nvSpPr>
@@ -21085,7 +22441,7 @@
       </p:sp>
       <p:sp>
         <p:nvSpPr>
-          <p:cNvPr id="31" name="Shape 29"/>
+          <p:cNvPr id="34" name="Shape 32"/>
           <p:cNvSpPr/>
           <p:nvPr/>
         </p:nvSpPr>
@@ -21112,7 +22468,7 @@
       </p:sp>
       <p:sp>
         <p:nvSpPr>
-          <p:cNvPr id="32" name="Text 30"/>
+          <p:cNvPr id="35" name="Text 33"/>
           <p:cNvSpPr/>
           <p:nvPr/>
         </p:nvSpPr>
@@ -21143,7 +22499,7 @@
                 <a:ea typeface="Trebuchet MS" pitchFamily="34" charset="-122"/>
                 <a:cs typeface="Trebuchet MS" pitchFamily="34" charset="-120"/>
               </a:rPr>
-              <a:t>cov</a:t>
+              <a:t>tur</a:t>
             </a:r>
             <a:endParaRPr lang="en-US" sz="1400" dirty="0"/>
           </a:p>
@@ -21151,7 +22507,7 @@
       </p:sp>
       <p:sp>
         <p:nvSpPr>
-          <p:cNvPr id="33" name="Text 31"/>
+          <p:cNvPr id="36" name="Text 34"/>
           <p:cNvSpPr/>
           <p:nvPr/>
         </p:nvSpPr>
@@ -21190,7 +22546,7 @@
       </p:sp>
       <p:sp>
         <p:nvSpPr>
-          <p:cNvPr id="34" name="Shape 32"/>
+          <p:cNvPr id="37" name="Shape 35"/>
           <p:cNvSpPr/>
           <p:nvPr/>
         </p:nvSpPr>
@@ -21217,7 +22573,7 @@
       </p:sp>
       <p:sp>
         <p:nvSpPr>
-          <p:cNvPr id="35" name="Text 33"/>
+          <p:cNvPr id="38" name="Text 36"/>
           <p:cNvSpPr/>
           <p:nvPr/>
         </p:nvSpPr>
@@ -21248,7 +22604,7 @@
                 <a:ea typeface="Trebuchet MS" pitchFamily="34" charset="-122"/>
                 <a:cs typeface="Trebuchet MS" pitchFamily="34" charset="-120"/>
               </a:rPr>
-              <a:t>er</a:t>
+              <a:t>ban</a:t>
             </a:r>
             <a:endParaRPr lang="en-US" sz="1400" dirty="0"/>
           </a:p>
@@ -21256,7 +22612,7 @@
       </p:sp>
       <p:sp>
         <p:nvSpPr>
-          <p:cNvPr id="36" name="Text 34"/>
+          <p:cNvPr id="39" name="Text 37"/>
           <p:cNvSpPr/>
           <p:nvPr/>
         </p:nvSpPr>
@@ -21295,7 +22651,7 @@
       </p:sp>
       <p:sp>
         <p:nvSpPr>
-          <p:cNvPr id="37" name="Shape 35"/>
+          <p:cNvPr id="40" name="Shape 38"/>
           <p:cNvSpPr/>
           <p:nvPr/>
         </p:nvSpPr>
@@ -21322,7 +22678,7 @@
       </p:sp>
       <p:sp>
         <p:nvSpPr>
-          <p:cNvPr id="38" name="Text 36"/>
+          <p:cNvPr id="41" name="Text 39"/>
           <p:cNvSpPr/>
           <p:nvPr/>
         </p:nvSpPr>
@@ -21353,7 +22709,7 @@
                 <a:ea typeface="Trebuchet MS" pitchFamily="34" charset="-122"/>
                 <a:cs typeface="Trebuchet MS" pitchFamily="34" charset="-120"/>
               </a:rPr>
-              <a:t>y</a:t>
+              <a:t>ces</a:t>
             </a:r>
             <a:endParaRPr lang="en-US" sz="1400" dirty="0"/>
           </a:p>
@@ -21361,7 +22717,7 @@
       </p:sp>
       <p:sp>
         <p:nvSpPr>
-          <p:cNvPr id="39" name="Shape 37"/>
+          <p:cNvPr id="42" name="Shape 40"/>
           <p:cNvSpPr/>
           <p:nvPr/>
         </p:nvSpPr>
@@ -21388,7 +22744,7 @@
       </p:sp>
       <p:sp>
         <p:nvSpPr>
-          <p:cNvPr id="40" name="Text 38"/>
+          <p:cNvPr id="43" name="Text 41"/>
           <p:cNvSpPr/>
           <p:nvPr/>
         </p:nvSpPr>
@@ -21427,7 +22783,7 @@
       </p:sp>
       <p:sp>
         <p:nvSpPr>
-          <p:cNvPr id="41" name="Shape 39"/>
+          <p:cNvPr id="44" name="Shape 42"/>
           <p:cNvSpPr/>
           <p:nvPr/>
         </p:nvSpPr>
@@ -21454,7 +22810,7 @@
       </p:sp>
       <p:sp>
         <p:nvSpPr>
-          <p:cNvPr id="42" name="Text 40"/>
+          <p:cNvPr id="45" name="Text 43"/>
           <p:cNvSpPr/>
           <p:nvPr/>
         </p:nvSpPr>
@@ -21777,7 +23133,7 @@
                 <a:ea typeface="Calibri" pitchFamily="34" charset="-122"/>
                 <a:cs typeface="Calibri" pitchFamily="34" charset="-120"/>
               </a:rPr>
-              <a:t>Word Labs  •  wordlabs.app  •  Prefix: 'dis-' = not, opposite, away</a:t>
+              <a:t>Word Labs  •  wordlabs.app  •  Prefix: 'dis-' = not; opposite; apart</a:t>
             </a:r>
             <a:endParaRPr lang="en-US" sz="800" dirty="0"/>
           </a:p>
@@ -21916,7 +23272,7 @@
                 <a:ea typeface="Trebuchet MS" pitchFamily="34" charset="-122"/>
                 <a:cs typeface="Trebuchet MS" pitchFamily="34" charset="-120"/>
               </a:rPr>
-              <a:t>discovery</a:t>
+              <a:t>disturbances</a:t>
             </a:r>
             <a:endParaRPr lang="en-US" sz="2800" dirty="0"/>
           </a:p>
@@ -21996,8 +23352,8 @@
         </p:nvSpPr>
         <p:spPr>
           <a:xfrm>
-            <a:off x="2221992" y="2258568"/>
-            <a:ext cx="1828800" cy="292608"/>
+            <a:off x="1989734" y="2258568"/>
+            <a:ext cx="1581912" cy="292608"/>
           </a:xfrm>
           <a:prstGeom prst="rect">
             <a:avLst>
@@ -22030,8 +23386,8 @@
         </p:nvSpPr>
         <p:spPr>
           <a:xfrm>
-            <a:off x="2221992" y="2258568"/>
-            <a:ext cx="1828800" cy="292608"/>
+            <a:off x="1989734" y="2258568"/>
+            <a:ext cx="1581912" cy="292608"/>
           </a:xfrm>
           <a:prstGeom prst="rect">
             <a:avLst/>
@@ -22069,8 +23425,8 @@
         </p:nvSpPr>
         <p:spPr>
           <a:xfrm>
-            <a:off x="2221992" y="2569464"/>
-            <a:ext cx="1828800" cy="201168"/>
+            <a:off x="1989734" y="2569464"/>
+            <a:ext cx="1581912" cy="201168"/>
           </a:xfrm>
           <a:prstGeom prst="rect">
             <a:avLst/>
@@ -22094,7 +23450,7 @@
                 <a:ea typeface="Calibri" pitchFamily="34" charset="-122"/>
                 <a:cs typeface="Calibri" pitchFamily="34" charset="-120"/>
               </a:rPr>
-              <a:t>not, opposite</a:t>
+              <a:t>not; opposite; apart</a:t>
             </a:r>
             <a:endParaRPr lang="en-US" sz="850" dirty="0"/>
           </a:p>
@@ -22108,8 +23464,8 @@
         </p:nvSpPr>
         <p:spPr>
           <a:xfrm>
-            <a:off x="4370832" y="2258568"/>
-            <a:ext cx="1828800" cy="292608"/>
+            <a:off x="3659429" y="2258568"/>
+            <a:ext cx="1581912" cy="292608"/>
           </a:xfrm>
           <a:prstGeom prst="rect">
             <a:avLst>
@@ -22142,8 +23498,8 @@
         </p:nvSpPr>
         <p:spPr>
           <a:xfrm>
-            <a:off x="4370832" y="2258568"/>
-            <a:ext cx="1828800" cy="292608"/>
+            <a:off x="3659429" y="2258568"/>
+            <a:ext cx="1581912" cy="292608"/>
           </a:xfrm>
           <a:prstGeom prst="rect">
             <a:avLst/>
@@ -22167,7 +23523,7 @@
                 <a:ea typeface="Trebuchet MS" pitchFamily="34" charset="-122"/>
                 <a:cs typeface="Trebuchet MS" pitchFamily="34" charset="-120"/>
               </a:rPr>
-              <a:t>cover</a:t>
+              <a:t>turb</a:t>
             </a:r>
             <a:endParaRPr lang="en-US" sz="1300" dirty="0"/>
           </a:p>
@@ -22181,8 +23537,8 @@
         </p:nvSpPr>
         <p:spPr>
           <a:xfrm>
-            <a:off x="4370832" y="2569464"/>
-            <a:ext cx="1828800" cy="201168"/>
+            <a:off x="3659429" y="2569464"/>
+            <a:ext cx="1581912" cy="201168"/>
           </a:xfrm>
           <a:prstGeom prst="rect">
             <a:avLst/>
@@ -22206,7 +23562,7 @@
                 <a:ea typeface="Calibri" pitchFamily="34" charset="-122"/>
                 <a:cs typeface="Calibri" pitchFamily="34" charset="-120"/>
               </a:rPr>
-              <a:t>to cover over, conceal</a:t>
+              <a:t>disturb; agitate</a:t>
             </a:r>
             <a:endParaRPr lang="en-US" sz="850" dirty="0"/>
           </a:p>
@@ -22220,8 +23576,8 @@
         </p:nvSpPr>
         <p:spPr>
           <a:xfrm>
-            <a:off x="6519672" y="2258568"/>
-            <a:ext cx="1828800" cy="292608"/>
+            <a:off x="5329123" y="2258568"/>
+            <a:ext cx="1581912" cy="292608"/>
           </a:xfrm>
           <a:prstGeom prst="rect">
             <a:avLst>
@@ -22254,8 +23610,8 @@
         </p:nvSpPr>
         <p:spPr>
           <a:xfrm>
-            <a:off x="6519672" y="2258568"/>
-            <a:ext cx="1828800" cy="292608"/>
+            <a:off x="5329123" y="2258568"/>
+            <a:ext cx="1581912" cy="292608"/>
           </a:xfrm>
           <a:prstGeom prst="rect">
             <a:avLst/>
@@ -22279,7 +23635,7 @@
                 <a:ea typeface="Trebuchet MS" pitchFamily="34" charset="-122"/>
                 <a:cs typeface="Trebuchet MS" pitchFamily="34" charset="-120"/>
               </a:rPr>
-              <a:t>y</a:t>
+              <a:t>ance</a:t>
             </a:r>
             <a:endParaRPr lang="en-US" sz="1300" dirty="0"/>
           </a:p>
@@ -22293,8 +23649,8 @@
         </p:nvSpPr>
         <p:spPr>
           <a:xfrm>
-            <a:off x="6519672" y="2569464"/>
-            <a:ext cx="1828800" cy="201168"/>
+            <a:off x="5329123" y="2569464"/>
+            <a:ext cx="1581912" cy="201168"/>
           </a:xfrm>
           <a:prstGeom prst="rect">
             <a:avLst/>
@@ -22318,7 +23674,7 @@
                 <a:ea typeface="Calibri" pitchFamily="34" charset="-122"/>
                 <a:cs typeface="Calibri" pitchFamily="34" charset="-120"/>
               </a:rPr>
-              <a:t>forms a noun</a:t>
+              <a:t>state of</a:t>
             </a:r>
             <a:endParaRPr lang="en-US" sz="850" dirty="0"/>
           </a:p>
@@ -22327,6 +23683,118 @@
       <p:sp>
         <p:nvSpPr>
           <p:cNvPr id="25" name="Shape 23"/>
+          <p:cNvSpPr/>
+          <p:nvPr/>
+        </p:nvSpPr>
+        <p:spPr>
+          <a:xfrm>
+            <a:off x="6998818" y="2258568"/>
+            <a:ext cx="1581912" cy="292608"/>
+          </a:xfrm>
+          <a:prstGeom prst="rect">
+            <a:avLst>
+              <a:gd name="adj" fmla="val 25000"/>
+            </a:avLst>
+          </a:prstGeom>
+          <a:solidFill>
+            <a:srgbClr val="FCE7F3"/>
+          </a:solidFill>
+          <a:ln w="19050">
+            <a:solidFill>
+              <a:srgbClr val="DB2777"/>
+            </a:solidFill>
+            <a:prstDash val="solid"/>
+          </a:ln>
+          <a:effectLst>
+            <a:outerShdw sx="100000" sy="100000" kx="0" ky="0" algn="bl" rotWithShape="0" blurRad="101600" dist="38100" dir="8100000">
+              <a:srgbClr val="000000">
+                <a:alpha val="12000"/>
+              </a:srgbClr>
+            </a:outerShdw>
+          </a:effectLst>
+        </p:spPr>
+      </p:sp>
+      <p:sp>
+        <p:nvSpPr>
+          <p:cNvPr id="26" name="Text 24"/>
+          <p:cNvSpPr/>
+          <p:nvPr/>
+        </p:nvSpPr>
+        <p:spPr>
+          <a:xfrm>
+            <a:off x="6998818" y="2258568"/>
+            <a:ext cx="1581912" cy="292608"/>
+          </a:xfrm>
+          <a:prstGeom prst="rect">
+            <a:avLst/>
+          </a:prstGeom>
+          <a:noFill/>
+          <a:ln/>
+        </p:spPr>
+        <p:txBody>
+          <a:bodyPr wrap="square" lIns="0" tIns="0" rIns="0" bIns="0" rtlCol="0" anchor="ctr"/>
+          <a:lstStyle/>
+          <a:p>
+            <a:pPr algn="ctr" indent="0" marL="0">
+              <a:buNone/>
+            </a:pPr>
+            <a:r>
+              <a:rPr lang="en-US" sz="1300" b="1" dirty="0">
+                <a:solidFill>
+                  <a:srgbClr val="9D174D"/>
+                </a:solidFill>
+                <a:latin typeface="Trebuchet MS" pitchFamily="34" charset="0"/>
+                <a:ea typeface="Trebuchet MS" pitchFamily="34" charset="-122"/>
+                <a:cs typeface="Trebuchet MS" pitchFamily="34" charset="-120"/>
+              </a:rPr>
+              <a:t>s</a:t>
+            </a:r>
+            <a:endParaRPr lang="en-US" sz="1300" dirty="0"/>
+          </a:p>
+        </p:txBody>
+      </p:sp>
+      <p:sp>
+        <p:nvSpPr>
+          <p:cNvPr id="27" name="Text 25"/>
+          <p:cNvSpPr/>
+          <p:nvPr/>
+        </p:nvSpPr>
+        <p:spPr>
+          <a:xfrm>
+            <a:off x="6998818" y="2569464"/>
+            <a:ext cx="1581912" cy="201168"/>
+          </a:xfrm>
+          <a:prstGeom prst="rect">
+            <a:avLst/>
+          </a:prstGeom>
+          <a:noFill/>
+          <a:ln/>
+        </p:spPr>
+        <p:txBody>
+          <a:bodyPr wrap="square" lIns="0" tIns="0" rIns="0" bIns="0" rtlCol="0" anchor="t"/>
+          <a:lstStyle/>
+          <a:p>
+            <a:pPr algn="ctr" indent="0" marL="0">
+              <a:buNone/>
+            </a:pPr>
+            <a:r>
+              <a:rPr lang="en-US" sz="850" dirty="0">
+                <a:solidFill>
+                  <a:srgbClr val="475569"/>
+                </a:solidFill>
+                <a:latin typeface="Calibri" pitchFamily="34" charset="0"/>
+                <a:ea typeface="Calibri" pitchFamily="34" charset="-122"/>
+                <a:cs typeface="Calibri" pitchFamily="34" charset="-120"/>
+              </a:rPr>
+              <a:t>plural or present tense</a:t>
+            </a:r>
+            <a:endParaRPr lang="en-US" sz="850" dirty="0"/>
+          </a:p>
+        </p:txBody>
+      </p:sp>
+      <p:sp>
+        <p:nvSpPr>
+          <p:cNvPr id="28" name="Shape 26"/>
           <p:cNvSpPr/>
           <p:nvPr/>
         </p:nvSpPr>
@@ -22353,7 +23821,7 @@
       </p:sp>
       <p:sp>
         <p:nvSpPr>
-          <p:cNvPr id="26" name="Text 24"/>
+          <p:cNvPr id="29" name="Text 27"/>
           <p:cNvSpPr/>
           <p:nvPr/>
         </p:nvSpPr>
@@ -22392,7 +23860,7 @@
       </p:sp>
       <p:sp>
         <p:nvSpPr>
-          <p:cNvPr id="27" name="Shape 25"/>
+          <p:cNvPr id="30" name="Shape 28"/>
           <p:cNvSpPr/>
           <p:nvPr/>
         </p:nvSpPr>
@@ -22419,7 +23887,7 @@
       </p:sp>
       <p:sp>
         <p:nvSpPr>
-          <p:cNvPr id="28" name="Shape 26"/>
+          <p:cNvPr id="31" name="Shape 29"/>
           <p:cNvSpPr/>
           <p:nvPr/>
         </p:nvSpPr>
@@ -22446,7 +23914,7 @@
       </p:sp>
       <p:sp>
         <p:nvSpPr>
-          <p:cNvPr id="29" name="Text 27"/>
+          <p:cNvPr id="32" name="Text 30"/>
           <p:cNvSpPr/>
           <p:nvPr/>
         </p:nvSpPr>
@@ -22485,7 +23953,7 @@
       </p:sp>
       <p:sp>
         <p:nvSpPr>
-          <p:cNvPr id="30" name="Text 28"/>
+          <p:cNvPr id="33" name="Text 31"/>
           <p:cNvSpPr/>
           <p:nvPr/>
         </p:nvSpPr>
@@ -22524,7 +23992,7 @@
       </p:sp>
       <p:sp>
         <p:nvSpPr>
-          <p:cNvPr id="31" name="Shape 29"/>
+          <p:cNvPr id="34" name="Shape 32"/>
           <p:cNvSpPr/>
           <p:nvPr/>
         </p:nvSpPr>
@@ -22551,7 +24019,7 @@
       </p:sp>
       <p:sp>
         <p:nvSpPr>
-          <p:cNvPr id="32" name="Text 30"/>
+          <p:cNvPr id="35" name="Text 33"/>
           <p:cNvSpPr/>
           <p:nvPr/>
         </p:nvSpPr>
@@ -22582,7 +24050,7 @@
                 <a:ea typeface="Trebuchet MS" pitchFamily="34" charset="-122"/>
                 <a:cs typeface="Trebuchet MS" pitchFamily="34" charset="-120"/>
               </a:rPr>
-              <a:t>cov</a:t>
+              <a:t>tur</a:t>
             </a:r>
             <a:endParaRPr lang="en-US" sz="1400" dirty="0"/>
           </a:p>
@@ -22590,7 +24058,7 @@
       </p:sp>
       <p:sp>
         <p:nvSpPr>
-          <p:cNvPr id="33" name="Text 31"/>
+          <p:cNvPr id="36" name="Text 34"/>
           <p:cNvSpPr/>
           <p:nvPr/>
         </p:nvSpPr>
@@ -22629,7 +24097,7 @@
       </p:sp>
       <p:sp>
         <p:nvSpPr>
-          <p:cNvPr id="34" name="Shape 32"/>
+          <p:cNvPr id="37" name="Shape 35"/>
           <p:cNvSpPr/>
           <p:nvPr/>
         </p:nvSpPr>
@@ -22656,7 +24124,7 @@
       </p:sp>
       <p:sp>
         <p:nvSpPr>
-          <p:cNvPr id="35" name="Text 33"/>
+          <p:cNvPr id="38" name="Text 36"/>
           <p:cNvSpPr/>
           <p:nvPr/>
         </p:nvSpPr>
@@ -22687,7 +24155,7 @@
                 <a:ea typeface="Trebuchet MS" pitchFamily="34" charset="-122"/>
                 <a:cs typeface="Trebuchet MS" pitchFamily="34" charset="-120"/>
               </a:rPr>
-              <a:t>er</a:t>
+              <a:t>ban</a:t>
             </a:r>
             <a:endParaRPr lang="en-US" sz="1400" dirty="0"/>
           </a:p>
@@ -22695,7 +24163,7 @@
       </p:sp>
       <p:sp>
         <p:nvSpPr>
-          <p:cNvPr id="36" name="Text 34"/>
+          <p:cNvPr id="39" name="Text 37"/>
           <p:cNvSpPr/>
           <p:nvPr/>
         </p:nvSpPr>
@@ -22734,7 +24202,7 @@
       </p:sp>
       <p:sp>
         <p:nvSpPr>
-          <p:cNvPr id="37" name="Shape 35"/>
+          <p:cNvPr id="40" name="Shape 38"/>
           <p:cNvSpPr/>
           <p:nvPr/>
         </p:nvSpPr>
@@ -22761,7 +24229,7 @@
       </p:sp>
       <p:sp>
         <p:nvSpPr>
-          <p:cNvPr id="38" name="Text 36"/>
+          <p:cNvPr id="41" name="Text 39"/>
           <p:cNvSpPr/>
           <p:nvPr/>
         </p:nvSpPr>
@@ -22792,7 +24260,7 @@
                 <a:ea typeface="Trebuchet MS" pitchFamily="34" charset="-122"/>
                 <a:cs typeface="Trebuchet MS" pitchFamily="34" charset="-120"/>
               </a:rPr>
-              <a:t>y</a:t>
+              <a:t>ces</a:t>
             </a:r>
             <a:endParaRPr lang="en-US" sz="1400" dirty="0"/>
           </a:p>
@@ -22800,7 +24268,7 @@
       </p:sp>
       <p:sp>
         <p:nvSpPr>
-          <p:cNvPr id="39" name="Shape 37"/>
+          <p:cNvPr id="42" name="Shape 40"/>
           <p:cNvSpPr/>
           <p:nvPr/>
         </p:nvSpPr>
@@ -22827,7 +24295,7 @@
       </p:sp>
       <p:sp>
         <p:nvSpPr>
-          <p:cNvPr id="40" name="Text 38"/>
+          <p:cNvPr id="43" name="Text 41"/>
           <p:cNvSpPr/>
           <p:nvPr/>
         </p:nvSpPr>
@@ -22866,7 +24334,7 @@
       </p:sp>
       <p:sp>
         <p:nvSpPr>
-          <p:cNvPr id="41" name="Shape 39"/>
+          <p:cNvPr id="44" name="Shape 42"/>
           <p:cNvSpPr/>
           <p:nvPr/>
         </p:nvSpPr>
@@ -22893,14 +24361,14 @@
       </p:sp>
       <p:sp>
         <p:nvSpPr>
-          <p:cNvPr id="42" name="Shape 40"/>
-          <p:cNvSpPr/>
-          <p:nvPr/>
-        </p:nvSpPr>
-        <p:spPr>
-          <a:xfrm>
-            <a:off x="2023872" y="4169664"/>
-            <a:ext cx="685800" cy="475488"/>
+          <p:cNvPr id="45" name="Shape 43"/>
+          <p:cNvSpPr/>
+          <p:nvPr/>
+        </p:nvSpPr>
+        <p:spPr>
+          <a:xfrm>
+            <a:off x="1952244" y="4169664"/>
+            <a:ext cx="543652" cy="475488"/>
           </a:xfrm>
           <a:prstGeom prst="rect">
             <a:avLst>
@@ -22920,14 +24388,14 @@
       </p:sp>
       <p:sp>
         <p:nvSpPr>
-          <p:cNvPr id="43" name="Text 41"/>
-          <p:cNvSpPr/>
-          <p:nvPr/>
-        </p:nvSpPr>
-        <p:spPr>
-          <a:xfrm>
-            <a:off x="2023872" y="4169664"/>
-            <a:ext cx="685800" cy="475488"/>
+          <p:cNvPr id="46" name="Text 44"/>
+          <p:cNvSpPr/>
+          <p:nvPr/>
+        </p:nvSpPr>
+        <p:spPr>
+          <a:xfrm>
+            <a:off x="1952244" y="4169664"/>
+            <a:ext cx="543652" cy="475488"/>
           </a:xfrm>
           <a:prstGeom prst="rect">
             <a:avLst/>
@@ -22959,14 +24427,14 @@
       </p:sp>
       <p:sp>
         <p:nvSpPr>
-          <p:cNvPr id="44" name="Shape 42"/>
-          <p:cNvSpPr/>
-          <p:nvPr/>
-        </p:nvSpPr>
-        <p:spPr>
-          <a:xfrm>
-            <a:off x="2831592" y="4169664"/>
-            <a:ext cx="685800" cy="475488"/>
+          <p:cNvPr id="47" name="Shape 45"/>
+          <p:cNvSpPr/>
+          <p:nvPr/>
+        </p:nvSpPr>
+        <p:spPr>
+          <a:xfrm>
+            <a:off x="2546188" y="4169664"/>
+            <a:ext cx="543652" cy="475488"/>
           </a:xfrm>
           <a:prstGeom prst="rect">
             <a:avLst>
@@ -22986,14 +24454,14 @@
       </p:sp>
       <p:sp>
         <p:nvSpPr>
-          <p:cNvPr id="45" name="Text 43"/>
-          <p:cNvSpPr/>
-          <p:nvPr/>
-        </p:nvSpPr>
-        <p:spPr>
-          <a:xfrm>
-            <a:off x="2831592" y="4169664"/>
-            <a:ext cx="685800" cy="475488"/>
+          <p:cNvPr id="48" name="Text 46"/>
+          <p:cNvSpPr/>
+          <p:nvPr/>
+        </p:nvSpPr>
+        <p:spPr>
+          <a:xfrm>
+            <a:off x="2546188" y="4169664"/>
+            <a:ext cx="543652" cy="475488"/>
           </a:xfrm>
           <a:prstGeom prst="rect">
             <a:avLst/>
@@ -23025,14 +24493,14 @@
       </p:sp>
       <p:sp>
         <p:nvSpPr>
-          <p:cNvPr id="46" name="Shape 44"/>
-          <p:cNvSpPr/>
-          <p:nvPr/>
-        </p:nvSpPr>
-        <p:spPr>
-          <a:xfrm>
-            <a:off x="3639312" y="4169664"/>
-            <a:ext cx="685800" cy="475488"/>
+          <p:cNvPr id="49" name="Shape 47"/>
+          <p:cNvSpPr/>
+          <p:nvPr/>
+        </p:nvSpPr>
+        <p:spPr>
+          <a:xfrm>
+            <a:off x="3140133" y="4169664"/>
+            <a:ext cx="543652" cy="475488"/>
           </a:xfrm>
           <a:prstGeom prst="rect">
             <a:avLst>
@@ -23052,14 +24520,14 @@
       </p:sp>
       <p:sp>
         <p:nvSpPr>
-          <p:cNvPr id="47" name="Text 45"/>
-          <p:cNvSpPr/>
-          <p:nvPr/>
-        </p:nvSpPr>
-        <p:spPr>
-          <a:xfrm>
-            <a:off x="3639312" y="4169664"/>
-            <a:ext cx="685800" cy="475488"/>
+          <p:cNvPr id="50" name="Text 48"/>
+          <p:cNvSpPr/>
+          <p:nvPr/>
+        </p:nvSpPr>
+        <p:spPr>
+          <a:xfrm>
+            <a:off x="3140133" y="4169664"/>
+            <a:ext cx="543652" cy="475488"/>
           </a:xfrm>
           <a:prstGeom prst="rect">
             <a:avLst/>
@@ -23091,14 +24559,14 @@
       </p:sp>
       <p:sp>
         <p:nvSpPr>
-          <p:cNvPr id="48" name="Shape 46"/>
-          <p:cNvSpPr/>
-          <p:nvPr/>
-        </p:nvSpPr>
-        <p:spPr>
-          <a:xfrm>
-            <a:off x="4447032" y="4169664"/>
-            <a:ext cx="685800" cy="475488"/>
+          <p:cNvPr id="51" name="Shape 49"/>
+          <p:cNvSpPr/>
+          <p:nvPr/>
+        </p:nvSpPr>
+        <p:spPr>
+          <a:xfrm>
+            <a:off x="3734077" y="4169664"/>
+            <a:ext cx="543652" cy="475488"/>
           </a:xfrm>
           <a:prstGeom prst="rect">
             <a:avLst>
@@ -23118,14 +24586,14 @@
       </p:sp>
       <p:sp>
         <p:nvSpPr>
-          <p:cNvPr id="49" name="Text 47"/>
-          <p:cNvSpPr/>
-          <p:nvPr/>
-        </p:nvSpPr>
-        <p:spPr>
-          <a:xfrm>
-            <a:off x="4447032" y="4169664"/>
-            <a:ext cx="685800" cy="475488"/>
+          <p:cNvPr id="52" name="Text 50"/>
+          <p:cNvSpPr/>
+          <p:nvPr/>
+        </p:nvSpPr>
+        <p:spPr>
+          <a:xfrm>
+            <a:off x="3734077" y="4169664"/>
+            <a:ext cx="543652" cy="475488"/>
           </a:xfrm>
           <a:prstGeom prst="rect">
             <a:avLst/>
@@ -23149,7 +24617,7 @@
                 <a:ea typeface="Trebuchet MS" pitchFamily="34" charset="-122"/>
                 <a:cs typeface="Trebuchet MS" pitchFamily="34" charset="-120"/>
               </a:rPr>
-              <a:t>c</a:t>
+              <a:t>t</a:t>
             </a:r>
             <a:endParaRPr lang="en-US" sz="900" dirty="0"/>
           </a:p>
@@ -23157,14 +24625,14 @@
       </p:sp>
       <p:sp>
         <p:nvSpPr>
-          <p:cNvPr id="50" name="Shape 48"/>
-          <p:cNvSpPr/>
-          <p:nvPr/>
-        </p:nvSpPr>
-        <p:spPr>
-          <a:xfrm>
-            <a:off x="5254752" y="4169664"/>
-            <a:ext cx="685800" cy="475488"/>
+          <p:cNvPr id="53" name="Shape 51"/>
+          <p:cNvSpPr/>
+          <p:nvPr/>
+        </p:nvSpPr>
+        <p:spPr>
+          <a:xfrm>
+            <a:off x="4328021" y="4169664"/>
+            <a:ext cx="543652" cy="475488"/>
           </a:xfrm>
           <a:prstGeom prst="rect">
             <a:avLst>
@@ -23184,14 +24652,14 @@
       </p:sp>
       <p:sp>
         <p:nvSpPr>
-          <p:cNvPr id="51" name="Text 49"/>
-          <p:cNvSpPr/>
-          <p:nvPr/>
-        </p:nvSpPr>
-        <p:spPr>
-          <a:xfrm>
-            <a:off x="5254752" y="4169664"/>
-            <a:ext cx="685800" cy="475488"/>
+          <p:cNvPr id="54" name="Text 52"/>
+          <p:cNvSpPr/>
+          <p:nvPr/>
+        </p:nvSpPr>
+        <p:spPr>
+          <a:xfrm>
+            <a:off x="4328021" y="4169664"/>
+            <a:ext cx="543652" cy="475488"/>
           </a:xfrm>
           <a:prstGeom prst="rect">
             <a:avLst/>
@@ -23215,7 +24683,7 @@
                 <a:ea typeface="Trebuchet MS" pitchFamily="34" charset="-122"/>
                 <a:cs typeface="Trebuchet MS" pitchFamily="34" charset="-120"/>
               </a:rPr>
-              <a:t>o</a:t>
+              <a:t>ur</a:t>
             </a:r>
             <a:endParaRPr lang="en-US" sz="900" dirty="0"/>
           </a:p>
@@ -23223,14 +24691,14 @@
       </p:sp>
       <p:sp>
         <p:nvSpPr>
-          <p:cNvPr id="52" name="Shape 50"/>
-          <p:cNvSpPr/>
-          <p:nvPr/>
-        </p:nvSpPr>
-        <p:spPr>
-          <a:xfrm>
-            <a:off x="6062472" y="4169664"/>
-            <a:ext cx="685800" cy="475488"/>
+          <p:cNvPr id="55" name="Shape 53"/>
+          <p:cNvSpPr/>
+          <p:nvPr/>
+        </p:nvSpPr>
+        <p:spPr>
+          <a:xfrm>
+            <a:off x="4921966" y="4169664"/>
+            <a:ext cx="543652" cy="475488"/>
           </a:xfrm>
           <a:prstGeom prst="rect">
             <a:avLst>
@@ -23250,14 +24718,14 @@
       </p:sp>
       <p:sp>
         <p:nvSpPr>
-          <p:cNvPr id="53" name="Text 51"/>
-          <p:cNvSpPr/>
-          <p:nvPr/>
-        </p:nvSpPr>
-        <p:spPr>
-          <a:xfrm>
-            <a:off x="6062472" y="4169664"/>
-            <a:ext cx="685800" cy="475488"/>
+          <p:cNvPr id="56" name="Text 54"/>
+          <p:cNvSpPr/>
+          <p:nvPr/>
+        </p:nvSpPr>
+        <p:spPr>
+          <a:xfrm>
+            <a:off x="4921966" y="4169664"/>
+            <a:ext cx="543652" cy="475488"/>
           </a:xfrm>
           <a:prstGeom prst="rect">
             <a:avLst/>
@@ -23281,7 +24749,7 @@
                 <a:ea typeface="Trebuchet MS" pitchFamily="34" charset="-122"/>
                 <a:cs typeface="Trebuchet MS" pitchFamily="34" charset="-120"/>
               </a:rPr>
-              <a:t>v</a:t>
+              <a:t>b</a:t>
             </a:r>
             <a:endParaRPr lang="en-US" sz="900" dirty="0"/>
           </a:p>
@@ -23289,14 +24757,14 @@
       </p:sp>
       <p:sp>
         <p:nvSpPr>
-          <p:cNvPr id="54" name="Shape 52"/>
-          <p:cNvSpPr/>
-          <p:nvPr/>
-        </p:nvSpPr>
-        <p:spPr>
-          <a:xfrm>
-            <a:off x="6870192" y="4169664"/>
-            <a:ext cx="685800" cy="475488"/>
+          <p:cNvPr id="57" name="Shape 55"/>
+          <p:cNvSpPr/>
+          <p:nvPr/>
+        </p:nvSpPr>
+        <p:spPr>
+          <a:xfrm>
+            <a:off x="5515910" y="4169664"/>
+            <a:ext cx="543652" cy="475488"/>
           </a:xfrm>
           <a:prstGeom prst="rect">
             <a:avLst>
@@ -23316,14 +24784,14 @@
       </p:sp>
       <p:sp>
         <p:nvSpPr>
-          <p:cNvPr id="55" name="Text 53"/>
-          <p:cNvSpPr/>
-          <p:nvPr/>
-        </p:nvSpPr>
-        <p:spPr>
-          <a:xfrm>
-            <a:off x="6870192" y="4169664"/>
-            <a:ext cx="685800" cy="475488"/>
+          <p:cNvPr id="58" name="Text 56"/>
+          <p:cNvSpPr/>
+          <p:nvPr/>
+        </p:nvSpPr>
+        <p:spPr>
+          <a:xfrm>
+            <a:off x="5515910" y="4169664"/>
+            <a:ext cx="543652" cy="475488"/>
           </a:xfrm>
           <a:prstGeom prst="rect">
             <a:avLst/>
@@ -23347,7 +24815,7 @@
                 <a:ea typeface="Trebuchet MS" pitchFamily="34" charset="-122"/>
                 <a:cs typeface="Trebuchet MS" pitchFamily="34" charset="-120"/>
               </a:rPr>
-              <a:t>er</a:t>
+              <a:t>a</a:t>
             </a:r>
             <a:endParaRPr lang="en-US" sz="900" dirty="0"/>
           </a:p>
@@ -23355,14 +24823,14 @@
       </p:sp>
       <p:sp>
         <p:nvSpPr>
-          <p:cNvPr id="56" name="Shape 54"/>
-          <p:cNvSpPr/>
-          <p:nvPr/>
-        </p:nvSpPr>
-        <p:spPr>
-          <a:xfrm>
-            <a:off x="7677912" y="4169664"/>
-            <a:ext cx="685800" cy="475488"/>
+          <p:cNvPr id="59" name="Shape 57"/>
+          <p:cNvSpPr/>
+          <p:nvPr/>
+        </p:nvSpPr>
+        <p:spPr>
+          <a:xfrm>
+            <a:off x="6109855" y="4169664"/>
+            <a:ext cx="543652" cy="475488"/>
           </a:xfrm>
           <a:prstGeom prst="rect">
             <a:avLst>
@@ -23382,14 +24850,14 @@
       </p:sp>
       <p:sp>
         <p:nvSpPr>
-          <p:cNvPr id="57" name="Text 55"/>
-          <p:cNvSpPr/>
-          <p:nvPr/>
-        </p:nvSpPr>
-        <p:spPr>
-          <a:xfrm>
-            <a:off x="7677912" y="4169664"/>
-            <a:ext cx="685800" cy="475488"/>
+          <p:cNvPr id="60" name="Text 58"/>
+          <p:cNvSpPr/>
+          <p:nvPr/>
+        </p:nvSpPr>
+        <p:spPr>
+          <a:xfrm>
+            <a:off x="6109855" y="4169664"/>
+            <a:ext cx="543652" cy="475488"/>
           </a:xfrm>
           <a:prstGeom prst="rect">
             <a:avLst/>
@@ -23413,7 +24881,205 @@
                 <a:ea typeface="Trebuchet MS" pitchFamily="34" charset="-122"/>
                 <a:cs typeface="Trebuchet MS" pitchFamily="34" charset="-120"/>
               </a:rPr>
-              <a:t>y</a:t>
+              <a:t>n</a:t>
+            </a:r>
+            <a:endParaRPr lang="en-US" sz="900" dirty="0"/>
+          </a:p>
+        </p:txBody>
+      </p:sp>
+      <p:sp>
+        <p:nvSpPr>
+          <p:cNvPr id="61" name="Shape 59"/>
+          <p:cNvSpPr/>
+          <p:nvPr/>
+        </p:nvSpPr>
+        <p:spPr>
+          <a:xfrm>
+            <a:off x="6703799" y="4169664"/>
+            <a:ext cx="543652" cy="475488"/>
+          </a:xfrm>
+          <a:prstGeom prst="rect">
+            <a:avLst>
+              <a:gd name="adj" fmla="val 7692"/>
+            </a:avLst>
+          </a:prstGeom>
+          <a:solidFill>
+            <a:srgbClr val="FFFFFF"/>
+          </a:solidFill>
+          <a:ln w="12700">
+            <a:solidFill>
+              <a:srgbClr val="DB2777"/>
+            </a:solidFill>
+            <a:prstDash val="solid"/>
+          </a:ln>
+        </p:spPr>
+      </p:sp>
+      <p:sp>
+        <p:nvSpPr>
+          <p:cNvPr id="62" name="Text 60"/>
+          <p:cNvSpPr/>
+          <p:nvPr/>
+        </p:nvSpPr>
+        <p:spPr>
+          <a:xfrm>
+            <a:off x="6703799" y="4169664"/>
+            <a:ext cx="543652" cy="475488"/>
+          </a:xfrm>
+          <a:prstGeom prst="rect">
+            <a:avLst/>
+          </a:prstGeom>
+          <a:noFill/>
+          <a:ln/>
+        </p:spPr>
+        <p:txBody>
+          <a:bodyPr wrap="square" lIns="0" tIns="0" rIns="0" bIns="0" rtlCol="0" anchor="ctr"/>
+          <a:lstStyle/>
+          <a:p>
+            <a:pPr algn="ctr" indent="0" marL="0">
+              <a:buNone/>
+            </a:pPr>
+            <a:r>
+              <a:rPr lang="en-US" sz="900" b="1" dirty="0">
+                <a:solidFill>
+                  <a:srgbClr val="9D174D"/>
+                </a:solidFill>
+                <a:latin typeface="Trebuchet MS" pitchFamily="34" charset="0"/>
+                <a:ea typeface="Trebuchet MS" pitchFamily="34" charset="-122"/>
+                <a:cs typeface="Trebuchet MS" pitchFamily="34" charset="-120"/>
+              </a:rPr>
+              <a:t>c</a:t>
+            </a:r>
+            <a:endParaRPr lang="en-US" sz="900" dirty="0"/>
+          </a:p>
+        </p:txBody>
+      </p:sp>
+      <p:sp>
+        <p:nvSpPr>
+          <p:cNvPr id="63" name="Shape 61"/>
+          <p:cNvSpPr/>
+          <p:nvPr/>
+        </p:nvSpPr>
+        <p:spPr>
+          <a:xfrm>
+            <a:off x="7297743" y="4169664"/>
+            <a:ext cx="543652" cy="475488"/>
+          </a:xfrm>
+          <a:prstGeom prst="rect">
+            <a:avLst>
+              <a:gd name="adj" fmla="val 7692"/>
+            </a:avLst>
+          </a:prstGeom>
+          <a:solidFill>
+            <a:srgbClr val="FFFFFF"/>
+          </a:solidFill>
+          <a:ln w="12700">
+            <a:solidFill>
+              <a:srgbClr val="DB2777"/>
+            </a:solidFill>
+            <a:prstDash val="solid"/>
+          </a:ln>
+        </p:spPr>
+      </p:sp>
+      <p:sp>
+        <p:nvSpPr>
+          <p:cNvPr id="64" name="Text 62"/>
+          <p:cNvSpPr/>
+          <p:nvPr/>
+        </p:nvSpPr>
+        <p:spPr>
+          <a:xfrm>
+            <a:off x="7297743" y="4169664"/>
+            <a:ext cx="543652" cy="475488"/>
+          </a:xfrm>
+          <a:prstGeom prst="rect">
+            <a:avLst/>
+          </a:prstGeom>
+          <a:noFill/>
+          <a:ln/>
+        </p:spPr>
+        <p:txBody>
+          <a:bodyPr wrap="square" lIns="0" tIns="0" rIns="0" bIns="0" rtlCol="0" anchor="ctr"/>
+          <a:lstStyle/>
+          <a:p>
+            <a:pPr algn="ctr" indent="0" marL="0">
+              <a:buNone/>
+            </a:pPr>
+            <a:r>
+              <a:rPr lang="en-US" sz="900" b="1" dirty="0">
+                <a:solidFill>
+                  <a:srgbClr val="9D174D"/>
+                </a:solidFill>
+                <a:latin typeface="Trebuchet MS" pitchFamily="34" charset="0"/>
+                <a:ea typeface="Trebuchet MS" pitchFamily="34" charset="-122"/>
+                <a:cs typeface="Trebuchet MS" pitchFamily="34" charset="-120"/>
+              </a:rPr>
+              <a:t>e</a:t>
+            </a:r>
+            <a:endParaRPr lang="en-US" sz="900" dirty="0"/>
+          </a:p>
+        </p:txBody>
+      </p:sp>
+      <p:sp>
+        <p:nvSpPr>
+          <p:cNvPr id="65" name="Shape 63"/>
+          <p:cNvSpPr/>
+          <p:nvPr/>
+        </p:nvSpPr>
+        <p:spPr>
+          <a:xfrm>
+            <a:off x="7891688" y="4169664"/>
+            <a:ext cx="543652" cy="475488"/>
+          </a:xfrm>
+          <a:prstGeom prst="rect">
+            <a:avLst>
+              <a:gd name="adj" fmla="val 7692"/>
+            </a:avLst>
+          </a:prstGeom>
+          <a:solidFill>
+            <a:srgbClr val="FFFFFF"/>
+          </a:solidFill>
+          <a:ln w="12700">
+            <a:solidFill>
+              <a:srgbClr val="DB2777"/>
+            </a:solidFill>
+            <a:prstDash val="solid"/>
+          </a:ln>
+        </p:spPr>
+      </p:sp>
+      <p:sp>
+        <p:nvSpPr>
+          <p:cNvPr id="66" name="Text 64"/>
+          <p:cNvSpPr/>
+          <p:nvPr/>
+        </p:nvSpPr>
+        <p:spPr>
+          <a:xfrm>
+            <a:off x="7891688" y="4169664"/>
+            <a:ext cx="543652" cy="475488"/>
+          </a:xfrm>
+          <a:prstGeom prst="rect">
+            <a:avLst/>
+          </a:prstGeom>
+          <a:noFill/>
+          <a:ln/>
+        </p:spPr>
+        <p:txBody>
+          <a:bodyPr wrap="square" lIns="0" tIns="0" rIns="0" bIns="0" rtlCol="0" anchor="ctr"/>
+          <a:lstStyle/>
+          <a:p>
+            <a:pPr algn="ctr" indent="0" marL="0">
+              <a:buNone/>
+            </a:pPr>
+            <a:r>
+              <a:rPr lang="en-US" sz="900" b="1" dirty="0">
+                <a:solidFill>
+                  <a:srgbClr val="9D174D"/>
+                </a:solidFill>
+                <a:latin typeface="Trebuchet MS" pitchFamily="34" charset="0"/>
+                <a:ea typeface="Trebuchet MS" pitchFamily="34" charset="-122"/>
+                <a:cs typeface="Trebuchet MS" pitchFamily="34" charset="-120"/>
+              </a:rPr>
+              <a:t>s</a:t>
             </a:r>
             <a:endParaRPr lang="en-US" sz="900" dirty="0"/>
           </a:p>
@@ -23705,7 +25371,7 @@
                 <a:ea typeface="Calibri" pitchFamily="34" charset="-122"/>
                 <a:cs typeface="Calibri" pitchFamily="34" charset="-120"/>
               </a:rPr>
-              <a:t>Word Labs  •  wordlabs.app  •  Prefix: 'dis-' = not, opposite, away</a:t>
+              <a:t>Word Labs  •  wordlabs.app  •  Prefix: 'dis-' = not; opposite; apart</a:t>
             </a:r>
             <a:endParaRPr lang="en-US" sz="800" dirty="0"/>
           </a:p>
@@ -23844,7 +25510,7 @@
                 <a:ea typeface="Trebuchet MS" pitchFamily="34" charset="-122"/>
                 <a:cs typeface="Trebuchet MS" pitchFamily="34" charset="-120"/>
               </a:rPr>
-              <a:t>dishonest</a:t>
+              <a:t>disaster</a:t>
             </a:r>
             <a:endParaRPr lang="en-US" sz="2800" dirty="0"/>
           </a:p>
@@ -24532,7 +26198,7 @@
                 <a:ea typeface="Calibri" pitchFamily="34" charset="-122"/>
                 <a:cs typeface="Calibri" pitchFamily="34" charset="-120"/>
               </a:rPr>
-              <a:t>Word Labs  •  wordlabs.app  •  Prefix: 'dis-' = not, opposite, away</a:t>
+              <a:t>Word Labs  •  wordlabs.app  •  Prefix: 'dis-' = not; opposite; apart</a:t>
             </a:r>
             <a:endParaRPr lang="en-US" sz="800" dirty="0"/>
           </a:p>
@@ -24671,7 +26337,7 @@
                 <a:ea typeface="Trebuchet MS" pitchFamily="34" charset="-122"/>
                 <a:cs typeface="Trebuchet MS" pitchFamily="34" charset="-120"/>
               </a:rPr>
-              <a:t>dishonest</a:t>
+              <a:t>disaster</a:t>
             </a:r>
             <a:endParaRPr lang="en-US" sz="2800" dirty="0"/>
           </a:p>
@@ -24849,7 +26515,7 @@
                 <a:ea typeface="Calibri" pitchFamily="34" charset="-122"/>
                 <a:cs typeface="Calibri" pitchFamily="34" charset="-120"/>
               </a:rPr>
-              <a:t>not, opposite</a:t>
+              <a:t>not; opposite; apart</a:t>
             </a:r>
             <a:endParaRPr lang="en-US" sz="850" dirty="0"/>
           </a:p>
@@ -24922,7 +26588,7 @@
                 <a:ea typeface="Trebuchet MS" pitchFamily="34" charset="-122"/>
                 <a:cs typeface="Trebuchet MS" pitchFamily="34" charset="-120"/>
               </a:rPr>
-              <a:t>honest</a:t>
+              <a:t>aster</a:t>
             </a:r>
             <a:endParaRPr lang="en-US" sz="1300" dirty="0"/>
           </a:p>
@@ -24961,7 +26627,7 @@
                 <a:ea typeface="Calibri" pitchFamily="34" charset="-122"/>
                 <a:cs typeface="Calibri" pitchFamily="34" charset="-120"/>
               </a:rPr>
-              <a:t>truthful, fair</a:t>
+              <a:t>star</a:t>
             </a:r>
             <a:endParaRPr lang="en-US" sz="850" dirty="0"/>
           </a:p>
@@ -25517,7 +27183,7 @@
                 <a:ea typeface="Calibri" pitchFamily="34" charset="-122"/>
                 <a:cs typeface="Calibri" pitchFamily="34" charset="-120"/>
               </a:rPr>
-              <a:t>Word Labs  •  wordlabs.app  •  Prefix: 'dis-' = not, opposite, away</a:t>
+              <a:t>Word Labs  •  wordlabs.app  •  Prefix: 'dis-' = not; opposite; apart</a:t>
             </a:r>
             <a:endParaRPr lang="en-US" sz="800" dirty="0"/>
           </a:p>
@@ -25590,7 +27256,7 @@
                 <a:ea typeface="Trebuchet MS" pitchFamily="34" charset="-122"/>
                 <a:cs typeface="Trebuchet MS" pitchFamily="34" charset="-120"/>
               </a:rPr>
-              <a:t>We are learning that the prefix 'dis-' means 'not, opposite, away'.</a:t>
+              <a:t>We are learning that the prefix 'dis-' means 'not; opposite; apart'.</a:t>
             </a:r>
             <a:endParaRPr lang="en-US" sz="2000" dirty="0"/>
           </a:p>
@@ -26236,7 +27902,7 @@
                 <a:ea typeface="Calibri" pitchFamily="34" charset="-122"/>
                 <a:cs typeface="Calibri" pitchFamily="34" charset="-120"/>
               </a:rPr>
-              <a:t>Word Labs  •  wordlabs.app  •  Prefix: 'dis-' = not, opposite, away</a:t>
+              <a:t>Word Labs  •  wordlabs.app  •  Prefix: 'dis-' = not; opposite; apart</a:t>
             </a:r>
             <a:endParaRPr lang="en-US" sz="800" dirty="0"/>
           </a:p>
@@ -26375,7 +28041,7 @@
                 <a:ea typeface="Trebuchet MS" pitchFamily="34" charset="-122"/>
                 <a:cs typeface="Trebuchet MS" pitchFamily="34" charset="-120"/>
               </a:rPr>
-              <a:t>dishonest</a:t>
+              <a:t>disaster</a:t>
             </a:r>
             <a:endParaRPr lang="en-US" sz="2800" dirty="0"/>
           </a:p>
@@ -26553,7 +28219,7 @@
                 <a:ea typeface="Calibri" pitchFamily="34" charset="-122"/>
                 <a:cs typeface="Calibri" pitchFamily="34" charset="-120"/>
               </a:rPr>
-              <a:t>not, opposite</a:t>
+              <a:t>not; opposite; apart</a:t>
             </a:r>
             <a:endParaRPr lang="en-US" sz="850" dirty="0"/>
           </a:p>
@@ -26626,7 +28292,7 @@
                 <a:ea typeface="Trebuchet MS" pitchFamily="34" charset="-122"/>
                 <a:cs typeface="Trebuchet MS" pitchFamily="34" charset="-120"/>
               </a:rPr>
-              <a:t>honest</a:t>
+              <a:t>aster</a:t>
             </a:r>
             <a:endParaRPr lang="en-US" sz="1300" dirty="0"/>
           </a:p>
@@ -26665,7 +28331,7 @@
                 <a:ea typeface="Calibri" pitchFamily="34" charset="-122"/>
                 <a:cs typeface="Calibri" pitchFamily="34" charset="-120"/>
               </a:rPr>
-              <a:t>truthful, fair</a:t>
+              <a:t>star</a:t>
             </a:r>
             <a:endParaRPr lang="en-US" sz="850" dirty="0"/>
           </a:p>
@@ -26929,7 +28595,7 @@
                 <a:ea typeface="Trebuchet MS" pitchFamily="34" charset="-122"/>
                 <a:cs typeface="Trebuchet MS" pitchFamily="34" charset="-120"/>
               </a:rPr>
-              <a:t>hon</a:t>
+              <a:t>as</a:t>
             </a:r>
             <a:endParaRPr lang="en-US" sz="1400" dirty="0"/>
           </a:p>
@@ -27034,7 +28700,7 @@
                 <a:ea typeface="Trebuchet MS" pitchFamily="34" charset="-122"/>
                 <a:cs typeface="Trebuchet MS" pitchFamily="34" charset="-120"/>
               </a:rPr>
-              <a:t>est</a:t>
+              <a:t>ter</a:t>
             </a:r>
             <a:endParaRPr lang="en-US" sz="1400" dirty="0"/>
           </a:p>
@@ -27458,7 +29124,7 @@
                 <a:ea typeface="Calibri" pitchFamily="34" charset="-122"/>
                 <a:cs typeface="Calibri" pitchFamily="34" charset="-120"/>
               </a:rPr>
-              <a:t>Word Labs  •  wordlabs.app  •  Prefix: 'dis-' = not, opposite, away</a:t>
+              <a:t>Word Labs  •  wordlabs.app  •  Prefix: 'dis-' = not; opposite; apart</a:t>
             </a:r>
             <a:endParaRPr lang="en-US" sz="800" dirty="0"/>
           </a:p>
@@ -27597,7 +29263,7 @@
                 <a:ea typeface="Trebuchet MS" pitchFamily="34" charset="-122"/>
                 <a:cs typeface="Trebuchet MS" pitchFamily="34" charset="-120"/>
               </a:rPr>
-              <a:t>dishonest</a:t>
+              <a:t>disaster</a:t>
             </a:r>
             <a:endParaRPr lang="en-US" sz="2800" dirty="0"/>
           </a:p>
@@ -27775,7 +29441,7 @@
                 <a:ea typeface="Calibri" pitchFamily="34" charset="-122"/>
                 <a:cs typeface="Calibri" pitchFamily="34" charset="-120"/>
               </a:rPr>
-              <a:t>not, opposite</a:t>
+              <a:t>not; opposite; apart</a:t>
             </a:r>
             <a:endParaRPr lang="en-US" sz="850" dirty="0"/>
           </a:p>
@@ -27848,7 +29514,7 @@
                 <a:ea typeface="Trebuchet MS" pitchFamily="34" charset="-122"/>
                 <a:cs typeface="Trebuchet MS" pitchFamily="34" charset="-120"/>
               </a:rPr>
-              <a:t>honest</a:t>
+              <a:t>aster</a:t>
             </a:r>
             <a:endParaRPr lang="en-US" sz="1300" dirty="0"/>
           </a:p>
@@ -27887,7 +29553,7 @@
                 <a:ea typeface="Calibri" pitchFamily="34" charset="-122"/>
                 <a:cs typeface="Calibri" pitchFamily="34" charset="-120"/>
               </a:rPr>
-              <a:t>truthful, fair</a:t>
+              <a:t>star</a:t>
             </a:r>
             <a:endParaRPr lang="en-US" sz="850" dirty="0"/>
           </a:p>
@@ -28151,7 +29817,7 @@
                 <a:ea typeface="Trebuchet MS" pitchFamily="34" charset="-122"/>
                 <a:cs typeface="Trebuchet MS" pitchFamily="34" charset="-120"/>
               </a:rPr>
-              <a:t>hon</a:t>
+              <a:t>as</a:t>
             </a:r>
             <a:endParaRPr lang="en-US" sz="1400" dirty="0"/>
           </a:p>
@@ -28256,7 +29922,7 @@
                 <a:ea typeface="Trebuchet MS" pitchFamily="34" charset="-122"/>
                 <a:cs typeface="Trebuchet MS" pitchFamily="34" charset="-120"/>
               </a:rPr>
-              <a:t>est</a:t>
+              <a:t>ter</a:t>
             </a:r>
             <a:endParaRPr lang="en-US" sz="1400" dirty="0"/>
           </a:p>
@@ -28363,8 +30029,8 @@
         </p:nvSpPr>
         <p:spPr>
           <a:xfrm>
-            <a:off x="1951330" y="4169664"/>
-            <a:ext cx="676656" cy="475488"/>
+            <a:off x="2124837" y="4169664"/>
+            <a:ext cx="685800" cy="475488"/>
           </a:xfrm>
           <a:prstGeom prst="rect">
             <a:avLst>
@@ -28390,8 +30056,8 @@
         </p:nvSpPr>
         <p:spPr>
           <a:xfrm>
-            <a:off x="1951330" y="4169664"/>
-            <a:ext cx="676656" cy="475488"/>
+            <a:off x="2124837" y="4169664"/>
+            <a:ext cx="685800" cy="475488"/>
           </a:xfrm>
           <a:prstGeom prst="rect">
             <a:avLst/>
@@ -28429,8 +30095,8 @@
         </p:nvSpPr>
         <p:spPr>
           <a:xfrm>
-            <a:off x="2677363" y="4169664"/>
-            <a:ext cx="676656" cy="475488"/>
+            <a:off x="3033522" y="4169664"/>
+            <a:ext cx="685800" cy="475488"/>
           </a:xfrm>
           <a:prstGeom prst="rect">
             <a:avLst>
@@ -28456,8 +30122,8 @@
         </p:nvSpPr>
         <p:spPr>
           <a:xfrm>
-            <a:off x="2677363" y="4169664"/>
-            <a:ext cx="676656" cy="475488"/>
+            <a:off x="3033522" y="4169664"/>
+            <a:ext cx="685800" cy="475488"/>
           </a:xfrm>
           <a:prstGeom prst="rect">
             <a:avLst/>
@@ -28495,8 +30161,8 @@
         </p:nvSpPr>
         <p:spPr>
           <a:xfrm>
-            <a:off x="3403397" y="4169664"/>
-            <a:ext cx="676656" cy="475488"/>
+            <a:off x="3942207" y="4169664"/>
+            <a:ext cx="685800" cy="475488"/>
           </a:xfrm>
           <a:prstGeom prst="rect">
             <a:avLst>
@@ -28522,8 +30188,8 @@
         </p:nvSpPr>
         <p:spPr>
           <a:xfrm>
-            <a:off x="3403397" y="4169664"/>
-            <a:ext cx="676656" cy="475488"/>
+            <a:off x="3942207" y="4169664"/>
+            <a:ext cx="685800" cy="475488"/>
           </a:xfrm>
           <a:prstGeom prst="rect">
             <a:avLst/>
@@ -28561,8 +30227,8 @@
         </p:nvSpPr>
         <p:spPr>
           <a:xfrm>
-            <a:off x="4129430" y="4169664"/>
-            <a:ext cx="676656" cy="475488"/>
+            <a:off x="4850892" y="4169664"/>
+            <a:ext cx="685800" cy="475488"/>
           </a:xfrm>
           <a:prstGeom prst="rect">
             <a:avLst>
@@ -28588,8 +30254,8 @@
         </p:nvSpPr>
         <p:spPr>
           <a:xfrm>
-            <a:off x="4129430" y="4169664"/>
-            <a:ext cx="676656" cy="475488"/>
+            <a:off x="4850892" y="4169664"/>
+            <a:ext cx="685800" cy="475488"/>
           </a:xfrm>
           <a:prstGeom prst="rect">
             <a:avLst/>
@@ -28613,7 +30279,7 @@
                 <a:ea typeface="Trebuchet MS" pitchFamily="34" charset="-122"/>
                 <a:cs typeface="Trebuchet MS" pitchFamily="34" charset="-120"/>
               </a:rPr>
-              <a:t>h</a:t>
+              <a:t>a</a:t>
             </a:r>
             <a:endParaRPr lang="en-US" sz="900" dirty="0"/>
           </a:p>
@@ -28627,8 +30293,8 @@
         </p:nvSpPr>
         <p:spPr>
           <a:xfrm>
-            <a:off x="4855464" y="4169664"/>
-            <a:ext cx="676656" cy="475488"/>
+            <a:off x="5759577" y="4169664"/>
+            <a:ext cx="685800" cy="475488"/>
           </a:xfrm>
           <a:prstGeom prst="rect">
             <a:avLst>
@@ -28654,8 +30320,8 @@
         </p:nvSpPr>
         <p:spPr>
           <a:xfrm>
-            <a:off x="4855464" y="4169664"/>
-            <a:ext cx="676656" cy="475488"/>
+            <a:off x="5759577" y="4169664"/>
+            <a:ext cx="685800" cy="475488"/>
           </a:xfrm>
           <a:prstGeom prst="rect">
             <a:avLst/>
@@ -28679,7 +30345,7 @@
                 <a:ea typeface="Trebuchet MS" pitchFamily="34" charset="-122"/>
                 <a:cs typeface="Trebuchet MS" pitchFamily="34" charset="-120"/>
               </a:rPr>
-              <a:t>o</a:t>
+              <a:t>s</a:t>
             </a:r>
             <a:endParaRPr lang="en-US" sz="900" dirty="0"/>
           </a:p>
@@ -28693,8 +30359,8 @@
         </p:nvSpPr>
         <p:spPr>
           <a:xfrm>
-            <a:off x="5581498" y="4169664"/>
-            <a:ext cx="676656" cy="475488"/>
+            <a:off x="6668262" y="4169664"/>
+            <a:ext cx="685800" cy="475488"/>
           </a:xfrm>
           <a:prstGeom prst="rect">
             <a:avLst>
@@ -28720,8 +30386,8 @@
         </p:nvSpPr>
         <p:spPr>
           <a:xfrm>
-            <a:off x="5581498" y="4169664"/>
-            <a:ext cx="676656" cy="475488"/>
+            <a:off x="6668262" y="4169664"/>
+            <a:ext cx="685800" cy="475488"/>
           </a:xfrm>
           <a:prstGeom prst="rect">
             <a:avLst/>
@@ -28745,7 +30411,7 @@
                 <a:ea typeface="Trebuchet MS" pitchFamily="34" charset="-122"/>
                 <a:cs typeface="Trebuchet MS" pitchFamily="34" charset="-120"/>
               </a:rPr>
-              <a:t>n</a:t>
+              <a:t>t</a:t>
             </a:r>
             <a:endParaRPr lang="en-US" sz="900" dirty="0"/>
           </a:p>
@@ -28759,8 +30425,8 @@
         </p:nvSpPr>
         <p:spPr>
           <a:xfrm>
-            <a:off x="6307531" y="4169664"/>
-            <a:ext cx="676656" cy="475488"/>
+            <a:off x="7576947" y="4169664"/>
+            <a:ext cx="685800" cy="475488"/>
           </a:xfrm>
           <a:prstGeom prst="rect">
             <a:avLst>
@@ -28786,8 +30452,8 @@
         </p:nvSpPr>
         <p:spPr>
           <a:xfrm>
-            <a:off x="6307531" y="4169664"/>
-            <a:ext cx="676656" cy="475488"/>
+            <a:off x="7576947" y="4169664"/>
+            <a:ext cx="685800" cy="475488"/>
           </a:xfrm>
           <a:prstGeom prst="rect">
             <a:avLst/>
@@ -28811,139 +30477,7 @@
                 <a:ea typeface="Trebuchet MS" pitchFamily="34" charset="-122"/>
                 <a:cs typeface="Trebuchet MS" pitchFamily="34" charset="-120"/>
               </a:rPr>
-              <a:t>e</a:t>
-            </a:r>
-            <a:endParaRPr lang="en-US" sz="900" dirty="0"/>
-          </a:p>
-        </p:txBody>
-      </p:sp>
-      <p:sp>
-        <p:nvSpPr>
-          <p:cNvPr id="50" name="Shape 48"/>
-          <p:cNvSpPr/>
-          <p:nvPr/>
-        </p:nvSpPr>
-        <p:spPr>
-          <a:xfrm>
-            <a:off x="7033565" y="4169664"/>
-            <a:ext cx="676656" cy="475488"/>
-          </a:xfrm>
-          <a:prstGeom prst="rect">
-            <a:avLst>
-              <a:gd name="adj" fmla="val 7692"/>
-            </a:avLst>
-          </a:prstGeom>
-          <a:solidFill>
-            <a:srgbClr val="FFFFFF"/>
-          </a:solidFill>
-          <a:ln w="12700">
-            <a:solidFill>
-              <a:srgbClr val="DB2777"/>
-            </a:solidFill>
-            <a:prstDash val="solid"/>
-          </a:ln>
-        </p:spPr>
-      </p:sp>
-      <p:sp>
-        <p:nvSpPr>
-          <p:cNvPr id="51" name="Text 49"/>
-          <p:cNvSpPr/>
-          <p:nvPr/>
-        </p:nvSpPr>
-        <p:spPr>
-          <a:xfrm>
-            <a:off x="7033565" y="4169664"/>
-            <a:ext cx="676656" cy="475488"/>
-          </a:xfrm>
-          <a:prstGeom prst="rect">
-            <a:avLst/>
-          </a:prstGeom>
-          <a:noFill/>
-          <a:ln/>
-        </p:spPr>
-        <p:txBody>
-          <a:bodyPr wrap="square" lIns="0" tIns="0" rIns="0" bIns="0" rtlCol="0" anchor="ctr"/>
-          <a:lstStyle/>
-          <a:p>
-            <a:pPr algn="ctr" indent="0" marL="0">
-              <a:buNone/>
-            </a:pPr>
-            <a:r>
-              <a:rPr lang="en-US" sz="900" b="1" dirty="0">
-                <a:solidFill>
-                  <a:srgbClr val="9D174D"/>
-                </a:solidFill>
-                <a:latin typeface="Trebuchet MS" pitchFamily="34" charset="0"/>
-                <a:ea typeface="Trebuchet MS" pitchFamily="34" charset="-122"/>
-                <a:cs typeface="Trebuchet MS" pitchFamily="34" charset="-120"/>
-              </a:rPr>
-              <a:t>s</a:t>
-            </a:r>
-            <a:endParaRPr lang="en-US" sz="900" dirty="0"/>
-          </a:p>
-        </p:txBody>
-      </p:sp>
-      <p:sp>
-        <p:nvSpPr>
-          <p:cNvPr id="52" name="Shape 50"/>
-          <p:cNvSpPr/>
-          <p:nvPr/>
-        </p:nvSpPr>
-        <p:spPr>
-          <a:xfrm>
-            <a:off x="7759598" y="4169664"/>
-            <a:ext cx="676656" cy="475488"/>
-          </a:xfrm>
-          <a:prstGeom prst="rect">
-            <a:avLst>
-              <a:gd name="adj" fmla="val 7692"/>
-            </a:avLst>
-          </a:prstGeom>
-          <a:solidFill>
-            <a:srgbClr val="FFFFFF"/>
-          </a:solidFill>
-          <a:ln w="12700">
-            <a:solidFill>
-              <a:srgbClr val="DB2777"/>
-            </a:solidFill>
-            <a:prstDash val="solid"/>
-          </a:ln>
-        </p:spPr>
-      </p:sp>
-      <p:sp>
-        <p:nvSpPr>
-          <p:cNvPr id="53" name="Text 51"/>
-          <p:cNvSpPr/>
-          <p:nvPr/>
-        </p:nvSpPr>
-        <p:spPr>
-          <a:xfrm>
-            <a:off x="7759598" y="4169664"/>
-            <a:ext cx="676656" cy="475488"/>
-          </a:xfrm>
-          <a:prstGeom prst="rect">
-            <a:avLst/>
-          </a:prstGeom>
-          <a:noFill/>
-          <a:ln/>
-        </p:spPr>
-        <p:txBody>
-          <a:bodyPr wrap="square" lIns="0" tIns="0" rIns="0" bIns="0" rtlCol="0" anchor="ctr"/>
-          <a:lstStyle/>
-          <a:p>
-            <a:pPr algn="ctr" indent="0" marL="0">
-              <a:buNone/>
-            </a:pPr>
-            <a:r>
-              <a:rPr lang="en-US" sz="900" b="1" dirty="0">
-                <a:solidFill>
-                  <a:srgbClr val="9D174D"/>
-                </a:solidFill>
-                <a:latin typeface="Trebuchet MS" pitchFamily="34" charset="0"/>
-                <a:ea typeface="Trebuchet MS" pitchFamily="34" charset="-122"/>
-                <a:cs typeface="Trebuchet MS" pitchFamily="34" charset="-120"/>
-              </a:rPr>
-              <a:t>t</a:t>
+              <a:t>er</a:t>
             </a:r>
             <a:endParaRPr lang="en-US" sz="900" dirty="0"/>
           </a:p>
@@ -29235,7 +30769,7 @@
                 <a:ea typeface="Calibri" pitchFamily="34" charset="-122"/>
                 <a:cs typeface="Calibri" pitchFamily="34" charset="-120"/>
               </a:rPr>
-              <a:t>Word Labs  •  wordlabs.app  •  Prefix: 'dis-' = not, opposite, away</a:t>
+              <a:t>Word Labs  •  wordlabs.app  •  Prefix: 'dis-' = not; opposite; apart</a:t>
             </a:r>
             <a:endParaRPr lang="en-US" sz="800" dirty="0"/>
           </a:p>
@@ -29374,7 +30908,7 @@
                 <a:ea typeface="Trebuchet MS" pitchFamily="34" charset="-122"/>
                 <a:cs typeface="Trebuchet MS" pitchFamily="34" charset="-120"/>
               </a:rPr>
-              <a:t>disappear</a:t>
+              <a:t>disasters</a:t>
             </a:r>
             <a:endParaRPr lang="en-US" sz="2800" dirty="0"/>
           </a:p>
@@ -30062,7 +31596,7 @@
                 <a:ea typeface="Calibri" pitchFamily="34" charset="-122"/>
                 <a:cs typeface="Calibri" pitchFamily="34" charset="-120"/>
               </a:rPr>
-              <a:t>Word Labs  •  wordlabs.app  •  Prefix: 'dis-' = not, opposite, away</a:t>
+              <a:t>Word Labs  •  wordlabs.app  •  Prefix: 'dis-' = not; opposite; apart</a:t>
             </a:r>
             <a:endParaRPr lang="en-US" sz="800" dirty="0"/>
           </a:p>
@@ -30201,7 +31735,7 @@
                 <a:ea typeface="Trebuchet MS" pitchFamily="34" charset="-122"/>
                 <a:cs typeface="Trebuchet MS" pitchFamily="34" charset="-120"/>
               </a:rPr>
-              <a:t>disappear</a:t>
+              <a:t>disasters</a:t>
             </a:r>
             <a:endParaRPr lang="en-US" sz="2800" dirty="0"/>
           </a:p>
@@ -30281,7 +31815,7 @@
         </p:nvSpPr>
         <p:spPr>
           <a:xfrm>
-            <a:off x="2938272" y="2258568"/>
+            <a:off x="2221992" y="2258568"/>
             <a:ext cx="1828800" cy="292608"/>
           </a:xfrm>
           <a:prstGeom prst="rect">
@@ -30315,7 +31849,7 @@
         </p:nvSpPr>
         <p:spPr>
           <a:xfrm>
-            <a:off x="2938272" y="2258568"/>
+            <a:off x="2221992" y="2258568"/>
             <a:ext cx="1828800" cy="292608"/>
           </a:xfrm>
           <a:prstGeom prst="rect">
@@ -30354,7 +31888,7 @@
         </p:nvSpPr>
         <p:spPr>
           <a:xfrm>
-            <a:off x="2938272" y="2569464"/>
+            <a:off x="2221992" y="2569464"/>
             <a:ext cx="1828800" cy="201168"/>
           </a:xfrm>
           <a:prstGeom prst="rect">
@@ -30379,7 +31913,7 @@
                 <a:ea typeface="Calibri" pitchFamily="34" charset="-122"/>
                 <a:cs typeface="Calibri" pitchFamily="34" charset="-120"/>
               </a:rPr>
-              <a:t>not, opposite</a:t>
+              <a:t>not; opposite; apart</a:t>
             </a:r>
             <a:endParaRPr lang="en-US" sz="850" dirty="0"/>
           </a:p>
@@ -30393,7 +31927,7 @@
         </p:nvSpPr>
         <p:spPr>
           <a:xfrm>
-            <a:off x="5803392" y="2258568"/>
+            <a:off x="4370832" y="2258568"/>
             <a:ext cx="1828800" cy="292608"/>
           </a:xfrm>
           <a:prstGeom prst="rect">
@@ -30427,7 +31961,7 @@
         </p:nvSpPr>
         <p:spPr>
           <a:xfrm>
-            <a:off x="5803392" y="2258568"/>
+            <a:off x="4370832" y="2258568"/>
             <a:ext cx="1828800" cy="292608"/>
           </a:xfrm>
           <a:prstGeom prst="rect">
@@ -30452,7 +31986,7 @@
                 <a:ea typeface="Trebuchet MS" pitchFamily="34" charset="-122"/>
                 <a:cs typeface="Trebuchet MS" pitchFamily="34" charset="-120"/>
               </a:rPr>
-              <a:t>appear</a:t>
+              <a:t>aster</a:t>
             </a:r>
             <a:endParaRPr lang="en-US" sz="1300" dirty="0"/>
           </a:p>
@@ -30466,7 +32000,7 @@
         </p:nvSpPr>
         <p:spPr>
           <a:xfrm>
-            <a:off x="5803392" y="2569464"/>
+            <a:off x="4370832" y="2569464"/>
             <a:ext cx="1828800" cy="201168"/>
           </a:xfrm>
           <a:prstGeom prst="rect">
@@ -30491,7 +32025,7 @@
                 <a:ea typeface="Calibri" pitchFamily="34" charset="-122"/>
                 <a:cs typeface="Calibri" pitchFamily="34" charset="-120"/>
               </a:rPr>
-              <a:t>to come into sight</a:t>
+              <a:t>star</a:t>
             </a:r>
             <a:endParaRPr lang="en-US" sz="850" dirty="0"/>
           </a:p>
@@ -30500,6 +32034,118 @@
       <p:sp>
         <p:nvSpPr>
           <p:cNvPr id="22" name="Shape 20"/>
+          <p:cNvSpPr/>
+          <p:nvPr/>
+        </p:nvSpPr>
+        <p:spPr>
+          <a:xfrm>
+            <a:off x="6519672" y="2258568"/>
+            <a:ext cx="1828800" cy="292608"/>
+          </a:xfrm>
+          <a:prstGeom prst="rect">
+            <a:avLst>
+              <a:gd name="adj" fmla="val 25000"/>
+            </a:avLst>
+          </a:prstGeom>
+          <a:solidFill>
+            <a:srgbClr val="FCE7F3"/>
+          </a:solidFill>
+          <a:ln w="19050">
+            <a:solidFill>
+              <a:srgbClr val="DB2777"/>
+            </a:solidFill>
+            <a:prstDash val="solid"/>
+          </a:ln>
+          <a:effectLst>
+            <a:outerShdw sx="100000" sy="100000" kx="0" ky="0" algn="bl" rotWithShape="0" blurRad="101600" dist="38100" dir="8100000">
+              <a:srgbClr val="000000">
+                <a:alpha val="12000"/>
+              </a:srgbClr>
+            </a:outerShdw>
+          </a:effectLst>
+        </p:spPr>
+      </p:sp>
+      <p:sp>
+        <p:nvSpPr>
+          <p:cNvPr id="23" name="Text 21"/>
+          <p:cNvSpPr/>
+          <p:nvPr/>
+        </p:nvSpPr>
+        <p:spPr>
+          <a:xfrm>
+            <a:off x="6519672" y="2258568"/>
+            <a:ext cx="1828800" cy="292608"/>
+          </a:xfrm>
+          <a:prstGeom prst="rect">
+            <a:avLst/>
+          </a:prstGeom>
+          <a:noFill/>
+          <a:ln/>
+        </p:spPr>
+        <p:txBody>
+          <a:bodyPr wrap="square" lIns="0" tIns="0" rIns="0" bIns="0" rtlCol="0" anchor="ctr"/>
+          <a:lstStyle/>
+          <a:p>
+            <a:pPr algn="ctr" indent="0" marL="0">
+              <a:buNone/>
+            </a:pPr>
+            <a:r>
+              <a:rPr lang="en-US" sz="1300" b="1" dirty="0">
+                <a:solidFill>
+                  <a:srgbClr val="9D174D"/>
+                </a:solidFill>
+                <a:latin typeface="Trebuchet MS" pitchFamily="34" charset="0"/>
+                <a:ea typeface="Trebuchet MS" pitchFamily="34" charset="-122"/>
+                <a:cs typeface="Trebuchet MS" pitchFamily="34" charset="-120"/>
+              </a:rPr>
+              <a:t>s</a:t>
+            </a:r>
+            <a:endParaRPr lang="en-US" sz="1300" dirty="0"/>
+          </a:p>
+        </p:txBody>
+      </p:sp>
+      <p:sp>
+        <p:nvSpPr>
+          <p:cNvPr id="24" name="Text 22"/>
+          <p:cNvSpPr/>
+          <p:nvPr/>
+        </p:nvSpPr>
+        <p:spPr>
+          <a:xfrm>
+            <a:off x="6519672" y="2569464"/>
+            <a:ext cx="1828800" cy="201168"/>
+          </a:xfrm>
+          <a:prstGeom prst="rect">
+            <a:avLst/>
+          </a:prstGeom>
+          <a:noFill/>
+          <a:ln/>
+        </p:spPr>
+        <p:txBody>
+          <a:bodyPr wrap="square" lIns="0" tIns="0" rIns="0" bIns="0" rtlCol="0" anchor="t"/>
+          <a:lstStyle/>
+          <a:p>
+            <a:pPr algn="ctr" indent="0" marL="0">
+              <a:buNone/>
+            </a:pPr>
+            <a:r>
+              <a:rPr lang="en-US" sz="850" dirty="0">
+                <a:solidFill>
+                  <a:srgbClr val="475569"/>
+                </a:solidFill>
+                <a:latin typeface="Calibri" pitchFamily="34" charset="0"/>
+                <a:ea typeface="Calibri" pitchFamily="34" charset="-122"/>
+                <a:cs typeface="Calibri" pitchFamily="34" charset="-120"/>
+              </a:rPr>
+              <a:t>plural or present tense</a:t>
+            </a:r>
+            <a:endParaRPr lang="en-US" sz="850" dirty="0"/>
+          </a:p>
+        </p:txBody>
+      </p:sp>
+      <p:sp>
+        <p:nvSpPr>
+          <p:cNvPr id="25" name="Shape 23"/>
           <p:cNvSpPr/>
           <p:nvPr/>
         </p:nvSpPr>
@@ -30526,7 +32172,7 @@
       </p:sp>
       <p:sp>
         <p:nvSpPr>
-          <p:cNvPr id="23" name="Text 21"/>
+          <p:cNvPr id="26" name="Text 24"/>
           <p:cNvSpPr/>
           <p:nvPr/>
         </p:nvSpPr>
@@ -30565,7 +32211,7 @@
       </p:sp>
       <p:sp>
         <p:nvSpPr>
-          <p:cNvPr id="24" name="Shape 22"/>
+          <p:cNvPr id="27" name="Shape 25"/>
           <p:cNvSpPr/>
           <p:nvPr/>
         </p:nvSpPr>
@@ -30592,7 +32238,7 @@
       </p:sp>
       <p:sp>
         <p:nvSpPr>
-          <p:cNvPr id="25" name="Text 23"/>
+          <p:cNvPr id="28" name="Text 26"/>
           <p:cNvSpPr/>
           <p:nvPr/>
         </p:nvSpPr>
@@ -30631,7 +32277,7 @@
       </p:sp>
       <p:sp>
         <p:nvSpPr>
-          <p:cNvPr id="26" name="Shape 24"/>
+          <p:cNvPr id="29" name="Shape 27"/>
           <p:cNvSpPr/>
           <p:nvPr/>
         </p:nvSpPr>
@@ -30658,7 +32304,7 @@
       </p:sp>
       <p:sp>
         <p:nvSpPr>
-          <p:cNvPr id="27" name="Text 25"/>
+          <p:cNvPr id="30" name="Text 28"/>
           <p:cNvSpPr/>
           <p:nvPr/>
         </p:nvSpPr>
@@ -30697,7 +32343,7 @@
       </p:sp>
       <p:sp>
         <p:nvSpPr>
-          <p:cNvPr id="28" name="Shape 26"/>
+          <p:cNvPr id="31" name="Shape 29"/>
           <p:cNvSpPr/>
           <p:nvPr/>
         </p:nvSpPr>
@@ -30724,7 +32370,7 @@
       </p:sp>
       <p:sp>
         <p:nvSpPr>
-          <p:cNvPr id="29" name="Text 27"/>
+          <p:cNvPr id="32" name="Text 30"/>
           <p:cNvSpPr/>
           <p:nvPr/>
         </p:nvSpPr>
@@ -31047,7 +32693,7 @@
                 <a:ea typeface="Calibri" pitchFamily="34" charset="-122"/>
                 <a:cs typeface="Calibri" pitchFamily="34" charset="-120"/>
               </a:rPr>
-              <a:t>Word Labs  •  wordlabs.app  •  Prefix: 'dis-' = not, opposite, away</a:t>
+              <a:t>Word Labs  •  wordlabs.app  •  Prefix: 'dis-' = not; opposite; apart</a:t>
             </a:r>
             <a:endParaRPr lang="en-US" sz="800" dirty="0"/>
           </a:p>
@@ -31186,7 +32832,7 @@
                 <a:ea typeface="Trebuchet MS" pitchFamily="34" charset="-122"/>
                 <a:cs typeface="Trebuchet MS" pitchFamily="34" charset="-120"/>
               </a:rPr>
-              <a:t>disappear</a:t>
+              <a:t>disasters</a:t>
             </a:r>
             <a:endParaRPr lang="en-US" sz="2800" dirty="0"/>
           </a:p>
@@ -31266,7 +32912,7 @@
         </p:nvSpPr>
         <p:spPr>
           <a:xfrm>
-            <a:off x="2938272" y="2258568"/>
+            <a:off x="2221992" y="2258568"/>
             <a:ext cx="1828800" cy="292608"/>
           </a:xfrm>
           <a:prstGeom prst="rect">
@@ -31300,7 +32946,7 @@
         </p:nvSpPr>
         <p:spPr>
           <a:xfrm>
-            <a:off x="2938272" y="2258568"/>
+            <a:off x="2221992" y="2258568"/>
             <a:ext cx="1828800" cy="292608"/>
           </a:xfrm>
           <a:prstGeom prst="rect">
@@ -31339,7 +32985,7 @@
         </p:nvSpPr>
         <p:spPr>
           <a:xfrm>
-            <a:off x="2938272" y="2569464"/>
+            <a:off x="2221992" y="2569464"/>
             <a:ext cx="1828800" cy="201168"/>
           </a:xfrm>
           <a:prstGeom prst="rect">
@@ -31364,7 +33010,7 @@
                 <a:ea typeface="Calibri" pitchFamily="34" charset="-122"/>
                 <a:cs typeface="Calibri" pitchFamily="34" charset="-120"/>
               </a:rPr>
-              <a:t>not, opposite</a:t>
+              <a:t>not; opposite; apart</a:t>
             </a:r>
             <a:endParaRPr lang="en-US" sz="850" dirty="0"/>
           </a:p>
@@ -31378,7 +33024,7 @@
         </p:nvSpPr>
         <p:spPr>
           <a:xfrm>
-            <a:off x="5803392" y="2258568"/>
+            <a:off x="4370832" y="2258568"/>
             <a:ext cx="1828800" cy="292608"/>
           </a:xfrm>
           <a:prstGeom prst="rect">
@@ -31412,7 +33058,7 @@
         </p:nvSpPr>
         <p:spPr>
           <a:xfrm>
-            <a:off x="5803392" y="2258568"/>
+            <a:off x="4370832" y="2258568"/>
             <a:ext cx="1828800" cy="292608"/>
           </a:xfrm>
           <a:prstGeom prst="rect">
@@ -31437,7 +33083,7 @@
                 <a:ea typeface="Trebuchet MS" pitchFamily="34" charset="-122"/>
                 <a:cs typeface="Trebuchet MS" pitchFamily="34" charset="-120"/>
               </a:rPr>
-              <a:t>appear</a:t>
+              <a:t>aster</a:t>
             </a:r>
             <a:endParaRPr lang="en-US" sz="1300" dirty="0"/>
           </a:p>
@@ -31451,7 +33097,7 @@
         </p:nvSpPr>
         <p:spPr>
           <a:xfrm>
-            <a:off x="5803392" y="2569464"/>
+            <a:off x="4370832" y="2569464"/>
             <a:ext cx="1828800" cy="201168"/>
           </a:xfrm>
           <a:prstGeom prst="rect">
@@ -31476,7 +33122,7 @@
                 <a:ea typeface="Calibri" pitchFamily="34" charset="-122"/>
                 <a:cs typeface="Calibri" pitchFamily="34" charset="-120"/>
               </a:rPr>
-              <a:t>to come into sight</a:t>
+              <a:t>star</a:t>
             </a:r>
             <a:endParaRPr lang="en-US" sz="850" dirty="0"/>
           </a:p>
@@ -31485,6 +33131,118 @@
       <p:sp>
         <p:nvSpPr>
           <p:cNvPr id="22" name="Shape 20"/>
+          <p:cNvSpPr/>
+          <p:nvPr/>
+        </p:nvSpPr>
+        <p:spPr>
+          <a:xfrm>
+            <a:off x="6519672" y="2258568"/>
+            <a:ext cx="1828800" cy="292608"/>
+          </a:xfrm>
+          <a:prstGeom prst="rect">
+            <a:avLst>
+              <a:gd name="adj" fmla="val 25000"/>
+            </a:avLst>
+          </a:prstGeom>
+          <a:solidFill>
+            <a:srgbClr val="FCE7F3"/>
+          </a:solidFill>
+          <a:ln w="19050">
+            <a:solidFill>
+              <a:srgbClr val="DB2777"/>
+            </a:solidFill>
+            <a:prstDash val="solid"/>
+          </a:ln>
+          <a:effectLst>
+            <a:outerShdw sx="100000" sy="100000" kx="0" ky="0" algn="bl" rotWithShape="0" blurRad="101600" dist="38100" dir="8100000">
+              <a:srgbClr val="000000">
+                <a:alpha val="12000"/>
+              </a:srgbClr>
+            </a:outerShdw>
+          </a:effectLst>
+        </p:spPr>
+      </p:sp>
+      <p:sp>
+        <p:nvSpPr>
+          <p:cNvPr id="23" name="Text 21"/>
+          <p:cNvSpPr/>
+          <p:nvPr/>
+        </p:nvSpPr>
+        <p:spPr>
+          <a:xfrm>
+            <a:off x="6519672" y="2258568"/>
+            <a:ext cx="1828800" cy="292608"/>
+          </a:xfrm>
+          <a:prstGeom prst="rect">
+            <a:avLst/>
+          </a:prstGeom>
+          <a:noFill/>
+          <a:ln/>
+        </p:spPr>
+        <p:txBody>
+          <a:bodyPr wrap="square" lIns="0" tIns="0" rIns="0" bIns="0" rtlCol="0" anchor="ctr"/>
+          <a:lstStyle/>
+          <a:p>
+            <a:pPr algn="ctr" indent="0" marL="0">
+              <a:buNone/>
+            </a:pPr>
+            <a:r>
+              <a:rPr lang="en-US" sz="1300" b="1" dirty="0">
+                <a:solidFill>
+                  <a:srgbClr val="9D174D"/>
+                </a:solidFill>
+                <a:latin typeface="Trebuchet MS" pitchFamily="34" charset="0"/>
+                <a:ea typeface="Trebuchet MS" pitchFamily="34" charset="-122"/>
+                <a:cs typeface="Trebuchet MS" pitchFamily="34" charset="-120"/>
+              </a:rPr>
+              <a:t>s</a:t>
+            </a:r>
+            <a:endParaRPr lang="en-US" sz="1300" dirty="0"/>
+          </a:p>
+        </p:txBody>
+      </p:sp>
+      <p:sp>
+        <p:nvSpPr>
+          <p:cNvPr id="24" name="Text 22"/>
+          <p:cNvSpPr/>
+          <p:nvPr/>
+        </p:nvSpPr>
+        <p:spPr>
+          <a:xfrm>
+            <a:off x="6519672" y="2569464"/>
+            <a:ext cx="1828800" cy="201168"/>
+          </a:xfrm>
+          <a:prstGeom prst="rect">
+            <a:avLst/>
+          </a:prstGeom>
+          <a:noFill/>
+          <a:ln/>
+        </p:spPr>
+        <p:txBody>
+          <a:bodyPr wrap="square" lIns="0" tIns="0" rIns="0" bIns="0" rtlCol="0" anchor="t"/>
+          <a:lstStyle/>
+          <a:p>
+            <a:pPr algn="ctr" indent="0" marL="0">
+              <a:buNone/>
+            </a:pPr>
+            <a:r>
+              <a:rPr lang="en-US" sz="850" dirty="0">
+                <a:solidFill>
+                  <a:srgbClr val="475569"/>
+                </a:solidFill>
+                <a:latin typeface="Calibri" pitchFamily="34" charset="0"/>
+                <a:ea typeface="Calibri" pitchFamily="34" charset="-122"/>
+                <a:cs typeface="Calibri" pitchFamily="34" charset="-120"/>
+              </a:rPr>
+              <a:t>plural or present tense</a:t>
+            </a:r>
+            <a:endParaRPr lang="en-US" sz="850" dirty="0"/>
+          </a:p>
+        </p:txBody>
+      </p:sp>
+      <p:sp>
+        <p:nvSpPr>
+          <p:cNvPr id="25" name="Shape 23"/>
           <p:cNvSpPr/>
           <p:nvPr/>
         </p:nvSpPr>
@@ -31511,7 +33269,7 @@
       </p:sp>
       <p:sp>
         <p:nvSpPr>
-          <p:cNvPr id="23" name="Text 21"/>
+          <p:cNvPr id="26" name="Text 24"/>
           <p:cNvSpPr/>
           <p:nvPr/>
         </p:nvSpPr>
@@ -31550,7 +33308,7 @@
       </p:sp>
       <p:sp>
         <p:nvSpPr>
-          <p:cNvPr id="24" name="Shape 22"/>
+          <p:cNvPr id="27" name="Shape 25"/>
           <p:cNvSpPr/>
           <p:nvPr/>
         </p:nvSpPr>
@@ -31577,7 +33335,7 @@
       </p:sp>
       <p:sp>
         <p:nvSpPr>
-          <p:cNvPr id="25" name="Shape 23"/>
+          <p:cNvPr id="28" name="Shape 26"/>
           <p:cNvSpPr/>
           <p:nvPr/>
         </p:nvSpPr>
@@ -31604,7 +33362,7 @@
       </p:sp>
       <p:sp>
         <p:nvSpPr>
-          <p:cNvPr id="26" name="Text 24"/>
+          <p:cNvPr id="29" name="Text 27"/>
           <p:cNvSpPr/>
           <p:nvPr/>
         </p:nvSpPr>
@@ -31643,7 +33401,7 @@
       </p:sp>
       <p:sp>
         <p:nvSpPr>
-          <p:cNvPr id="27" name="Text 25"/>
+          <p:cNvPr id="30" name="Text 28"/>
           <p:cNvSpPr/>
           <p:nvPr/>
         </p:nvSpPr>
@@ -31682,7 +33440,7 @@
       </p:sp>
       <p:sp>
         <p:nvSpPr>
-          <p:cNvPr id="28" name="Shape 26"/>
+          <p:cNvPr id="31" name="Shape 29"/>
           <p:cNvSpPr/>
           <p:nvPr/>
         </p:nvSpPr>
@@ -31709,7 +33467,7 @@
       </p:sp>
       <p:sp>
         <p:nvSpPr>
-          <p:cNvPr id="29" name="Text 27"/>
+          <p:cNvPr id="32" name="Text 30"/>
           <p:cNvSpPr/>
           <p:nvPr/>
         </p:nvSpPr>
@@ -31740,7 +33498,7 @@
                 <a:ea typeface="Trebuchet MS" pitchFamily="34" charset="-122"/>
                 <a:cs typeface="Trebuchet MS" pitchFamily="34" charset="-120"/>
               </a:rPr>
-              <a:t>ap</a:t>
+              <a:t>as</a:t>
             </a:r>
             <a:endParaRPr lang="en-US" sz="1400" dirty="0"/>
           </a:p>
@@ -31748,7 +33506,7 @@
       </p:sp>
       <p:sp>
         <p:nvSpPr>
-          <p:cNvPr id="30" name="Text 28"/>
+          <p:cNvPr id="33" name="Text 31"/>
           <p:cNvSpPr/>
           <p:nvPr/>
         </p:nvSpPr>
@@ -31787,7 +33545,7 @@
       </p:sp>
       <p:sp>
         <p:nvSpPr>
-          <p:cNvPr id="31" name="Shape 29"/>
+          <p:cNvPr id="34" name="Shape 32"/>
           <p:cNvSpPr/>
           <p:nvPr/>
         </p:nvSpPr>
@@ -31814,7 +33572,7 @@
       </p:sp>
       <p:sp>
         <p:nvSpPr>
-          <p:cNvPr id="32" name="Text 30"/>
+          <p:cNvPr id="35" name="Text 33"/>
           <p:cNvSpPr/>
           <p:nvPr/>
         </p:nvSpPr>
@@ -31845,7 +33603,7 @@
                 <a:ea typeface="Trebuchet MS" pitchFamily="34" charset="-122"/>
                 <a:cs typeface="Trebuchet MS" pitchFamily="34" charset="-120"/>
               </a:rPr>
-              <a:t>pear</a:t>
+              <a:t>ters</a:t>
             </a:r>
             <a:endParaRPr lang="en-US" sz="1400" dirty="0"/>
           </a:p>
@@ -31853,7 +33611,7 @@
       </p:sp>
       <p:sp>
         <p:nvSpPr>
-          <p:cNvPr id="33" name="Shape 31"/>
+          <p:cNvPr id="36" name="Shape 34"/>
           <p:cNvSpPr/>
           <p:nvPr/>
         </p:nvSpPr>
@@ -31880,7 +33638,7 @@
       </p:sp>
       <p:sp>
         <p:nvSpPr>
-          <p:cNvPr id="34" name="Text 32"/>
+          <p:cNvPr id="37" name="Text 35"/>
           <p:cNvSpPr/>
           <p:nvPr/>
         </p:nvSpPr>
@@ -31919,7 +33677,7 @@
       </p:sp>
       <p:sp>
         <p:nvSpPr>
-          <p:cNvPr id="35" name="Shape 33"/>
+          <p:cNvPr id="38" name="Shape 36"/>
           <p:cNvSpPr/>
           <p:nvPr/>
         </p:nvSpPr>
@@ -31946,7 +33704,7 @@
       </p:sp>
       <p:sp>
         <p:nvSpPr>
-          <p:cNvPr id="36" name="Text 34"/>
+          <p:cNvPr id="39" name="Text 37"/>
           <p:cNvSpPr/>
           <p:nvPr/>
         </p:nvSpPr>
@@ -32269,7 +34027,7 @@
                 <a:ea typeface="Calibri" pitchFamily="34" charset="-122"/>
                 <a:cs typeface="Calibri" pitchFamily="34" charset="-120"/>
               </a:rPr>
-              <a:t>Word Labs  •  wordlabs.app  •  Prefix: 'dis-' = not, opposite, away</a:t>
+              <a:t>Word Labs  •  wordlabs.app  •  Prefix: 'dis-' = not; opposite; apart</a:t>
             </a:r>
             <a:endParaRPr lang="en-US" sz="800" dirty="0"/>
           </a:p>
@@ -32408,7 +34166,7 @@
                 <a:ea typeface="Trebuchet MS" pitchFamily="34" charset="-122"/>
                 <a:cs typeface="Trebuchet MS" pitchFamily="34" charset="-120"/>
               </a:rPr>
-              <a:t>disappear</a:t>
+              <a:t>disasters</a:t>
             </a:r>
             <a:endParaRPr lang="en-US" sz="2800" dirty="0"/>
           </a:p>
@@ -32488,7 +34246,7 @@
         </p:nvSpPr>
         <p:spPr>
           <a:xfrm>
-            <a:off x="2938272" y="2258568"/>
+            <a:off x="2221992" y="2258568"/>
             <a:ext cx="1828800" cy="292608"/>
           </a:xfrm>
           <a:prstGeom prst="rect">
@@ -32522,7 +34280,7 @@
         </p:nvSpPr>
         <p:spPr>
           <a:xfrm>
-            <a:off x="2938272" y="2258568"/>
+            <a:off x="2221992" y="2258568"/>
             <a:ext cx="1828800" cy="292608"/>
           </a:xfrm>
           <a:prstGeom prst="rect">
@@ -32561,7 +34319,7 @@
         </p:nvSpPr>
         <p:spPr>
           <a:xfrm>
-            <a:off x="2938272" y="2569464"/>
+            <a:off x="2221992" y="2569464"/>
             <a:ext cx="1828800" cy="201168"/>
           </a:xfrm>
           <a:prstGeom prst="rect">
@@ -32586,7 +34344,7 @@
                 <a:ea typeface="Calibri" pitchFamily="34" charset="-122"/>
                 <a:cs typeface="Calibri" pitchFamily="34" charset="-120"/>
               </a:rPr>
-              <a:t>not, opposite</a:t>
+              <a:t>not; opposite; apart</a:t>
             </a:r>
             <a:endParaRPr lang="en-US" sz="850" dirty="0"/>
           </a:p>
@@ -32600,7 +34358,7 @@
         </p:nvSpPr>
         <p:spPr>
           <a:xfrm>
-            <a:off x="5803392" y="2258568"/>
+            <a:off x="4370832" y="2258568"/>
             <a:ext cx="1828800" cy="292608"/>
           </a:xfrm>
           <a:prstGeom prst="rect">
@@ -32634,7 +34392,7 @@
         </p:nvSpPr>
         <p:spPr>
           <a:xfrm>
-            <a:off x="5803392" y="2258568"/>
+            <a:off x="4370832" y="2258568"/>
             <a:ext cx="1828800" cy="292608"/>
           </a:xfrm>
           <a:prstGeom prst="rect">
@@ -32659,7 +34417,7 @@
                 <a:ea typeface="Trebuchet MS" pitchFamily="34" charset="-122"/>
                 <a:cs typeface="Trebuchet MS" pitchFamily="34" charset="-120"/>
               </a:rPr>
-              <a:t>appear</a:t>
+              <a:t>aster</a:t>
             </a:r>
             <a:endParaRPr lang="en-US" sz="1300" dirty="0"/>
           </a:p>
@@ -32673,7 +34431,7 @@
         </p:nvSpPr>
         <p:spPr>
           <a:xfrm>
-            <a:off x="5803392" y="2569464"/>
+            <a:off x="4370832" y="2569464"/>
             <a:ext cx="1828800" cy="201168"/>
           </a:xfrm>
           <a:prstGeom prst="rect">
@@ -32698,7 +34456,7 @@
                 <a:ea typeface="Calibri" pitchFamily="34" charset="-122"/>
                 <a:cs typeface="Calibri" pitchFamily="34" charset="-120"/>
               </a:rPr>
-              <a:t>to come into sight</a:t>
+              <a:t>star</a:t>
             </a:r>
             <a:endParaRPr lang="en-US" sz="850" dirty="0"/>
           </a:p>
@@ -32707,6 +34465,118 @@
       <p:sp>
         <p:nvSpPr>
           <p:cNvPr id="22" name="Shape 20"/>
+          <p:cNvSpPr/>
+          <p:nvPr/>
+        </p:nvSpPr>
+        <p:spPr>
+          <a:xfrm>
+            <a:off x="6519672" y="2258568"/>
+            <a:ext cx="1828800" cy="292608"/>
+          </a:xfrm>
+          <a:prstGeom prst="rect">
+            <a:avLst>
+              <a:gd name="adj" fmla="val 25000"/>
+            </a:avLst>
+          </a:prstGeom>
+          <a:solidFill>
+            <a:srgbClr val="FCE7F3"/>
+          </a:solidFill>
+          <a:ln w="19050">
+            <a:solidFill>
+              <a:srgbClr val="DB2777"/>
+            </a:solidFill>
+            <a:prstDash val="solid"/>
+          </a:ln>
+          <a:effectLst>
+            <a:outerShdw sx="100000" sy="100000" kx="0" ky="0" algn="bl" rotWithShape="0" blurRad="101600" dist="38100" dir="8100000">
+              <a:srgbClr val="000000">
+                <a:alpha val="12000"/>
+              </a:srgbClr>
+            </a:outerShdw>
+          </a:effectLst>
+        </p:spPr>
+      </p:sp>
+      <p:sp>
+        <p:nvSpPr>
+          <p:cNvPr id="23" name="Text 21"/>
+          <p:cNvSpPr/>
+          <p:nvPr/>
+        </p:nvSpPr>
+        <p:spPr>
+          <a:xfrm>
+            <a:off x="6519672" y="2258568"/>
+            <a:ext cx="1828800" cy="292608"/>
+          </a:xfrm>
+          <a:prstGeom prst="rect">
+            <a:avLst/>
+          </a:prstGeom>
+          <a:noFill/>
+          <a:ln/>
+        </p:spPr>
+        <p:txBody>
+          <a:bodyPr wrap="square" lIns="0" tIns="0" rIns="0" bIns="0" rtlCol="0" anchor="ctr"/>
+          <a:lstStyle/>
+          <a:p>
+            <a:pPr algn="ctr" indent="0" marL="0">
+              <a:buNone/>
+            </a:pPr>
+            <a:r>
+              <a:rPr lang="en-US" sz="1300" b="1" dirty="0">
+                <a:solidFill>
+                  <a:srgbClr val="9D174D"/>
+                </a:solidFill>
+                <a:latin typeface="Trebuchet MS" pitchFamily="34" charset="0"/>
+                <a:ea typeface="Trebuchet MS" pitchFamily="34" charset="-122"/>
+                <a:cs typeface="Trebuchet MS" pitchFamily="34" charset="-120"/>
+              </a:rPr>
+              <a:t>s</a:t>
+            </a:r>
+            <a:endParaRPr lang="en-US" sz="1300" dirty="0"/>
+          </a:p>
+        </p:txBody>
+      </p:sp>
+      <p:sp>
+        <p:nvSpPr>
+          <p:cNvPr id="24" name="Text 22"/>
+          <p:cNvSpPr/>
+          <p:nvPr/>
+        </p:nvSpPr>
+        <p:spPr>
+          <a:xfrm>
+            <a:off x="6519672" y="2569464"/>
+            <a:ext cx="1828800" cy="201168"/>
+          </a:xfrm>
+          <a:prstGeom prst="rect">
+            <a:avLst/>
+          </a:prstGeom>
+          <a:noFill/>
+          <a:ln/>
+        </p:spPr>
+        <p:txBody>
+          <a:bodyPr wrap="square" lIns="0" tIns="0" rIns="0" bIns="0" rtlCol="0" anchor="t"/>
+          <a:lstStyle/>
+          <a:p>
+            <a:pPr algn="ctr" indent="0" marL="0">
+              <a:buNone/>
+            </a:pPr>
+            <a:r>
+              <a:rPr lang="en-US" sz="850" dirty="0">
+                <a:solidFill>
+                  <a:srgbClr val="475569"/>
+                </a:solidFill>
+                <a:latin typeface="Calibri" pitchFamily="34" charset="0"/>
+                <a:ea typeface="Calibri" pitchFamily="34" charset="-122"/>
+                <a:cs typeface="Calibri" pitchFamily="34" charset="-120"/>
+              </a:rPr>
+              <a:t>plural or present tense</a:t>
+            </a:r>
+            <a:endParaRPr lang="en-US" sz="850" dirty="0"/>
+          </a:p>
+        </p:txBody>
+      </p:sp>
+      <p:sp>
+        <p:nvSpPr>
+          <p:cNvPr id="25" name="Shape 23"/>
           <p:cNvSpPr/>
           <p:nvPr/>
         </p:nvSpPr>
@@ -32733,7 +34603,7 @@
       </p:sp>
       <p:sp>
         <p:nvSpPr>
-          <p:cNvPr id="23" name="Text 21"/>
+          <p:cNvPr id="26" name="Text 24"/>
           <p:cNvSpPr/>
           <p:nvPr/>
         </p:nvSpPr>
@@ -32772,7 +34642,7 @@
       </p:sp>
       <p:sp>
         <p:nvSpPr>
-          <p:cNvPr id="24" name="Shape 22"/>
+          <p:cNvPr id="27" name="Shape 25"/>
           <p:cNvSpPr/>
           <p:nvPr/>
         </p:nvSpPr>
@@ -32799,7 +34669,7 @@
       </p:sp>
       <p:sp>
         <p:nvSpPr>
-          <p:cNvPr id="25" name="Shape 23"/>
+          <p:cNvPr id="28" name="Shape 26"/>
           <p:cNvSpPr/>
           <p:nvPr/>
         </p:nvSpPr>
@@ -32826,7 +34696,7 @@
       </p:sp>
       <p:sp>
         <p:nvSpPr>
-          <p:cNvPr id="26" name="Text 24"/>
+          <p:cNvPr id="29" name="Text 27"/>
           <p:cNvSpPr/>
           <p:nvPr/>
         </p:nvSpPr>
@@ -32865,7 +34735,7 @@
       </p:sp>
       <p:sp>
         <p:nvSpPr>
-          <p:cNvPr id="27" name="Text 25"/>
+          <p:cNvPr id="30" name="Text 28"/>
           <p:cNvSpPr/>
           <p:nvPr/>
         </p:nvSpPr>
@@ -32904,7 +34774,7 @@
       </p:sp>
       <p:sp>
         <p:nvSpPr>
-          <p:cNvPr id="28" name="Shape 26"/>
+          <p:cNvPr id="31" name="Shape 29"/>
           <p:cNvSpPr/>
           <p:nvPr/>
         </p:nvSpPr>
@@ -32931,7 +34801,7 @@
       </p:sp>
       <p:sp>
         <p:nvSpPr>
-          <p:cNvPr id="29" name="Text 27"/>
+          <p:cNvPr id="32" name="Text 30"/>
           <p:cNvSpPr/>
           <p:nvPr/>
         </p:nvSpPr>
@@ -32962,7 +34832,7 @@
                 <a:ea typeface="Trebuchet MS" pitchFamily="34" charset="-122"/>
                 <a:cs typeface="Trebuchet MS" pitchFamily="34" charset="-120"/>
               </a:rPr>
-              <a:t>ap</a:t>
+              <a:t>as</a:t>
             </a:r>
             <a:endParaRPr lang="en-US" sz="1400" dirty="0"/>
           </a:p>
@@ -32970,7 +34840,7 @@
       </p:sp>
       <p:sp>
         <p:nvSpPr>
-          <p:cNvPr id="30" name="Text 28"/>
+          <p:cNvPr id="33" name="Text 31"/>
           <p:cNvSpPr/>
           <p:nvPr/>
         </p:nvSpPr>
@@ -33009,7 +34879,7 @@
       </p:sp>
       <p:sp>
         <p:nvSpPr>
-          <p:cNvPr id="31" name="Shape 29"/>
+          <p:cNvPr id="34" name="Shape 32"/>
           <p:cNvSpPr/>
           <p:nvPr/>
         </p:nvSpPr>
@@ -33036,7 +34906,7 @@
       </p:sp>
       <p:sp>
         <p:nvSpPr>
-          <p:cNvPr id="32" name="Text 30"/>
+          <p:cNvPr id="35" name="Text 33"/>
           <p:cNvSpPr/>
           <p:nvPr/>
         </p:nvSpPr>
@@ -33067,7 +34937,7 @@
                 <a:ea typeface="Trebuchet MS" pitchFamily="34" charset="-122"/>
                 <a:cs typeface="Trebuchet MS" pitchFamily="34" charset="-120"/>
               </a:rPr>
-              <a:t>pear</a:t>
+              <a:t>ters</a:t>
             </a:r>
             <a:endParaRPr lang="en-US" sz="1400" dirty="0"/>
           </a:p>
@@ -33075,7 +34945,7 @@
       </p:sp>
       <p:sp>
         <p:nvSpPr>
-          <p:cNvPr id="33" name="Shape 31"/>
+          <p:cNvPr id="36" name="Shape 34"/>
           <p:cNvSpPr/>
           <p:nvPr/>
         </p:nvSpPr>
@@ -33102,7 +34972,7 @@
       </p:sp>
       <p:sp>
         <p:nvSpPr>
-          <p:cNvPr id="34" name="Text 32"/>
+          <p:cNvPr id="37" name="Text 35"/>
           <p:cNvSpPr/>
           <p:nvPr/>
         </p:nvSpPr>
@@ -33141,18 +35011,18 @@
       </p:sp>
       <p:sp>
         <p:nvSpPr>
-          <p:cNvPr id="35" name="Shape 33"/>
+          <p:cNvPr id="38" name="Shape 36"/>
           <p:cNvSpPr/>
           <p:nvPr/>
         </p:nvSpPr>
         <p:spPr>
           <a:xfrm>
             <a:off x="1874520" y="4096512"/>
-            <a:ext cx="6903720" cy="804672"/>
+            <a:ext cx="6903720" cy="658368"/>
           </a:xfrm>
           <a:prstGeom prst="rect">
             <a:avLst>
-              <a:gd name="adj" fmla="val 6818"/>
+              <a:gd name="adj" fmla="val 8333"/>
             </a:avLst>
           </a:prstGeom>
           <a:solidFill>
@@ -33168,18 +35038,18 @@
       </p:sp>
       <p:sp>
         <p:nvSpPr>
-          <p:cNvPr id="36" name="Shape 34"/>
-          <p:cNvSpPr/>
-          <p:nvPr/>
-        </p:nvSpPr>
-        <p:spPr>
-          <a:xfrm>
-            <a:off x="2254649" y="4169664"/>
-            <a:ext cx="685800" cy="384048"/>
+          <p:cNvPr id="39" name="Shape 37"/>
+          <p:cNvSpPr/>
+          <p:nvPr/>
+        </p:nvSpPr>
+        <p:spPr>
+          <a:xfrm>
+            <a:off x="2023872" y="4169664"/>
+            <a:ext cx="685800" cy="475488"/>
           </a:xfrm>
           <a:prstGeom prst="rect">
             <a:avLst>
-              <a:gd name="adj" fmla="val 9524"/>
+              <a:gd name="adj" fmla="val 7692"/>
             </a:avLst>
           </a:prstGeom>
           <a:solidFill>
@@ -33195,14 +35065,14 @@
       </p:sp>
       <p:sp>
         <p:nvSpPr>
-          <p:cNvPr id="37" name="Text 35"/>
-          <p:cNvSpPr/>
-          <p:nvPr/>
-        </p:nvSpPr>
-        <p:spPr>
-          <a:xfrm>
-            <a:off x="2254649" y="4169664"/>
-            <a:ext cx="685800" cy="384048"/>
+          <p:cNvPr id="40" name="Text 38"/>
+          <p:cNvSpPr/>
+          <p:nvPr/>
+        </p:nvSpPr>
+        <p:spPr>
+          <a:xfrm>
+            <a:off x="2023872" y="4169664"/>
+            <a:ext cx="685800" cy="475488"/>
           </a:xfrm>
           <a:prstGeom prst="rect">
             <a:avLst/>
@@ -33234,18 +35104,18 @@
       </p:sp>
       <p:sp>
         <p:nvSpPr>
-          <p:cNvPr id="38" name="Shape 36"/>
-          <p:cNvSpPr/>
-          <p:nvPr/>
-        </p:nvSpPr>
-        <p:spPr>
-          <a:xfrm>
-            <a:off x="3293146" y="4169664"/>
-            <a:ext cx="685800" cy="384048"/>
+          <p:cNvPr id="41" name="Shape 39"/>
+          <p:cNvSpPr/>
+          <p:nvPr/>
+        </p:nvSpPr>
+        <p:spPr>
+          <a:xfrm>
+            <a:off x="2831592" y="4169664"/>
+            <a:ext cx="685800" cy="475488"/>
           </a:xfrm>
           <a:prstGeom prst="rect">
             <a:avLst>
-              <a:gd name="adj" fmla="val 9524"/>
+              <a:gd name="adj" fmla="val 7692"/>
             </a:avLst>
           </a:prstGeom>
           <a:solidFill>
@@ -33261,14 +35131,14 @@
       </p:sp>
       <p:sp>
         <p:nvSpPr>
-          <p:cNvPr id="39" name="Text 37"/>
-          <p:cNvSpPr/>
-          <p:nvPr/>
-        </p:nvSpPr>
-        <p:spPr>
-          <a:xfrm>
-            <a:off x="3293146" y="4169664"/>
-            <a:ext cx="685800" cy="384048"/>
+          <p:cNvPr id="42" name="Text 40"/>
+          <p:cNvSpPr/>
+          <p:nvPr/>
+        </p:nvSpPr>
+        <p:spPr>
+          <a:xfrm>
+            <a:off x="2831592" y="4169664"/>
+            <a:ext cx="685800" cy="475488"/>
           </a:xfrm>
           <a:prstGeom prst="rect">
             <a:avLst/>
@@ -33300,18 +35170,18 @@
       </p:sp>
       <p:sp>
         <p:nvSpPr>
-          <p:cNvPr id="40" name="Shape 38"/>
-          <p:cNvSpPr/>
-          <p:nvPr/>
-        </p:nvSpPr>
-        <p:spPr>
-          <a:xfrm>
-            <a:off x="4331643" y="4169664"/>
-            <a:ext cx="685800" cy="384048"/>
+          <p:cNvPr id="43" name="Shape 41"/>
+          <p:cNvSpPr/>
+          <p:nvPr/>
+        </p:nvSpPr>
+        <p:spPr>
+          <a:xfrm>
+            <a:off x="3639312" y="4169664"/>
+            <a:ext cx="685800" cy="475488"/>
           </a:xfrm>
           <a:prstGeom prst="rect">
             <a:avLst>
-              <a:gd name="adj" fmla="val 9524"/>
+              <a:gd name="adj" fmla="val 7692"/>
             </a:avLst>
           </a:prstGeom>
           <a:solidFill>
@@ -33327,14 +35197,14 @@
       </p:sp>
       <p:sp>
         <p:nvSpPr>
-          <p:cNvPr id="41" name="Text 39"/>
-          <p:cNvSpPr/>
-          <p:nvPr/>
-        </p:nvSpPr>
-        <p:spPr>
-          <a:xfrm>
-            <a:off x="4331643" y="4169664"/>
-            <a:ext cx="685800" cy="384048"/>
+          <p:cNvPr id="44" name="Text 42"/>
+          <p:cNvSpPr/>
+          <p:nvPr/>
+        </p:nvSpPr>
+        <p:spPr>
+          <a:xfrm>
+            <a:off x="3639312" y="4169664"/>
+            <a:ext cx="685800" cy="475488"/>
           </a:xfrm>
           <a:prstGeom prst="rect">
             <a:avLst/>
@@ -33366,18 +35236,18 @@
       </p:sp>
       <p:sp>
         <p:nvSpPr>
-          <p:cNvPr id="42" name="Shape 40"/>
-          <p:cNvSpPr/>
-          <p:nvPr/>
-        </p:nvSpPr>
-        <p:spPr>
-          <a:xfrm>
-            <a:off x="5370141" y="4169664"/>
-            <a:ext cx="685800" cy="384048"/>
+          <p:cNvPr id="45" name="Shape 43"/>
+          <p:cNvSpPr/>
+          <p:nvPr/>
+        </p:nvSpPr>
+        <p:spPr>
+          <a:xfrm>
+            <a:off x="4447032" y="4169664"/>
+            <a:ext cx="685800" cy="475488"/>
           </a:xfrm>
           <a:prstGeom prst="rect">
             <a:avLst>
-              <a:gd name="adj" fmla="val 9524"/>
+              <a:gd name="adj" fmla="val 7692"/>
             </a:avLst>
           </a:prstGeom>
           <a:solidFill>
@@ -33393,14 +35263,14 @@
       </p:sp>
       <p:sp>
         <p:nvSpPr>
-          <p:cNvPr id="43" name="Text 41"/>
-          <p:cNvSpPr/>
-          <p:nvPr/>
-        </p:nvSpPr>
-        <p:spPr>
-          <a:xfrm>
-            <a:off x="5370141" y="4169664"/>
-            <a:ext cx="685800" cy="384048"/>
+          <p:cNvPr id="46" name="Text 44"/>
+          <p:cNvSpPr/>
+          <p:nvPr/>
+        </p:nvSpPr>
+        <p:spPr>
+          <a:xfrm>
+            <a:off x="4447032" y="4169664"/>
+            <a:ext cx="685800" cy="475488"/>
           </a:xfrm>
           <a:prstGeom prst="rect">
             <a:avLst/>
@@ -33432,18 +35302,18 @@
       </p:sp>
       <p:sp>
         <p:nvSpPr>
-          <p:cNvPr id="44" name="Shape 42"/>
-          <p:cNvSpPr/>
-          <p:nvPr/>
-        </p:nvSpPr>
-        <p:spPr>
-          <a:xfrm>
-            <a:off x="6408638" y="4169664"/>
-            <a:ext cx="685800" cy="384048"/>
+          <p:cNvPr id="47" name="Shape 45"/>
+          <p:cNvSpPr/>
+          <p:nvPr/>
+        </p:nvSpPr>
+        <p:spPr>
+          <a:xfrm>
+            <a:off x="5254752" y="4169664"/>
+            <a:ext cx="685800" cy="475488"/>
           </a:xfrm>
           <a:prstGeom prst="rect">
             <a:avLst>
-              <a:gd name="adj" fmla="val 9524"/>
+              <a:gd name="adj" fmla="val 7692"/>
             </a:avLst>
           </a:prstGeom>
           <a:solidFill>
@@ -33459,14 +35329,14 @@
       </p:sp>
       <p:sp>
         <p:nvSpPr>
-          <p:cNvPr id="45" name="Text 43"/>
-          <p:cNvSpPr/>
-          <p:nvPr/>
-        </p:nvSpPr>
-        <p:spPr>
-          <a:xfrm>
-            <a:off x="6408638" y="4169664"/>
-            <a:ext cx="685800" cy="384048"/>
+          <p:cNvPr id="48" name="Text 46"/>
+          <p:cNvSpPr/>
+          <p:nvPr/>
+        </p:nvSpPr>
+        <p:spPr>
+          <a:xfrm>
+            <a:off x="5254752" y="4169664"/>
+            <a:ext cx="685800" cy="475488"/>
           </a:xfrm>
           <a:prstGeom prst="rect">
             <a:avLst/>
@@ -33490,7 +35360,7 @@
                 <a:ea typeface="Trebuchet MS" pitchFamily="34" charset="-122"/>
                 <a:cs typeface="Trebuchet MS" pitchFamily="34" charset="-120"/>
               </a:rPr>
-              <a:t>pp</a:t>
+              <a:t>s</a:t>
             </a:r>
             <a:endParaRPr lang="en-US" sz="900" dirty="0"/>
           </a:p>
@@ -33498,18 +35368,18 @@
       </p:sp>
       <p:sp>
         <p:nvSpPr>
-          <p:cNvPr id="46" name="Shape 44"/>
-          <p:cNvSpPr/>
-          <p:nvPr/>
-        </p:nvSpPr>
-        <p:spPr>
-          <a:xfrm>
-            <a:off x="7447135" y="4169664"/>
-            <a:ext cx="685800" cy="384048"/>
+          <p:cNvPr id="49" name="Shape 47"/>
+          <p:cNvSpPr/>
+          <p:nvPr/>
+        </p:nvSpPr>
+        <p:spPr>
+          <a:xfrm>
+            <a:off x="6062472" y="4169664"/>
+            <a:ext cx="685800" cy="475488"/>
           </a:xfrm>
           <a:prstGeom prst="rect">
             <a:avLst>
-              <a:gd name="adj" fmla="val 9524"/>
+              <a:gd name="adj" fmla="val 7692"/>
             </a:avLst>
           </a:prstGeom>
           <a:solidFill>
@@ -33525,14 +35395,14 @@
       </p:sp>
       <p:sp>
         <p:nvSpPr>
-          <p:cNvPr id="47" name="Text 45"/>
-          <p:cNvSpPr/>
-          <p:nvPr/>
-        </p:nvSpPr>
-        <p:spPr>
-          <a:xfrm>
-            <a:off x="7447135" y="4169664"/>
-            <a:ext cx="685800" cy="384048"/>
+          <p:cNvPr id="50" name="Text 48"/>
+          <p:cNvSpPr/>
+          <p:nvPr/>
+        </p:nvSpPr>
+        <p:spPr>
+          <a:xfrm>
+            <a:off x="6062472" y="4169664"/>
+            <a:ext cx="685800" cy="475488"/>
           </a:xfrm>
           <a:prstGeom prst="rect">
             <a:avLst/>
@@ -33556,7 +35426,7 @@
                 <a:ea typeface="Trebuchet MS" pitchFamily="34" charset="-122"/>
                 <a:cs typeface="Trebuchet MS" pitchFamily="34" charset="-120"/>
               </a:rPr>
-              <a:t>ear</a:t>
+              <a:t>t</a:t>
             </a:r>
             <a:endParaRPr lang="en-US" sz="900" dirty="0"/>
           </a:p>
@@ -33564,40 +35434,133 @@
       </p:sp>
       <p:sp>
         <p:nvSpPr>
-          <p:cNvPr id="48" name="Text 46"/>
-          <p:cNvSpPr/>
-          <p:nvPr/>
-        </p:nvSpPr>
-        <p:spPr>
-          <a:xfrm>
-            <a:off x="7447135" y="4572000"/>
-            <a:ext cx="685800" cy="219456"/>
-          </a:xfrm>
-          <a:prstGeom prst="rect">
-            <a:avLst/>
-          </a:prstGeom>
-          <a:noFill/>
-          <a:ln/>
-        </p:spPr>
-        <p:txBody>
-          <a:bodyPr wrap="square" lIns="0" tIns="0" rIns="0" bIns="0" rtlCol="0" anchor="t"/>
-          <a:lstStyle/>
-          <a:p>
-            <a:pPr algn="ctr" indent="0" marL="0">
-              <a:buNone/>
-            </a:pPr>
-            <a:r>
-              <a:rPr lang="en-US" sz="750" i="1" dirty="0">
-                <a:solidFill>
-                  <a:srgbClr val="94A3B8"/>
-                </a:solidFill>
-                <a:latin typeface="Calibri" pitchFamily="34" charset="0"/>
-                <a:ea typeface="Calibri" pitchFamily="34" charset="-122"/>
-                <a:cs typeface="Calibri" pitchFamily="34" charset="-120"/>
-              </a:rPr>
-              <a:t>/eer/</a:t>
-            </a:r>
-            <a:endParaRPr lang="en-US" sz="750" dirty="0"/>
+          <p:cNvPr id="51" name="Shape 49"/>
+          <p:cNvSpPr/>
+          <p:nvPr/>
+        </p:nvSpPr>
+        <p:spPr>
+          <a:xfrm>
+            <a:off x="6870192" y="4169664"/>
+            <a:ext cx="685800" cy="475488"/>
+          </a:xfrm>
+          <a:prstGeom prst="rect">
+            <a:avLst>
+              <a:gd name="adj" fmla="val 7692"/>
+            </a:avLst>
+          </a:prstGeom>
+          <a:solidFill>
+            <a:srgbClr val="FFFFFF"/>
+          </a:solidFill>
+          <a:ln w="12700">
+            <a:solidFill>
+              <a:srgbClr val="DB2777"/>
+            </a:solidFill>
+            <a:prstDash val="solid"/>
+          </a:ln>
+        </p:spPr>
+      </p:sp>
+      <p:sp>
+        <p:nvSpPr>
+          <p:cNvPr id="52" name="Text 50"/>
+          <p:cNvSpPr/>
+          <p:nvPr/>
+        </p:nvSpPr>
+        <p:spPr>
+          <a:xfrm>
+            <a:off x="6870192" y="4169664"/>
+            <a:ext cx="685800" cy="475488"/>
+          </a:xfrm>
+          <a:prstGeom prst="rect">
+            <a:avLst/>
+          </a:prstGeom>
+          <a:noFill/>
+          <a:ln/>
+        </p:spPr>
+        <p:txBody>
+          <a:bodyPr wrap="square" lIns="0" tIns="0" rIns="0" bIns="0" rtlCol="0" anchor="ctr"/>
+          <a:lstStyle/>
+          <a:p>
+            <a:pPr algn="ctr" indent="0" marL="0">
+              <a:buNone/>
+            </a:pPr>
+            <a:r>
+              <a:rPr lang="en-US" sz="900" b="1" dirty="0">
+                <a:solidFill>
+                  <a:srgbClr val="9D174D"/>
+                </a:solidFill>
+                <a:latin typeface="Trebuchet MS" pitchFamily="34" charset="0"/>
+                <a:ea typeface="Trebuchet MS" pitchFamily="34" charset="-122"/>
+                <a:cs typeface="Trebuchet MS" pitchFamily="34" charset="-120"/>
+              </a:rPr>
+              <a:t>er</a:t>
+            </a:r>
+            <a:endParaRPr lang="en-US" sz="900" dirty="0"/>
+          </a:p>
+        </p:txBody>
+      </p:sp>
+      <p:sp>
+        <p:nvSpPr>
+          <p:cNvPr id="53" name="Shape 51"/>
+          <p:cNvSpPr/>
+          <p:nvPr/>
+        </p:nvSpPr>
+        <p:spPr>
+          <a:xfrm>
+            <a:off x="7677912" y="4169664"/>
+            <a:ext cx="685800" cy="475488"/>
+          </a:xfrm>
+          <a:prstGeom prst="rect">
+            <a:avLst>
+              <a:gd name="adj" fmla="val 7692"/>
+            </a:avLst>
+          </a:prstGeom>
+          <a:solidFill>
+            <a:srgbClr val="FFFFFF"/>
+          </a:solidFill>
+          <a:ln w="12700">
+            <a:solidFill>
+              <a:srgbClr val="DB2777"/>
+            </a:solidFill>
+            <a:prstDash val="solid"/>
+          </a:ln>
+        </p:spPr>
+      </p:sp>
+      <p:sp>
+        <p:nvSpPr>
+          <p:cNvPr id="54" name="Text 52"/>
+          <p:cNvSpPr/>
+          <p:nvPr/>
+        </p:nvSpPr>
+        <p:spPr>
+          <a:xfrm>
+            <a:off x="7677912" y="4169664"/>
+            <a:ext cx="685800" cy="475488"/>
+          </a:xfrm>
+          <a:prstGeom prst="rect">
+            <a:avLst/>
+          </a:prstGeom>
+          <a:noFill/>
+          <a:ln/>
+        </p:spPr>
+        <p:txBody>
+          <a:bodyPr wrap="square" lIns="0" tIns="0" rIns="0" bIns="0" rtlCol="0" anchor="ctr"/>
+          <a:lstStyle/>
+          <a:p>
+            <a:pPr algn="ctr" indent="0" marL="0">
+              <a:buNone/>
+            </a:pPr>
+            <a:r>
+              <a:rPr lang="en-US" sz="900" b="1" dirty="0">
+                <a:solidFill>
+                  <a:srgbClr val="9D174D"/>
+                </a:solidFill>
+                <a:latin typeface="Trebuchet MS" pitchFamily="34" charset="0"/>
+                <a:ea typeface="Trebuchet MS" pitchFamily="34" charset="-122"/>
+                <a:cs typeface="Trebuchet MS" pitchFamily="34" charset="-120"/>
+              </a:rPr>
+              <a:t>s</a:t>
+            </a:r>
+            <a:endParaRPr lang="en-US" sz="900" dirty="0"/>
           </a:p>
         </p:txBody>
       </p:sp>
@@ -33887,7 +35850,7 @@
                 <a:ea typeface="Calibri" pitchFamily="34" charset="-122"/>
                 <a:cs typeface="Calibri" pitchFamily="34" charset="-120"/>
               </a:rPr>
-              <a:t>Word Labs  •  wordlabs.app  •  Prefix: 'dis-' = not, opposite, away</a:t>
+              <a:t>Word Labs  •  wordlabs.app  •  Prefix: 'dis-' = not; opposite; apart</a:t>
             </a:r>
             <a:endParaRPr lang="en-US" sz="800" dirty="0"/>
           </a:p>
@@ -35056,7 +37019,7 @@
                 <a:ea typeface="Calibri" pitchFamily="34" charset="-122"/>
                 <a:cs typeface="Calibri" pitchFamily="34" charset="-120"/>
               </a:rPr>
-              <a:t>Word Labs  •  wordlabs.app  •  Prefix: 'dis-' = not, opposite, away</a:t>
+              <a:t>Word Labs  •  wordlabs.app  •  Prefix: 'dis-' = not; opposite; apart</a:t>
             </a:r>
             <a:endParaRPr lang="en-US" sz="800" dirty="0"/>
           </a:p>
@@ -35485,7 +37448,7 @@
                 <a:ea typeface="Trebuchet MS" pitchFamily="34" charset="-122"/>
                 <a:cs typeface="Trebuchet MS" pitchFamily="34" charset="-120"/>
               </a:rPr>
-              <a:t>-ed</a:t>
+              <a:t>-ee</a:t>
             </a:r>
             <a:endParaRPr lang="en-US" sz="1300" dirty="0"/>
           </a:p>
@@ -35574,7 +37537,7 @@
                 <a:ea typeface="Trebuchet MS" pitchFamily="34" charset="-122"/>
                 <a:cs typeface="Trebuchet MS" pitchFamily="34" charset="-120"/>
               </a:rPr>
-              <a:t>connect</a:t>
+              <a:t>appear</a:t>
             </a:r>
             <a:endParaRPr lang="en-US" sz="1300" dirty="0"/>
           </a:p>
@@ -35638,7 +37601,7 @@
                 <a:ea typeface="Trebuchet MS" pitchFamily="34" charset="-122"/>
                 <a:cs typeface="Trebuchet MS" pitchFamily="34" charset="-120"/>
               </a:rPr>
-              <a:t>-ing</a:t>
+              <a:t>-ed</a:t>
             </a:r>
             <a:endParaRPr lang="en-US" sz="1300" dirty="0"/>
           </a:p>
@@ -35727,7 +37690,7 @@
                 <a:ea typeface="Trebuchet MS" pitchFamily="34" charset="-122"/>
                 <a:cs typeface="Trebuchet MS" pitchFamily="34" charset="-120"/>
               </a:rPr>
-              <a:t>appear</a:t>
+              <a:t>aster</a:t>
             </a:r>
             <a:endParaRPr lang="en-US" sz="1300" dirty="0"/>
           </a:p>
@@ -35880,7 +37843,7 @@
                 <a:ea typeface="Trebuchet MS" pitchFamily="34" charset="-122"/>
                 <a:cs typeface="Trebuchet MS" pitchFamily="34" charset="-120"/>
               </a:rPr>
-              <a:t>cover</a:t>
+              <a:t>believe</a:t>
             </a:r>
             <a:endParaRPr lang="en-US" sz="1300" dirty="0"/>
           </a:p>
@@ -35944,7 +37907,7 @@
                 <a:ea typeface="Trebuchet MS" pitchFamily="34" charset="-122"/>
                 <a:cs typeface="Trebuchet MS" pitchFamily="34" charset="-120"/>
               </a:rPr>
-              <a:t>-ly</a:t>
+              <a:t>-s</a:t>
             </a:r>
             <a:endParaRPr lang="en-US" sz="1300" dirty="0"/>
           </a:p>
@@ -36033,7 +37996,7 @@
                 <a:ea typeface="Trebuchet MS" pitchFamily="34" charset="-122"/>
                 <a:cs typeface="Trebuchet MS" pitchFamily="34" charset="-120"/>
               </a:rPr>
-              <a:t>honest</a:t>
+              <a:t>claim</a:t>
             </a:r>
             <a:endParaRPr lang="en-US" sz="1300" dirty="0"/>
           </a:p>
@@ -36097,7 +38060,7 @@
                 <a:ea typeface="Trebuchet MS" pitchFamily="34" charset="-122"/>
                 <a:cs typeface="Trebuchet MS" pitchFamily="34" charset="-120"/>
               </a:rPr>
-              <a:t>-ance</a:t>
+              <a:t>-er</a:t>
             </a:r>
             <a:endParaRPr lang="en-US" sz="1300" dirty="0"/>
           </a:p>
@@ -36105,37 +38068,190 @@
       </p:sp>
       <p:sp>
         <p:nvSpPr>
-          <p:cNvPr id="43" name="Text 41"/>
-          <p:cNvSpPr/>
-          <p:nvPr/>
-        </p:nvSpPr>
-        <p:spPr>
-          <a:xfrm>
-            <a:off x="365760" y="3611880"/>
-            <a:ext cx="1828800" cy="347472"/>
-          </a:xfrm>
-          <a:prstGeom prst="rect">
-            <a:avLst/>
-          </a:prstGeom>
-          <a:noFill/>
-          <a:ln/>
-        </p:spPr>
-        <p:txBody>
-          <a:bodyPr wrap="square" lIns="0" tIns="0" rIns="0" bIns="0" rtlCol="0" anchor="ctr"/>
-          <a:lstStyle/>
-          <a:p>
-            <a:pPr algn="l" indent="0" marL="0">
-              <a:buNone/>
-            </a:pPr>
-            <a:r>
-              <a:rPr lang="en-US" sz="1200" b="1" dirty="0">
-                <a:solidFill>
-                  <a:srgbClr val="0F172A"/>
+          <p:cNvPr id="43" name="Shape 41"/>
+          <p:cNvSpPr/>
+          <p:nvPr/>
+        </p:nvSpPr>
+        <p:spPr>
+          <a:xfrm>
+            <a:off x="365760" y="3666744"/>
+            <a:ext cx="2468880" cy="402336"/>
+          </a:xfrm>
+          <a:prstGeom prst="rect">
+            <a:avLst/>
+          </a:prstGeom>
+          <a:solidFill>
+            <a:srgbClr val="F1F5F9"/>
+          </a:solidFill>
+          <a:ln w="12700">
+            <a:solidFill>
+              <a:srgbClr val="E2E8F0"/>
+            </a:solidFill>
+            <a:prstDash val="solid"/>
+          </a:ln>
+        </p:spPr>
+      </p:sp>
+      <p:sp>
+        <p:nvSpPr>
+          <p:cNvPr id="44" name="Shape 42"/>
+          <p:cNvSpPr/>
+          <p:nvPr/>
+        </p:nvSpPr>
+        <p:spPr>
+          <a:xfrm>
+            <a:off x="2971800" y="3666744"/>
+            <a:ext cx="2834640" cy="402336"/>
+          </a:xfrm>
+          <a:prstGeom prst="rect">
+            <a:avLst/>
+          </a:prstGeom>
+          <a:solidFill>
+            <a:srgbClr val="CCFBF1"/>
+          </a:solidFill>
+          <a:ln w="12700">
+            <a:solidFill>
+              <a:srgbClr val="E2E8F0"/>
+            </a:solidFill>
+            <a:prstDash val="solid"/>
+          </a:ln>
+        </p:spPr>
+      </p:sp>
+      <p:sp>
+        <p:nvSpPr>
+          <p:cNvPr id="45" name="Text 43"/>
+          <p:cNvSpPr/>
+          <p:nvPr/>
+        </p:nvSpPr>
+        <p:spPr>
+          <a:xfrm>
+            <a:off x="2971800" y="3666744"/>
+            <a:ext cx="2834640" cy="402336"/>
+          </a:xfrm>
+          <a:prstGeom prst="rect">
+            <a:avLst/>
+          </a:prstGeom>
+          <a:noFill/>
+          <a:ln/>
+        </p:spPr>
+        <p:txBody>
+          <a:bodyPr wrap="square" lIns="0" tIns="0" rIns="0" bIns="0" rtlCol="0" anchor="ctr"/>
+          <a:lstStyle/>
+          <a:p>
+            <a:pPr algn="ctr" indent="0" marL="0">
+              <a:buNone/>
+            </a:pPr>
+            <a:r>
+              <a:rPr lang="en-US" sz="1300" b="1" dirty="0">
+                <a:solidFill>
+                  <a:srgbClr val="0F766E"/>
                 </a:solidFill>
                 <a:latin typeface="Trebuchet MS" pitchFamily="34" charset="0"/>
                 <a:ea typeface="Trebuchet MS" pitchFamily="34" charset="-122"/>
                 <a:cs typeface="Trebuchet MS" pitchFamily="34" charset="-120"/>
               </a:rPr>
+              <a:t>clos</a:t>
+            </a:r>
+            <a:endParaRPr lang="en-US" sz="1300" dirty="0"/>
+          </a:p>
+        </p:txBody>
+      </p:sp>
+      <p:sp>
+        <p:nvSpPr>
+          <p:cNvPr id="46" name="Shape 44"/>
+          <p:cNvSpPr/>
+          <p:nvPr/>
+        </p:nvSpPr>
+        <p:spPr>
+          <a:xfrm>
+            <a:off x="5943600" y="3666744"/>
+            <a:ext cx="2834640" cy="402336"/>
+          </a:xfrm>
+          <a:prstGeom prst="rect">
+            <a:avLst/>
+          </a:prstGeom>
+          <a:solidFill>
+            <a:srgbClr val="FCE7F3"/>
+          </a:solidFill>
+          <a:ln w="12700">
+            <a:solidFill>
+              <a:srgbClr val="E2E8F0"/>
+            </a:solidFill>
+            <a:prstDash val="solid"/>
+          </a:ln>
+        </p:spPr>
+      </p:sp>
+      <p:sp>
+        <p:nvSpPr>
+          <p:cNvPr id="47" name="Text 45"/>
+          <p:cNvSpPr/>
+          <p:nvPr/>
+        </p:nvSpPr>
+        <p:spPr>
+          <a:xfrm>
+            <a:off x="5943600" y="3666744"/>
+            <a:ext cx="2834640" cy="402336"/>
+          </a:xfrm>
+          <a:prstGeom prst="rect">
+            <a:avLst/>
+          </a:prstGeom>
+          <a:noFill/>
+          <a:ln/>
+        </p:spPr>
+        <p:txBody>
+          <a:bodyPr wrap="square" lIns="0" tIns="0" rIns="0" bIns="0" rtlCol="0" anchor="ctr"/>
+          <a:lstStyle/>
+          <a:p>
+            <a:pPr algn="ctr" indent="0" marL="0">
+              <a:buNone/>
+            </a:pPr>
+            <a:r>
+              <a:rPr lang="en-US" sz="1300" b="1" dirty="0">
+                <a:solidFill>
+                  <a:srgbClr val="9D174D"/>
+                </a:solidFill>
+                <a:latin typeface="Trebuchet MS" pitchFamily="34" charset="0"/>
+                <a:ea typeface="Trebuchet MS" pitchFamily="34" charset="-122"/>
+                <a:cs typeface="Trebuchet MS" pitchFamily="34" charset="-120"/>
+              </a:rPr>
+              <a:t>-ure</a:t>
+            </a:r>
+            <a:endParaRPr lang="en-US" sz="1300" dirty="0"/>
+          </a:p>
+        </p:txBody>
+      </p:sp>
+      <p:sp>
+        <p:nvSpPr>
+          <p:cNvPr id="48" name="Text 46"/>
+          <p:cNvSpPr/>
+          <p:nvPr/>
+        </p:nvSpPr>
+        <p:spPr>
+          <a:xfrm>
+            <a:off x="365760" y="3611880"/>
+            <a:ext cx="1828800" cy="347472"/>
+          </a:xfrm>
+          <a:prstGeom prst="rect">
+            <a:avLst/>
+          </a:prstGeom>
+          <a:noFill/>
+          <a:ln/>
+        </p:spPr>
+        <p:txBody>
+          <a:bodyPr wrap="square" lIns="0" tIns="0" rIns="0" bIns="0" rtlCol="0" anchor="ctr"/>
+          <a:lstStyle/>
+          <a:p>
+            <a:pPr algn="l" indent="0" marL="0">
+              <a:buNone/>
+            </a:pPr>
+            <a:r>
+              <a:rPr lang="en-US" sz="1200" b="1" dirty="0">
+                <a:solidFill>
+                  <a:srgbClr val="0F172A"/>
+                </a:solidFill>
+                <a:latin typeface="Trebuchet MS" pitchFamily="34" charset="0"/>
+                <a:ea typeface="Trebuchet MS" pitchFamily="34" charset="-122"/>
+                <a:cs typeface="Trebuchet MS" pitchFamily="34" charset="-120"/>
+              </a:rPr>
               <a:t>Sample words:</a:t>
             </a:r>
             <a:endParaRPr lang="en-US" sz="1200" dirty="0"/>
@@ -36144,7 +38260,7 @@
       </p:sp>
       <p:sp>
         <p:nvSpPr>
-          <p:cNvPr id="44" name="Shape 42"/>
+          <p:cNvPr id="49" name="Shape 47"/>
           <p:cNvSpPr/>
           <p:nvPr/>
         </p:nvSpPr>
@@ -36171,7 +38287,7 @@
       </p:sp>
       <p:sp>
         <p:nvSpPr>
-          <p:cNvPr id="45" name="Text 43"/>
+          <p:cNvPr id="50" name="Text 48"/>
           <p:cNvSpPr/>
           <p:nvPr/>
         </p:nvSpPr>
@@ -36202,7 +38318,7 @@
                 <a:ea typeface="Trebuchet MS" pitchFamily="34" charset="-122"/>
                 <a:cs typeface="Trebuchet MS" pitchFamily="34" charset="-120"/>
               </a:rPr>
-              <a:t>disagree</a:t>
+              <a:t>dislike</a:t>
             </a:r>
             <a:endParaRPr lang="en-US" sz="1200" dirty="0"/>
           </a:p>
@@ -36210,7 +38326,7 @@
       </p:sp>
       <p:sp>
         <p:nvSpPr>
-          <p:cNvPr id="46" name="Shape 44"/>
+          <p:cNvPr id="51" name="Shape 49"/>
           <p:cNvSpPr/>
           <p:nvPr/>
         </p:nvSpPr>
@@ -36237,7 +38353,7 @@
       </p:sp>
       <p:sp>
         <p:nvSpPr>
-          <p:cNvPr id="47" name="Text 45"/>
+          <p:cNvPr id="52" name="Text 50"/>
           <p:cNvSpPr/>
           <p:nvPr/>
         </p:nvSpPr>
@@ -36268,7 +38384,7 @@
                 <a:ea typeface="Trebuchet MS" pitchFamily="34" charset="-122"/>
                 <a:cs typeface="Trebuchet MS" pitchFamily="34" charset="-120"/>
               </a:rPr>
-              <a:t>disappear</a:t>
+              <a:t>display</a:t>
             </a:r>
             <a:endParaRPr lang="en-US" sz="1200" dirty="0"/>
           </a:p>
@@ -36276,7 +38392,7 @@
       </p:sp>
       <p:sp>
         <p:nvSpPr>
-          <p:cNvPr id="48" name="Shape 46"/>
+          <p:cNvPr id="53" name="Shape 51"/>
           <p:cNvSpPr/>
           <p:nvPr/>
         </p:nvSpPr>
@@ -36303,7 +38419,7 @@
       </p:sp>
       <p:sp>
         <p:nvSpPr>
-          <p:cNvPr id="49" name="Text 47"/>
+          <p:cNvPr id="54" name="Text 52"/>
           <p:cNvSpPr/>
           <p:nvPr/>
         </p:nvSpPr>
@@ -36334,7 +38450,7 @@
                 <a:ea typeface="Trebuchet MS" pitchFamily="34" charset="-122"/>
                 <a:cs typeface="Trebuchet MS" pitchFamily="34" charset="-120"/>
               </a:rPr>
-              <a:t>discover</a:t>
+              <a:t>disagree</a:t>
             </a:r>
             <a:endParaRPr lang="en-US" sz="1200" dirty="0"/>
           </a:p>
@@ -36342,7 +38458,7 @@
       </p:sp>
       <p:sp>
         <p:nvSpPr>
-          <p:cNvPr id="50" name="Shape 48"/>
+          <p:cNvPr id="55" name="Shape 53"/>
           <p:cNvSpPr/>
           <p:nvPr/>
         </p:nvSpPr>
@@ -36369,7 +38485,7 @@
       </p:sp>
       <p:sp>
         <p:nvSpPr>
-          <p:cNvPr id="51" name="Text 49"/>
+          <p:cNvPr id="56" name="Text 54"/>
           <p:cNvSpPr/>
           <p:nvPr/>
         </p:nvSpPr>
@@ -36400,7 +38516,7 @@
                 <a:ea typeface="Trebuchet MS" pitchFamily="34" charset="-122"/>
                 <a:cs typeface="Trebuchet MS" pitchFamily="34" charset="-120"/>
               </a:rPr>
-              <a:t>dishonest</a:t>
+              <a:t>discount</a:t>
             </a:r>
             <a:endParaRPr lang="en-US" sz="1200" dirty="0"/>
           </a:p>
@@ -36408,7 +38524,7 @@
       </p:sp>
       <p:sp>
         <p:nvSpPr>
-          <p:cNvPr id="52" name="Shape 50"/>
+          <p:cNvPr id="57" name="Shape 55"/>
           <p:cNvSpPr/>
           <p:nvPr/>
         </p:nvSpPr>
@@ -36435,7 +38551,7 @@
       </p:sp>
       <p:sp>
         <p:nvSpPr>
-          <p:cNvPr id="53" name="Text 51"/>
+          <p:cNvPr id="58" name="Text 56"/>
           <p:cNvSpPr/>
           <p:nvPr/>
         </p:nvSpPr>
@@ -36466,7 +38582,7 @@
                 <a:ea typeface="Trebuchet MS" pitchFamily="34" charset="-122"/>
                 <a:cs typeface="Trebuchet MS" pitchFamily="34" charset="-120"/>
               </a:rPr>
-              <a:t>disconnect</a:t>
+              <a:t>discover</a:t>
             </a:r>
             <a:endParaRPr lang="en-US" sz="1200" dirty="0"/>
           </a:p>
@@ -36474,7 +38590,7 @@
       </p:sp>
       <p:sp>
         <p:nvSpPr>
-          <p:cNvPr id="54" name="Shape 52"/>
+          <p:cNvPr id="59" name="Shape 57"/>
           <p:cNvSpPr/>
           <p:nvPr/>
         </p:nvSpPr>
@@ -36501,7 +38617,7 @@
       </p:sp>
       <p:sp>
         <p:nvSpPr>
-          <p:cNvPr id="55" name="Text 53"/>
+          <p:cNvPr id="60" name="Text 58"/>
           <p:cNvSpPr/>
           <p:nvPr/>
         </p:nvSpPr>
@@ -36532,7 +38648,7 @@
                 <a:ea typeface="Trebuchet MS" pitchFamily="34" charset="-122"/>
                 <a:cs typeface="Trebuchet MS" pitchFamily="34" charset="-120"/>
               </a:rPr>
-              <a:t>discomfort</a:t>
+              <a:t>disgrace</a:t>
             </a:r>
             <a:endParaRPr lang="en-US" sz="1200" dirty="0"/>
           </a:p>
@@ -36540,7 +38656,7 @@
       </p:sp>
       <p:sp>
         <p:nvSpPr>
-          <p:cNvPr id="56" name="Shape 54"/>
+          <p:cNvPr id="61" name="Shape 59"/>
           <p:cNvSpPr/>
           <p:nvPr/>
         </p:nvSpPr>
@@ -36567,7 +38683,7 @@
       </p:sp>
       <p:sp>
         <p:nvSpPr>
-          <p:cNvPr id="57" name="Text 55"/>
+          <p:cNvPr id="62" name="Text 60"/>
           <p:cNvSpPr/>
           <p:nvPr/>
         </p:nvSpPr>
@@ -36598,73 +38714,7 @@
                 <a:ea typeface="Trebuchet MS" pitchFamily="34" charset="-122"/>
                 <a:cs typeface="Trebuchet MS" pitchFamily="34" charset="-120"/>
               </a:rPr>
-              <a:t>display</a:t>
-            </a:r>
-            <a:endParaRPr lang="en-US" sz="1200" dirty="0"/>
-          </a:p>
-        </p:txBody>
-      </p:sp>
-      <p:sp>
-        <p:nvSpPr>
-          <p:cNvPr id="58" name="Shape 56"/>
-          <p:cNvSpPr/>
-          <p:nvPr/>
-        </p:nvSpPr>
-        <p:spPr>
-          <a:xfrm>
-            <a:off x="6894576" y="4498848"/>
-            <a:ext cx="2011680" cy="402336"/>
-          </a:xfrm>
-          <a:prstGeom prst="rect">
-            <a:avLst>
-              <a:gd name="adj" fmla="val 13636"/>
-            </a:avLst>
-          </a:prstGeom>
-          <a:solidFill>
-            <a:srgbClr val="EEF2FF"/>
-          </a:solidFill>
-          <a:ln w="12700">
-            <a:solidFill>
-              <a:srgbClr val="6366F1"/>
-            </a:solidFill>
-            <a:prstDash val="solid"/>
-          </a:ln>
-        </p:spPr>
-      </p:sp>
-      <p:sp>
-        <p:nvSpPr>
-          <p:cNvPr id="59" name="Text 57"/>
-          <p:cNvSpPr/>
-          <p:nvPr/>
-        </p:nvSpPr>
-        <p:spPr>
-          <a:xfrm>
-            <a:off x="6894576" y="4498848"/>
-            <a:ext cx="2011680" cy="402336"/>
-          </a:xfrm>
-          <a:prstGeom prst="rect">
-            <a:avLst/>
-          </a:prstGeom>
-          <a:noFill/>
-          <a:ln/>
-        </p:spPr>
-        <p:txBody>
-          <a:bodyPr wrap="square" lIns="0" tIns="0" rIns="0" bIns="0" rtlCol="0" anchor="ctr"/>
-          <a:lstStyle/>
-          <a:p>
-            <a:pPr algn="ctr" indent="0" marL="0">
-              <a:buNone/>
-            </a:pPr>
-            <a:r>
-              <a:rPr lang="en-US" sz="1200" b="1" dirty="0">
-                <a:solidFill>
-                  <a:srgbClr val="4338CA"/>
-                </a:solidFill>
-                <a:latin typeface="Trebuchet MS" pitchFamily="34" charset="0"/>
-                <a:ea typeface="Trebuchet MS" pitchFamily="34" charset="-122"/>
-                <a:cs typeface="Trebuchet MS" pitchFamily="34" charset="-120"/>
-              </a:rPr>
-              <a:t>disbelief</a:t>
+              <a:t>disliked</a:t>
             </a:r>
             <a:endParaRPr lang="en-US" sz="1200" dirty="0"/>
           </a:p>
@@ -36956,7 +39006,7 @@
                 <a:ea typeface="Calibri" pitchFamily="34" charset="-122"/>
                 <a:cs typeface="Calibri" pitchFamily="34" charset="-120"/>
               </a:rPr>
-              <a:t>Word Labs  •  wordlabs.app  •  Prefix: 'dis-' = not, opposite, away</a:t>
+              <a:t>Word Labs  •  wordlabs.app  •  Prefix: 'dis-' = not; opposite; apart</a:t>
             </a:r>
             <a:endParaRPr lang="en-US" sz="800" dirty="0"/>
           </a:p>
@@ -37120,7 +39170,7 @@
                 <a:ea typeface="Calibri" pitchFamily="34" charset="-122"/>
                 <a:cs typeface="Calibri" pitchFamily="34" charset="-120"/>
               </a:rPr>
-              <a:t>A meaningful word part added to the beginning of a root to change its meaning. The prefix 'dis-' means 'not, opposite, away'.</a:t>
+              <a:t>A meaningful word part added to the beginning of a root to change its meaning. The prefix 'dis-' means 'not; opposite; apart'.</a:t>
             </a:r>
             <a:endParaRPr lang="en-US" sz="1350" dirty="0"/>
           </a:p>
@@ -37284,7 +39334,7 @@
                 <a:ea typeface="Calibri" pitchFamily="34" charset="-122"/>
                 <a:cs typeface="Calibri" pitchFamily="34" charset="-120"/>
               </a:rPr>
-              <a:t>The core part of a word carrying its basic meaning. In 'disagree', the root is the part after the prefix 'dis-'.</a:t>
+              <a:t>The core part of a word carrying its basic meaning. In 'dislike', the root is the part after the prefix 'dis-'.</a:t>
             </a:r>
             <a:endParaRPr lang="en-US" sz="1350" dirty="0"/>
           </a:p>
@@ -37740,7 +39790,7 @@
                 <a:ea typeface="Calibri" pitchFamily="34" charset="-122"/>
                 <a:cs typeface="Calibri" pitchFamily="34" charset="-120"/>
               </a:rPr>
-              <a:t>Word Labs  •  wordlabs.app  •  Prefix: 'dis-' = not, opposite, away</a:t>
+              <a:t>Word Labs  •  wordlabs.app  •  Prefix: 'dis-' = not; opposite; apart</a:t>
             </a:r>
             <a:endParaRPr lang="en-US" sz="800" dirty="0"/>
           </a:p>
@@ -37852,7 +39902,7 @@
                 <a:ea typeface="Calibri" pitchFamily="34" charset="-122"/>
                 <a:cs typeface="Calibri" pitchFamily="34" charset="-120"/>
               </a:rPr>
-              <a:t>1.  The prefix 'dis-' can mean 'not' or 'opposite of'.</a:t>
+              <a:t>1.  'display' means 'to hide something secretly'.</a:t>
             </a:r>
             <a:endParaRPr lang="en-US" sz="1300" dirty="0"/>
           </a:p>
@@ -37875,11 +39925,11 @@
             </a:avLst>
           </a:prstGeom>
           <a:solidFill>
-            <a:srgbClr val="DCFCE7"/>
-          </a:solidFill>
-          <a:ln w="12700">
-            <a:solidFill>
-              <a:srgbClr val="16A34A"/>
+            <a:srgbClr val="FEE2E2"/>
+          </a:solidFill>
+          <a:ln w="12700">
+            <a:solidFill>
+              <a:srgbClr val="DC2626"/>
             </a:solidFill>
             <a:prstDash val="solid"/>
           </a:ln>
@@ -37912,13 +39962,13 @@
             <a:r>
               <a:rPr lang="en-US" sz="1100" b="1" dirty="0">
                 <a:solidFill>
-                  <a:srgbClr val="16A34A"/>
+                  <a:srgbClr val="DC2626"/>
                 </a:solidFill>
                 <a:latin typeface="Trebuchet MS" pitchFamily="34" charset="0"/>
                 <a:ea typeface="Trebuchet MS" pitchFamily="34" charset="-122"/>
                 <a:cs typeface="Trebuchet MS" pitchFamily="34" charset="-120"/>
               </a:rPr>
-              <a:t>TRUE</a:t>
+              <a:t>FALSE</a:t>
             </a:r>
             <a:endParaRPr lang="en-US" sz="1100" dirty="0"/>
           </a:p>
@@ -37991,7 +40041,7 @@
                 <a:ea typeface="Calibri" pitchFamily="34" charset="-122"/>
                 <a:cs typeface="Calibri" pitchFamily="34" charset="-120"/>
               </a:rPr>
-              <a:t>2.  'Dis-' comes from Latin.</a:t>
+              <a:t>2.  'dislike' means 'a feeling of not liking something or someone'.</a:t>
             </a:r>
             <a:endParaRPr lang="en-US" sz="1300" dirty="0"/>
           </a:p>
@@ -38130,7 +40180,7 @@
                 <a:ea typeface="Calibri" pitchFamily="34" charset="-122"/>
                 <a:cs typeface="Calibri" pitchFamily="34" charset="-120"/>
               </a:rPr>
-              <a:t>3.  The word 'discuss' contains the prefix 'dis-' meaning 'not'.</a:t>
+              <a:t>3.  'dis' means 'not; opposite; apart'.</a:t>
             </a:r>
             <a:endParaRPr lang="en-US" sz="1300" dirty="0"/>
           </a:p>
@@ -38153,11 +40203,11 @@
             </a:avLst>
           </a:prstGeom>
           <a:solidFill>
-            <a:srgbClr val="FEE2E2"/>
-          </a:solidFill>
-          <a:ln w="12700">
-            <a:solidFill>
-              <a:srgbClr val="DC2626"/>
+            <a:srgbClr val="DCFCE7"/>
+          </a:solidFill>
+          <a:ln w="12700">
+            <a:solidFill>
+              <a:srgbClr val="16A34A"/>
             </a:solidFill>
             <a:prstDash val="solid"/>
           </a:ln>
@@ -38190,13 +40240,13 @@
             <a:r>
               <a:rPr lang="en-US" sz="1100" b="1" dirty="0">
                 <a:solidFill>
-                  <a:srgbClr val="DC2626"/>
+                  <a:srgbClr val="16A34A"/>
                 </a:solidFill>
                 <a:latin typeface="Trebuchet MS" pitchFamily="34" charset="0"/>
                 <a:ea typeface="Trebuchet MS" pitchFamily="34" charset="-122"/>
                 <a:cs typeface="Trebuchet MS" pitchFamily="34" charset="-120"/>
               </a:rPr>
-              <a:t>FALSE</a:t>
+              <a:t>TRUE</a:t>
             </a:r>
             <a:endParaRPr lang="en-US" sz="1100" dirty="0"/>
           </a:p>
@@ -38269,7 +40319,7 @@
                 <a:ea typeface="Calibri" pitchFamily="34" charset="-122"/>
                 <a:cs typeface="Calibri" pitchFamily="34" charset="-120"/>
               </a:rPr>
-              <a:t>4.  Adding 'dis-' to 'agree' makes a word that means to not agree.</a:t>
+              <a:t>4.  'dislike' means 'a strong feeling of love'.</a:t>
             </a:r>
             <a:endParaRPr lang="en-US" sz="1300" dirty="0"/>
           </a:p>
@@ -38292,11 +40342,11 @@
             </a:avLst>
           </a:prstGeom>
           <a:solidFill>
-            <a:srgbClr val="DCFCE7"/>
-          </a:solidFill>
-          <a:ln w="12700">
-            <a:solidFill>
-              <a:srgbClr val="16A34A"/>
+            <a:srgbClr val="FEE2E2"/>
+          </a:solidFill>
+          <a:ln w="12700">
+            <a:solidFill>
+              <a:srgbClr val="DC2626"/>
             </a:solidFill>
             <a:prstDash val="solid"/>
           </a:ln>
@@ -38329,13 +40379,13 @@
             <a:r>
               <a:rPr lang="en-US" sz="1100" b="1" dirty="0">
                 <a:solidFill>
-                  <a:srgbClr val="16A34A"/>
+                  <a:srgbClr val="DC2626"/>
                 </a:solidFill>
                 <a:latin typeface="Trebuchet MS" pitchFamily="34" charset="0"/>
                 <a:ea typeface="Trebuchet MS" pitchFamily="34" charset="-122"/>
                 <a:cs typeface="Trebuchet MS" pitchFamily="34" charset="-120"/>
               </a:rPr>
-              <a:t>TRUE</a:t>
+              <a:t>FALSE</a:t>
             </a:r>
             <a:endParaRPr lang="en-US" sz="1100" dirty="0"/>
           </a:p>
@@ -38408,7 +40458,7 @@
                 <a:ea typeface="Calibri" pitchFamily="34" charset="-122"/>
                 <a:cs typeface="Calibri" pitchFamily="34" charset="-120"/>
               </a:rPr>
-              <a:t>5.  The prefix 'dis-' always makes a word mean the opposite of the base word.</a:t>
+              <a:t>5.  'display' means 'to show something publicly, or an arrangement of things put out to be seen'.</a:t>
             </a:r>
             <a:endParaRPr lang="en-US" sz="1300" dirty="0"/>
           </a:p>
@@ -38431,11 +40481,11 @@
             </a:avLst>
           </a:prstGeom>
           <a:solidFill>
-            <a:srgbClr val="FEE2E2"/>
-          </a:solidFill>
-          <a:ln w="12700">
-            <a:solidFill>
-              <a:srgbClr val="DC2626"/>
+            <a:srgbClr val="DCFCE7"/>
+          </a:solidFill>
+          <a:ln w="12700">
+            <a:solidFill>
+              <a:srgbClr val="16A34A"/>
             </a:solidFill>
             <a:prstDash val="solid"/>
           </a:ln>
@@ -38468,13 +40518,13 @@
             <a:r>
               <a:rPr lang="en-US" sz="1100" b="1" dirty="0">
                 <a:solidFill>
-                  <a:srgbClr val="DC2626"/>
+                  <a:srgbClr val="16A34A"/>
                 </a:solidFill>
                 <a:latin typeface="Trebuchet MS" pitchFamily="34" charset="0"/>
                 <a:ea typeface="Trebuchet MS" pitchFamily="34" charset="-122"/>
                 <a:cs typeface="Trebuchet MS" pitchFamily="34" charset="-120"/>
               </a:rPr>
-              <a:t>FALSE</a:t>
+              <a:t>TRUE</a:t>
             </a:r>
             <a:endParaRPr lang="en-US" sz="1100" dirty="0"/>
           </a:p>
@@ -38766,7 +40816,7 @@
                 <a:ea typeface="Calibri" pitchFamily="34" charset="-122"/>
                 <a:cs typeface="Calibri" pitchFamily="34" charset="-120"/>
               </a:rPr>
-              <a:t>Word Labs  •  wordlabs.app  •  Prefix: 'dis-' = not, opposite, away</a:t>
+              <a:t>Word Labs  •  wordlabs.app  •  Prefix: 'dis-' = not; opposite; apart</a:t>
             </a:r>
             <a:endParaRPr lang="en-US" sz="800" dirty="0"/>
           </a:p>
@@ -38903,7 +40953,7 @@
                 <a:ea typeface="Trebuchet MS" pitchFamily="34" charset="-122"/>
                 <a:cs typeface="Trebuchet MS" pitchFamily="34" charset="-120"/>
               </a:rPr>
-              <a:t>not, opposite, away</a:t>
+              <a:t>not; opposite; apart</a:t>
             </a:r>
             <a:endParaRPr lang="en-US" sz="2000" dirty="0"/>
           </a:p>
@@ -38942,7 +40992,7 @@
                 <a:ea typeface="Calibri" pitchFamily="34" charset="-122"/>
                 <a:cs typeface="Calibri" pitchFamily="34" charset="-120"/>
               </a:rPr>
-              <a:t>Origin: Latin: dis-</a:t>
+              <a:t>Origin: Prefix</a:t>
             </a:r>
             <a:endParaRPr lang="en-US" sz="1100" dirty="0"/>
           </a:p>
@@ -39047,7 +41097,7 @@
                 <a:ea typeface="Trebuchet MS" pitchFamily="34" charset="-122"/>
                 <a:cs typeface="Trebuchet MS" pitchFamily="34" charset="-120"/>
               </a:rPr>
-              <a:t>disagree</a:t>
+              <a:t>dislike</a:t>
             </a:r>
             <a:endParaRPr lang="en-US" sz="1300" dirty="0"/>
           </a:p>
@@ -39113,7 +41163,7 @@
                 <a:ea typeface="Trebuchet MS" pitchFamily="34" charset="-122"/>
                 <a:cs typeface="Trebuchet MS" pitchFamily="34" charset="-120"/>
               </a:rPr>
-              <a:t>disappear</a:t>
+              <a:t>display</a:t>
             </a:r>
             <a:endParaRPr lang="en-US" sz="1300" dirty="0"/>
           </a:p>
@@ -39179,7 +41229,7 @@
                 <a:ea typeface="Trebuchet MS" pitchFamily="34" charset="-122"/>
                 <a:cs typeface="Trebuchet MS" pitchFamily="34" charset="-120"/>
               </a:rPr>
-              <a:t>discover</a:t>
+              <a:t>disagree</a:t>
             </a:r>
             <a:endParaRPr lang="en-US" sz="1300" dirty="0"/>
           </a:p>
@@ -39245,7 +41295,7 @@
                 <a:ea typeface="Trebuchet MS" pitchFamily="34" charset="-122"/>
                 <a:cs typeface="Trebuchet MS" pitchFamily="34" charset="-120"/>
               </a:rPr>
-              <a:t>dishonest</a:t>
+              <a:t>discount</a:t>
             </a:r>
             <a:endParaRPr lang="en-US" sz="1300" dirty="0"/>
           </a:p>
@@ -39311,7 +41361,7 @@
                 <a:ea typeface="Trebuchet MS" pitchFamily="34" charset="-122"/>
                 <a:cs typeface="Trebuchet MS" pitchFamily="34" charset="-120"/>
               </a:rPr>
-              <a:t>disconnect</a:t>
+              <a:t>discover</a:t>
             </a:r>
             <a:endParaRPr lang="en-US" sz="1300" dirty="0"/>
           </a:p>
@@ -39377,7 +41427,7 @@
                 <a:ea typeface="Trebuchet MS" pitchFamily="34" charset="-122"/>
                 <a:cs typeface="Trebuchet MS" pitchFamily="34" charset="-120"/>
               </a:rPr>
-              <a:t>discomfort</a:t>
+              <a:t>disgrace</a:t>
             </a:r>
             <a:endParaRPr lang="en-US" sz="1300" dirty="0"/>
           </a:p>
@@ -39443,7 +41493,7 @@
                 <a:ea typeface="Trebuchet MS" pitchFamily="34" charset="-122"/>
                 <a:cs typeface="Trebuchet MS" pitchFamily="34" charset="-120"/>
               </a:rPr>
-              <a:t>display</a:t>
+              <a:t>disliked</a:t>
             </a:r>
             <a:endParaRPr lang="en-US" sz="1300" dirty="0"/>
           </a:p>
@@ -39735,7 +41785,7 @@
                 <a:ea typeface="Calibri" pitchFamily="34" charset="-122"/>
                 <a:cs typeface="Calibri" pitchFamily="34" charset="-120"/>
               </a:rPr>
-              <a:t>Word Labs  •  wordlabs.app  •  Prefix: 'dis-' = not, opposite, away</a:t>
+              <a:t>Word Labs  •  wordlabs.app  •  Prefix: 'dis-' = not; opposite; apart</a:t>
             </a:r>
             <a:endParaRPr lang="en-US" sz="800" dirty="0"/>
           </a:p>
@@ -40164,7 +42214,7 @@
                 <a:ea typeface="Trebuchet MS" pitchFamily="34" charset="-122"/>
                 <a:cs typeface="Trebuchet MS" pitchFamily="34" charset="-120"/>
               </a:rPr>
-              <a:t>-ed</a:t>
+              <a:t>-ee</a:t>
             </a:r>
             <a:endParaRPr lang="en-US" sz="1300" dirty="0"/>
           </a:p>
@@ -40253,7 +42303,7 @@
                 <a:ea typeface="Trebuchet MS" pitchFamily="34" charset="-122"/>
                 <a:cs typeface="Trebuchet MS" pitchFamily="34" charset="-120"/>
               </a:rPr>
-              <a:t>connect</a:t>
+              <a:t>appear</a:t>
             </a:r>
             <a:endParaRPr lang="en-US" sz="1300" dirty="0"/>
           </a:p>
@@ -40317,7 +42367,7 @@
                 <a:ea typeface="Trebuchet MS" pitchFamily="34" charset="-122"/>
                 <a:cs typeface="Trebuchet MS" pitchFamily="34" charset="-120"/>
               </a:rPr>
-              <a:t>-ing</a:t>
+              <a:t>-ed</a:t>
             </a:r>
             <a:endParaRPr lang="en-US" sz="1300" dirty="0"/>
           </a:p>
@@ -40406,7 +42456,7 @@
                 <a:ea typeface="Trebuchet MS" pitchFamily="34" charset="-122"/>
                 <a:cs typeface="Trebuchet MS" pitchFamily="34" charset="-120"/>
               </a:rPr>
-              <a:t>appear</a:t>
+              <a:t>aster</a:t>
             </a:r>
             <a:endParaRPr lang="en-US" sz="1300" dirty="0"/>
           </a:p>
@@ -40559,7 +42609,7 @@
                 <a:ea typeface="Trebuchet MS" pitchFamily="34" charset="-122"/>
                 <a:cs typeface="Trebuchet MS" pitchFamily="34" charset="-120"/>
               </a:rPr>
-              <a:t>cover</a:t>
+              <a:t>believe</a:t>
             </a:r>
             <a:endParaRPr lang="en-US" sz="1300" dirty="0"/>
           </a:p>
@@ -40623,7 +42673,7 @@
                 <a:ea typeface="Trebuchet MS" pitchFamily="34" charset="-122"/>
                 <a:cs typeface="Trebuchet MS" pitchFamily="34" charset="-120"/>
               </a:rPr>
-              <a:t>-ly</a:t>
+              <a:t>-s</a:t>
             </a:r>
             <a:endParaRPr lang="en-US" sz="1300" dirty="0"/>
           </a:p>
@@ -40712,7 +42762,7 @@
                 <a:ea typeface="Trebuchet MS" pitchFamily="34" charset="-122"/>
                 <a:cs typeface="Trebuchet MS" pitchFamily="34" charset="-120"/>
               </a:rPr>
-              <a:t>honest</a:t>
+              <a:t>claim</a:t>
             </a:r>
             <a:endParaRPr lang="en-US" sz="1300" dirty="0"/>
           </a:p>
@@ -40776,7 +42826,7 @@
                 <a:ea typeface="Trebuchet MS" pitchFamily="34" charset="-122"/>
                 <a:cs typeface="Trebuchet MS" pitchFamily="34" charset="-120"/>
               </a:rPr>
-              <a:t>-ance</a:t>
+              <a:t>-er</a:t>
             </a:r>
             <a:endParaRPr lang="en-US" sz="1300" dirty="0"/>
           </a:p>
@@ -40784,13 +42834,166 @@
       </p:sp>
       <p:sp>
         <p:nvSpPr>
-          <p:cNvPr id="43" name="Text 41"/>
-          <p:cNvSpPr/>
-          <p:nvPr/>
-        </p:nvSpPr>
-        <p:spPr>
-          <a:xfrm>
-            <a:off x="365760" y="4178808"/>
+          <p:cNvPr id="43" name="Shape 41"/>
+          <p:cNvSpPr/>
+          <p:nvPr/>
+        </p:nvSpPr>
+        <p:spPr>
+          <a:xfrm>
+            <a:off x="640080" y="4041648"/>
+            <a:ext cx="1463040" cy="420624"/>
+          </a:xfrm>
+          <a:prstGeom prst="rect">
+            <a:avLst/>
+          </a:prstGeom>
+          <a:solidFill>
+            <a:srgbClr val="F1F5F9"/>
+          </a:solidFill>
+          <a:ln w="12700">
+            <a:solidFill>
+              <a:srgbClr val="E5E7EB"/>
+            </a:solidFill>
+            <a:prstDash val="solid"/>
+          </a:ln>
+        </p:spPr>
+      </p:sp>
+      <p:sp>
+        <p:nvSpPr>
+          <p:cNvPr id="44" name="Shape 42"/>
+          <p:cNvSpPr/>
+          <p:nvPr/>
+        </p:nvSpPr>
+        <p:spPr>
+          <a:xfrm>
+            <a:off x="3291840" y="4041648"/>
+            <a:ext cx="1645920" cy="420624"/>
+          </a:xfrm>
+          <a:prstGeom prst="rect">
+            <a:avLst/>
+          </a:prstGeom>
+          <a:solidFill>
+            <a:srgbClr val="CCFBF1"/>
+          </a:solidFill>
+          <a:ln w="12700">
+            <a:solidFill>
+              <a:srgbClr val="E5E7EB"/>
+            </a:solidFill>
+            <a:prstDash val="solid"/>
+          </a:ln>
+        </p:spPr>
+      </p:sp>
+      <p:sp>
+        <p:nvSpPr>
+          <p:cNvPr id="45" name="Text 43"/>
+          <p:cNvSpPr/>
+          <p:nvPr/>
+        </p:nvSpPr>
+        <p:spPr>
+          <a:xfrm>
+            <a:off x="3291840" y="4041648"/>
+            <a:ext cx="1645920" cy="420624"/>
+          </a:xfrm>
+          <a:prstGeom prst="rect">
+            <a:avLst/>
+          </a:prstGeom>
+          <a:noFill/>
+          <a:ln/>
+        </p:spPr>
+        <p:txBody>
+          <a:bodyPr wrap="square" lIns="0" tIns="0" rIns="0" bIns="0" rtlCol="0" anchor="ctr"/>
+          <a:lstStyle/>
+          <a:p>
+            <a:pPr algn="ctr" indent="0" marL="0">
+              <a:buNone/>
+            </a:pPr>
+            <a:r>
+              <a:rPr lang="en-US" sz="1300" b="1" dirty="0">
+                <a:solidFill>
+                  <a:srgbClr val="0F766E"/>
+                </a:solidFill>
+                <a:latin typeface="Trebuchet MS" pitchFamily="34" charset="0"/>
+                <a:ea typeface="Trebuchet MS" pitchFamily="34" charset="-122"/>
+                <a:cs typeface="Trebuchet MS" pitchFamily="34" charset="-120"/>
+              </a:rPr>
+              <a:t>clos</a:t>
+            </a:r>
+            <a:endParaRPr lang="en-US" sz="1300" dirty="0"/>
+          </a:p>
+        </p:txBody>
+      </p:sp>
+      <p:sp>
+        <p:nvSpPr>
+          <p:cNvPr id="46" name="Shape 44"/>
+          <p:cNvSpPr/>
+          <p:nvPr/>
+        </p:nvSpPr>
+        <p:spPr>
+          <a:xfrm>
+            <a:off x="5943600" y="4041648"/>
+            <a:ext cx="1463040" cy="420624"/>
+          </a:xfrm>
+          <a:prstGeom prst="rect">
+            <a:avLst/>
+          </a:prstGeom>
+          <a:solidFill>
+            <a:srgbClr val="FCE7F3"/>
+          </a:solidFill>
+          <a:ln w="12700">
+            <a:solidFill>
+              <a:srgbClr val="E5E7EB"/>
+            </a:solidFill>
+            <a:prstDash val="solid"/>
+          </a:ln>
+        </p:spPr>
+      </p:sp>
+      <p:sp>
+        <p:nvSpPr>
+          <p:cNvPr id="47" name="Text 45"/>
+          <p:cNvSpPr/>
+          <p:nvPr/>
+        </p:nvSpPr>
+        <p:spPr>
+          <a:xfrm>
+            <a:off x="5943600" y="4041648"/>
+            <a:ext cx="1463040" cy="420624"/>
+          </a:xfrm>
+          <a:prstGeom prst="rect">
+            <a:avLst/>
+          </a:prstGeom>
+          <a:noFill/>
+          <a:ln/>
+        </p:spPr>
+        <p:txBody>
+          <a:bodyPr wrap="square" lIns="0" tIns="0" rIns="0" bIns="0" rtlCol="0" anchor="ctr"/>
+          <a:lstStyle/>
+          <a:p>
+            <a:pPr algn="ctr" indent="0" marL="0">
+              <a:buNone/>
+            </a:pPr>
+            <a:r>
+              <a:rPr lang="en-US" sz="1300" b="1" dirty="0">
+                <a:solidFill>
+                  <a:srgbClr val="9D174D"/>
+                </a:solidFill>
+                <a:latin typeface="Trebuchet MS" pitchFamily="34" charset="0"/>
+                <a:ea typeface="Trebuchet MS" pitchFamily="34" charset="-122"/>
+                <a:cs typeface="Trebuchet MS" pitchFamily="34" charset="-120"/>
+              </a:rPr>
+              <a:t>-ure</a:t>
+            </a:r>
+            <a:endParaRPr lang="en-US" sz="1300" dirty="0"/>
+          </a:p>
+        </p:txBody>
+      </p:sp>
+      <p:sp>
+        <p:nvSpPr>
+          <p:cNvPr id="48" name="Text 46"/>
+          <p:cNvSpPr/>
+          <p:nvPr/>
+        </p:nvSpPr>
+        <p:spPr>
+          <a:xfrm>
+            <a:off x="365760" y="4636008"/>
             <a:ext cx="1097280" cy="420624"/>
           </a:xfrm>
           <a:prstGeom prst="rect">
@@ -40823,13 +43026,13 @@
       </p:sp>
       <p:sp>
         <p:nvSpPr>
-          <p:cNvPr id="44" name="Shape 42"/>
-          <p:cNvSpPr/>
-          <p:nvPr/>
-        </p:nvSpPr>
-        <p:spPr>
-          <a:xfrm>
-            <a:off x="1508760" y="4178808"/>
+          <p:cNvPr id="49" name="Shape 47"/>
+          <p:cNvSpPr/>
+          <p:nvPr/>
+        </p:nvSpPr>
+        <p:spPr>
+          <a:xfrm>
+            <a:off x="1508760" y="4636008"/>
             <a:ext cx="950976" cy="420624"/>
           </a:xfrm>
           <a:prstGeom prst="rect">
@@ -40857,13 +43060,13 @@
       </p:sp>
       <p:sp>
         <p:nvSpPr>
-          <p:cNvPr id="45" name="Text 43"/>
-          <p:cNvSpPr/>
-          <p:nvPr/>
-        </p:nvSpPr>
-        <p:spPr>
-          <a:xfrm>
-            <a:off x="1508760" y="4178808"/>
+          <p:cNvPr id="50" name="Text 48"/>
+          <p:cNvSpPr/>
+          <p:nvPr/>
+        </p:nvSpPr>
+        <p:spPr>
+          <a:xfrm>
+            <a:off x="1508760" y="4636008"/>
             <a:ext cx="950976" cy="420624"/>
           </a:xfrm>
           <a:prstGeom prst="rect">
@@ -40896,13 +43099,13 @@
       </p:sp>
       <p:sp>
         <p:nvSpPr>
-          <p:cNvPr id="46" name="Text 44"/>
-          <p:cNvSpPr/>
-          <p:nvPr/>
-        </p:nvSpPr>
-        <p:spPr>
-          <a:xfrm>
-            <a:off x="2487168" y="4178808"/>
+          <p:cNvPr id="51" name="Text 49"/>
+          <p:cNvSpPr/>
+          <p:nvPr/>
+        </p:nvSpPr>
+        <p:spPr>
+          <a:xfrm>
+            <a:off x="2487168" y="4636008"/>
             <a:ext cx="320040" cy="420624"/>
           </a:xfrm>
           <a:prstGeom prst="rect">
@@ -40935,13 +43138,13 @@
       </p:sp>
       <p:sp>
         <p:nvSpPr>
-          <p:cNvPr id="47" name="Shape 45"/>
-          <p:cNvSpPr/>
-          <p:nvPr/>
-        </p:nvSpPr>
-        <p:spPr>
-          <a:xfrm>
-            <a:off x="2834640" y="4178808"/>
+          <p:cNvPr id="52" name="Shape 50"/>
+          <p:cNvSpPr/>
+          <p:nvPr/>
+        </p:nvSpPr>
+        <p:spPr>
+          <a:xfrm>
+            <a:off x="2834640" y="4636008"/>
             <a:ext cx="1097280" cy="420624"/>
           </a:xfrm>
           <a:prstGeom prst="rect">
@@ -40969,13 +43172,13 @@
       </p:sp>
       <p:sp>
         <p:nvSpPr>
-          <p:cNvPr id="48" name="Text 46"/>
-          <p:cNvSpPr/>
-          <p:nvPr/>
-        </p:nvSpPr>
-        <p:spPr>
-          <a:xfrm>
-            <a:off x="2834640" y="4178808"/>
+          <p:cNvPr id="53" name="Text 51"/>
+          <p:cNvSpPr/>
+          <p:nvPr/>
+        </p:nvSpPr>
+        <p:spPr>
+          <a:xfrm>
+            <a:off x="2834640" y="4636008"/>
             <a:ext cx="1097280" cy="420624"/>
           </a:xfrm>
           <a:prstGeom prst="rect">
@@ -41008,13 +43211,13 @@
       </p:sp>
       <p:sp>
         <p:nvSpPr>
-          <p:cNvPr id="49" name="Text 47"/>
-          <p:cNvSpPr/>
-          <p:nvPr/>
-        </p:nvSpPr>
-        <p:spPr>
-          <a:xfrm>
-            <a:off x="3959352" y="4178808"/>
+          <p:cNvPr id="54" name="Text 52"/>
+          <p:cNvSpPr/>
+          <p:nvPr/>
+        </p:nvSpPr>
+        <p:spPr>
+          <a:xfrm>
+            <a:off x="3959352" y="4636008"/>
             <a:ext cx="320040" cy="420624"/>
           </a:xfrm>
           <a:prstGeom prst="rect">
@@ -41047,13 +43250,13 @@
       </p:sp>
       <p:sp>
         <p:nvSpPr>
-          <p:cNvPr id="50" name="Shape 48"/>
-          <p:cNvSpPr/>
-          <p:nvPr/>
-        </p:nvSpPr>
-        <p:spPr>
-          <a:xfrm>
-            <a:off x="4306824" y="4178808"/>
+          <p:cNvPr id="55" name="Shape 53"/>
+          <p:cNvSpPr/>
+          <p:nvPr/>
+        </p:nvSpPr>
+        <p:spPr>
+          <a:xfrm>
+            <a:off x="4306824" y="4636008"/>
             <a:ext cx="822960" cy="420624"/>
           </a:xfrm>
           <a:prstGeom prst="rect">
@@ -41081,13 +43284,13 @@
       </p:sp>
       <p:sp>
         <p:nvSpPr>
-          <p:cNvPr id="51" name="Text 49"/>
-          <p:cNvSpPr/>
-          <p:nvPr/>
-        </p:nvSpPr>
-        <p:spPr>
-          <a:xfrm>
-            <a:off x="4306824" y="4178808"/>
+          <p:cNvPr id="56" name="Text 54"/>
+          <p:cNvSpPr/>
+          <p:nvPr/>
+        </p:nvSpPr>
+        <p:spPr>
+          <a:xfrm>
+            <a:off x="4306824" y="4636008"/>
             <a:ext cx="822960" cy="420624"/>
           </a:xfrm>
           <a:prstGeom prst="rect">
@@ -41112,7 +43315,7 @@
                 <a:ea typeface="Trebuchet MS" pitchFamily="34" charset="-122"/>
                 <a:cs typeface="Trebuchet MS" pitchFamily="34" charset="-120"/>
               </a:rPr>
-              <a:t>-ed</a:t>
+              <a:t>-ee</a:t>
             </a:r>
             <a:endParaRPr lang="en-US" sz="1300" dirty="0"/>
           </a:p>
@@ -41120,13 +43323,13 @@
       </p:sp>
       <p:sp>
         <p:nvSpPr>
-          <p:cNvPr id="52" name="Text 50"/>
-          <p:cNvSpPr/>
-          <p:nvPr/>
-        </p:nvSpPr>
-        <p:spPr>
-          <a:xfrm>
-            <a:off x="5202936" y="4178808"/>
+          <p:cNvPr id="57" name="Text 55"/>
+          <p:cNvSpPr/>
+          <p:nvPr/>
+        </p:nvSpPr>
+        <p:spPr>
+          <a:xfrm>
+            <a:off x="5202936" y="4636008"/>
             <a:ext cx="365760" cy="420624"/>
           </a:xfrm>
           <a:prstGeom prst="rect">
@@ -41159,13 +43362,13 @@
       </p:sp>
       <p:sp>
         <p:nvSpPr>
-          <p:cNvPr id="53" name="Shape 51"/>
-          <p:cNvSpPr/>
-          <p:nvPr/>
-        </p:nvSpPr>
-        <p:spPr>
-          <a:xfrm>
-            <a:off x="5614416" y="4178808"/>
+          <p:cNvPr id="58" name="Shape 56"/>
+          <p:cNvSpPr/>
+          <p:nvPr/>
+        </p:nvSpPr>
+        <p:spPr>
+          <a:xfrm>
+            <a:off x="5614416" y="4636008"/>
             <a:ext cx="2194560" cy="420624"/>
           </a:xfrm>
           <a:prstGeom prst="rect">
@@ -41186,13 +43389,13 @@
       </p:sp>
       <p:sp>
         <p:nvSpPr>
-          <p:cNvPr id="54" name="Text 52"/>
-          <p:cNvSpPr/>
-          <p:nvPr/>
-        </p:nvSpPr>
-        <p:spPr>
-          <a:xfrm>
-            <a:off x="5614416" y="4178808"/>
+          <p:cNvPr id="59" name="Text 57"/>
+          <p:cNvSpPr/>
+          <p:nvPr/>
+        </p:nvSpPr>
+        <p:spPr>
+          <a:xfrm>
+            <a:off x="5614416" y="4636008"/>
             <a:ext cx="2194560" cy="420624"/>
           </a:xfrm>
           <a:prstGeom prst="rect">
@@ -41217,7 +43420,7 @@
                 <a:ea typeface="Trebuchet MS" pitchFamily="34" charset="-122"/>
                 <a:cs typeface="Trebuchet MS" pitchFamily="34" charset="-120"/>
               </a:rPr>
-              <a:t>disagree</a:t>
+              <a:t>dislike</a:t>
             </a:r>
             <a:endParaRPr lang="en-US" sz="1400" dirty="0"/>
           </a:p>
@@ -41509,7 +43712,7 @@
                 <a:ea typeface="Calibri" pitchFamily="34" charset="-122"/>
                 <a:cs typeface="Calibri" pitchFamily="34" charset="-120"/>
               </a:rPr>
-              <a:t>Word Labs  •  wordlabs.app  •  Prefix: 'dis-' = not, opposite, away</a:t>
+              <a:t>Word Labs  •  wordlabs.app  •  Prefix: 'dis-' = not; opposite; apart</a:t>
             </a:r>
             <a:endParaRPr lang="en-US" sz="800" dirty="0"/>
           </a:p>
@@ -41621,7 +43824,7 @@
                 <a:ea typeface="Trebuchet MS" pitchFamily="34" charset="-122"/>
                 <a:cs typeface="Trebuchet MS" pitchFamily="34" charset="-120"/>
               </a:rPr>
-              <a:t>disagree</a:t>
+              <a:t>dislike</a:t>
             </a:r>
             <a:endParaRPr lang="en-US" sz="1200" dirty="0"/>
           </a:p>
@@ -41687,7 +43890,7 @@
                 <a:ea typeface="Calibri" pitchFamily="34" charset="-122"/>
                 <a:cs typeface="Calibri" pitchFamily="34" charset="-120"/>
               </a:rPr>
-              <a:t>To separate or break a connection between things.</a:t>
+              <a:t>to find something for the first time or learn something new</a:t>
             </a:r>
             <a:endParaRPr lang="en-US" sz="1200" dirty="0"/>
           </a:p>
@@ -41760,7 +43963,7 @@
                 <a:ea typeface="Trebuchet MS" pitchFamily="34" charset="-122"/>
                 <a:cs typeface="Trebuchet MS" pitchFamily="34" charset="-120"/>
               </a:rPr>
-              <a:t>disappear</a:t>
+              <a:t>display</a:t>
             </a:r>
             <a:endParaRPr lang="en-US" sz="1200" dirty="0"/>
           </a:p>
@@ -41826,7 +44029,7 @@
                 <a:ea typeface="Calibri" pitchFamily="34" charset="-122"/>
                 <a:cs typeface="Calibri" pitchFamily="34" charset="-120"/>
               </a:rPr>
-              <a:t>To put something out so others can see it.</a:t>
+              <a:t>did not like something or someone</a:t>
             </a:r>
             <a:endParaRPr lang="en-US" sz="1200" dirty="0"/>
           </a:p>
@@ -41899,7 +44102,7 @@
                 <a:ea typeface="Trebuchet MS" pitchFamily="34" charset="-122"/>
                 <a:cs typeface="Trebuchet MS" pitchFamily="34" charset="-120"/>
               </a:rPr>
-              <a:t>discover</a:t>
+              <a:t>disagree</a:t>
             </a:r>
             <a:endParaRPr lang="en-US" sz="1200" dirty="0"/>
           </a:p>
@@ -41965,7 +44168,7 @@
                 <a:ea typeface="Calibri" pitchFamily="34" charset="-122"/>
                 <a:cs typeface="Calibri" pitchFamily="34" charset="-120"/>
               </a:rPr>
-              <a:t>To have a different opinion from someone else.</a:t>
+              <a:t>a feeling of not liking something or someone</a:t>
             </a:r>
             <a:endParaRPr lang="en-US" sz="1200" dirty="0"/>
           </a:p>
@@ -42038,7 +44241,7 @@
                 <a:ea typeface="Trebuchet MS" pitchFamily="34" charset="-122"/>
                 <a:cs typeface="Trebuchet MS" pitchFamily="34" charset="-120"/>
               </a:rPr>
-              <a:t>dishonest</a:t>
+              <a:t>discount</a:t>
             </a:r>
             <a:endParaRPr lang="en-US" sz="1200" dirty="0"/>
           </a:p>
@@ -42104,7 +44307,7 @@
                 <a:ea typeface="Calibri" pitchFamily="34" charset="-122"/>
                 <a:cs typeface="Calibri" pitchFamily="34" charset="-120"/>
               </a:rPr>
-              <a:t>A feeling of slight pain or unease.</a:t>
+              <a:t>a loss of respect or honour caused by shameful behaviour</a:t>
             </a:r>
             <a:endParaRPr lang="en-US" sz="1200" dirty="0"/>
           </a:p>
@@ -42177,7 +44380,7 @@
                 <a:ea typeface="Trebuchet MS" pitchFamily="34" charset="-122"/>
                 <a:cs typeface="Trebuchet MS" pitchFamily="34" charset="-120"/>
               </a:rPr>
-              <a:t>disconnect</a:t>
+              <a:t>discover</a:t>
             </a:r>
             <a:endParaRPr lang="en-US" sz="1200" dirty="0"/>
           </a:p>
@@ -42243,7 +44446,7 @@
                 <a:ea typeface="Calibri" pitchFamily="34" charset="-122"/>
                 <a:cs typeface="Calibri" pitchFamily="34" charset="-120"/>
               </a:rPr>
-              <a:t>To find or learn something for the first time.</a:t>
+              <a:t>to have a different opinion from someone else</a:t>
             </a:r>
             <a:endParaRPr lang="en-US" sz="1200" dirty="0"/>
           </a:p>
@@ -42316,7 +44519,7 @@
                 <a:ea typeface="Trebuchet MS" pitchFamily="34" charset="-122"/>
                 <a:cs typeface="Trebuchet MS" pitchFamily="34" charset="-120"/>
               </a:rPr>
-              <a:t>discomfort</a:t>
+              <a:t>disgrace</a:t>
             </a:r>
             <a:endParaRPr lang="en-US" sz="1200" dirty="0"/>
           </a:p>
@@ -42382,7 +44585,7 @@
                 <a:ea typeface="Calibri" pitchFamily="34" charset="-122"/>
                 <a:cs typeface="Calibri" pitchFamily="34" charset="-120"/>
               </a:rPr>
-              <a:t>Not telling the truth; likely to cheat or lie.</a:t>
+              <a:t>a reduction in the usual price of something</a:t>
             </a:r>
             <a:endParaRPr lang="en-US" sz="1200" dirty="0"/>
           </a:p>
@@ -42455,7 +44658,7 @@
                 <a:ea typeface="Trebuchet MS" pitchFamily="34" charset="-122"/>
                 <a:cs typeface="Trebuchet MS" pitchFamily="34" charset="-120"/>
               </a:rPr>
-              <a:t>display</a:t>
+              <a:t>disliked</a:t>
             </a:r>
             <a:endParaRPr lang="en-US" sz="1200" dirty="0"/>
           </a:p>
@@ -42521,7 +44724,7 @@
                 <a:ea typeface="Calibri" pitchFamily="34" charset="-122"/>
                 <a:cs typeface="Calibri" pitchFamily="34" charset="-120"/>
               </a:rPr>
-              <a:t>To go out of sight or stop being visible.</a:t>
+              <a:t>to show something publicly, or an arrangement of things put out to be seen</a:t>
             </a:r>
             <a:endParaRPr lang="en-US" sz="1200" dirty="0"/>
           </a:p>
@@ -42813,7 +45016,7 @@
                 <a:ea typeface="Calibri" pitchFamily="34" charset="-122"/>
                 <a:cs typeface="Calibri" pitchFamily="34" charset="-120"/>
               </a:rPr>
-              <a:t>Word Labs  •  wordlabs.app  •  Prefix: 'dis-' = not, opposite, away</a:t>
+              <a:t>Word Labs  •  wordlabs.app  •  Prefix: 'dis-' = not; opposite; apart</a:t>
             </a:r>
             <a:endParaRPr lang="en-US" sz="800" dirty="0"/>
           </a:p>
@@ -43016,7 +45219,7 @@
                 <a:ea typeface="Calibri" pitchFamily="34" charset="-122"/>
                 <a:cs typeface="Calibri" pitchFamily="34" charset="-120"/>
               </a:rPr>
-              <a:t>The magician made the rabbit disappear in a puff of smoke.</a:t>
+              <a:t>I dislike getting up early on cold winter mornings.</a:t>
             </a:r>
             <a:endParaRPr lang="en-US" sz="1500" dirty="0"/>
           </a:p>
@@ -43180,7 +45383,7 @@
                 <a:ea typeface="Calibri" pitchFamily="34" charset="-122"/>
                 <a:cs typeface="Calibri" pitchFamily="34" charset="-120"/>
               </a:rPr>
-              <a:t>It is important to be honest and not dishonest with your friends.</a:t>
+              <a:t>The museum has a new display of ancient Roman coins.</a:t>
             </a:r>
             <a:endParaRPr lang="en-US" sz="1500" dirty="0"/>
           </a:p>
@@ -43344,7 +45547,7 @@
                 <a:ea typeface="Calibri" pitchFamily="34" charset="-122"/>
                 <a:cs typeface="Calibri" pitchFamily="34" charset="-120"/>
               </a:rPr>
-              <a:t>The students began to disagree about which book was the best.</a:t>
+              <a:t>My brother and I often disagree about which film to watch.</a:t>
             </a:r>
             <a:endParaRPr lang="en-US" sz="1500" dirty="0"/>
           </a:p>
